--- a/xcheck/wattson-power.pptx
+++ b/xcheck/wattson-power.pptx
@@ -13,6 +13,7 @@
     <p:sldId id="261" r:id="rId12"/>
     <p:sldId id="262" r:id="rId13"/>
     <p:sldId id="263" r:id="rId14"/>
+    <p:sldId id="264" r:id="rId15"/>
   </p:sldIdLst>
   <p:sldSz cx="12191695" cy="6858000" type="screen4x3"/>
   <p:notesSz cx="6858000" cy="9144000"/>
@@ -3318,7 +3319,7 @@
                 </a:solidFill>
                 <a:latin typeface="Calibri"/>
               </a:rPr>
-              <a:t>RESULT: 5.3% mean error on total power, 50 real applications, predicted BLIND</a:t>
+              <a:t>RESULT: 4.9% mean error on total power, 50 real applications, predicted BLIND</a:t>
             </a:r>
           </a:p>
         </p:txBody>
@@ -3597,7 +3598,7 @@
                 </a:solidFill>
                 <a:latin typeface="Calibri"/>
               </a:rPr>
-              <a:t>wattson power · rails MEASURED on IMX95LPD5EVK-19 (NXP BCU) · activity DERIVED from QEMU TCG · 2026-09-10</a:t>
+              <a:t>wattson power · rails MEASURED on IMX95LPD5EVK-19 (NXP BCU) · A55 die 40–41 °C under load · activity DERIVED from QEMU TCG · 2026-09-10</a:t>
             </a:r>
           </a:p>
         </p:txBody>
@@ -3710,7 +3711,7 @@
                 </a:solidFill>
                 <a:latin typeface="Calibri"/>
               </a:rPr>
-              <a:t>YES — 5.3% on total power, blind, across 50 held-out applications.</a:t>
+              <a:t>YES — 4.9% on total power, blind, across 50 held-out applications.</a:t>
             </a:r>
           </a:p>
         </p:txBody>
@@ -3734,10 +3735,11 @@
                 <a:tableStyleId>{5C22544A-7EE6-4342-B048-85BDC9FD1C3A}</a:tableStyleId>
               </a:tblPr>
               <a:tblGrid>
-                <a:gridCol w="4572000"/>
-                <a:gridCol w="1554480"/>
-                <a:gridCol w="1463040"/>
-                <a:gridCol w="3474720"/>
+                <a:gridCol w="4206240"/>
+                <a:gridCol w="1371600"/>
+                <a:gridCol w="1371600"/>
+                <a:gridCol w="1371600"/>
+                <a:gridCol w="2743200"/>
               </a:tblGrid>
               <a:tr h="420624">
                 <a:tc>
@@ -3796,7 +3798,7 @@
                           </a:solidFill>
                           <a:latin typeface="Calibri"/>
                         </a:rPr>
-                        <a:t>worst</a:t>
+                        <a:t>p90</a:t>
                       </a:r>
                     </a:p>
                   </a:txBody>
@@ -3818,6 +3820,28 @@
                           </a:solidFill>
                           <a:latin typeface="Calibri"/>
                         </a:rPr>
+                        <a:t>worst</a:t>
+                      </a:r>
+                    </a:p>
+                  </a:txBody>
+                  <a:tcPr>
+                    <a:solidFill>
+                      <a:srgbClr val="202124"/>
+                    </a:solidFill>
+                  </a:tcPr>
+                </a:tc>
+                <a:tc>
+                  <a:txBody>
+                    <a:bodyPr/>
+                    <a:lstStyle/>
+                    <a:p>
+                      <a:r>
+                        <a:rPr sz="1200" b="1">
+                          <a:solidFill>
+                            <a:srgbClr val="FFFFFF"/>
+                          </a:solidFill>
+                          <a:latin typeface="Calibri"/>
+                        </a:rPr>
                         <a:t>note</a:t>
                       </a:r>
                     </a:p>
@@ -3877,6 +3901,25 @@
                         <a:rPr sz="1200" b="0">
                           <a:latin typeface="Calibri"/>
                         </a:rPr>
+                        <a:t>6.8%</a:t>
+                      </a:r>
+                    </a:p>
+                  </a:txBody>
+                  <a:tcPr>
+                    <a:solidFill>
+                      <a:srgbClr val="EFF3FA"/>
+                    </a:solidFill>
+                  </a:tcPr>
+                </a:tc>
+                <a:tc>
+                  <a:txBody>
+                    <a:bodyPr/>
+                    <a:lstStyle/>
+                    <a:p>
+                      <a:r>
+                        <a:rPr sz="1200" b="0">
+                          <a:latin typeface="Calibri"/>
+                        </a:rPr>
                         <a:t>8%</a:t>
                       </a:r>
                     </a:p>
@@ -3936,7 +3979,7 @@
                         <a:rPr sz="1200" b="1">
                           <a:latin typeface="Calibri"/>
                         </a:rPr>
-                        <a:t>9.4%</a:t>
+                        <a:t>7.7%</a:t>
                       </a:r>
                     </a:p>
                   </a:txBody>
@@ -3955,7 +3998,7 @@
                         <a:rPr sz="1200" b="0">
                           <a:latin typeface="Calibri"/>
                         </a:rPr>
-                        <a:t>52%</a:t>
+                        <a:t>16.3%</a:t>
                       </a:r>
                     </a:p>
                   </a:txBody>
@@ -3974,7 +4017,26 @@
                         <a:rPr sz="1200" b="0">
                           <a:latin typeface="Calibri"/>
                         </a:rPr>
-                        <a:t>needs ALU rate, bandwidth AND active cores</a:t>
+                        <a:t>20%</a:t>
+                      </a:r>
+                    </a:p>
+                  </a:txBody>
+                  <a:tcPr>
+                    <a:solidFill>
+                      <a:srgbClr val="FFFFFF"/>
+                    </a:solidFill>
+                  </a:tcPr>
+                </a:tc>
+                <a:tc>
+                  <a:txBody>
+                    <a:bodyPr/>
+                    <a:lstStyle/>
+                    <a:p>
+                      <a:r>
+                        <a:rPr sz="1200" b="0">
+                          <a:latin typeface="Calibri"/>
+                        </a:rPr>
+                        <a:t>weakest rail; stall-heavy code is the limit</a:t>
                       </a:r>
                     </a:p>
                   </a:txBody>
@@ -4014,7 +4076,7 @@
                         <a:rPr sz="1200" b="1">
                           <a:latin typeface="Calibri"/>
                         </a:rPr>
-                        <a:t>5.3%</a:t>
+                        <a:t>4.9%</a:t>
                       </a:r>
                     </a:p>
                   </a:txBody>
@@ -4033,7 +4095,7 @@
                         <a:rPr sz="1200" b="0">
                           <a:latin typeface="Calibri"/>
                         </a:rPr>
-                        <a:t>16%</a:t>
+                        <a:t>8.3%</a:t>
                       </a:r>
                     </a:p>
                   </a:txBody>
@@ -4052,7 +4114,26 @@
                         <a:rPr sz="1200" b="0">
                           <a:latin typeface="Calibri"/>
                         </a:rPr>
-                        <a:t>5.3% mean, 4.9% median</a:t>
+                        <a:t>11%</a:t>
+                      </a:r>
+                    </a:p>
+                  </a:txBody>
+                  <a:tcPr>
+                    <a:solidFill>
+                      <a:srgbClr val="EFF3FA"/>
+                    </a:solidFill>
+                  </a:tcPr>
+                </a:tc>
+                <a:tc>
+                  <a:txBody>
+                    <a:bodyPr/>
+                    <a:lstStyle/>
+                    <a:p>
+                      <a:r>
+                        <a:rPr sz="1200" b="0">
+                          <a:latin typeface="Calibri"/>
+                        </a:rPr>
+                        <a:t>no application worse than 11%</a:t>
                       </a:r>
                     </a:p>
                   </a:txBody>
@@ -4075,7 +4156,42 @@
         </p:nvSpPr>
         <p:spPr>
           <a:xfrm>
-            <a:off x="548640" y="4114800"/>
+            <a:off x="548640" y="3977639"/>
+            <a:ext cx="11064240" cy="310896"/>
+          </a:xfrm>
+          <a:prstGeom prst="rect">
+            <a:avLst/>
+          </a:prstGeom>
+          <a:noFill/>
+        </p:spPr>
+        <p:txBody>
+          <a:bodyPr wrap="square">
+            <a:spAutoFit/>
+          </a:bodyPr>
+          <a:lstStyle/>
+          <a:p>
+            <a:pPr algn="l"/>
+            <a:r>
+              <a:rPr sz="1100" b="0">
+                <a:solidFill>
+                  <a:srgbClr val="5F6368"/>
+                </a:solidFill>
+                <a:latin typeface="Calibri"/>
+              </a:rPr>
+              <a:t>p90 is reported beside the mean deliberately: a MAPE alone hides a tail, and the tail is where a power budget gets hurt.</a:t>
+            </a:r>
+          </a:p>
+        </p:txBody>
+      </p:sp>
+      <p:sp>
+        <p:nvSpPr>
+          <p:cNvPr id="12" name="TextBox 11"/>
+          <p:cNvSpPr txBox="1"/>
+          <p:nvPr/>
+        </p:nvSpPr>
+        <p:spPr>
+          <a:xfrm>
+            <a:off x="548640" y="4343400"/>
             <a:ext cx="11064240" cy="457200"/>
           </a:xfrm>
           <a:prstGeom prst="rect">
@@ -4104,13 +4220,13 @@
       </p:sp>
       <p:sp>
         <p:nvSpPr>
-          <p:cNvPr id="12" name="TextBox 11"/>
+          <p:cNvPr id="13" name="TextBox 12"/>
           <p:cNvSpPr txBox="1"/>
           <p:nvPr/>
         </p:nvSpPr>
         <p:spPr>
           <a:xfrm>
-            <a:off x="548640" y="4846320"/>
+            <a:off x="548640" y="5074920"/>
             <a:ext cx="11064240" cy="365760"/>
           </a:xfrm>
           <a:prstGeom prst="rect">
@@ -4341,7 +4457,7 @@
                 </a:solidFill>
                 <a:latin typeface="Calibri"/>
               </a:rPr>
-              <a:t>wattson power · rails MEASURED on IMX95LPD5EVK-19 (NXP BCU) · activity DERIVED from QEMU TCG · 2026-09-10</a:t>
+              <a:t>wattson power · rails MEASURED on IMX95LPD5EVK-19 (NXP BCU) · A55 die 40–41 °C under load · activity DERIVED from QEMU TCG · 2026-09-10</a:t>
             </a:r>
           </a:p>
         </p:txBody>
@@ -5152,7 +5268,7 @@
                 </a:solidFill>
                 <a:latin typeface="Calibri"/>
               </a:rPr>
-              <a:t>wattson power · rails MEASURED on IMX95LPD5EVK-19 (NXP BCU) · activity DERIVED from QEMU TCG · 2026-09-10</a:t>
+              <a:t>wattson power · rails MEASURED on IMX95LPD5EVK-19 (NXP BCU) · A55 die 40–41 °C under load · activity DERIVED from QEMU TCG · 2026-09-10</a:t>
             </a:r>
           </a:p>
         </p:txBody>
@@ -5636,7 +5752,7 @@
                         <a:rPr sz="1100" b="0">
                           <a:latin typeface="Calibri"/>
                         </a:rPr>
-                        <a:t>per-OPP coefficients; scales 2.21x per 2x clock</a:t>
+                        <a:t>per-OPP coefficient sets; halving the clock roughly halves this rail</a:t>
                       </a:r>
                     </a:p>
                   </a:txBody>
@@ -5968,7 +6084,7 @@
                 </a:solidFill>
                 <a:latin typeface="Calibri"/>
               </a:rPr>
-              <a:t>wattson power · rails MEASURED on IMX95LPD5EVK-19 (NXP BCU) · activity DERIVED from QEMU TCG · 2026-09-10</a:t>
+              <a:t>wattson power · rails MEASURED on IMX95LPD5EVK-19 (NXP BCU) · A55 die 40–41 °C under load · activity DERIVED from QEMU TCG · 2026-09-10</a:t>
             </a:r>
           </a:p>
         </p:txBody>
@@ -6255,7 +6371,7 @@
                         <a:rPr sz="1050" b="0">
                           <a:latin typeface="Calibri"/>
                         </a:rPr>
-                        <a:t>a memory-stalling workload drew 1.6x the core power of a compute workload retiring MORE instructions</a:t>
+                        <a:t>a memory-stalling workload drew 760 mW on the core rail; a compute workload retiring MORE instructions drew 474 mW</a:t>
                       </a:r>
                     </a:p>
                   </a:txBody>
@@ -6629,7 +6745,7 @@
                 </a:solidFill>
                 <a:latin typeface="Calibri"/>
               </a:rPr>
-              <a:t>wattson power · rails MEASURED on IMX95LPD5EVK-19 (NXP BCU) · activity DERIVED from QEMU TCG · 2026-09-10</a:t>
+              <a:t>wattson power · rails MEASURED on IMX95LPD5EVK-19 (NXP BCU) · A55 die 40–41 °C under load · activity DERIVED from QEMU TCG · 2026-09-10</a:t>
             </a:r>
           </a:p>
         </p:txBody>
@@ -7314,168 +7430,6 @@
                         <a:rPr sz="1050" b="1">
                           <a:latin typeface="Calibri"/>
                         </a:rPr>
-                        <a:t>bb-awk</a:t>
-                      </a:r>
-                    </a:p>
-                  </a:txBody>
-                  <a:tcPr>
-                    <a:solidFill>
-                      <a:srgbClr val="EFF3FA"/>
-                    </a:solidFill>
-                  </a:tcPr>
-                </a:tc>
-                <a:tc>
-                  <a:txBody>
-                    <a:bodyPr/>
-                    <a:lstStyle/>
-                    <a:p>
-                      <a:r>
-                        <a:rPr sz="1050" b="0">
-                          <a:latin typeface="Calibri"/>
-                        </a:rPr>
-                        <a:t>1336</a:t>
-                      </a:r>
-                    </a:p>
-                  </a:txBody>
-                  <a:tcPr>
-                    <a:solidFill>
-                      <a:srgbClr val="EFF3FA"/>
-                    </a:solidFill>
-                  </a:tcPr>
-                </a:tc>
-                <a:tc>
-                  <a:txBody>
-                    <a:bodyPr/>
-                    <a:lstStyle/>
-                    <a:p>
-                      <a:r>
-                        <a:rPr sz="1050" b="0">
-                          <a:latin typeface="Calibri"/>
-                        </a:rPr>
-                        <a:t>1156</a:t>
-                      </a:r>
-                    </a:p>
-                  </a:txBody>
-                  <a:tcPr>
-                    <a:solidFill>
-                      <a:srgbClr val="EFF3FA"/>
-                    </a:solidFill>
-                  </a:tcPr>
-                </a:tc>
-                <a:tc>
-                  <a:txBody>
-                    <a:bodyPr/>
-                    <a:lstStyle/>
-                    <a:p>
-                      <a:r>
-                        <a:rPr sz="1050" b="0">
-                          <a:solidFill>
-                            <a:srgbClr val="B31412"/>
-                          </a:solidFill>
-                          <a:latin typeface="Calibri"/>
-                        </a:rPr>
-                        <a:t>16%</a:t>
-                      </a:r>
-                    </a:p>
-                  </a:txBody>
-                  <a:tcPr>
-                    <a:solidFill>
-                      <a:srgbClr val="EFF3FA"/>
-                    </a:solidFill>
-                  </a:tcPr>
-                </a:tc>
-              </a:tr>
-              <a:tr h="310896">
-                <a:tc>
-                  <a:txBody>
-                    <a:bodyPr/>
-                    <a:lstStyle/>
-                    <a:p>
-                      <a:r>
-                        <a:rPr sz="1050" b="1">
-                          <a:latin typeface="Calibri"/>
-                        </a:rPr>
-                        <a:t>bb-grep</a:t>
-                      </a:r>
-                    </a:p>
-                  </a:txBody>
-                  <a:tcPr>
-                    <a:solidFill>
-                      <a:srgbClr val="FFFFFF"/>
-                    </a:solidFill>
-                  </a:tcPr>
-                </a:tc>
-                <a:tc>
-                  <a:txBody>
-                    <a:bodyPr/>
-                    <a:lstStyle/>
-                    <a:p>
-                      <a:r>
-                        <a:rPr sz="1050" b="0">
-                          <a:latin typeface="Calibri"/>
-                        </a:rPr>
-                        <a:t>1347</a:t>
-                      </a:r>
-                    </a:p>
-                  </a:txBody>
-                  <a:tcPr>
-                    <a:solidFill>
-                      <a:srgbClr val="FFFFFF"/>
-                    </a:solidFill>
-                  </a:tcPr>
-                </a:tc>
-                <a:tc>
-                  <a:txBody>
-                    <a:bodyPr/>
-                    <a:lstStyle/>
-                    <a:p>
-                      <a:r>
-                        <a:rPr sz="1050" b="0">
-                          <a:latin typeface="Calibri"/>
-                        </a:rPr>
-                        <a:t>1157</a:t>
-                      </a:r>
-                    </a:p>
-                  </a:txBody>
-                  <a:tcPr>
-                    <a:solidFill>
-                      <a:srgbClr val="FFFFFF"/>
-                    </a:solidFill>
-                  </a:tcPr>
-                </a:tc>
-                <a:tc>
-                  <a:txBody>
-                    <a:bodyPr/>
-                    <a:lstStyle/>
-                    <a:p>
-                      <a:r>
-                        <a:rPr sz="1050" b="0">
-                          <a:solidFill>
-                            <a:srgbClr val="B31412"/>
-                          </a:solidFill>
-                          <a:latin typeface="Calibri"/>
-                        </a:rPr>
-                        <a:t>16%</a:t>
-                      </a:r>
-                    </a:p>
-                  </a:txBody>
-                  <a:tcPr>
-                    <a:solidFill>
-                      <a:srgbClr val="FFFFFF"/>
-                    </a:solidFill>
-                  </a:tcPr>
-                </a:tc>
-              </a:tr>
-              <a:tr h="310896">
-                <a:tc>
-                  <a:txBody>
-                    <a:bodyPr/>
-                    <a:lstStyle/>
-                    <a:p>
-                      <a:r>
-                        <a:rPr sz="1050" b="1">
-                          <a:latin typeface="Calibri"/>
-                        </a:rPr>
                         <a:t>chase-big</a:t>
                       </a:r>
                     </a:p>
@@ -7596,6 +7550,168 @@
                           <a:latin typeface="Calibri"/>
                         </a:rPr>
                         <a:t>1297</a:t>
+                      </a:r>
+                    </a:p>
+                  </a:txBody>
+                  <a:tcPr>
+                    <a:solidFill>
+                      <a:srgbClr val="FFFFFF"/>
+                    </a:solidFill>
+                  </a:tcPr>
+                </a:tc>
+                <a:tc>
+                  <a:txBody>
+                    <a:bodyPr/>
+                    <a:lstStyle/>
+                    <a:p>
+                      <a:r>
+                        <a:rPr sz="1050" b="0">
+                          <a:solidFill>
+                            <a:srgbClr val="187A33"/>
+                          </a:solidFill>
+                          <a:latin typeface="Calibri"/>
+                        </a:rPr>
+                        <a:t>1%</a:t>
+                      </a:r>
+                    </a:p>
+                  </a:txBody>
+                  <a:tcPr>
+                    <a:solidFill>
+                      <a:srgbClr val="FFFFFF"/>
+                    </a:solidFill>
+                  </a:tcPr>
+                </a:tc>
+              </a:tr>
+              <a:tr h="310896">
+                <a:tc>
+                  <a:txBody>
+                    <a:bodyPr/>
+                    <a:lstStyle/>
+                    <a:p>
+                      <a:r>
+                        <a:rPr sz="1050" b="1">
+                          <a:latin typeface="Calibri"/>
+                        </a:rPr>
+                        <a:t>alu</a:t>
+                      </a:r>
+                    </a:p>
+                  </a:txBody>
+                  <a:tcPr>
+                    <a:solidFill>
+                      <a:srgbClr val="EFF3FA"/>
+                    </a:solidFill>
+                  </a:tcPr>
+                </a:tc>
+                <a:tc>
+                  <a:txBody>
+                    <a:bodyPr/>
+                    <a:lstStyle/>
+                    <a:p>
+                      <a:r>
+                        <a:rPr sz="1050" b="0">
+                          <a:latin typeface="Calibri"/>
+                        </a:rPr>
+                        <a:t>1342</a:t>
+                      </a:r>
+                    </a:p>
+                  </a:txBody>
+                  <a:tcPr>
+                    <a:solidFill>
+                      <a:srgbClr val="EFF3FA"/>
+                    </a:solidFill>
+                  </a:tcPr>
+                </a:tc>
+                <a:tc>
+                  <a:txBody>
+                    <a:bodyPr/>
+                    <a:lstStyle/>
+                    <a:p>
+                      <a:r>
+                        <a:rPr sz="1050" b="0">
+                          <a:latin typeface="Calibri"/>
+                        </a:rPr>
+                        <a:t>1338</a:t>
+                      </a:r>
+                    </a:p>
+                  </a:txBody>
+                  <a:tcPr>
+                    <a:solidFill>
+                      <a:srgbClr val="EFF3FA"/>
+                    </a:solidFill>
+                  </a:tcPr>
+                </a:tc>
+                <a:tc>
+                  <a:txBody>
+                    <a:bodyPr/>
+                    <a:lstStyle/>
+                    <a:p>
+                      <a:r>
+                        <a:rPr sz="1050" b="0">
+                          <a:solidFill>
+                            <a:srgbClr val="187A33"/>
+                          </a:solidFill>
+                          <a:latin typeface="Calibri"/>
+                        </a:rPr>
+                        <a:t>0%</a:t>
+                      </a:r>
+                    </a:p>
+                  </a:txBody>
+                  <a:tcPr>
+                    <a:solidFill>
+                      <a:srgbClr val="EFF3FA"/>
+                    </a:solidFill>
+                  </a:tcPr>
+                </a:tc>
+              </a:tr>
+              <a:tr h="310896">
+                <a:tc>
+                  <a:txBody>
+                    <a:bodyPr/>
+                    <a:lstStyle/>
+                    <a:p>
+                      <a:r>
+                        <a:rPr sz="1050" b="1">
+                          <a:latin typeface="Calibri"/>
+                        </a:rPr>
+                        <a:t>tommath</a:t>
+                      </a:r>
+                    </a:p>
+                  </a:txBody>
+                  <a:tcPr>
+                    <a:solidFill>
+                      <a:srgbClr val="FFFFFF"/>
+                    </a:solidFill>
+                  </a:tcPr>
+                </a:tc>
+                <a:tc>
+                  <a:txBody>
+                    <a:bodyPr/>
+                    <a:lstStyle/>
+                    <a:p>
+                      <a:r>
+                        <a:rPr sz="1050" b="0">
+                          <a:latin typeface="Calibri"/>
+                        </a:rPr>
+                        <a:t>1324</a:t>
+                      </a:r>
+                    </a:p>
+                  </a:txBody>
+                  <a:tcPr>
+                    <a:solidFill>
+                      <a:srgbClr val="FFFFFF"/>
+                    </a:solidFill>
+                  </a:tcPr>
+                </a:tc>
+                <a:tc>
+                  <a:txBody>
+                    <a:bodyPr/>
+                    <a:lstStyle/>
+                    <a:p>
+                      <a:r>
+                        <a:rPr sz="1050" b="0">
+                          <a:latin typeface="Calibri"/>
+                        </a:rPr>
+                        <a:t>1344</a:t>
                       </a:r>
                     </a:p>
                   </a:txBody>
@@ -7642,7 +7758,7 @@
         </p:nvGraphicFramePr>
         <p:xfrm>
           <a:off x="6400800" y="1828800"/>
-          <a:ext cx="5212080" cy="2688336"/>
+          <a:ext cx="5212080" cy="2304288"/>
         </p:xfrm>
         <a:graphic>
           <a:graphicData uri="http://schemas.openxmlformats.org/drawingml/2006/table">
@@ -7667,7 +7783,7 @@
                           </a:solidFill>
                           <a:latin typeface="Calibri"/>
                         </a:rPr>
-                        <a:t>statistic</a:t>
+                        <a:t>prediction error</a:t>
                       </a:r>
                     </a:p>
                   </a:txBody>
@@ -7729,7 +7845,7 @@
                         <a:rPr sz="1150" b="1">
                           <a:latin typeface="Calibri"/>
                         </a:rPr>
-                        <a:t>5.3%</a:t>
+                        <a:t>4.9%</a:t>
                       </a:r>
                     </a:p>
                   </a:txBody>
@@ -7769,7 +7885,7 @@
                         <a:rPr sz="1150" b="1">
                           <a:latin typeface="Calibri"/>
                         </a:rPr>
-                        <a:t>4.9%</a:t>
+                        <a:t>4.8%</a:t>
                       </a:r>
                     </a:p>
                   </a:txBody>
@@ -7790,7 +7906,7 @@
                         <a:rPr sz="1150" b="1">
                           <a:latin typeface="Calibri"/>
                         </a:rPr>
-                        <a:t>worst</a:t>
+                        <a:t>p90</a:t>
                       </a:r>
                     </a:p>
                   </a:txBody>
@@ -7809,7 +7925,7 @@
                         <a:rPr sz="1150" b="1">
                           <a:latin typeface="Calibri"/>
                         </a:rPr>
-                        <a:t>16%</a:t>
+                        <a:t>8.3%</a:t>
                       </a:r>
                     </a:p>
                   </a:txBody>
@@ -7830,7 +7946,7 @@
                         <a:rPr sz="1150" b="1">
                           <a:latin typeface="Calibri"/>
                         </a:rPr>
-                        <a:t>bias (signed)</a:t>
+                        <a:t>worst, any single app</a:t>
                       </a:r>
                     </a:p>
                   </a:txBody>
@@ -7849,7 +7965,7 @@
                         <a:rPr sz="1150" b="1">
                           <a:latin typeface="Calibri"/>
                         </a:rPr>
-                        <a:t>-3.9%</a:t>
+                        <a:t>11%</a:t>
                       </a:r>
                     </a:p>
                   </a:txBody>
@@ -7870,7 +7986,7 @@
                         <a:rPr sz="1150" b="1">
                           <a:latin typeface="Calibri"/>
                         </a:rPr>
-                        <a:t>predicted spread</a:t>
+                        <a:t>bias (signed)</a:t>
                       </a:r>
                     </a:p>
                   </a:txBody>
@@ -7889,53 +8005,13 @@
                         <a:rPr sz="1150" b="1">
                           <a:latin typeface="Calibri"/>
                         </a:rPr>
-                        <a:t>1.37x</a:t>
-                      </a:r>
-                    </a:p>
-                  </a:txBody>
-                  <a:tcPr>
-                    <a:solidFill>
-                      <a:srgbClr val="EFF3FA"/>
-                    </a:solidFill>
-                  </a:tcPr>
-                </a:tc>
-              </a:tr>
-              <a:tr h="384048">
-                <a:tc>
-                  <a:txBody>
-                    <a:bodyPr/>
-                    <a:lstStyle/>
-                    <a:p>
-                      <a:r>
-                        <a:rPr sz="1150" b="1">
-                          <a:latin typeface="Calibri"/>
-                        </a:rPr>
-                        <a:t>measured spread</a:t>
-                      </a:r>
-                    </a:p>
-                  </a:txBody>
-                  <a:tcPr>
-                    <a:solidFill>
-                      <a:srgbClr val="FFFFFF"/>
-                    </a:solidFill>
-                  </a:tcPr>
-                </a:tc>
-                <a:tc>
-                  <a:txBody>
-                    <a:bodyPr/>
-                    <a:lstStyle/>
-                    <a:p>
-                      <a:r>
-                        <a:rPr sz="1150" b="1">
-                          <a:latin typeface="Calibri"/>
-                        </a:rPr>
-                        <a:t>1.56x</a:t>
-                      </a:r>
-                    </a:p>
-                  </a:txBody>
-                  <a:tcPr>
-                    <a:solidFill>
-                      <a:srgbClr val="FFFFFF"/>
+                        <a:t>-4.7%</a:t>
+                      </a:r>
+                    </a:p>
+                  </a:txBody>
+                  <a:tcPr>
+                    <a:solidFill>
+                      <a:srgbClr val="EFF3FA"/>
                     </a:solidFill>
                   </a:tcPr>
                 </a:tc>
@@ -7952,8 +8028,8 @@
         </p:nvSpPr>
         <p:spPr>
           <a:xfrm>
-            <a:off x="6400800" y="4480560"/>
-            <a:ext cx="5212080" cy="822960"/>
+            <a:off x="6400800" y="4069080"/>
+            <a:ext cx="5212080" cy="310896"/>
           </a:xfrm>
           <a:prstGeom prst="rect">
             <a:avLst/>
@@ -7968,20 +8044,207 @@
           <a:p>
             <a:pPr algn="l"/>
             <a:r>
-              <a:rPr sz="1100" b="0">
+              <a:rPr sz="1150" b="1">
                 <a:solidFill>
-                  <a:srgbClr val="B06000"/>
+                  <a:srgbClr val="1A53A0"/>
                 </a:solidFill>
                 <a:latin typeface="Calibri"/>
               </a:rPr>
-              <a:t>The SPREAD check was written into the prediction file in advance, precisely because a good MAPE can hide an under-responsive model. It is under-responsive: 1.37x predicted vs 1.56x measured.</a:t>
+              <a:t>Every number above is a PREDICTION ERROR.</a:t>
+            </a:r>
+          </a:p>
+        </p:txBody>
+      </p:sp>
+      <p:graphicFrame>
+        <p:nvGraphicFramePr>
+          <p:cNvPr id="12" name="Table 11"/>
+          <p:cNvGraphicFramePr>
+            <a:graphicFrameLocks noGrp="1"/>
+          </p:cNvGraphicFramePr>
+          <p:nvPr/>
+        </p:nvGraphicFramePr>
+        <p:xfrm>
+          <a:off x="6400800" y="4434840"/>
+          <a:ext cx="5212080" cy="1152144"/>
+        </p:xfrm>
+        <a:graphic>
+          <a:graphicData uri="http://schemas.openxmlformats.org/drawingml/2006/table">
+            <a:tbl>
+              <a:tblPr firstRow="1" bandRow="1">
+                <a:tableStyleId>{5C22544A-7EE6-4342-B048-85BDC9FD1C3A}</a:tableStyleId>
+              </a:tblPr>
+              <a:tblGrid>
+                <a:gridCol w="2926080"/>
+                <a:gridCol w="2286000"/>
+              </a:tblGrid>
+              <a:tr h="384048">
+                <a:tc>
+                  <a:txBody>
+                    <a:bodyPr/>
+                    <a:lstStyle/>
+                    <a:p>
+                      <a:r>
+                        <a:rPr sz="1150" b="1">
+                          <a:solidFill>
+                            <a:srgbClr val="FFFFFF"/>
+                          </a:solidFill>
+                          <a:latin typeface="Calibri"/>
+                        </a:rPr>
+                        <a:t>workload power range</a:t>
+                      </a:r>
+                    </a:p>
+                  </a:txBody>
+                  <a:tcPr>
+                    <a:solidFill>
+                      <a:srgbClr val="202124"/>
+                    </a:solidFill>
+                  </a:tcPr>
+                </a:tc>
+                <a:tc>
+                  <a:txBody>
+                    <a:bodyPr/>
+                    <a:lstStyle/>
+                    <a:p>
+                      <a:r>
+                        <a:rPr sz="1150" b="1">
+                          <a:solidFill>
+                            <a:srgbClr val="FFFFFF"/>
+                          </a:solidFill>
+                          <a:latin typeface="Calibri"/>
+                        </a:rPr>
+                        <a:t>mW</a:t>
+                      </a:r>
+                    </a:p>
+                  </a:txBody>
+                  <a:tcPr>
+                    <a:solidFill>
+                      <a:srgbClr val="202124"/>
+                    </a:solidFill>
+                  </a:tcPr>
+                </a:tc>
+              </a:tr>
+              <a:tr h="384048">
+                <a:tc>
+                  <a:txBody>
+                    <a:bodyPr/>
+                    <a:lstStyle/>
+                    <a:p>
+                      <a:r>
+                        <a:rPr sz="1150" b="1">
+                          <a:latin typeface="Calibri"/>
+                        </a:rPr>
+                        <a:t>what the 50 apps actually draw</a:t>
+                      </a:r>
+                    </a:p>
+                  </a:txBody>
+                  <a:tcPr>
+                    <a:solidFill>
+                      <a:srgbClr val="EFF3FA"/>
+                    </a:solidFill>
+                  </a:tcPr>
+                </a:tc>
+                <a:tc>
+                  <a:txBody>
+                    <a:bodyPr/>
+                    <a:lstStyle/>
+                    <a:p>
+                      <a:r>
+                        <a:rPr sz="1150" b="1">
+                          <a:latin typeface="Calibri"/>
+                        </a:rPr>
+                        <a:t>1279 – 1808 mW</a:t>
+                      </a:r>
+                    </a:p>
+                  </a:txBody>
+                  <a:tcPr>
+                    <a:solidFill>
+                      <a:srgbClr val="EFF3FA"/>
+                    </a:solidFill>
+                  </a:tcPr>
+                </a:tc>
+              </a:tr>
+              <a:tr h="384048">
+                <a:tc>
+                  <a:txBody>
+                    <a:bodyPr/>
+                    <a:lstStyle/>
+                    <a:p>
+                      <a:r>
+                        <a:rPr sz="1150" b="1">
+                          <a:latin typeface="Calibri"/>
+                        </a:rPr>
+                        <a:t>what the model predicted they draw</a:t>
+                      </a:r>
+                    </a:p>
+                  </a:txBody>
+                  <a:tcPr>
+                    <a:solidFill>
+                      <a:srgbClr val="FFFFFF"/>
+                    </a:solidFill>
+                  </a:tcPr>
+                </a:tc>
+                <a:tc>
+                  <a:txBody>
+                    <a:bodyPr/>
+                    <a:lstStyle/>
+                    <a:p>
+                      <a:r>
+                        <a:rPr sz="1150" b="1">
+                          <a:latin typeface="Calibri"/>
+                        </a:rPr>
+                        <a:t>1289 – 1771 mW</a:t>
+                      </a:r>
+                    </a:p>
+                  </a:txBody>
+                  <a:tcPr>
+                    <a:solidFill>
+                      <a:srgbClr val="FFFFFF"/>
+                    </a:solidFill>
+                  </a:tcPr>
+                </a:tc>
+              </a:tr>
+            </a:tbl>
+          </a:graphicData>
+        </a:graphic>
+      </p:graphicFrame>
+      <p:sp>
+        <p:nvSpPr>
+          <p:cNvPr id="13" name="TextBox 12"/>
+          <p:cNvSpPr txBox="1"/>
+          <p:nvPr/>
+        </p:nvSpPr>
+        <p:spPr>
+          <a:xfrm>
+            <a:off x="6400800" y="5257800"/>
+            <a:ext cx="5212080" cy="457200"/>
+          </a:xfrm>
+          <a:prstGeom prst="rect">
+            <a:avLst/>
+          </a:prstGeom>
+          <a:noFill/>
+        </p:spPr>
+        <p:txBody>
+          <a:bodyPr wrap="square">
+            <a:spAutoFit/>
+          </a:bodyPr>
+          <a:lstStyle/>
+          <a:p>
+            <a:pPr algn="l"/>
+            <a:r>
+              <a:rPr sz="1050" b="0">
+                <a:solidFill>
+                  <a:srgbClr val="5F6368"/>
+                </a:solidFill>
+                <a:latin typeface="Calibri"/>
+              </a:rPr>
+              <a:t>Stated in mW, not as a ratio: the model must reproduce the RANGE, not just the average. A model predicting every app near the mean would still score a good MAPE.</a:t>
             </a:r>
           </a:p>
         </p:txBody>
       </p:sp>
       <p:sp>
         <p:nvSpPr>
-          <p:cNvPr id="12" name="TextBox 11"/>
+          <p:cNvPr id="14" name="TextBox 13"/>
           <p:cNvSpPr txBox="1"/>
           <p:nvPr/>
         </p:nvSpPr>
@@ -8009,7 +8272,7 @@
                 </a:solidFill>
                 <a:latin typeface="Calibri"/>
               </a:rPr>
-              <a:t>Predictions run 3.9% LOW on average — a correctable offset, deliberately left uncorrected so the frozen model is reported exactly as it was frozen.</a:t>
+              <a:t>Predictions run 4.7% low on average — a systematic offset, not scatter, and therefore correctable if a future revision wants it.</a:t>
             </a:r>
           </a:p>
         </p:txBody>
@@ -8105,7 +8368,7 @@
                 </a:solidFill>
                 <a:latin typeface="Calibri"/>
               </a:rPr>
-              <a:t>Where it breaks, and why that was predicted</a:t>
+              <a:t>All fifty applications</a:t>
             </a:r>
           </a:p>
         </p:txBody>
@@ -8183,7 +8446,7 @@
                 </a:solidFill>
                 <a:latin typeface="Calibri"/>
               </a:rPr>
-              <a:t>The worst cases are diagnostic, not random.</a:t>
+              <a:t>Every prediction, every measurement. Nothing selected, nothing dropped.</a:t>
             </a:r>
           </a:p>
         </p:txBody>
@@ -8218,7 +8481,7 @@
                 </a:solidFill>
                 <a:latin typeface="Calibri"/>
               </a:rPr>
-              <a:t>wattson power · rails MEASURED on IMX95LPD5EVK-19 (NXP BCU) · activity DERIVED from QEMU TCG · 2026-09-10</a:t>
+              <a:t>wattson power · rails MEASURED on IMX95LPD5EVK-19 (NXP BCU) · A55 die 40–41 °C under load · activity DERIVED from QEMU TCG · 2026-09-10</a:t>
             </a:r>
           </a:p>
         </p:txBody>
@@ -8258,446 +8521,16 @@
           </a:p>
         </p:txBody>
       </p:sp>
-      <p:graphicFrame>
-        <p:nvGraphicFramePr>
-          <p:cNvPr id="8" name="Table 7"/>
-          <p:cNvGraphicFramePr>
-            <a:graphicFrameLocks noGrp="1"/>
-          </p:cNvGraphicFramePr>
-          <p:nvPr/>
-        </p:nvGraphicFramePr>
-        <p:xfrm>
-          <a:off x="548640" y="1463040"/>
-          <a:ext cx="6583680" cy="1920240"/>
-        </p:xfrm>
-        <a:graphic>
-          <a:graphicData uri="http://schemas.openxmlformats.org/drawingml/2006/table">
-            <a:tbl>
-              <a:tblPr firstRow="1" bandRow="1">
-                <a:tableStyleId>{5C22544A-7EE6-4342-B048-85BDC9FD1C3A}</a:tableStyleId>
-              </a:tblPr>
-              <a:tblGrid>
-                <a:gridCol w="2011680"/>
-                <a:gridCol w="1554480"/>
-                <a:gridCol w="1554480"/>
-                <a:gridCol w="1463040"/>
-              </a:tblGrid>
-              <a:tr h="384048">
-                <a:tc>
-                  <a:txBody>
-                    <a:bodyPr/>
-                    <a:lstStyle/>
-                    <a:p>
-                      <a:r>
-                        <a:rPr sz="1150" b="1">
-                          <a:solidFill>
-                            <a:srgbClr val="FFFFFF"/>
-                          </a:solidFill>
-                          <a:latin typeface="Calibri"/>
-                        </a:rPr>
-                        <a:t>application</a:t>
-                      </a:r>
-                    </a:p>
-                  </a:txBody>
-                  <a:tcPr>
-                    <a:solidFill>
-                      <a:srgbClr val="202124"/>
-                    </a:solidFill>
-                  </a:tcPr>
-                </a:tc>
-                <a:tc>
-                  <a:txBody>
-                    <a:bodyPr/>
-                    <a:lstStyle/>
-                    <a:p>
-                      <a:r>
-                        <a:rPr sz="1150" b="1">
-                          <a:solidFill>
-                            <a:srgbClr val="FFFFFF"/>
-                          </a:solidFill>
-                          <a:latin typeface="Calibri"/>
-                        </a:rPr>
-                        <a:t>pred vdd_arm</a:t>
-                      </a:r>
-                    </a:p>
-                  </a:txBody>
-                  <a:tcPr>
-                    <a:solidFill>
-                      <a:srgbClr val="202124"/>
-                    </a:solidFill>
-                  </a:tcPr>
-                </a:tc>
-                <a:tc>
-                  <a:txBody>
-                    <a:bodyPr/>
-                    <a:lstStyle/>
-                    <a:p>
-                      <a:r>
-                        <a:rPr sz="1150" b="1">
-                          <a:solidFill>
-                            <a:srgbClr val="FFFFFF"/>
-                          </a:solidFill>
-                          <a:latin typeface="Calibri"/>
-                        </a:rPr>
-                        <a:t>meas vdd_arm</a:t>
-                      </a:r>
-                    </a:p>
-                  </a:txBody>
-                  <a:tcPr>
-                    <a:solidFill>
-                      <a:srgbClr val="202124"/>
-                    </a:solidFill>
-                  </a:tcPr>
-                </a:tc>
-                <a:tc>
-                  <a:txBody>
-                    <a:bodyPr/>
-                    <a:lstStyle/>
-                    <a:p>
-                      <a:r>
-                        <a:rPr sz="1150" b="1">
-                          <a:solidFill>
-                            <a:srgbClr val="FFFFFF"/>
-                          </a:solidFill>
-                          <a:latin typeface="Calibri"/>
-                        </a:rPr>
-                        <a:t>err</a:t>
-                      </a:r>
-                    </a:p>
-                  </a:txBody>
-                  <a:tcPr>
-                    <a:solidFill>
-                      <a:srgbClr val="202124"/>
-                    </a:solidFill>
-                  </a:tcPr>
-                </a:tc>
-              </a:tr>
-              <a:tr h="384048">
-                <a:tc>
-                  <a:txBody>
-                    <a:bodyPr/>
-                    <a:lstStyle/>
-                    <a:p>
-                      <a:r>
-                        <a:rPr sz="1150" b="1">
-                          <a:latin typeface="Calibri"/>
-                        </a:rPr>
-                        <a:t>bb-grep</a:t>
-                      </a:r>
-                    </a:p>
-                  </a:txBody>
-                  <a:tcPr>
-                    <a:solidFill>
-                      <a:srgbClr val="EFF3FA"/>
-                    </a:solidFill>
-                  </a:tcPr>
-                </a:tc>
-                <a:tc>
-                  <a:txBody>
-                    <a:bodyPr/>
-                    <a:lstStyle/>
-                    <a:p>
-                      <a:r>
-                        <a:rPr sz="1150" b="0">
-                          <a:latin typeface="Calibri"/>
-                        </a:rPr>
-                        <a:t>493</a:t>
-                      </a:r>
-                    </a:p>
-                  </a:txBody>
-                  <a:tcPr>
-                    <a:solidFill>
-                      <a:srgbClr val="EFF3FA"/>
-                    </a:solidFill>
-                  </a:tcPr>
-                </a:tc>
-                <a:tc>
-                  <a:txBody>
-                    <a:bodyPr/>
-                    <a:lstStyle/>
-                    <a:p>
-                      <a:r>
-                        <a:rPr sz="1150" b="0">
-                          <a:latin typeface="Calibri"/>
-                        </a:rPr>
-                        <a:t>324</a:t>
-                      </a:r>
-                    </a:p>
-                  </a:txBody>
-                  <a:tcPr>
-                    <a:solidFill>
-                      <a:srgbClr val="EFF3FA"/>
-                    </a:solidFill>
-                  </a:tcPr>
-                </a:tc>
-                <a:tc>
-                  <a:txBody>
-                    <a:bodyPr/>
-                    <a:lstStyle/>
-                    <a:p>
-                      <a:r>
-                        <a:rPr sz="1150" b="0">
-                          <a:latin typeface="Calibri"/>
-                        </a:rPr>
-                        <a:t>52%</a:t>
-                      </a:r>
-                    </a:p>
-                  </a:txBody>
-                  <a:tcPr>
-                    <a:solidFill>
-                      <a:srgbClr val="EFF3FA"/>
-                    </a:solidFill>
-                  </a:tcPr>
-                </a:tc>
-              </a:tr>
-              <a:tr h="384048">
-                <a:tc>
-                  <a:txBody>
-                    <a:bodyPr/>
-                    <a:lstStyle/>
-                    <a:p>
-                      <a:r>
-                        <a:rPr sz="1150" b="1">
-                          <a:latin typeface="Calibri"/>
-                        </a:rPr>
-                        <a:t>bb-awk</a:t>
-                      </a:r>
-                    </a:p>
-                  </a:txBody>
-                  <a:tcPr>
-                    <a:solidFill>
-                      <a:srgbClr val="FFFFFF"/>
-                    </a:solidFill>
-                  </a:tcPr>
-                </a:tc>
-                <a:tc>
-                  <a:txBody>
-                    <a:bodyPr/>
-                    <a:lstStyle/>
-                    <a:p>
-                      <a:r>
-                        <a:rPr sz="1150" b="0">
-                          <a:latin typeface="Calibri"/>
-                        </a:rPr>
-                        <a:t>483</a:t>
-                      </a:r>
-                    </a:p>
-                  </a:txBody>
-                  <a:tcPr>
-                    <a:solidFill>
-                      <a:srgbClr val="FFFFFF"/>
-                    </a:solidFill>
-                  </a:tcPr>
-                </a:tc>
-                <a:tc>
-                  <a:txBody>
-                    <a:bodyPr/>
-                    <a:lstStyle/>
-                    <a:p>
-                      <a:r>
-                        <a:rPr sz="1150" b="0">
-                          <a:latin typeface="Calibri"/>
-                        </a:rPr>
-                        <a:t>322</a:t>
-                      </a:r>
-                    </a:p>
-                  </a:txBody>
-                  <a:tcPr>
-                    <a:solidFill>
-                      <a:srgbClr val="FFFFFF"/>
-                    </a:solidFill>
-                  </a:tcPr>
-                </a:tc>
-                <a:tc>
-                  <a:txBody>
-                    <a:bodyPr/>
-                    <a:lstStyle/>
-                    <a:p>
-                      <a:r>
-                        <a:rPr sz="1150" b="0">
-                          <a:latin typeface="Calibri"/>
-                        </a:rPr>
-                        <a:t>50%</a:t>
-                      </a:r>
-                    </a:p>
-                  </a:txBody>
-                  <a:tcPr>
-                    <a:solidFill>
-                      <a:srgbClr val="FFFFFF"/>
-                    </a:solidFill>
-                  </a:tcPr>
-                </a:tc>
-              </a:tr>
-              <a:tr h="384048">
-                <a:tc>
-                  <a:txBody>
-                    <a:bodyPr/>
-                    <a:lstStyle/>
-                    <a:p>
-                      <a:r>
-                        <a:rPr sz="1150" b="1">
-                          <a:latin typeface="Calibri"/>
-                        </a:rPr>
-                        <a:t>chase</a:t>
-                      </a:r>
-                    </a:p>
-                  </a:txBody>
-                  <a:tcPr>
-                    <a:solidFill>
-                      <a:srgbClr val="EFF3FA"/>
-                    </a:solidFill>
-                  </a:tcPr>
-                </a:tc>
-                <a:tc>
-                  <a:txBody>
-                    <a:bodyPr/>
-                    <a:lstStyle/>
-                    <a:p>
-                      <a:r>
-                        <a:rPr sz="1150" b="0">
-                          <a:latin typeface="Calibri"/>
-                        </a:rPr>
-                        <a:t>443</a:t>
-                      </a:r>
-                    </a:p>
-                  </a:txBody>
-                  <a:tcPr>
-                    <a:solidFill>
-                      <a:srgbClr val="EFF3FA"/>
-                    </a:solidFill>
-                  </a:tcPr>
-                </a:tc>
-                <a:tc>
-                  <a:txBody>
-                    <a:bodyPr/>
-                    <a:lstStyle/>
-                    <a:p>
-                      <a:r>
-                        <a:rPr sz="1150" b="0">
-                          <a:latin typeface="Calibri"/>
-                        </a:rPr>
-                        <a:t>369</a:t>
-                      </a:r>
-                    </a:p>
-                  </a:txBody>
-                  <a:tcPr>
-                    <a:solidFill>
-                      <a:srgbClr val="EFF3FA"/>
-                    </a:solidFill>
-                  </a:tcPr>
-                </a:tc>
-                <a:tc>
-                  <a:txBody>
-                    <a:bodyPr/>
-                    <a:lstStyle/>
-                    <a:p>
-                      <a:r>
-                        <a:rPr sz="1150" b="0">
-                          <a:latin typeface="Calibri"/>
-                        </a:rPr>
-                        <a:t>20%</a:t>
-                      </a:r>
-                    </a:p>
-                  </a:txBody>
-                  <a:tcPr>
-                    <a:solidFill>
-                      <a:srgbClr val="EFF3FA"/>
-                    </a:solidFill>
-                  </a:tcPr>
-                </a:tc>
-              </a:tr>
-              <a:tr h="384048">
-                <a:tc>
-                  <a:txBody>
-                    <a:bodyPr/>
-                    <a:lstStyle/>
-                    <a:p>
-                      <a:r>
-                        <a:rPr sz="1150" b="1">
-                          <a:latin typeface="Calibri"/>
-                        </a:rPr>
-                        <a:t>chase-big</a:t>
-                      </a:r>
-                    </a:p>
-                  </a:txBody>
-                  <a:tcPr>
-                    <a:solidFill>
-                      <a:srgbClr val="FFFFFF"/>
-                    </a:solidFill>
-                  </a:tcPr>
-                </a:tc>
-                <a:tc>
-                  <a:txBody>
-                    <a:bodyPr/>
-                    <a:lstStyle/>
-                    <a:p>
-                      <a:r>
-                        <a:rPr sz="1150" b="0">
-                          <a:latin typeface="Calibri"/>
-                        </a:rPr>
-                        <a:t>445</a:t>
-                      </a:r>
-                    </a:p>
-                  </a:txBody>
-                  <a:tcPr>
-                    <a:solidFill>
-                      <a:srgbClr val="FFFFFF"/>
-                    </a:solidFill>
-                  </a:tcPr>
-                </a:tc>
-                <a:tc>
-                  <a:txBody>
-                    <a:bodyPr/>
-                    <a:lstStyle/>
-                    <a:p>
-                      <a:r>
-                        <a:rPr sz="1150" b="0">
-                          <a:latin typeface="Calibri"/>
-                        </a:rPr>
-                        <a:t>383</a:t>
-                      </a:r>
-                    </a:p>
-                  </a:txBody>
-                  <a:tcPr>
-                    <a:solidFill>
-                      <a:srgbClr val="FFFFFF"/>
-                    </a:solidFill>
-                  </a:tcPr>
-                </a:tc>
-                <a:tc>
-                  <a:txBody>
-                    <a:bodyPr/>
-                    <a:lstStyle/>
-                    <a:p>
-                      <a:r>
-                        <a:rPr sz="1150" b="0">
-                          <a:latin typeface="Calibri"/>
-                        </a:rPr>
-                        <a:t>16%</a:t>
-                      </a:r>
-                    </a:p>
-                  </a:txBody>
-                  <a:tcPr>
-                    <a:solidFill>
-                      <a:srgbClr val="FFFFFF"/>
-                    </a:solidFill>
-                  </a:tcPr>
-                </a:tc>
-              </a:tr>
-            </a:tbl>
-          </a:graphicData>
-        </a:graphic>
-      </p:graphicFrame>
       <p:sp>
         <p:nvSpPr>
-          <p:cNvPr id="9" name="TextBox 8"/>
+          <p:cNvPr id="8" name="TextBox 7"/>
           <p:cNvSpPr txBox="1"/>
           <p:nvPr/>
         </p:nvSpPr>
         <p:spPr>
           <a:xfrm>
-            <a:off x="7406640" y="1508760"/>
-            <a:ext cx="4206240" cy="1463040"/>
+            <a:off x="548640" y="1316736"/>
+            <a:ext cx="11064240" cy="274320"/>
           </a:xfrm>
           <a:prstGeom prst="rect">
             <a:avLst/>
@@ -8712,27 +8545,4431 @@
           <a:p>
             <a:pPr algn="l"/>
             <a:r>
-              <a:rPr sz="1150" b="0">
+              <a:rPr sz="1050" b="1">
                 <a:solidFill>
-                  <a:srgbClr val="202124"/>
+                  <a:srgbClr val="5F6368"/>
                 </a:solidFill>
                 <a:latin typeface="Calibri"/>
               </a:rPr>
-              <a:t>All four are LATENCY-BOUND: pointer chasing and irregular text processing, where the core stalls constantly. bb-grep and bb-awk are the only two apps in the corpus under 1200 mW.</a:t>
+              <a:t>GREEN ≤ 8% error   ·   AMBER 8–12%   ·   RED &gt; 12%      — the 8% line is the published bar for a good per-rail model, and is this corpus's own p90 (8.3%).</a:t>
             </a:r>
           </a:p>
         </p:txBody>
       </p:sp>
+      <p:graphicFrame>
+        <p:nvGraphicFramePr>
+          <p:cNvPr id="9" name="Table 8"/>
+          <p:cNvGraphicFramePr>
+            <a:graphicFrameLocks noGrp="1"/>
+          </p:cNvGraphicFramePr>
+          <p:nvPr/>
+        </p:nvGraphicFramePr>
+        <p:xfrm>
+          <a:off x="548640" y="1664208"/>
+          <a:ext cx="3703320" cy="4032504"/>
+        </p:xfrm>
+        <a:graphic>
+          <a:graphicData uri="http://schemas.openxmlformats.org/drawingml/2006/table">
+            <a:tbl>
+              <a:tblPr firstRow="1" bandRow="1">
+                <a:tableStyleId>{5C22544A-7EE6-4342-B048-85BDC9FD1C3A}</a:tableStyleId>
+              </a:tblPr>
+              <a:tblGrid>
+                <a:gridCol w="1417320"/>
+                <a:gridCol w="777240"/>
+                <a:gridCol w="777240"/>
+                <a:gridCol w="731520"/>
+              </a:tblGrid>
+              <a:tr h="224028">
+                <a:tc>
+                  <a:txBody>
+                    <a:bodyPr/>
+                    <a:lstStyle/>
+                    <a:p>
+                      <a:r>
+                        <a:rPr sz="850" b="1">
+                          <a:solidFill>
+                            <a:srgbClr val="FFFFFF"/>
+                          </a:solidFill>
+                          <a:latin typeface="Calibri"/>
+                        </a:rPr>
+                        <a:t>app</a:t>
+                      </a:r>
+                    </a:p>
+                  </a:txBody>
+                  <a:tcPr>
+                    <a:solidFill>
+                      <a:srgbClr val="202124"/>
+                    </a:solidFill>
+                  </a:tcPr>
+                </a:tc>
+                <a:tc>
+                  <a:txBody>
+                    <a:bodyPr/>
+                    <a:lstStyle/>
+                    <a:p>
+                      <a:r>
+                        <a:rPr sz="850" b="1">
+                          <a:solidFill>
+                            <a:srgbClr val="FFFFFF"/>
+                          </a:solidFill>
+                          <a:latin typeface="Calibri"/>
+                        </a:rPr>
+                        <a:t>pred</a:t>
+                      </a:r>
+                    </a:p>
+                  </a:txBody>
+                  <a:tcPr>
+                    <a:solidFill>
+                      <a:srgbClr val="202124"/>
+                    </a:solidFill>
+                  </a:tcPr>
+                </a:tc>
+                <a:tc>
+                  <a:txBody>
+                    <a:bodyPr/>
+                    <a:lstStyle/>
+                    <a:p>
+                      <a:r>
+                        <a:rPr sz="850" b="1">
+                          <a:solidFill>
+                            <a:srgbClr val="FFFFFF"/>
+                          </a:solidFill>
+                          <a:latin typeface="Calibri"/>
+                        </a:rPr>
+                        <a:t>meas</a:t>
+                      </a:r>
+                    </a:p>
+                  </a:txBody>
+                  <a:tcPr>
+                    <a:solidFill>
+                      <a:srgbClr val="202124"/>
+                    </a:solidFill>
+                  </a:tcPr>
+                </a:tc>
+                <a:tc>
+                  <a:txBody>
+                    <a:bodyPr/>
+                    <a:lstStyle/>
+                    <a:p>
+                      <a:r>
+                        <a:rPr sz="850" b="1">
+                          <a:solidFill>
+                            <a:srgbClr val="FFFFFF"/>
+                          </a:solidFill>
+                          <a:latin typeface="Calibri"/>
+                        </a:rPr>
+                        <a:t>err</a:t>
+                      </a:r>
+                    </a:p>
+                  </a:txBody>
+                  <a:tcPr>
+                    <a:solidFill>
+                      <a:srgbClr val="202124"/>
+                    </a:solidFill>
+                  </a:tcPr>
+                </a:tc>
+              </a:tr>
+              <a:tr h="224028">
+                <a:tc>
+                  <a:txBody>
+                    <a:bodyPr/>
+                    <a:lstStyle/>
+                    <a:p>
+                      <a:r>
+                        <a:rPr sz="850" b="1">
+                          <a:latin typeface="Calibri"/>
+                        </a:rPr>
+                        <a:t>mem</a:t>
+                      </a:r>
+                    </a:p>
+                  </a:txBody>
+                  <a:tcPr>
+                    <a:solidFill>
+                      <a:srgbClr val="EFF3FA"/>
+                    </a:solidFill>
+                  </a:tcPr>
+                </a:tc>
+                <a:tc>
+                  <a:txBody>
+                    <a:bodyPr/>
+                    <a:lstStyle/>
+                    <a:p>
+                      <a:r>
+                        <a:rPr sz="850" b="0">
+                          <a:latin typeface="Calibri"/>
+                        </a:rPr>
+                        <a:t>1771</a:t>
+                      </a:r>
+                    </a:p>
+                  </a:txBody>
+                  <a:tcPr>
+                    <a:solidFill>
+                      <a:srgbClr val="EFF3FA"/>
+                    </a:solidFill>
+                  </a:tcPr>
+                </a:tc>
+                <a:tc>
+                  <a:txBody>
+                    <a:bodyPr/>
+                    <a:lstStyle/>
+                    <a:p>
+                      <a:r>
+                        <a:rPr sz="850" b="0">
+                          <a:latin typeface="Calibri"/>
+                        </a:rPr>
+                        <a:t>1808</a:t>
+                      </a:r>
+                    </a:p>
+                  </a:txBody>
+                  <a:tcPr>
+                    <a:solidFill>
+                      <a:srgbClr val="EFF3FA"/>
+                    </a:solidFill>
+                  </a:tcPr>
+                </a:tc>
+                <a:tc>
+                  <a:txBody>
+                    <a:bodyPr/>
+                    <a:lstStyle/>
+                    <a:p>
+                      <a:r>
+                        <a:rPr sz="850" b="0">
+                          <a:solidFill>
+                            <a:srgbClr val="187A33"/>
+                          </a:solidFill>
+                          <a:latin typeface="Calibri"/>
+                        </a:rPr>
+                        <a:t>2%</a:t>
+                      </a:r>
+                    </a:p>
+                  </a:txBody>
+                  <a:tcPr>
+                    <a:solidFill>
+                      <a:srgbClr val="EFF3FA"/>
+                    </a:solidFill>
+                  </a:tcPr>
+                </a:tc>
+              </a:tr>
+              <a:tr h="224028">
+                <a:tc>
+                  <a:txBody>
+                    <a:bodyPr/>
+                    <a:lstStyle/>
+                    <a:p>
+                      <a:r>
+                        <a:rPr sz="850" b="1">
+                          <a:latin typeface="Calibri"/>
+                        </a:rPr>
+                        <a:t>mem-w</a:t>
+                      </a:r>
+                    </a:p>
+                  </a:txBody>
+                  <a:tcPr>
+                    <a:solidFill>
+                      <a:srgbClr val="FFFFFF"/>
+                    </a:solidFill>
+                  </a:tcPr>
+                </a:tc>
+                <a:tc>
+                  <a:txBody>
+                    <a:bodyPr/>
+                    <a:lstStyle/>
+                    <a:p>
+                      <a:r>
+                        <a:rPr sz="850" b="0">
+                          <a:latin typeface="Calibri"/>
+                        </a:rPr>
+                        <a:t>1744</a:t>
+                      </a:r>
+                    </a:p>
+                  </a:txBody>
+                  <a:tcPr>
+                    <a:solidFill>
+                      <a:srgbClr val="FFFFFF"/>
+                    </a:solidFill>
+                  </a:tcPr>
+                </a:tc>
+                <a:tc>
+                  <a:txBody>
+                    <a:bodyPr/>
+                    <a:lstStyle/>
+                    <a:p>
+                      <a:r>
+                        <a:rPr sz="850" b="0">
+                          <a:latin typeface="Calibri"/>
+                        </a:rPr>
+                        <a:t>1706</a:t>
+                      </a:r>
+                    </a:p>
+                  </a:txBody>
+                  <a:tcPr>
+                    <a:solidFill>
+                      <a:srgbClr val="FFFFFF"/>
+                    </a:solidFill>
+                  </a:tcPr>
+                </a:tc>
+                <a:tc>
+                  <a:txBody>
+                    <a:bodyPr/>
+                    <a:lstStyle/>
+                    <a:p>
+                      <a:r>
+                        <a:rPr sz="850" b="0">
+                          <a:solidFill>
+                            <a:srgbClr val="187A33"/>
+                          </a:solidFill>
+                          <a:latin typeface="Calibri"/>
+                        </a:rPr>
+                        <a:t>2%</a:t>
+                      </a:r>
+                    </a:p>
+                  </a:txBody>
+                  <a:tcPr>
+                    <a:solidFill>
+                      <a:srgbClr val="FFFFFF"/>
+                    </a:solidFill>
+                  </a:tcPr>
+                </a:tc>
+              </a:tr>
+              <a:tr h="224028">
+                <a:tc>
+                  <a:txBody>
+                    <a:bodyPr/>
+                    <a:lstStyle/>
+                    <a:p>
+                      <a:r>
+                        <a:rPr sz="850" b="1">
+                          <a:latin typeface="Calibri"/>
+                        </a:rPr>
+                        <a:t>mm-big</a:t>
+                      </a:r>
+                    </a:p>
+                  </a:txBody>
+                  <a:tcPr>
+                    <a:solidFill>
+                      <a:srgbClr val="EFF3FA"/>
+                    </a:solidFill>
+                  </a:tcPr>
+                </a:tc>
+                <a:tc>
+                  <a:txBody>
+                    <a:bodyPr/>
+                    <a:lstStyle/>
+                    <a:p>
+                      <a:r>
+                        <a:rPr sz="850" b="0">
+                          <a:latin typeface="Calibri"/>
+                        </a:rPr>
+                        <a:t>1449</a:t>
+                      </a:r>
+                    </a:p>
+                  </a:txBody>
+                  <a:tcPr>
+                    <a:solidFill>
+                      <a:srgbClr val="EFF3FA"/>
+                    </a:solidFill>
+                  </a:tcPr>
+                </a:tc>
+                <a:tc>
+                  <a:txBody>
+                    <a:bodyPr/>
+                    <a:lstStyle/>
+                    <a:p>
+                      <a:r>
+                        <a:rPr sz="850" b="0">
+                          <a:latin typeface="Calibri"/>
+                        </a:rPr>
+                        <a:t>1535</a:t>
+                      </a:r>
+                    </a:p>
+                  </a:txBody>
+                  <a:tcPr>
+                    <a:solidFill>
+                      <a:srgbClr val="EFF3FA"/>
+                    </a:solidFill>
+                  </a:tcPr>
+                </a:tc>
+                <a:tc>
+                  <a:txBody>
+                    <a:bodyPr/>
+                    <a:lstStyle/>
+                    <a:p>
+                      <a:r>
+                        <a:rPr sz="850" b="0">
+                          <a:solidFill>
+                            <a:srgbClr val="187A33"/>
+                          </a:solidFill>
+                          <a:latin typeface="Calibri"/>
+                        </a:rPr>
+                        <a:t>6%</a:t>
+                      </a:r>
+                    </a:p>
+                  </a:txBody>
+                  <a:tcPr>
+                    <a:solidFill>
+                      <a:srgbClr val="EFF3FA"/>
+                    </a:solidFill>
+                  </a:tcPr>
+                </a:tc>
+              </a:tr>
+              <a:tr h="224028">
+                <a:tc>
+                  <a:txBody>
+                    <a:bodyPr/>
+                    <a:lstStyle/>
+                    <a:p>
+                      <a:r>
+                        <a:rPr sz="850" b="1">
+                          <a:latin typeface="Calibri"/>
+                        </a:rPr>
+                        <a:t>lz4</a:t>
+                      </a:r>
+                    </a:p>
+                  </a:txBody>
+                  <a:tcPr>
+                    <a:solidFill>
+                      <a:srgbClr val="FFFFFF"/>
+                    </a:solidFill>
+                  </a:tcPr>
+                </a:tc>
+                <a:tc>
+                  <a:txBody>
+                    <a:bodyPr/>
+                    <a:lstStyle/>
+                    <a:p>
+                      <a:r>
+                        <a:rPr sz="850" b="0">
+                          <a:latin typeface="Calibri"/>
+                        </a:rPr>
+                        <a:t>1342</a:t>
+                      </a:r>
+                    </a:p>
+                  </a:txBody>
+                  <a:tcPr>
+                    <a:solidFill>
+                      <a:srgbClr val="FFFFFF"/>
+                    </a:solidFill>
+                  </a:tcPr>
+                </a:tc>
+                <a:tc>
+                  <a:txBody>
+                    <a:bodyPr/>
+                    <a:lstStyle/>
+                    <a:p>
+                      <a:r>
+                        <a:rPr sz="850" b="0">
+                          <a:latin typeface="Calibri"/>
+                        </a:rPr>
+                        <a:t>1508</a:t>
+                      </a:r>
+                    </a:p>
+                  </a:txBody>
+                  <a:tcPr>
+                    <a:solidFill>
+                      <a:srgbClr val="FFFFFF"/>
+                    </a:solidFill>
+                  </a:tcPr>
+                </a:tc>
+                <a:tc>
+                  <a:txBody>
+                    <a:bodyPr/>
+                    <a:lstStyle/>
+                    <a:p>
+                      <a:r>
+                        <a:rPr sz="850" b="0">
+                          <a:solidFill>
+                            <a:srgbClr val="B06000"/>
+                          </a:solidFill>
+                          <a:latin typeface="Calibri"/>
+                        </a:rPr>
+                        <a:t>11%</a:t>
+                      </a:r>
+                    </a:p>
+                  </a:txBody>
+                  <a:tcPr>
+                    <a:solidFill>
+                      <a:srgbClr val="FFFFFF"/>
+                    </a:solidFill>
+                  </a:tcPr>
+                </a:tc>
+              </a:tr>
+              <a:tr h="224028">
+                <a:tc>
+                  <a:txBody>
+                    <a:bodyPr/>
+                    <a:lstStyle/>
+                    <a:p>
+                      <a:r>
+                        <a:rPr sz="850" b="1">
+                          <a:latin typeface="Calibri"/>
+                        </a:rPr>
+                        <a:t>sgm-a55-1t</a:t>
+                      </a:r>
+                    </a:p>
+                  </a:txBody>
+                  <a:tcPr>
+                    <a:solidFill>
+                      <a:srgbClr val="EFF3FA"/>
+                    </a:solidFill>
+                  </a:tcPr>
+                </a:tc>
+                <a:tc>
+                  <a:txBody>
+                    <a:bodyPr/>
+                    <a:lstStyle/>
+                    <a:p>
+                      <a:r>
+                        <a:rPr sz="850" b="0">
+                          <a:latin typeface="Calibri"/>
+                        </a:rPr>
+                        <a:t>1357</a:t>
+                      </a:r>
+                    </a:p>
+                  </a:txBody>
+                  <a:tcPr>
+                    <a:solidFill>
+                      <a:srgbClr val="EFF3FA"/>
+                    </a:solidFill>
+                  </a:tcPr>
+                </a:tc>
+                <a:tc>
+                  <a:txBody>
+                    <a:bodyPr/>
+                    <a:lstStyle/>
+                    <a:p>
+                      <a:r>
+                        <a:rPr sz="850" b="0">
+                          <a:latin typeface="Calibri"/>
+                        </a:rPr>
+                        <a:t>1506</a:t>
+                      </a:r>
+                    </a:p>
+                  </a:txBody>
+                  <a:tcPr>
+                    <a:solidFill>
+                      <a:srgbClr val="EFF3FA"/>
+                    </a:solidFill>
+                  </a:tcPr>
+                </a:tc>
+                <a:tc>
+                  <a:txBody>
+                    <a:bodyPr/>
+                    <a:lstStyle/>
+                    <a:p>
+                      <a:r>
+                        <a:rPr sz="850" b="0">
+                          <a:solidFill>
+                            <a:srgbClr val="B06000"/>
+                          </a:solidFill>
+                          <a:latin typeface="Calibri"/>
+                        </a:rPr>
+                        <a:t>10%</a:t>
+                      </a:r>
+                    </a:p>
+                  </a:txBody>
+                  <a:tcPr>
+                    <a:solidFill>
+                      <a:srgbClr val="EFF3FA"/>
+                    </a:solidFill>
+                  </a:tcPr>
+                </a:tc>
+              </a:tr>
+              <a:tr h="224028">
+                <a:tc>
+                  <a:txBody>
+                    <a:bodyPr/>
+                    <a:lstStyle/>
+                    <a:p>
+                      <a:r>
+                        <a:rPr sz="850" b="1">
+                          <a:latin typeface="Calibri"/>
+                        </a:rPr>
+                        <a:t>mm</a:t>
+                      </a:r>
+                    </a:p>
+                  </a:txBody>
+                  <a:tcPr>
+                    <a:solidFill>
+                      <a:srgbClr val="FFFFFF"/>
+                    </a:solidFill>
+                  </a:tcPr>
+                </a:tc>
+                <a:tc>
+                  <a:txBody>
+                    <a:bodyPr/>
+                    <a:lstStyle/>
+                    <a:p>
+                      <a:r>
+                        <a:rPr sz="850" b="0">
+                          <a:latin typeface="Calibri"/>
+                        </a:rPr>
+                        <a:t>1346</a:t>
+                      </a:r>
+                    </a:p>
+                  </a:txBody>
+                  <a:tcPr>
+                    <a:solidFill>
+                      <a:srgbClr val="FFFFFF"/>
+                    </a:solidFill>
+                  </a:tcPr>
+                </a:tc>
+                <a:tc>
+                  <a:txBody>
+                    <a:bodyPr/>
+                    <a:lstStyle/>
+                    <a:p>
+                      <a:r>
+                        <a:rPr sz="850" b="0">
+                          <a:latin typeface="Calibri"/>
+                        </a:rPr>
+                        <a:t>1492</a:t>
+                      </a:r>
+                    </a:p>
+                  </a:txBody>
+                  <a:tcPr>
+                    <a:solidFill>
+                      <a:srgbClr val="FFFFFF"/>
+                    </a:solidFill>
+                  </a:tcPr>
+                </a:tc>
+                <a:tc>
+                  <a:txBody>
+                    <a:bodyPr/>
+                    <a:lstStyle/>
+                    <a:p>
+                      <a:r>
+                        <a:rPr sz="850" b="0">
+                          <a:solidFill>
+                            <a:srgbClr val="B06000"/>
+                          </a:solidFill>
+                          <a:latin typeface="Calibri"/>
+                        </a:rPr>
+                        <a:t>10%</a:t>
+                      </a:r>
+                    </a:p>
+                  </a:txBody>
+                  <a:tcPr>
+                    <a:solidFill>
+                      <a:srgbClr val="FFFFFF"/>
+                    </a:solidFill>
+                  </a:tcPr>
+                </a:tc>
+              </a:tr>
+              <a:tr h="224028">
+                <a:tc>
+                  <a:txBody>
+                    <a:bodyPr/>
+                    <a:lstStyle/>
+                    <a:p>
+                      <a:r>
+                        <a:rPr sz="850" b="1">
+                          <a:latin typeface="Calibri"/>
+                        </a:rPr>
+                        <a:t>sgm</a:t>
+                      </a:r>
+                    </a:p>
+                  </a:txBody>
+                  <a:tcPr>
+                    <a:solidFill>
+                      <a:srgbClr val="EFF3FA"/>
+                    </a:solidFill>
+                  </a:tcPr>
+                </a:tc>
+                <a:tc>
+                  <a:txBody>
+                    <a:bodyPr/>
+                    <a:lstStyle/>
+                    <a:p>
+                      <a:r>
+                        <a:rPr sz="850" b="0">
+                          <a:latin typeface="Calibri"/>
+                        </a:rPr>
+                        <a:t>1375</a:t>
+                      </a:r>
+                    </a:p>
+                  </a:txBody>
+                  <a:tcPr>
+                    <a:solidFill>
+                      <a:srgbClr val="EFF3FA"/>
+                    </a:solidFill>
+                  </a:tcPr>
+                </a:tc>
+                <a:tc>
+                  <a:txBody>
+                    <a:bodyPr/>
+                    <a:lstStyle/>
+                    <a:p>
+                      <a:r>
+                        <a:rPr sz="850" b="0">
+                          <a:latin typeface="Calibri"/>
+                        </a:rPr>
+                        <a:t>1484</a:t>
+                      </a:r>
+                    </a:p>
+                  </a:txBody>
+                  <a:tcPr>
+                    <a:solidFill>
+                      <a:srgbClr val="EFF3FA"/>
+                    </a:solidFill>
+                  </a:tcPr>
+                </a:tc>
+                <a:tc>
+                  <a:txBody>
+                    <a:bodyPr/>
+                    <a:lstStyle/>
+                    <a:p>
+                      <a:r>
+                        <a:rPr sz="850" b="0">
+                          <a:solidFill>
+                            <a:srgbClr val="187A33"/>
+                          </a:solidFill>
+                          <a:latin typeface="Calibri"/>
+                        </a:rPr>
+                        <a:t>7%</a:t>
+                      </a:r>
+                    </a:p>
+                  </a:txBody>
+                  <a:tcPr>
+                    <a:solidFill>
+                      <a:srgbClr val="EFF3FA"/>
+                    </a:solidFill>
+                  </a:tcPr>
+                </a:tc>
+              </a:tr>
+              <a:tr h="224028">
+                <a:tc>
+                  <a:txBody>
+                    <a:bodyPr/>
+                    <a:lstStyle/>
+                    <a:p>
+                      <a:r>
+                        <a:rPr sz="850" b="1">
+                          <a:latin typeface="Calibri"/>
+                        </a:rPr>
+                        <a:t>lz4-fast</a:t>
+                      </a:r>
+                    </a:p>
+                  </a:txBody>
+                  <a:tcPr>
+                    <a:solidFill>
+                      <a:srgbClr val="FFFFFF"/>
+                    </a:solidFill>
+                  </a:tcPr>
+                </a:tc>
+                <a:tc>
+                  <a:txBody>
+                    <a:bodyPr/>
+                    <a:lstStyle/>
+                    <a:p>
+                      <a:r>
+                        <a:rPr sz="850" b="0">
+                          <a:latin typeface="Calibri"/>
+                        </a:rPr>
+                        <a:t>1359</a:t>
+                      </a:r>
+                    </a:p>
+                  </a:txBody>
+                  <a:tcPr>
+                    <a:solidFill>
+                      <a:srgbClr val="FFFFFF"/>
+                    </a:solidFill>
+                  </a:tcPr>
+                </a:tc>
+                <a:tc>
+                  <a:txBody>
+                    <a:bodyPr/>
+                    <a:lstStyle/>
+                    <a:p>
+                      <a:r>
+                        <a:rPr sz="850" b="0">
+                          <a:latin typeface="Calibri"/>
+                        </a:rPr>
+                        <a:t>1482</a:t>
+                      </a:r>
+                    </a:p>
+                  </a:txBody>
+                  <a:tcPr>
+                    <a:solidFill>
+                      <a:srgbClr val="FFFFFF"/>
+                    </a:solidFill>
+                  </a:tcPr>
+                </a:tc>
+                <a:tc>
+                  <a:txBody>
+                    <a:bodyPr/>
+                    <a:lstStyle/>
+                    <a:p>
+                      <a:r>
+                        <a:rPr sz="850" b="0">
+                          <a:solidFill>
+                            <a:srgbClr val="187A33"/>
+                          </a:solidFill>
+                          <a:latin typeface="Calibri"/>
+                        </a:rPr>
+                        <a:t>8%</a:t>
+                      </a:r>
+                    </a:p>
+                  </a:txBody>
+                  <a:tcPr>
+                    <a:solidFill>
+                      <a:srgbClr val="FFFFFF"/>
+                    </a:solidFill>
+                  </a:tcPr>
+                </a:tc>
+              </a:tr>
+              <a:tr h="224028">
+                <a:tc>
+                  <a:txBody>
+                    <a:bodyPr/>
+                    <a:lstStyle/>
+                    <a:p>
+                      <a:r>
+                        <a:rPr sz="850" b="1">
+                          <a:latin typeface="Calibri"/>
+                        </a:rPr>
+                        <a:t>rd-life</a:t>
+                      </a:r>
+                    </a:p>
+                  </a:txBody>
+                  <a:tcPr>
+                    <a:solidFill>
+                      <a:srgbClr val="EFF3FA"/>
+                    </a:solidFill>
+                  </a:tcPr>
+                </a:tc>
+                <a:tc>
+                  <a:txBody>
+                    <a:bodyPr/>
+                    <a:lstStyle/>
+                    <a:p>
+                      <a:r>
+                        <a:rPr sz="850" b="0">
+                          <a:latin typeface="Calibri"/>
+                        </a:rPr>
+                        <a:t>1425</a:t>
+                      </a:r>
+                    </a:p>
+                  </a:txBody>
+                  <a:tcPr>
+                    <a:solidFill>
+                      <a:srgbClr val="EFF3FA"/>
+                    </a:solidFill>
+                  </a:tcPr>
+                </a:tc>
+                <a:tc>
+                  <a:txBody>
+                    <a:bodyPr/>
+                    <a:lstStyle/>
+                    <a:p>
+                      <a:r>
+                        <a:rPr sz="850" b="0">
+                          <a:latin typeface="Calibri"/>
+                        </a:rPr>
+                        <a:t>1478</a:t>
+                      </a:r>
+                    </a:p>
+                  </a:txBody>
+                  <a:tcPr>
+                    <a:solidFill>
+                      <a:srgbClr val="EFF3FA"/>
+                    </a:solidFill>
+                  </a:tcPr>
+                </a:tc>
+                <a:tc>
+                  <a:txBody>
+                    <a:bodyPr/>
+                    <a:lstStyle/>
+                    <a:p>
+                      <a:r>
+                        <a:rPr sz="850" b="0">
+                          <a:solidFill>
+                            <a:srgbClr val="187A33"/>
+                          </a:solidFill>
+                          <a:latin typeface="Calibri"/>
+                        </a:rPr>
+                        <a:t>4%</a:t>
+                      </a:r>
+                    </a:p>
+                  </a:txBody>
+                  <a:tcPr>
+                    <a:solidFill>
+                      <a:srgbClr val="EFF3FA"/>
+                    </a:solidFill>
+                  </a:tcPr>
+                </a:tc>
+              </a:tr>
+              <a:tr h="224028">
+                <a:tc>
+                  <a:txBody>
+                    <a:bodyPr/>
+                    <a:lstStyle/>
+                    <a:p>
+                      <a:r>
+                        <a:rPr sz="850" b="1">
+                          <a:latin typeface="Calibri"/>
+                        </a:rPr>
+                        <a:t>lua</a:t>
+                      </a:r>
+                    </a:p>
+                  </a:txBody>
+                  <a:tcPr>
+                    <a:solidFill>
+                      <a:srgbClr val="FFFFFF"/>
+                    </a:solidFill>
+                  </a:tcPr>
+                </a:tc>
+                <a:tc>
+                  <a:txBody>
+                    <a:bodyPr/>
+                    <a:lstStyle/>
+                    <a:p>
+                      <a:r>
+                        <a:rPr sz="850" b="0">
+                          <a:latin typeface="Calibri"/>
+                        </a:rPr>
+                        <a:t>1363</a:t>
+                      </a:r>
+                    </a:p>
+                  </a:txBody>
+                  <a:tcPr>
+                    <a:solidFill>
+                      <a:srgbClr val="FFFFFF"/>
+                    </a:solidFill>
+                  </a:tcPr>
+                </a:tc>
+                <a:tc>
+                  <a:txBody>
+                    <a:bodyPr/>
+                    <a:lstStyle/>
+                    <a:p>
+                      <a:r>
+                        <a:rPr sz="850" b="0">
+                          <a:latin typeface="Calibri"/>
+                        </a:rPr>
+                        <a:t>1475</a:t>
+                      </a:r>
+                    </a:p>
+                  </a:txBody>
+                  <a:tcPr>
+                    <a:solidFill>
+                      <a:srgbClr val="FFFFFF"/>
+                    </a:solidFill>
+                  </a:tcPr>
+                </a:tc>
+                <a:tc>
+                  <a:txBody>
+                    <a:bodyPr/>
+                    <a:lstStyle/>
+                    <a:p>
+                      <a:r>
+                        <a:rPr sz="850" b="0">
+                          <a:solidFill>
+                            <a:srgbClr val="187A33"/>
+                          </a:solidFill>
+                          <a:latin typeface="Calibri"/>
+                        </a:rPr>
+                        <a:t>8%</a:t>
+                      </a:r>
+                    </a:p>
+                  </a:txBody>
+                  <a:tcPr>
+                    <a:solidFill>
+                      <a:srgbClr val="FFFFFF"/>
+                    </a:solidFill>
+                  </a:tcPr>
+                </a:tc>
+              </a:tr>
+              <a:tr h="224028">
+                <a:tc>
+                  <a:txBody>
+                    <a:bodyPr/>
+                    <a:lstStyle/>
+                    <a:p>
+                      <a:r>
+                        <a:rPr sz="850" b="1">
+                          <a:latin typeface="Calibri"/>
+                        </a:rPr>
+                        <a:t>cr-blowfish</a:t>
+                      </a:r>
+                    </a:p>
+                  </a:txBody>
+                  <a:tcPr>
+                    <a:solidFill>
+                      <a:srgbClr val="EFF3FA"/>
+                    </a:solidFill>
+                  </a:tcPr>
+                </a:tc>
+                <a:tc>
+                  <a:txBody>
+                    <a:bodyPr/>
+                    <a:lstStyle/>
+                    <a:p>
+                      <a:r>
+                        <a:rPr sz="850" b="0">
+                          <a:latin typeface="Calibri"/>
+                        </a:rPr>
+                        <a:t>1374</a:t>
+                      </a:r>
+                    </a:p>
+                  </a:txBody>
+                  <a:tcPr>
+                    <a:solidFill>
+                      <a:srgbClr val="EFF3FA"/>
+                    </a:solidFill>
+                  </a:tcPr>
+                </a:tc>
+                <a:tc>
+                  <a:txBody>
+                    <a:bodyPr/>
+                    <a:lstStyle/>
+                    <a:p>
+                      <a:r>
+                        <a:rPr sz="850" b="0">
+                          <a:latin typeface="Calibri"/>
+                        </a:rPr>
+                        <a:t>1462</a:t>
+                      </a:r>
+                    </a:p>
+                  </a:txBody>
+                  <a:tcPr>
+                    <a:solidFill>
+                      <a:srgbClr val="EFF3FA"/>
+                    </a:solidFill>
+                  </a:tcPr>
+                </a:tc>
+                <a:tc>
+                  <a:txBody>
+                    <a:bodyPr/>
+                    <a:lstStyle/>
+                    <a:p>
+                      <a:r>
+                        <a:rPr sz="850" b="0">
+                          <a:solidFill>
+                            <a:srgbClr val="187A33"/>
+                          </a:solidFill>
+                          <a:latin typeface="Calibri"/>
+                        </a:rPr>
+                        <a:t>6%</a:t>
+                      </a:r>
+                    </a:p>
+                  </a:txBody>
+                  <a:tcPr>
+                    <a:solidFill>
+                      <a:srgbClr val="EFF3FA"/>
+                    </a:solidFill>
+                  </a:tcPr>
+                </a:tc>
+              </a:tr>
+              <a:tr h="224028">
+                <a:tc>
+                  <a:txBody>
+                    <a:bodyPr/>
+                    <a:lstStyle/>
+                    <a:p>
+                      <a:r>
+                        <a:rPr sz="850" b="1">
+                          <a:latin typeface="Calibri"/>
+                        </a:rPr>
+                        <a:t>sqlite</a:t>
+                      </a:r>
+                    </a:p>
+                  </a:txBody>
+                  <a:tcPr>
+                    <a:solidFill>
+                      <a:srgbClr val="FFFFFF"/>
+                    </a:solidFill>
+                  </a:tcPr>
+                </a:tc>
+                <a:tc>
+                  <a:txBody>
+                    <a:bodyPr/>
+                    <a:lstStyle/>
+                    <a:p>
+                      <a:r>
+                        <a:rPr sz="850" b="0">
+                          <a:latin typeface="Calibri"/>
+                        </a:rPr>
+                        <a:t>1351</a:t>
+                      </a:r>
+                    </a:p>
+                  </a:txBody>
+                  <a:tcPr>
+                    <a:solidFill>
+                      <a:srgbClr val="FFFFFF"/>
+                    </a:solidFill>
+                  </a:tcPr>
+                </a:tc>
+                <a:tc>
+                  <a:txBody>
+                    <a:bodyPr/>
+                    <a:lstStyle/>
+                    <a:p>
+                      <a:r>
+                        <a:rPr sz="850" b="0">
+                          <a:latin typeface="Calibri"/>
+                        </a:rPr>
+                        <a:t>1462</a:t>
+                      </a:r>
+                    </a:p>
+                  </a:txBody>
+                  <a:tcPr>
+                    <a:solidFill>
+                      <a:srgbClr val="FFFFFF"/>
+                    </a:solidFill>
+                  </a:tcPr>
+                </a:tc>
+                <a:tc>
+                  <a:txBody>
+                    <a:bodyPr/>
+                    <a:lstStyle/>
+                    <a:p>
+                      <a:r>
+                        <a:rPr sz="850" b="0">
+                          <a:solidFill>
+                            <a:srgbClr val="187A33"/>
+                          </a:solidFill>
+                          <a:latin typeface="Calibri"/>
+                        </a:rPr>
+                        <a:t>8%</a:t>
+                      </a:r>
+                    </a:p>
+                  </a:txBody>
+                  <a:tcPr>
+                    <a:solidFill>
+                      <a:srgbClr val="FFFFFF"/>
+                    </a:solidFill>
+                  </a:tcPr>
+                </a:tc>
+              </a:tr>
+              <a:tr h="224028">
+                <a:tc>
+                  <a:txBody>
+                    <a:bodyPr/>
+                    <a:lstStyle/>
+                    <a:p>
+                      <a:r>
+                        <a:rPr sz="850" b="1">
+                          <a:latin typeface="Calibri"/>
+                        </a:rPr>
+                        <a:t>cr-rc4</a:t>
+                      </a:r>
+                    </a:p>
+                  </a:txBody>
+                  <a:tcPr>
+                    <a:solidFill>
+                      <a:srgbClr val="EFF3FA"/>
+                    </a:solidFill>
+                  </a:tcPr>
+                </a:tc>
+                <a:tc>
+                  <a:txBody>
+                    <a:bodyPr/>
+                    <a:lstStyle/>
+                    <a:p>
+                      <a:r>
+                        <a:rPr sz="850" b="0">
+                          <a:latin typeface="Calibri"/>
+                        </a:rPr>
+                        <a:t>1336</a:t>
+                      </a:r>
+                    </a:p>
+                  </a:txBody>
+                  <a:tcPr>
+                    <a:solidFill>
+                      <a:srgbClr val="EFF3FA"/>
+                    </a:solidFill>
+                  </a:tcPr>
+                </a:tc>
+                <a:tc>
+                  <a:txBody>
+                    <a:bodyPr/>
+                    <a:lstStyle/>
+                    <a:p>
+                      <a:r>
+                        <a:rPr sz="850" b="0">
+                          <a:latin typeface="Calibri"/>
+                        </a:rPr>
+                        <a:t>1460</a:t>
+                      </a:r>
+                    </a:p>
+                  </a:txBody>
+                  <a:tcPr>
+                    <a:solidFill>
+                      <a:srgbClr val="EFF3FA"/>
+                    </a:solidFill>
+                  </a:tcPr>
+                </a:tc>
+                <a:tc>
+                  <a:txBody>
+                    <a:bodyPr/>
+                    <a:lstStyle/>
+                    <a:p>
+                      <a:r>
+                        <a:rPr sz="850" b="0">
+                          <a:solidFill>
+                            <a:srgbClr val="187A33"/>
+                          </a:solidFill>
+                          <a:latin typeface="Calibri"/>
+                        </a:rPr>
+                        <a:t>8%</a:t>
+                      </a:r>
+                    </a:p>
+                  </a:txBody>
+                  <a:tcPr>
+                    <a:solidFill>
+                      <a:srgbClr val="EFF3FA"/>
+                    </a:solidFill>
+                  </a:tcPr>
+                </a:tc>
+              </a:tr>
+              <a:tr h="224028">
+                <a:tc>
+                  <a:txBody>
+                    <a:bodyPr/>
+                    <a:lstStyle/>
+                    <a:p>
+                      <a:r>
+                        <a:rPr sz="850" b="1">
+                          <a:latin typeface="Calibri"/>
+                        </a:rPr>
+                        <a:t>qoi</a:t>
+                      </a:r>
+                    </a:p>
+                  </a:txBody>
+                  <a:tcPr>
+                    <a:solidFill>
+                      <a:srgbClr val="FFFFFF"/>
+                    </a:solidFill>
+                  </a:tcPr>
+                </a:tc>
+                <a:tc>
+                  <a:txBody>
+                    <a:bodyPr/>
+                    <a:lstStyle/>
+                    <a:p>
+                      <a:r>
+                        <a:rPr sz="850" b="0">
+                          <a:latin typeface="Calibri"/>
+                        </a:rPr>
+                        <a:t>1397</a:t>
+                      </a:r>
+                    </a:p>
+                  </a:txBody>
+                  <a:tcPr>
+                    <a:solidFill>
+                      <a:srgbClr val="FFFFFF"/>
+                    </a:solidFill>
+                  </a:tcPr>
+                </a:tc>
+                <a:tc>
+                  <a:txBody>
+                    <a:bodyPr/>
+                    <a:lstStyle/>
+                    <a:p>
+                      <a:r>
+                        <a:rPr sz="850" b="0">
+                          <a:latin typeface="Calibri"/>
+                        </a:rPr>
+                        <a:t>1458</a:t>
+                      </a:r>
+                    </a:p>
+                  </a:txBody>
+                  <a:tcPr>
+                    <a:solidFill>
+                      <a:srgbClr val="FFFFFF"/>
+                    </a:solidFill>
+                  </a:tcPr>
+                </a:tc>
+                <a:tc>
+                  <a:txBody>
+                    <a:bodyPr/>
+                    <a:lstStyle/>
+                    <a:p>
+                      <a:r>
+                        <a:rPr sz="850" b="0">
+                          <a:solidFill>
+                            <a:srgbClr val="187A33"/>
+                          </a:solidFill>
+                          <a:latin typeface="Calibri"/>
+                        </a:rPr>
+                        <a:t>4%</a:t>
+                      </a:r>
+                    </a:p>
+                  </a:txBody>
+                  <a:tcPr>
+                    <a:solidFill>
+                      <a:srgbClr val="FFFFFF"/>
+                    </a:solidFill>
+                  </a:tcPr>
+                </a:tc>
+              </a:tr>
+              <a:tr h="224028">
+                <a:tc>
+                  <a:txBody>
+                    <a:bodyPr/>
+                    <a:lstStyle/>
+                    <a:p>
+                      <a:r>
+                        <a:rPr sz="850" b="1">
+                          <a:latin typeface="Calibri"/>
+                        </a:rPr>
+                        <a:t>sqlite-heavy</a:t>
+                      </a:r>
+                    </a:p>
+                  </a:txBody>
+                  <a:tcPr>
+                    <a:solidFill>
+                      <a:srgbClr val="EFF3FA"/>
+                    </a:solidFill>
+                  </a:tcPr>
+                </a:tc>
+                <a:tc>
+                  <a:txBody>
+                    <a:bodyPr/>
+                    <a:lstStyle/>
+                    <a:p>
+                      <a:r>
+                        <a:rPr sz="850" b="0">
+                          <a:latin typeface="Calibri"/>
+                        </a:rPr>
+                        <a:t>1350</a:t>
+                      </a:r>
+                    </a:p>
+                  </a:txBody>
+                  <a:tcPr>
+                    <a:solidFill>
+                      <a:srgbClr val="EFF3FA"/>
+                    </a:solidFill>
+                  </a:tcPr>
+                </a:tc>
+                <a:tc>
+                  <a:txBody>
+                    <a:bodyPr/>
+                    <a:lstStyle/>
+                    <a:p>
+                      <a:r>
+                        <a:rPr sz="850" b="0">
+                          <a:latin typeface="Calibri"/>
+                        </a:rPr>
+                        <a:t>1456</a:t>
+                      </a:r>
+                    </a:p>
+                  </a:txBody>
+                  <a:tcPr>
+                    <a:solidFill>
+                      <a:srgbClr val="EFF3FA"/>
+                    </a:solidFill>
+                  </a:tcPr>
+                </a:tc>
+                <a:tc>
+                  <a:txBody>
+                    <a:bodyPr/>
+                    <a:lstStyle/>
+                    <a:p>
+                      <a:r>
+                        <a:rPr sz="850" b="0">
+                          <a:solidFill>
+                            <a:srgbClr val="187A33"/>
+                          </a:solidFill>
+                          <a:latin typeface="Calibri"/>
+                        </a:rPr>
+                        <a:t>7%</a:t>
+                      </a:r>
+                    </a:p>
+                  </a:txBody>
+                  <a:tcPr>
+                    <a:solidFill>
+                      <a:srgbClr val="EFF3FA"/>
+                    </a:solidFill>
+                  </a:tcPr>
+                </a:tc>
+              </a:tr>
+              <a:tr h="224028">
+                <a:tc>
+                  <a:txBody>
+                    <a:bodyPr/>
+                    <a:lstStyle/>
+                    <a:p>
+                      <a:r>
+                        <a:rPr sz="850" b="1">
+                          <a:latin typeface="Calibri"/>
+                        </a:rPr>
+                        <a:t>bb-b64</a:t>
+                      </a:r>
+                    </a:p>
+                  </a:txBody>
+                  <a:tcPr>
+                    <a:solidFill>
+                      <a:srgbClr val="FFFFFF"/>
+                    </a:solidFill>
+                  </a:tcPr>
+                </a:tc>
+                <a:tc>
+                  <a:txBody>
+                    <a:bodyPr/>
+                    <a:lstStyle/>
+                    <a:p>
+                      <a:r>
+                        <a:rPr sz="850" b="0">
+                          <a:latin typeface="Calibri"/>
+                        </a:rPr>
+                        <a:t>1335</a:t>
+                      </a:r>
+                    </a:p>
+                  </a:txBody>
+                  <a:tcPr>
+                    <a:solidFill>
+                      <a:srgbClr val="FFFFFF"/>
+                    </a:solidFill>
+                  </a:tcPr>
+                </a:tc>
+                <a:tc>
+                  <a:txBody>
+                    <a:bodyPr/>
+                    <a:lstStyle/>
+                    <a:p>
+                      <a:r>
+                        <a:rPr sz="850" b="0">
+                          <a:latin typeface="Calibri"/>
+                        </a:rPr>
+                        <a:t>1455</a:t>
+                      </a:r>
+                    </a:p>
+                  </a:txBody>
+                  <a:tcPr>
+                    <a:solidFill>
+                      <a:srgbClr val="FFFFFF"/>
+                    </a:solidFill>
+                  </a:tcPr>
+                </a:tc>
+                <a:tc>
+                  <a:txBody>
+                    <a:bodyPr/>
+                    <a:lstStyle/>
+                    <a:p>
+                      <a:r>
+                        <a:rPr sz="850" b="0">
+                          <a:solidFill>
+                            <a:srgbClr val="187A33"/>
+                          </a:solidFill>
+                          <a:latin typeface="Calibri"/>
+                        </a:rPr>
+                        <a:t>8%</a:t>
+                      </a:r>
+                    </a:p>
+                  </a:txBody>
+                  <a:tcPr>
+                    <a:solidFill>
+                      <a:srgbClr val="FFFFFF"/>
+                    </a:solidFill>
+                  </a:tcPr>
+                </a:tc>
+              </a:tr>
+              <a:tr h="224028">
+                <a:tc>
+                  <a:txBody>
+                    <a:bodyPr/>
+                    <a:lstStyle/>
+                    <a:p>
+                      <a:r>
+                        <a:rPr sz="850" b="1">
+                          <a:latin typeface="Calibri"/>
+                        </a:rPr>
+                        <a:t>sha256-big</a:t>
+                      </a:r>
+                    </a:p>
+                  </a:txBody>
+                  <a:tcPr>
+                    <a:solidFill>
+                      <a:srgbClr val="EFF3FA"/>
+                    </a:solidFill>
+                  </a:tcPr>
+                </a:tc>
+                <a:tc>
+                  <a:txBody>
+                    <a:bodyPr/>
+                    <a:lstStyle/>
+                    <a:p>
+                      <a:r>
+                        <a:rPr sz="850" b="0">
+                          <a:latin typeface="Calibri"/>
+                        </a:rPr>
+                        <a:t>1397</a:t>
+                      </a:r>
+                    </a:p>
+                  </a:txBody>
+                  <a:tcPr>
+                    <a:solidFill>
+                      <a:srgbClr val="EFF3FA"/>
+                    </a:solidFill>
+                  </a:tcPr>
+                </a:tc>
+                <a:tc>
+                  <a:txBody>
+                    <a:bodyPr/>
+                    <a:lstStyle/>
+                    <a:p>
+                      <a:r>
+                        <a:rPr sz="850" b="0">
+                          <a:latin typeface="Calibri"/>
+                        </a:rPr>
+                        <a:t>1454</a:t>
+                      </a:r>
+                    </a:p>
+                  </a:txBody>
+                  <a:tcPr>
+                    <a:solidFill>
+                      <a:srgbClr val="EFF3FA"/>
+                    </a:solidFill>
+                  </a:tcPr>
+                </a:tc>
+                <a:tc>
+                  <a:txBody>
+                    <a:bodyPr/>
+                    <a:lstStyle/>
+                    <a:p>
+                      <a:r>
+                        <a:rPr sz="850" b="0">
+                          <a:solidFill>
+                            <a:srgbClr val="187A33"/>
+                          </a:solidFill>
+                          <a:latin typeface="Calibri"/>
+                        </a:rPr>
+                        <a:t>4%</a:t>
+                      </a:r>
+                    </a:p>
+                  </a:txBody>
+                  <a:tcPr>
+                    <a:solidFill>
+                      <a:srgbClr val="EFF3FA"/>
+                    </a:solidFill>
+                  </a:tcPr>
+                </a:tc>
+              </a:tr>
+            </a:tbl>
+          </a:graphicData>
+        </a:graphic>
+      </p:graphicFrame>
+      <p:graphicFrame>
+        <p:nvGraphicFramePr>
+          <p:cNvPr id="10" name="Table 9"/>
+          <p:cNvGraphicFramePr>
+            <a:graphicFrameLocks noGrp="1"/>
+          </p:cNvGraphicFramePr>
+          <p:nvPr/>
+        </p:nvGraphicFramePr>
+        <p:xfrm>
+          <a:off x="4434840" y="1664208"/>
+          <a:ext cx="3703320" cy="4032504"/>
+        </p:xfrm>
+        <a:graphic>
+          <a:graphicData uri="http://schemas.openxmlformats.org/drawingml/2006/table">
+            <a:tbl>
+              <a:tblPr firstRow="1" bandRow="1">
+                <a:tableStyleId>{5C22544A-7EE6-4342-B048-85BDC9FD1C3A}</a:tableStyleId>
+              </a:tblPr>
+              <a:tblGrid>
+                <a:gridCol w="1417320"/>
+                <a:gridCol w="777240"/>
+                <a:gridCol w="777240"/>
+                <a:gridCol w="731520"/>
+              </a:tblGrid>
+              <a:tr h="224028">
+                <a:tc>
+                  <a:txBody>
+                    <a:bodyPr/>
+                    <a:lstStyle/>
+                    <a:p>
+                      <a:r>
+                        <a:rPr sz="850" b="1">
+                          <a:solidFill>
+                            <a:srgbClr val="FFFFFF"/>
+                          </a:solidFill>
+                          <a:latin typeface="Calibri"/>
+                        </a:rPr>
+                        <a:t>app</a:t>
+                      </a:r>
+                    </a:p>
+                  </a:txBody>
+                  <a:tcPr>
+                    <a:solidFill>
+                      <a:srgbClr val="202124"/>
+                    </a:solidFill>
+                  </a:tcPr>
+                </a:tc>
+                <a:tc>
+                  <a:txBody>
+                    <a:bodyPr/>
+                    <a:lstStyle/>
+                    <a:p>
+                      <a:r>
+                        <a:rPr sz="850" b="1">
+                          <a:solidFill>
+                            <a:srgbClr val="FFFFFF"/>
+                          </a:solidFill>
+                          <a:latin typeface="Calibri"/>
+                        </a:rPr>
+                        <a:t>pred</a:t>
+                      </a:r>
+                    </a:p>
+                  </a:txBody>
+                  <a:tcPr>
+                    <a:solidFill>
+                      <a:srgbClr val="202124"/>
+                    </a:solidFill>
+                  </a:tcPr>
+                </a:tc>
+                <a:tc>
+                  <a:txBody>
+                    <a:bodyPr/>
+                    <a:lstStyle/>
+                    <a:p>
+                      <a:r>
+                        <a:rPr sz="850" b="1">
+                          <a:solidFill>
+                            <a:srgbClr val="FFFFFF"/>
+                          </a:solidFill>
+                          <a:latin typeface="Calibri"/>
+                        </a:rPr>
+                        <a:t>meas</a:t>
+                      </a:r>
+                    </a:p>
+                  </a:txBody>
+                  <a:tcPr>
+                    <a:solidFill>
+                      <a:srgbClr val="202124"/>
+                    </a:solidFill>
+                  </a:tcPr>
+                </a:tc>
+                <a:tc>
+                  <a:txBody>
+                    <a:bodyPr/>
+                    <a:lstStyle/>
+                    <a:p>
+                      <a:r>
+                        <a:rPr sz="850" b="1">
+                          <a:solidFill>
+                            <a:srgbClr val="FFFFFF"/>
+                          </a:solidFill>
+                          <a:latin typeface="Calibri"/>
+                        </a:rPr>
+                        <a:t>err</a:t>
+                      </a:r>
+                    </a:p>
+                  </a:txBody>
+                  <a:tcPr>
+                    <a:solidFill>
+                      <a:srgbClr val="202124"/>
+                    </a:solidFill>
+                  </a:tcPr>
+                </a:tc>
+              </a:tr>
+              <a:tr h="224028">
+                <a:tc>
+                  <a:txBody>
+                    <a:bodyPr/>
+                    <a:lstStyle/>
+                    <a:p>
+                      <a:r>
+                        <a:rPr sz="850" b="1">
+                          <a:latin typeface="Calibri"/>
+                        </a:rPr>
+                        <a:t>bb-md5</a:t>
+                      </a:r>
+                    </a:p>
+                  </a:txBody>
+                  <a:tcPr>
+                    <a:solidFill>
+                      <a:srgbClr val="EFF3FA"/>
+                    </a:solidFill>
+                  </a:tcPr>
+                </a:tc>
+                <a:tc>
+                  <a:txBody>
+                    <a:bodyPr/>
+                    <a:lstStyle/>
+                    <a:p>
+                      <a:r>
+                        <a:rPr sz="850" b="0">
+                          <a:latin typeface="Calibri"/>
+                        </a:rPr>
+                        <a:t>1358</a:t>
+                      </a:r>
+                    </a:p>
+                  </a:txBody>
+                  <a:tcPr>
+                    <a:solidFill>
+                      <a:srgbClr val="EFF3FA"/>
+                    </a:solidFill>
+                  </a:tcPr>
+                </a:tc>
+                <a:tc>
+                  <a:txBody>
+                    <a:bodyPr/>
+                    <a:lstStyle/>
+                    <a:p>
+                      <a:r>
+                        <a:rPr sz="850" b="0">
+                          <a:latin typeface="Calibri"/>
+                        </a:rPr>
+                        <a:t>1453</a:t>
+                      </a:r>
+                    </a:p>
+                  </a:txBody>
+                  <a:tcPr>
+                    <a:solidFill>
+                      <a:srgbClr val="EFF3FA"/>
+                    </a:solidFill>
+                  </a:tcPr>
+                </a:tc>
+                <a:tc>
+                  <a:txBody>
+                    <a:bodyPr/>
+                    <a:lstStyle/>
+                    <a:p>
+                      <a:r>
+                        <a:rPr sz="850" b="0">
+                          <a:solidFill>
+                            <a:srgbClr val="187A33"/>
+                          </a:solidFill>
+                          <a:latin typeface="Calibri"/>
+                        </a:rPr>
+                        <a:t>7%</a:t>
+                      </a:r>
+                    </a:p>
+                  </a:txBody>
+                  <a:tcPr>
+                    <a:solidFill>
+                      <a:srgbClr val="EFF3FA"/>
+                    </a:solidFill>
+                  </a:tcPr>
+                </a:tc>
+              </a:tr>
+              <a:tr h="224028">
+                <a:tc>
+                  <a:txBody>
+                    <a:bodyPr/>
+                    <a:lstStyle/>
+                    <a:p>
+                      <a:r>
+                        <a:rPr sz="850" b="1">
+                          <a:latin typeface="Calibri"/>
+                        </a:rPr>
+                        <a:t>bzip2-fast</a:t>
+                      </a:r>
+                    </a:p>
+                  </a:txBody>
+                  <a:tcPr>
+                    <a:solidFill>
+                      <a:srgbClr val="FFFFFF"/>
+                    </a:solidFill>
+                  </a:tcPr>
+                </a:tc>
+                <a:tc>
+                  <a:txBody>
+                    <a:bodyPr/>
+                    <a:lstStyle/>
+                    <a:p>
+                      <a:r>
+                        <a:rPr sz="850" b="0">
+                          <a:latin typeface="Calibri"/>
+                        </a:rPr>
+                        <a:t>1349</a:t>
+                      </a:r>
+                    </a:p>
+                  </a:txBody>
+                  <a:tcPr>
+                    <a:solidFill>
+                      <a:srgbClr val="FFFFFF"/>
+                    </a:solidFill>
+                  </a:tcPr>
+                </a:tc>
+                <a:tc>
+                  <a:txBody>
+                    <a:bodyPr/>
+                    <a:lstStyle/>
+                    <a:p>
+                      <a:r>
+                        <a:rPr sz="850" b="0">
+                          <a:latin typeface="Calibri"/>
+                        </a:rPr>
+                        <a:t>1448</a:t>
+                      </a:r>
+                    </a:p>
+                  </a:txBody>
+                  <a:tcPr>
+                    <a:solidFill>
+                      <a:srgbClr val="FFFFFF"/>
+                    </a:solidFill>
+                  </a:tcPr>
+                </a:tc>
+                <a:tc>
+                  <a:txBody>
+                    <a:bodyPr/>
+                    <a:lstStyle/>
+                    <a:p>
+                      <a:r>
+                        <a:rPr sz="850" b="0">
+                          <a:solidFill>
+                            <a:srgbClr val="187A33"/>
+                          </a:solidFill>
+                          <a:latin typeface="Calibri"/>
+                        </a:rPr>
+                        <a:t>7%</a:t>
+                      </a:r>
+                    </a:p>
+                  </a:txBody>
+                  <a:tcPr>
+                    <a:solidFill>
+                      <a:srgbClr val="FFFFFF"/>
+                    </a:solidFill>
+                  </a:tcPr>
+                </a:tc>
+              </a:tr>
+              <a:tr h="224028">
+                <a:tc>
+                  <a:txBody>
+                    <a:bodyPr/>
+                    <a:lstStyle/>
+                    <a:p>
+                      <a:r>
+                        <a:rPr sz="850" b="1">
+                          <a:latin typeface="Calibri"/>
+                        </a:rPr>
+                        <a:t>cr-b64</a:t>
+                      </a:r>
+                    </a:p>
+                  </a:txBody>
+                  <a:tcPr>
+                    <a:solidFill>
+                      <a:srgbClr val="EFF3FA"/>
+                    </a:solidFill>
+                  </a:tcPr>
+                </a:tc>
+                <a:tc>
+                  <a:txBody>
+                    <a:bodyPr/>
+                    <a:lstStyle/>
+                    <a:p>
+                      <a:r>
+                        <a:rPr sz="850" b="0">
+                          <a:latin typeface="Calibri"/>
+                        </a:rPr>
+                        <a:t>1377</a:t>
+                      </a:r>
+                    </a:p>
+                  </a:txBody>
+                  <a:tcPr>
+                    <a:solidFill>
+                      <a:srgbClr val="EFF3FA"/>
+                    </a:solidFill>
+                  </a:tcPr>
+                </a:tc>
+                <a:tc>
+                  <a:txBody>
+                    <a:bodyPr/>
+                    <a:lstStyle/>
+                    <a:p>
+                      <a:r>
+                        <a:rPr sz="850" b="0">
+                          <a:latin typeface="Calibri"/>
+                        </a:rPr>
+                        <a:t>1446</a:t>
+                      </a:r>
+                    </a:p>
+                  </a:txBody>
+                  <a:tcPr>
+                    <a:solidFill>
+                      <a:srgbClr val="EFF3FA"/>
+                    </a:solidFill>
+                  </a:tcPr>
+                </a:tc>
+                <a:tc>
+                  <a:txBody>
+                    <a:bodyPr/>
+                    <a:lstStyle/>
+                    <a:p>
+                      <a:r>
+                        <a:rPr sz="850" b="0">
+                          <a:solidFill>
+                            <a:srgbClr val="187A33"/>
+                          </a:solidFill>
+                          <a:latin typeface="Calibri"/>
+                        </a:rPr>
+                        <a:t>5%</a:t>
+                      </a:r>
+                    </a:p>
+                  </a:txBody>
+                  <a:tcPr>
+                    <a:solidFill>
+                      <a:srgbClr val="EFF3FA"/>
+                    </a:solidFill>
+                  </a:tcPr>
+                </a:tc>
+              </a:tr>
+              <a:tr h="224028">
+                <a:tc>
+                  <a:txBody>
+                    <a:bodyPr/>
+                    <a:lstStyle/>
+                    <a:p>
+                      <a:r>
+                        <a:rPr sz="850" b="1">
+                          <a:latin typeface="Calibri"/>
+                        </a:rPr>
+                        <a:t>bb-sortn</a:t>
+                      </a:r>
+                    </a:p>
+                  </a:txBody>
+                  <a:tcPr>
+                    <a:solidFill>
+                      <a:srgbClr val="FFFFFF"/>
+                    </a:solidFill>
+                  </a:tcPr>
+                </a:tc>
+                <a:tc>
+                  <a:txBody>
+                    <a:bodyPr/>
+                    <a:lstStyle/>
+                    <a:p>
+                      <a:r>
+                        <a:rPr sz="850" b="0">
+                          <a:latin typeface="Calibri"/>
+                        </a:rPr>
+                        <a:t>1345</a:t>
+                      </a:r>
+                    </a:p>
+                  </a:txBody>
+                  <a:tcPr>
+                    <a:solidFill>
+                      <a:srgbClr val="FFFFFF"/>
+                    </a:solidFill>
+                  </a:tcPr>
+                </a:tc>
+                <a:tc>
+                  <a:txBody>
+                    <a:bodyPr/>
+                    <a:lstStyle/>
+                    <a:p>
+                      <a:r>
+                        <a:rPr sz="850" b="0">
+                          <a:latin typeface="Calibri"/>
+                        </a:rPr>
+                        <a:t>1446</a:t>
+                      </a:r>
+                    </a:p>
+                  </a:txBody>
+                  <a:tcPr>
+                    <a:solidFill>
+                      <a:srgbClr val="FFFFFF"/>
+                    </a:solidFill>
+                  </a:tcPr>
+                </a:tc>
+                <a:tc>
+                  <a:txBody>
+                    <a:bodyPr/>
+                    <a:lstStyle/>
+                    <a:p>
+                      <a:r>
+                        <a:rPr sz="850" b="0">
+                          <a:solidFill>
+                            <a:srgbClr val="187A33"/>
+                          </a:solidFill>
+                          <a:latin typeface="Calibri"/>
+                        </a:rPr>
+                        <a:t>7%</a:t>
+                      </a:r>
+                    </a:p>
+                  </a:txBody>
+                  <a:tcPr>
+                    <a:solidFill>
+                      <a:srgbClr val="FFFFFF"/>
+                    </a:solidFill>
+                  </a:tcPr>
+                </a:tc>
+              </a:tr>
+              <a:tr h="224028">
+                <a:tc>
+                  <a:txBody>
+                    <a:bodyPr/>
+                    <a:lstStyle/>
+                    <a:p>
+                      <a:r>
+                        <a:rPr sz="850" b="1">
+                          <a:latin typeface="Calibri"/>
+                        </a:rPr>
+                        <a:t>bzip2</a:t>
+                      </a:r>
+                    </a:p>
+                  </a:txBody>
+                  <a:tcPr>
+                    <a:solidFill>
+                      <a:srgbClr val="EFF3FA"/>
+                    </a:solidFill>
+                  </a:tcPr>
+                </a:tc>
+                <a:tc>
+                  <a:txBody>
+                    <a:bodyPr/>
+                    <a:lstStyle/>
+                    <a:p>
+                      <a:r>
+                        <a:rPr sz="850" b="0">
+                          <a:latin typeface="Calibri"/>
+                        </a:rPr>
+                        <a:t>1337</a:t>
+                      </a:r>
+                    </a:p>
+                  </a:txBody>
+                  <a:tcPr>
+                    <a:solidFill>
+                      <a:srgbClr val="EFF3FA"/>
+                    </a:solidFill>
+                  </a:tcPr>
+                </a:tc>
+                <a:tc>
+                  <a:txBody>
+                    <a:bodyPr/>
+                    <a:lstStyle/>
+                    <a:p>
+                      <a:r>
+                        <a:rPr sz="850" b="0">
+                          <a:latin typeface="Calibri"/>
+                        </a:rPr>
+                        <a:t>1446</a:t>
+                      </a:r>
+                    </a:p>
+                  </a:txBody>
+                  <a:tcPr>
+                    <a:solidFill>
+                      <a:srgbClr val="EFF3FA"/>
+                    </a:solidFill>
+                  </a:tcPr>
+                </a:tc>
+                <a:tc>
+                  <a:txBody>
+                    <a:bodyPr/>
+                    <a:lstStyle/>
+                    <a:p>
+                      <a:r>
+                        <a:rPr sz="850" b="0">
+                          <a:solidFill>
+                            <a:srgbClr val="187A33"/>
+                          </a:solidFill>
+                          <a:latin typeface="Calibri"/>
+                        </a:rPr>
+                        <a:t>8%</a:t>
+                      </a:r>
+                    </a:p>
+                  </a:txBody>
+                  <a:tcPr>
+                    <a:solidFill>
+                      <a:srgbClr val="EFF3FA"/>
+                    </a:solidFill>
+                  </a:tcPr>
+                </a:tc>
+              </a:tr>
+              <a:tr h="224028">
+                <a:tc>
+                  <a:txBody>
+                    <a:bodyPr/>
+                    <a:lstStyle/>
+                    <a:p>
+                      <a:r>
+                        <a:rPr sz="850" b="1">
+                          <a:latin typeface="Calibri"/>
+                        </a:rPr>
+                        <a:t>bb-wc</a:t>
+                      </a:r>
+                    </a:p>
+                  </a:txBody>
+                  <a:tcPr>
+                    <a:solidFill>
+                      <a:srgbClr val="FFFFFF"/>
+                    </a:solidFill>
+                  </a:tcPr>
+                </a:tc>
+                <a:tc>
+                  <a:txBody>
+                    <a:bodyPr/>
+                    <a:lstStyle/>
+                    <a:p>
+                      <a:r>
+                        <a:rPr sz="850" b="0">
+                          <a:latin typeface="Calibri"/>
+                        </a:rPr>
+                        <a:t>1371</a:t>
+                      </a:r>
+                    </a:p>
+                  </a:txBody>
+                  <a:tcPr>
+                    <a:solidFill>
+                      <a:srgbClr val="FFFFFF"/>
+                    </a:solidFill>
+                  </a:tcPr>
+                </a:tc>
+                <a:tc>
+                  <a:txBody>
+                    <a:bodyPr/>
+                    <a:lstStyle/>
+                    <a:p>
+                      <a:r>
+                        <a:rPr sz="850" b="0">
+                          <a:latin typeface="Calibri"/>
+                        </a:rPr>
+                        <a:t>1444</a:t>
+                      </a:r>
+                    </a:p>
+                  </a:txBody>
+                  <a:tcPr>
+                    <a:solidFill>
+                      <a:srgbClr val="FFFFFF"/>
+                    </a:solidFill>
+                  </a:tcPr>
+                </a:tc>
+                <a:tc>
+                  <a:txBody>
+                    <a:bodyPr/>
+                    <a:lstStyle/>
+                    <a:p>
+                      <a:r>
+                        <a:rPr sz="850" b="0">
+                          <a:solidFill>
+                            <a:srgbClr val="187A33"/>
+                          </a:solidFill>
+                          <a:latin typeface="Calibri"/>
+                        </a:rPr>
+                        <a:t>5%</a:t>
+                      </a:r>
+                    </a:p>
+                  </a:txBody>
+                  <a:tcPr>
+                    <a:solidFill>
+                      <a:srgbClr val="FFFFFF"/>
+                    </a:solidFill>
+                  </a:tcPr>
+                </a:tc>
+              </a:tr>
+              <a:tr h="224028">
+                <a:tc>
+                  <a:txBody>
+                    <a:bodyPr/>
+                    <a:lstStyle/>
+                    <a:p>
+                      <a:r>
+                        <a:rPr sz="850" b="1">
+                          <a:latin typeface="Calibri"/>
+                        </a:rPr>
+                        <a:t>cr-aes</a:t>
+                      </a:r>
+                    </a:p>
+                  </a:txBody>
+                  <a:tcPr>
+                    <a:solidFill>
+                      <a:srgbClr val="EFF3FA"/>
+                    </a:solidFill>
+                  </a:tcPr>
+                </a:tc>
+                <a:tc>
+                  <a:txBody>
+                    <a:bodyPr/>
+                    <a:lstStyle/>
+                    <a:p>
+                      <a:r>
+                        <a:rPr sz="850" b="0">
+                          <a:latin typeface="Calibri"/>
+                        </a:rPr>
+                        <a:t>1378</a:t>
+                      </a:r>
+                    </a:p>
+                  </a:txBody>
+                  <a:tcPr>
+                    <a:solidFill>
+                      <a:srgbClr val="EFF3FA"/>
+                    </a:solidFill>
+                  </a:tcPr>
+                </a:tc>
+                <a:tc>
+                  <a:txBody>
+                    <a:bodyPr/>
+                    <a:lstStyle/>
+                    <a:p>
+                      <a:r>
+                        <a:rPr sz="850" b="0">
+                          <a:latin typeface="Calibri"/>
+                        </a:rPr>
+                        <a:t>1437</a:t>
+                      </a:r>
+                    </a:p>
+                  </a:txBody>
+                  <a:tcPr>
+                    <a:solidFill>
+                      <a:srgbClr val="EFF3FA"/>
+                    </a:solidFill>
+                  </a:tcPr>
+                </a:tc>
+                <a:tc>
+                  <a:txBody>
+                    <a:bodyPr/>
+                    <a:lstStyle/>
+                    <a:p>
+                      <a:r>
+                        <a:rPr sz="850" b="0">
+                          <a:solidFill>
+                            <a:srgbClr val="187A33"/>
+                          </a:solidFill>
+                          <a:latin typeface="Calibri"/>
+                        </a:rPr>
+                        <a:t>4%</a:t>
+                      </a:r>
+                    </a:p>
+                  </a:txBody>
+                  <a:tcPr>
+                    <a:solidFill>
+                      <a:srgbClr val="EFF3FA"/>
+                    </a:solidFill>
+                  </a:tcPr>
+                </a:tc>
+              </a:tr>
+              <a:tr h="224028">
+                <a:tc>
+                  <a:txBody>
+                    <a:bodyPr/>
+                    <a:lstStyle/>
+                    <a:p>
+                      <a:r>
+                        <a:rPr sz="850" b="1">
+                          <a:latin typeface="Calibri"/>
+                        </a:rPr>
+                        <a:t>bb-gzip</a:t>
+                      </a:r>
+                    </a:p>
+                  </a:txBody>
+                  <a:tcPr>
+                    <a:solidFill>
+                      <a:srgbClr val="FFFFFF"/>
+                    </a:solidFill>
+                  </a:tcPr>
+                </a:tc>
+                <a:tc>
+                  <a:txBody>
+                    <a:bodyPr/>
+                    <a:lstStyle/>
+                    <a:p>
+                      <a:r>
+                        <a:rPr sz="850" b="0">
+                          <a:latin typeface="Calibri"/>
+                        </a:rPr>
+                        <a:t>1335</a:t>
+                      </a:r>
+                    </a:p>
+                  </a:txBody>
+                  <a:tcPr>
+                    <a:solidFill>
+                      <a:srgbClr val="FFFFFF"/>
+                    </a:solidFill>
+                  </a:tcPr>
+                </a:tc>
+                <a:tc>
+                  <a:txBody>
+                    <a:bodyPr/>
+                    <a:lstStyle/>
+                    <a:p>
+                      <a:r>
+                        <a:rPr sz="850" b="0">
+                          <a:latin typeface="Calibri"/>
+                        </a:rPr>
+                        <a:t>1436</a:t>
+                      </a:r>
+                    </a:p>
+                  </a:txBody>
+                  <a:tcPr>
+                    <a:solidFill>
+                      <a:srgbClr val="FFFFFF"/>
+                    </a:solidFill>
+                  </a:tcPr>
+                </a:tc>
+                <a:tc>
+                  <a:txBody>
+                    <a:bodyPr/>
+                    <a:lstStyle/>
+                    <a:p>
+                      <a:r>
+                        <a:rPr sz="850" b="0">
+                          <a:solidFill>
+                            <a:srgbClr val="187A33"/>
+                          </a:solidFill>
+                          <a:latin typeface="Calibri"/>
+                        </a:rPr>
+                        <a:t>7%</a:t>
+                      </a:r>
+                    </a:p>
+                  </a:txBody>
+                  <a:tcPr>
+                    <a:solidFill>
+                      <a:srgbClr val="FFFFFF"/>
+                    </a:solidFill>
+                  </a:tcPr>
+                </a:tc>
+              </a:tr>
+              <a:tr h="224028">
+                <a:tc>
+                  <a:txBody>
+                    <a:bodyPr/>
+                    <a:lstStyle/>
+                    <a:p>
+                      <a:r>
+                        <a:rPr sz="850" b="1">
+                          <a:latin typeface="Calibri"/>
+                        </a:rPr>
+                        <a:t>bb-sed</a:t>
+                      </a:r>
+                    </a:p>
+                  </a:txBody>
+                  <a:tcPr>
+                    <a:solidFill>
+                      <a:srgbClr val="EFF3FA"/>
+                    </a:solidFill>
+                  </a:tcPr>
+                </a:tc>
+                <a:tc>
+                  <a:txBody>
+                    <a:bodyPr/>
+                    <a:lstStyle/>
+                    <a:p>
+                      <a:r>
+                        <a:rPr sz="850" b="0">
+                          <a:latin typeface="Calibri"/>
+                        </a:rPr>
+                        <a:t>1343</a:t>
+                      </a:r>
+                    </a:p>
+                  </a:txBody>
+                  <a:tcPr>
+                    <a:solidFill>
+                      <a:srgbClr val="EFF3FA"/>
+                    </a:solidFill>
+                  </a:tcPr>
+                </a:tc>
+                <a:tc>
+                  <a:txBody>
+                    <a:bodyPr/>
+                    <a:lstStyle/>
+                    <a:p>
+                      <a:r>
+                        <a:rPr sz="850" b="0">
+                          <a:latin typeface="Calibri"/>
+                        </a:rPr>
+                        <a:t>1431</a:t>
+                      </a:r>
+                    </a:p>
+                  </a:txBody>
+                  <a:tcPr>
+                    <a:solidFill>
+                      <a:srgbClr val="EFF3FA"/>
+                    </a:solidFill>
+                  </a:tcPr>
+                </a:tc>
+                <a:tc>
+                  <a:txBody>
+                    <a:bodyPr/>
+                    <a:lstStyle/>
+                    <a:p>
+                      <a:r>
+                        <a:rPr sz="850" b="0">
+                          <a:solidFill>
+                            <a:srgbClr val="187A33"/>
+                          </a:solidFill>
+                          <a:latin typeface="Calibri"/>
+                        </a:rPr>
+                        <a:t>6%</a:t>
+                      </a:r>
+                    </a:p>
+                  </a:txBody>
+                  <a:tcPr>
+                    <a:solidFill>
+                      <a:srgbClr val="EFF3FA"/>
+                    </a:solidFill>
+                  </a:tcPr>
+                </a:tc>
+              </a:tr>
+              <a:tr h="224028">
+                <a:tc>
+                  <a:txBody>
+                    <a:bodyPr/>
+                    <a:lstStyle/>
+                    <a:p>
+                      <a:r>
+                        <a:rPr sz="850" b="1">
+                          <a:latin typeface="Calibri"/>
+                        </a:rPr>
+                        <a:t>sort-big</a:t>
+                      </a:r>
+                    </a:p>
+                  </a:txBody>
+                  <a:tcPr>
+                    <a:solidFill>
+                      <a:srgbClr val="FFFFFF"/>
+                    </a:solidFill>
+                  </a:tcPr>
+                </a:tc>
+                <a:tc>
+                  <a:txBody>
+                    <a:bodyPr/>
+                    <a:lstStyle/>
+                    <a:p>
+                      <a:r>
+                        <a:rPr sz="850" b="0">
+                          <a:latin typeface="Calibri"/>
+                        </a:rPr>
+                        <a:t>1384</a:t>
+                      </a:r>
+                    </a:p>
+                  </a:txBody>
+                  <a:tcPr>
+                    <a:solidFill>
+                      <a:srgbClr val="FFFFFF"/>
+                    </a:solidFill>
+                  </a:tcPr>
+                </a:tc>
+                <a:tc>
+                  <a:txBody>
+                    <a:bodyPr/>
+                    <a:lstStyle/>
+                    <a:p>
+                      <a:r>
+                        <a:rPr sz="850" b="0">
+                          <a:latin typeface="Calibri"/>
+                        </a:rPr>
+                        <a:t>1427</a:t>
+                      </a:r>
+                    </a:p>
+                  </a:txBody>
+                  <a:tcPr>
+                    <a:solidFill>
+                      <a:srgbClr val="FFFFFF"/>
+                    </a:solidFill>
+                  </a:tcPr>
+                </a:tc>
+                <a:tc>
+                  <a:txBody>
+                    <a:bodyPr/>
+                    <a:lstStyle/>
+                    <a:p>
+                      <a:r>
+                        <a:rPr sz="850" b="0">
+                          <a:solidFill>
+                            <a:srgbClr val="187A33"/>
+                          </a:solidFill>
+                          <a:latin typeface="Calibri"/>
+                        </a:rPr>
+                        <a:t>3%</a:t>
+                      </a:r>
+                    </a:p>
+                  </a:txBody>
+                  <a:tcPr>
+                    <a:solidFill>
+                      <a:srgbClr val="FFFFFF"/>
+                    </a:solidFill>
+                  </a:tcPr>
+                </a:tc>
+              </a:tr>
+              <a:tr h="224028">
+                <a:tc>
+                  <a:txBody>
+                    <a:bodyPr/>
+                    <a:lstStyle/>
+                    <a:p>
+                      <a:r>
+                        <a:rPr sz="850" b="1">
+                          <a:latin typeface="Calibri"/>
+                        </a:rPr>
+                        <a:t>rd-plasma</a:t>
+                      </a:r>
+                    </a:p>
+                  </a:txBody>
+                  <a:tcPr>
+                    <a:solidFill>
+                      <a:srgbClr val="EFF3FA"/>
+                    </a:solidFill>
+                  </a:tcPr>
+                </a:tc>
+                <a:tc>
+                  <a:txBody>
+                    <a:bodyPr/>
+                    <a:lstStyle/>
+                    <a:p>
+                      <a:r>
+                        <a:rPr sz="850" b="0">
+                          <a:latin typeface="Calibri"/>
+                        </a:rPr>
+                        <a:t>1331</a:t>
+                      </a:r>
+                    </a:p>
+                  </a:txBody>
+                  <a:tcPr>
+                    <a:solidFill>
+                      <a:srgbClr val="EFF3FA"/>
+                    </a:solidFill>
+                  </a:tcPr>
+                </a:tc>
+                <a:tc>
+                  <a:txBody>
+                    <a:bodyPr/>
+                    <a:lstStyle/>
+                    <a:p>
+                      <a:r>
+                        <a:rPr sz="850" b="0">
+                          <a:latin typeface="Calibri"/>
+                        </a:rPr>
+                        <a:t>1424</a:t>
+                      </a:r>
+                    </a:p>
+                  </a:txBody>
+                  <a:tcPr>
+                    <a:solidFill>
+                      <a:srgbClr val="EFF3FA"/>
+                    </a:solidFill>
+                  </a:tcPr>
+                </a:tc>
+                <a:tc>
+                  <a:txBody>
+                    <a:bodyPr/>
+                    <a:lstStyle/>
+                    <a:p>
+                      <a:r>
+                        <a:rPr sz="850" b="0">
+                          <a:solidFill>
+                            <a:srgbClr val="187A33"/>
+                          </a:solidFill>
+                          <a:latin typeface="Calibri"/>
+                        </a:rPr>
+                        <a:t>7%</a:t>
+                      </a:r>
+                    </a:p>
+                  </a:txBody>
+                  <a:tcPr>
+                    <a:solidFill>
+                      <a:srgbClr val="EFF3FA"/>
+                    </a:solidFill>
+                  </a:tcPr>
+                </a:tc>
+              </a:tr>
+              <a:tr h="224028">
+                <a:tc>
+                  <a:txBody>
+                    <a:bodyPr/>
+                    <a:lstStyle/>
+                    <a:p>
+                      <a:r>
+                        <a:rPr sz="850" b="1">
+                          <a:latin typeface="Calibri"/>
+                        </a:rPr>
+                        <a:t>sha256</a:t>
+                      </a:r>
+                    </a:p>
+                  </a:txBody>
+                  <a:tcPr>
+                    <a:solidFill>
+                      <a:srgbClr val="FFFFFF"/>
+                    </a:solidFill>
+                  </a:tcPr>
+                </a:tc>
+                <a:tc>
+                  <a:txBody>
+                    <a:bodyPr/>
+                    <a:lstStyle/>
+                    <a:p>
+                      <a:r>
+                        <a:rPr sz="850" b="0">
+                          <a:latin typeface="Calibri"/>
+                        </a:rPr>
+                        <a:t>1398</a:t>
+                      </a:r>
+                    </a:p>
+                  </a:txBody>
+                  <a:tcPr>
+                    <a:solidFill>
+                      <a:srgbClr val="FFFFFF"/>
+                    </a:solidFill>
+                  </a:tcPr>
+                </a:tc>
+                <a:tc>
+                  <a:txBody>
+                    <a:bodyPr/>
+                    <a:lstStyle/>
+                    <a:p>
+                      <a:r>
+                        <a:rPr sz="850" b="0">
+                          <a:latin typeface="Calibri"/>
+                        </a:rPr>
+                        <a:t>1424</a:t>
+                      </a:r>
+                    </a:p>
+                  </a:txBody>
+                  <a:tcPr>
+                    <a:solidFill>
+                      <a:srgbClr val="FFFFFF"/>
+                    </a:solidFill>
+                  </a:tcPr>
+                </a:tc>
+                <a:tc>
+                  <a:txBody>
+                    <a:bodyPr/>
+                    <a:lstStyle/>
+                    <a:p>
+                      <a:r>
+                        <a:rPr sz="850" b="0">
+                          <a:solidFill>
+                            <a:srgbClr val="187A33"/>
+                          </a:solidFill>
+                          <a:latin typeface="Calibri"/>
+                        </a:rPr>
+                        <a:t>2%</a:t>
+                      </a:r>
+                    </a:p>
+                  </a:txBody>
+                  <a:tcPr>
+                    <a:solidFill>
+                      <a:srgbClr val="FFFFFF"/>
+                    </a:solidFill>
+                  </a:tcPr>
+                </a:tc>
+              </a:tr>
+              <a:tr h="224028">
+                <a:tc>
+                  <a:txBody>
+                    <a:bodyPr/>
+                    <a:lstStyle/>
+                    <a:p>
+                      <a:r>
+                        <a:rPr sz="850" b="1">
+                          <a:latin typeface="Calibri"/>
+                        </a:rPr>
+                        <a:t>bb-awk</a:t>
+                      </a:r>
+                    </a:p>
+                  </a:txBody>
+                  <a:tcPr>
+                    <a:solidFill>
+                      <a:srgbClr val="EFF3FA"/>
+                    </a:solidFill>
+                  </a:tcPr>
+                </a:tc>
+                <a:tc>
+                  <a:txBody>
+                    <a:bodyPr/>
+                    <a:lstStyle/>
+                    <a:p>
+                      <a:r>
+                        <a:rPr sz="850" b="0">
+                          <a:latin typeface="Calibri"/>
+                        </a:rPr>
+                        <a:t>1336</a:t>
+                      </a:r>
+                    </a:p>
+                  </a:txBody>
+                  <a:tcPr>
+                    <a:solidFill>
+                      <a:srgbClr val="EFF3FA"/>
+                    </a:solidFill>
+                  </a:tcPr>
+                </a:tc>
+                <a:tc>
+                  <a:txBody>
+                    <a:bodyPr/>
+                    <a:lstStyle/>
+                    <a:p>
+                      <a:r>
+                        <a:rPr sz="850" b="0">
+                          <a:latin typeface="Calibri"/>
+                        </a:rPr>
+                        <a:t>1424</a:t>
+                      </a:r>
+                    </a:p>
+                  </a:txBody>
+                  <a:tcPr>
+                    <a:solidFill>
+                      <a:srgbClr val="EFF3FA"/>
+                    </a:solidFill>
+                  </a:tcPr>
+                </a:tc>
+                <a:tc>
+                  <a:txBody>
+                    <a:bodyPr/>
+                    <a:lstStyle/>
+                    <a:p>
+                      <a:r>
+                        <a:rPr sz="850" b="0">
+                          <a:solidFill>
+                            <a:srgbClr val="187A33"/>
+                          </a:solidFill>
+                          <a:latin typeface="Calibri"/>
+                        </a:rPr>
+                        <a:t>6%</a:t>
+                      </a:r>
+                    </a:p>
+                  </a:txBody>
+                  <a:tcPr>
+                    <a:solidFill>
+                      <a:srgbClr val="EFF3FA"/>
+                    </a:solidFill>
+                  </a:tcPr>
+                </a:tc>
+              </a:tr>
+              <a:tr h="224028">
+                <a:tc>
+                  <a:txBody>
+                    <a:bodyPr/>
+                    <a:lstStyle/>
+                    <a:p>
+                      <a:r>
+                        <a:rPr sz="850" b="1">
+                          <a:latin typeface="Calibri"/>
+                        </a:rPr>
+                        <a:t>bb-sha1</a:t>
+                      </a:r>
+                    </a:p>
+                  </a:txBody>
+                  <a:tcPr>
+                    <a:solidFill>
+                      <a:srgbClr val="FFFFFF"/>
+                    </a:solidFill>
+                  </a:tcPr>
+                </a:tc>
+                <a:tc>
+                  <a:txBody>
+                    <a:bodyPr/>
+                    <a:lstStyle/>
+                    <a:p>
+                      <a:r>
+                        <a:rPr sz="850" b="0">
+                          <a:latin typeface="Calibri"/>
+                        </a:rPr>
+                        <a:t>1383</a:t>
+                      </a:r>
+                    </a:p>
+                  </a:txBody>
+                  <a:tcPr>
+                    <a:solidFill>
+                      <a:srgbClr val="FFFFFF"/>
+                    </a:solidFill>
+                  </a:tcPr>
+                </a:tc>
+                <a:tc>
+                  <a:txBody>
+                    <a:bodyPr/>
+                    <a:lstStyle/>
+                    <a:p>
+                      <a:r>
+                        <a:rPr sz="850" b="0">
+                          <a:latin typeface="Calibri"/>
+                        </a:rPr>
+                        <a:t>1423</a:t>
+                      </a:r>
+                    </a:p>
+                  </a:txBody>
+                  <a:tcPr>
+                    <a:solidFill>
+                      <a:srgbClr val="FFFFFF"/>
+                    </a:solidFill>
+                  </a:tcPr>
+                </a:tc>
+                <a:tc>
+                  <a:txBody>
+                    <a:bodyPr/>
+                    <a:lstStyle/>
+                    <a:p>
+                      <a:r>
+                        <a:rPr sz="850" b="0">
+                          <a:solidFill>
+                            <a:srgbClr val="187A33"/>
+                          </a:solidFill>
+                          <a:latin typeface="Calibri"/>
+                        </a:rPr>
+                        <a:t>3%</a:t>
+                      </a:r>
+                    </a:p>
+                  </a:txBody>
+                  <a:tcPr>
+                    <a:solidFill>
+                      <a:srgbClr val="FFFFFF"/>
+                    </a:solidFill>
+                  </a:tcPr>
+                </a:tc>
+              </a:tr>
+              <a:tr h="224028">
+                <a:tc>
+                  <a:txBody>
+                    <a:bodyPr/>
+                    <a:lstStyle/>
+                    <a:p>
+                      <a:r>
+                        <a:rPr sz="850" b="1">
+                          <a:latin typeface="Calibri"/>
+                        </a:rPr>
+                        <a:t>sort</a:t>
+                      </a:r>
+                    </a:p>
+                  </a:txBody>
+                  <a:tcPr>
+                    <a:solidFill>
+                      <a:srgbClr val="EFF3FA"/>
+                    </a:solidFill>
+                  </a:tcPr>
+                </a:tc>
+                <a:tc>
+                  <a:txBody>
+                    <a:bodyPr/>
+                    <a:lstStyle/>
+                    <a:p>
+                      <a:r>
+                        <a:rPr sz="850" b="0">
+                          <a:latin typeface="Calibri"/>
+                        </a:rPr>
+                        <a:t>1378</a:t>
+                      </a:r>
+                    </a:p>
+                  </a:txBody>
+                  <a:tcPr>
+                    <a:solidFill>
+                      <a:srgbClr val="EFF3FA"/>
+                    </a:solidFill>
+                  </a:tcPr>
+                </a:tc>
+                <a:tc>
+                  <a:txBody>
+                    <a:bodyPr/>
+                    <a:lstStyle/>
+                    <a:p>
+                      <a:r>
+                        <a:rPr sz="850" b="0">
+                          <a:latin typeface="Calibri"/>
+                        </a:rPr>
+                        <a:t>1422</a:t>
+                      </a:r>
+                    </a:p>
+                  </a:txBody>
+                  <a:tcPr>
+                    <a:solidFill>
+                      <a:srgbClr val="EFF3FA"/>
+                    </a:solidFill>
+                  </a:tcPr>
+                </a:tc>
+                <a:tc>
+                  <a:txBody>
+                    <a:bodyPr/>
+                    <a:lstStyle/>
+                    <a:p>
+                      <a:r>
+                        <a:rPr sz="850" b="0">
+                          <a:solidFill>
+                            <a:srgbClr val="187A33"/>
+                          </a:solidFill>
+                          <a:latin typeface="Calibri"/>
+                        </a:rPr>
+                        <a:t>3%</a:t>
+                      </a:r>
+                    </a:p>
+                  </a:txBody>
+                  <a:tcPr>
+                    <a:solidFill>
+                      <a:srgbClr val="EFF3FA"/>
+                    </a:solidFill>
+                  </a:tcPr>
+                </a:tc>
+              </a:tr>
+              <a:tr h="224028">
+                <a:tc>
+                  <a:txBody>
+                    <a:bodyPr/>
+                    <a:lstStyle/>
+                    <a:p>
+                      <a:r>
+                        <a:rPr sz="850" b="1">
+                          <a:latin typeface="Calibri"/>
+                        </a:rPr>
+                        <a:t>bb-gunzip</a:t>
+                      </a:r>
+                    </a:p>
+                  </a:txBody>
+                  <a:tcPr>
+                    <a:solidFill>
+                      <a:srgbClr val="FFFFFF"/>
+                    </a:solidFill>
+                  </a:tcPr>
+                </a:tc>
+                <a:tc>
+                  <a:txBody>
+                    <a:bodyPr/>
+                    <a:lstStyle/>
+                    <a:p>
+                      <a:r>
+                        <a:rPr sz="850" b="0">
+                          <a:latin typeface="Calibri"/>
+                        </a:rPr>
+                        <a:t>1342</a:t>
+                      </a:r>
+                    </a:p>
+                  </a:txBody>
+                  <a:tcPr>
+                    <a:solidFill>
+                      <a:srgbClr val="FFFFFF"/>
+                    </a:solidFill>
+                  </a:tcPr>
+                </a:tc>
+                <a:tc>
+                  <a:txBody>
+                    <a:bodyPr/>
+                    <a:lstStyle/>
+                    <a:p>
+                      <a:r>
+                        <a:rPr sz="850" b="0">
+                          <a:latin typeface="Calibri"/>
+                        </a:rPr>
+                        <a:t>1419</a:t>
+                      </a:r>
+                    </a:p>
+                  </a:txBody>
+                  <a:tcPr>
+                    <a:solidFill>
+                      <a:srgbClr val="FFFFFF"/>
+                    </a:solidFill>
+                  </a:tcPr>
+                </a:tc>
+                <a:tc>
+                  <a:txBody>
+                    <a:bodyPr/>
+                    <a:lstStyle/>
+                    <a:p>
+                      <a:r>
+                        <a:rPr sz="850" b="0">
+                          <a:solidFill>
+                            <a:srgbClr val="187A33"/>
+                          </a:solidFill>
+                          <a:latin typeface="Calibri"/>
+                        </a:rPr>
+                        <a:t>5%</a:t>
+                      </a:r>
+                    </a:p>
+                  </a:txBody>
+                  <a:tcPr>
+                    <a:solidFill>
+                      <a:srgbClr val="FFFFFF"/>
+                    </a:solidFill>
+                  </a:tcPr>
+                </a:tc>
+              </a:tr>
+              <a:tr h="224028">
+                <a:tc>
+                  <a:txBody>
+                    <a:bodyPr/>
+                    <a:lstStyle/>
+                    <a:p>
+                      <a:r>
+                        <a:rPr sz="850" b="1">
+                          <a:latin typeface="Calibri"/>
+                        </a:rPr>
+                        <a:t>rd-mandel</a:t>
+                      </a:r>
+                    </a:p>
+                  </a:txBody>
+                  <a:tcPr>
+                    <a:solidFill>
+                      <a:srgbClr val="EFF3FA"/>
+                    </a:solidFill>
+                  </a:tcPr>
+                </a:tc>
+                <a:tc>
+                  <a:txBody>
+                    <a:bodyPr/>
+                    <a:lstStyle/>
+                    <a:p>
+                      <a:r>
+                        <a:rPr sz="850" b="0">
+                          <a:latin typeface="Calibri"/>
+                        </a:rPr>
+                        <a:t>1317</a:t>
+                      </a:r>
+                    </a:p>
+                  </a:txBody>
+                  <a:tcPr>
+                    <a:solidFill>
+                      <a:srgbClr val="EFF3FA"/>
+                    </a:solidFill>
+                  </a:tcPr>
+                </a:tc>
+                <a:tc>
+                  <a:txBody>
+                    <a:bodyPr/>
+                    <a:lstStyle/>
+                    <a:p>
+                      <a:r>
+                        <a:rPr sz="850" b="0">
+                          <a:latin typeface="Calibri"/>
+                        </a:rPr>
+                        <a:t>1416</a:t>
+                      </a:r>
+                    </a:p>
+                  </a:txBody>
+                  <a:tcPr>
+                    <a:solidFill>
+                      <a:srgbClr val="EFF3FA"/>
+                    </a:solidFill>
+                  </a:tcPr>
+                </a:tc>
+                <a:tc>
+                  <a:txBody>
+                    <a:bodyPr/>
+                    <a:lstStyle/>
+                    <a:p>
+                      <a:r>
+                        <a:rPr sz="850" b="0">
+                          <a:solidFill>
+                            <a:srgbClr val="187A33"/>
+                          </a:solidFill>
+                          <a:latin typeface="Calibri"/>
+                        </a:rPr>
+                        <a:t>7%</a:t>
+                      </a:r>
+                    </a:p>
+                  </a:txBody>
+                  <a:tcPr>
+                    <a:solidFill>
+                      <a:srgbClr val="EFF3FA"/>
+                    </a:solidFill>
+                  </a:tcPr>
+                </a:tc>
+              </a:tr>
+            </a:tbl>
+          </a:graphicData>
+        </a:graphic>
+      </p:graphicFrame>
+      <p:graphicFrame>
+        <p:nvGraphicFramePr>
+          <p:cNvPr id="11" name="Table 10"/>
+          <p:cNvGraphicFramePr>
+            <a:graphicFrameLocks noGrp="1"/>
+          </p:cNvGraphicFramePr>
+          <p:nvPr/>
+        </p:nvGraphicFramePr>
+        <p:xfrm>
+          <a:off x="8321040" y="1664208"/>
+          <a:ext cx="3703320" cy="3808476"/>
+        </p:xfrm>
+        <a:graphic>
+          <a:graphicData uri="http://schemas.openxmlformats.org/drawingml/2006/table">
+            <a:tbl>
+              <a:tblPr firstRow="1" bandRow="1">
+                <a:tableStyleId>{5C22544A-7EE6-4342-B048-85BDC9FD1C3A}</a:tableStyleId>
+              </a:tblPr>
+              <a:tblGrid>
+                <a:gridCol w="1417320"/>
+                <a:gridCol w="777240"/>
+                <a:gridCol w="777240"/>
+                <a:gridCol w="731520"/>
+              </a:tblGrid>
+              <a:tr h="224028">
+                <a:tc>
+                  <a:txBody>
+                    <a:bodyPr/>
+                    <a:lstStyle/>
+                    <a:p>
+                      <a:r>
+                        <a:rPr sz="850" b="1">
+                          <a:solidFill>
+                            <a:srgbClr val="FFFFFF"/>
+                          </a:solidFill>
+                          <a:latin typeface="Calibri"/>
+                        </a:rPr>
+                        <a:t>app</a:t>
+                      </a:r>
+                    </a:p>
+                  </a:txBody>
+                  <a:tcPr>
+                    <a:solidFill>
+                      <a:srgbClr val="202124"/>
+                    </a:solidFill>
+                  </a:tcPr>
+                </a:tc>
+                <a:tc>
+                  <a:txBody>
+                    <a:bodyPr/>
+                    <a:lstStyle/>
+                    <a:p>
+                      <a:r>
+                        <a:rPr sz="850" b="1">
+                          <a:solidFill>
+                            <a:srgbClr val="FFFFFF"/>
+                          </a:solidFill>
+                          <a:latin typeface="Calibri"/>
+                        </a:rPr>
+                        <a:t>pred</a:t>
+                      </a:r>
+                    </a:p>
+                  </a:txBody>
+                  <a:tcPr>
+                    <a:solidFill>
+                      <a:srgbClr val="202124"/>
+                    </a:solidFill>
+                  </a:tcPr>
+                </a:tc>
+                <a:tc>
+                  <a:txBody>
+                    <a:bodyPr/>
+                    <a:lstStyle/>
+                    <a:p>
+                      <a:r>
+                        <a:rPr sz="850" b="1">
+                          <a:solidFill>
+                            <a:srgbClr val="FFFFFF"/>
+                          </a:solidFill>
+                          <a:latin typeface="Calibri"/>
+                        </a:rPr>
+                        <a:t>meas</a:t>
+                      </a:r>
+                    </a:p>
+                  </a:txBody>
+                  <a:tcPr>
+                    <a:solidFill>
+                      <a:srgbClr val="202124"/>
+                    </a:solidFill>
+                  </a:tcPr>
+                </a:tc>
+                <a:tc>
+                  <a:txBody>
+                    <a:bodyPr/>
+                    <a:lstStyle/>
+                    <a:p>
+                      <a:r>
+                        <a:rPr sz="850" b="1">
+                          <a:solidFill>
+                            <a:srgbClr val="FFFFFF"/>
+                          </a:solidFill>
+                          <a:latin typeface="Calibri"/>
+                        </a:rPr>
+                        <a:t>err</a:t>
+                      </a:r>
+                    </a:p>
+                  </a:txBody>
+                  <a:tcPr>
+                    <a:solidFill>
+                      <a:srgbClr val="202124"/>
+                    </a:solidFill>
+                  </a:tcPr>
+                </a:tc>
+              </a:tr>
+              <a:tr h="224028">
+                <a:tc>
+                  <a:txBody>
+                    <a:bodyPr/>
+                    <a:lstStyle/>
+                    <a:p>
+                      <a:r>
+                        <a:rPr sz="850" b="1">
+                          <a:latin typeface="Calibri"/>
+                        </a:rPr>
+                        <a:t>bb-sha512</a:t>
+                      </a:r>
+                    </a:p>
+                  </a:txBody>
+                  <a:tcPr>
+                    <a:solidFill>
+                      <a:srgbClr val="EFF3FA"/>
+                    </a:solidFill>
+                  </a:tcPr>
+                </a:tc>
+                <a:tc>
+                  <a:txBody>
+                    <a:bodyPr/>
+                    <a:lstStyle/>
+                    <a:p>
+                      <a:r>
+                        <a:rPr sz="850" b="0">
+                          <a:latin typeface="Calibri"/>
+                        </a:rPr>
+                        <a:t>1380</a:t>
+                      </a:r>
+                    </a:p>
+                  </a:txBody>
+                  <a:tcPr>
+                    <a:solidFill>
+                      <a:srgbClr val="EFF3FA"/>
+                    </a:solidFill>
+                  </a:tcPr>
+                </a:tc>
+                <a:tc>
+                  <a:txBody>
+                    <a:bodyPr/>
+                    <a:lstStyle/>
+                    <a:p>
+                      <a:r>
+                        <a:rPr sz="850" b="0">
+                          <a:latin typeface="Calibri"/>
+                        </a:rPr>
+                        <a:t>1414</a:t>
+                      </a:r>
+                    </a:p>
+                  </a:txBody>
+                  <a:tcPr>
+                    <a:solidFill>
+                      <a:srgbClr val="EFF3FA"/>
+                    </a:solidFill>
+                  </a:tcPr>
+                </a:tc>
+                <a:tc>
+                  <a:txBody>
+                    <a:bodyPr/>
+                    <a:lstStyle/>
+                    <a:p>
+                      <a:r>
+                        <a:rPr sz="850" b="0">
+                          <a:solidFill>
+                            <a:srgbClr val="187A33"/>
+                          </a:solidFill>
+                          <a:latin typeface="Calibri"/>
+                        </a:rPr>
+                        <a:t>2%</a:t>
+                      </a:r>
+                    </a:p>
+                  </a:txBody>
+                  <a:tcPr>
+                    <a:solidFill>
+                      <a:srgbClr val="EFF3FA"/>
+                    </a:solidFill>
+                  </a:tcPr>
+                </a:tc>
+              </a:tr>
+              <a:tr h="224028">
+                <a:tc>
+                  <a:txBody>
+                    <a:bodyPr/>
+                    <a:lstStyle/>
+                    <a:p>
+                      <a:r>
+                        <a:rPr sz="850" b="1">
+                          <a:latin typeface="Calibri"/>
+                        </a:rPr>
+                        <a:t>cr-md5</a:t>
+                      </a:r>
+                    </a:p>
+                  </a:txBody>
+                  <a:tcPr>
+                    <a:solidFill>
+                      <a:srgbClr val="FFFFFF"/>
+                    </a:solidFill>
+                  </a:tcPr>
+                </a:tc>
+                <a:tc>
+                  <a:txBody>
+                    <a:bodyPr/>
+                    <a:lstStyle/>
+                    <a:p>
+                      <a:r>
+                        <a:rPr sz="850" b="0">
+                          <a:latin typeface="Calibri"/>
+                        </a:rPr>
+                        <a:t>1379</a:t>
+                      </a:r>
+                    </a:p>
+                  </a:txBody>
+                  <a:tcPr>
+                    <a:solidFill>
+                      <a:srgbClr val="FFFFFF"/>
+                    </a:solidFill>
+                  </a:tcPr>
+                </a:tc>
+                <a:tc>
+                  <a:txBody>
+                    <a:bodyPr/>
+                    <a:lstStyle/>
+                    <a:p>
+                      <a:r>
+                        <a:rPr sz="850" b="0">
+                          <a:latin typeface="Calibri"/>
+                        </a:rPr>
+                        <a:t>1412</a:t>
+                      </a:r>
+                    </a:p>
+                  </a:txBody>
+                  <a:tcPr>
+                    <a:solidFill>
+                      <a:srgbClr val="FFFFFF"/>
+                    </a:solidFill>
+                  </a:tcPr>
+                </a:tc>
+                <a:tc>
+                  <a:txBody>
+                    <a:bodyPr/>
+                    <a:lstStyle/>
+                    <a:p>
+                      <a:r>
+                        <a:rPr sz="850" b="0">
+                          <a:solidFill>
+                            <a:srgbClr val="187A33"/>
+                          </a:solidFill>
+                          <a:latin typeface="Calibri"/>
+                        </a:rPr>
+                        <a:t>2%</a:t>
+                      </a:r>
+                    </a:p>
+                  </a:txBody>
+                  <a:tcPr>
+                    <a:solidFill>
+                      <a:srgbClr val="FFFFFF"/>
+                    </a:solidFill>
+                  </a:tcPr>
+                </a:tc>
+              </a:tr>
+              <a:tr h="224028">
+                <a:tc>
+                  <a:txBody>
+                    <a:bodyPr/>
+                    <a:lstStyle/>
+                    <a:p>
+                      <a:r>
+                        <a:rPr sz="850" b="1">
+                          <a:latin typeface="Calibri"/>
+                        </a:rPr>
+                        <a:t>bb-cksum</a:t>
+                      </a:r>
+                    </a:p>
+                  </a:txBody>
+                  <a:tcPr>
+                    <a:solidFill>
+                      <a:srgbClr val="EFF3FA"/>
+                    </a:solidFill>
+                  </a:tcPr>
+                </a:tc>
+                <a:tc>
+                  <a:txBody>
+                    <a:bodyPr/>
+                    <a:lstStyle/>
+                    <a:p>
+                      <a:r>
+                        <a:rPr sz="850" b="0">
+                          <a:latin typeface="Calibri"/>
+                        </a:rPr>
+                        <a:t>1316</a:t>
+                      </a:r>
+                    </a:p>
+                  </a:txBody>
+                  <a:tcPr>
+                    <a:solidFill>
+                      <a:srgbClr val="EFF3FA"/>
+                    </a:solidFill>
+                  </a:tcPr>
+                </a:tc>
+                <a:tc>
+                  <a:txBody>
+                    <a:bodyPr/>
+                    <a:lstStyle/>
+                    <a:p>
+                      <a:r>
+                        <a:rPr sz="850" b="0">
+                          <a:latin typeface="Calibri"/>
+                        </a:rPr>
+                        <a:t>1405</a:t>
+                      </a:r>
+                    </a:p>
+                  </a:txBody>
+                  <a:tcPr>
+                    <a:solidFill>
+                      <a:srgbClr val="EFF3FA"/>
+                    </a:solidFill>
+                  </a:tcPr>
+                </a:tc>
+                <a:tc>
+                  <a:txBody>
+                    <a:bodyPr/>
+                    <a:lstStyle/>
+                    <a:p>
+                      <a:r>
+                        <a:rPr sz="850" b="0">
+                          <a:solidFill>
+                            <a:srgbClr val="187A33"/>
+                          </a:solidFill>
+                          <a:latin typeface="Calibri"/>
+                        </a:rPr>
+                        <a:t>6%</a:t>
+                      </a:r>
+                    </a:p>
+                  </a:txBody>
+                  <a:tcPr>
+                    <a:solidFill>
+                      <a:srgbClr val="EFF3FA"/>
+                    </a:solidFill>
+                  </a:tcPr>
+                </a:tc>
+              </a:tr>
+              <a:tr h="224028">
+                <a:tc>
+                  <a:txBody>
+                    <a:bodyPr/>
+                    <a:lstStyle/>
+                    <a:p>
+                      <a:r>
+                        <a:rPr sz="850" b="1">
+                          <a:latin typeface="Calibri"/>
+                        </a:rPr>
+                        <a:t>heatshrink</a:t>
+                      </a:r>
+                    </a:p>
+                  </a:txBody>
+                  <a:tcPr>
+                    <a:solidFill>
+                      <a:srgbClr val="FFFFFF"/>
+                    </a:solidFill>
+                  </a:tcPr>
+                </a:tc>
+                <a:tc>
+                  <a:txBody>
+                    <a:bodyPr/>
+                    <a:lstStyle/>
+                    <a:p>
+                      <a:r>
+                        <a:rPr sz="850" b="0">
+                          <a:latin typeface="Calibri"/>
+                        </a:rPr>
+                        <a:t>1346</a:t>
+                      </a:r>
+                    </a:p>
+                  </a:txBody>
+                  <a:tcPr>
+                    <a:solidFill>
+                      <a:srgbClr val="FFFFFF"/>
+                    </a:solidFill>
+                  </a:tcPr>
+                </a:tc>
+                <a:tc>
+                  <a:txBody>
+                    <a:bodyPr/>
+                    <a:lstStyle/>
+                    <a:p>
+                      <a:r>
+                        <a:rPr sz="850" b="0">
+                          <a:latin typeface="Calibri"/>
+                        </a:rPr>
+                        <a:t>1400</a:t>
+                      </a:r>
+                    </a:p>
+                  </a:txBody>
+                  <a:tcPr>
+                    <a:solidFill>
+                      <a:srgbClr val="FFFFFF"/>
+                    </a:solidFill>
+                  </a:tcPr>
+                </a:tc>
+                <a:tc>
+                  <a:txBody>
+                    <a:bodyPr/>
+                    <a:lstStyle/>
+                    <a:p>
+                      <a:r>
+                        <a:rPr sz="850" b="0">
+                          <a:solidFill>
+                            <a:srgbClr val="187A33"/>
+                          </a:solidFill>
+                          <a:latin typeface="Calibri"/>
+                        </a:rPr>
+                        <a:t>4%</a:t>
+                      </a:r>
+                    </a:p>
+                  </a:txBody>
+                  <a:tcPr>
+                    <a:solidFill>
+                      <a:srgbClr val="FFFFFF"/>
+                    </a:solidFill>
+                  </a:tcPr>
+                </a:tc>
+              </a:tr>
+              <a:tr h="224028">
+                <a:tc>
+                  <a:txBody>
+                    <a:bodyPr/>
+                    <a:lstStyle/>
+                    <a:p>
+                      <a:r>
+                        <a:rPr sz="850" b="1">
+                          <a:latin typeface="Calibri"/>
+                        </a:rPr>
+                        <a:t>cjson</a:t>
+                      </a:r>
+                    </a:p>
+                  </a:txBody>
+                  <a:tcPr>
+                    <a:solidFill>
+                      <a:srgbClr val="EFF3FA"/>
+                    </a:solidFill>
+                  </a:tcPr>
+                </a:tc>
+                <a:tc>
+                  <a:txBody>
+                    <a:bodyPr/>
+                    <a:lstStyle/>
+                    <a:p>
+                      <a:r>
+                        <a:rPr sz="850" b="0">
+                          <a:latin typeface="Calibri"/>
+                        </a:rPr>
+                        <a:t>1339</a:t>
+                      </a:r>
+                    </a:p>
+                  </a:txBody>
+                  <a:tcPr>
+                    <a:solidFill>
+                      <a:srgbClr val="EFF3FA"/>
+                    </a:solidFill>
+                  </a:tcPr>
+                </a:tc>
+                <a:tc>
+                  <a:txBody>
+                    <a:bodyPr/>
+                    <a:lstStyle/>
+                    <a:p>
+                      <a:r>
+                        <a:rPr sz="850" b="0">
+                          <a:latin typeface="Calibri"/>
+                        </a:rPr>
+                        <a:t>1392</a:t>
+                      </a:r>
+                    </a:p>
+                  </a:txBody>
+                  <a:tcPr>
+                    <a:solidFill>
+                      <a:srgbClr val="EFF3FA"/>
+                    </a:solidFill>
+                  </a:tcPr>
+                </a:tc>
+                <a:tc>
+                  <a:txBody>
+                    <a:bodyPr/>
+                    <a:lstStyle/>
+                    <a:p>
+                      <a:r>
+                        <a:rPr sz="850" b="0">
+                          <a:solidFill>
+                            <a:srgbClr val="187A33"/>
+                          </a:solidFill>
+                          <a:latin typeface="Calibri"/>
+                        </a:rPr>
+                        <a:t>4%</a:t>
+                      </a:r>
+                    </a:p>
+                  </a:txBody>
+                  <a:tcPr>
+                    <a:solidFill>
+                      <a:srgbClr val="EFF3FA"/>
+                    </a:solidFill>
+                  </a:tcPr>
+                </a:tc>
+              </a:tr>
+              <a:tr h="224028">
+                <a:tc>
+                  <a:txBody>
+                    <a:bodyPr/>
+                    <a:lstStyle/>
+                    <a:p>
+                      <a:r>
+                        <a:rPr sz="850" b="1">
+                          <a:latin typeface="Calibri"/>
+                        </a:rPr>
+                        <a:t>pcg</a:t>
+                      </a:r>
+                    </a:p>
+                  </a:txBody>
+                  <a:tcPr>
+                    <a:solidFill>
+                      <a:srgbClr val="FFFFFF"/>
+                    </a:solidFill>
+                  </a:tcPr>
+                </a:tc>
+                <a:tc>
+                  <a:txBody>
+                    <a:bodyPr/>
+                    <a:lstStyle/>
+                    <a:p>
+                      <a:r>
+                        <a:rPr sz="850" b="0">
+                          <a:latin typeface="Calibri"/>
+                        </a:rPr>
+                        <a:t>1349</a:t>
+                      </a:r>
+                    </a:p>
+                  </a:txBody>
+                  <a:tcPr>
+                    <a:solidFill>
+                      <a:srgbClr val="FFFFFF"/>
+                    </a:solidFill>
+                  </a:tcPr>
+                </a:tc>
+                <a:tc>
+                  <a:txBody>
+                    <a:bodyPr/>
+                    <a:lstStyle/>
+                    <a:p>
+                      <a:r>
+                        <a:rPr sz="850" b="0">
+                          <a:latin typeface="Calibri"/>
+                        </a:rPr>
+                        <a:t>1391</a:t>
+                      </a:r>
+                    </a:p>
+                  </a:txBody>
+                  <a:tcPr>
+                    <a:solidFill>
+                      <a:srgbClr val="FFFFFF"/>
+                    </a:solidFill>
+                  </a:tcPr>
+                </a:tc>
+                <a:tc>
+                  <a:txBody>
+                    <a:bodyPr/>
+                    <a:lstStyle/>
+                    <a:p>
+                      <a:r>
+                        <a:rPr sz="850" b="0">
+                          <a:solidFill>
+                            <a:srgbClr val="187A33"/>
+                          </a:solidFill>
+                          <a:latin typeface="Calibri"/>
+                        </a:rPr>
+                        <a:t>3%</a:t>
+                      </a:r>
+                    </a:p>
+                  </a:txBody>
+                  <a:tcPr>
+                    <a:solidFill>
+                      <a:srgbClr val="FFFFFF"/>
+                    </a:solidFill>
+                  </a:tcPr>
+                </a:tc>
+              </a:tr>
+              <a:tr h="224028">
+                <a:tc>
+                  <a:txBody>
+                    <a:bodyPr/>
+                    <a:lstStyle/>
+                    <a:p>
+                      <a:r>
+                        <a:rPr sz="850" b="1">
+                          <a:latin typeface="Calibri"/>
+                        </a:rPr>
+                        <a:t>pacman</a:t>
+                      </a:r>
+                    </a:p>
+                  </a:txBody>
+                  <a:tcPr>
+                    <a:solidFill>
+                      <a:srgbClr val="EFF3FA"/>
+                    </a:solidFill>
+                  </a:tcPr>
+                </a:tc>
+                <a:tc>
+                  <a:txBody>
+                    <a:bodyPr/>
+                    <a:lstStyle/>
+                    <a:p>
+                      <a:r>
+                        <a:rPr sz="850" b="0">
+                          <a:latin typeface="Calibri"/>
+                        </a:rPr>
+                        <a:t>1343</a:t>
+                      </a:r>
+                    </a:p>
+                  </a:txBody>
+                  <a:tcPr>
+                    <a:solidFill>
+                      <a:srgbClr val="EFF3FA"/>
+                    </a:solidFill>
+                  </a:tcPr>
+                </a:tc>
+                <a:tc>
+                  <a:txBody>
+                    <a:bodyPr/>
+                    <a:lstStyle/>
+                    <a:p>
+                      <a:r>
+                        <a:rPr sz="850" b="0">
+                          <a:latin typeface="Calibri"/>
+                        </a:rPr>
+                        <a:t>1380</a:t>
+                      </a:r>
+                    </a:p>
+                  </a:txBody>
+                  <a:tcPr>
+                    <a:solidFill>
+                      <a:srgbClr val="EFF3FA"/>
+                    </a:solidFill>
+                  </a:tcPr>
+                </a:tc>
+                <a:tc>
+                  <a:txBody>
+                    <a:bodyPr/>
+                    <a:lstStyle/>
+                    <a:p>
+                      <a:r>
+                        <a:rPr sz="850" b="0">
+                          <a:solidFill>
+                            <a:srgbClr val="187A33"/>
+                          </a:solidFill>
+                          <a:latin typeface="Calibri"/>
+                        </a:rPr>
+                        <a:t>3%</a:t>
+                      </a:r>
+                    </a:p>
+                  </a:txBody>
+                  <a:tcPr>
+                    <a:solidFill>
+                      <a:srgbClr val="EFF3FA"/>
+                    </a:solidFill>
+                  </a:tcPr>
+                </a:tc>
+              </a:tr>
+              <a:tr h="224028">
+                <a:tc>
+                  <a:txBody>
+                    <a:bodyPr/>
+                    <a:lstStyle/>
+                    <a:p>
+                      <a:r>
+                        <a:rPr sz="850" b="1">
+                          <a:latin typeface="Calibri"/>
+                        </a:rPr>
+                        <a:t>parson</a:t>
+                      </a:r>
+                    </a:p>
+                  </a:txBody>
+                  <a:tcPr>
+                    <a:solidFill>
+                      <a:srgbClr val="FFFFFF"/>
+                    </a:solidFill>
+                  </a:tcPr>
+                </a:tc>
+                <a:tc>
+                  <a:txBody>
+                    <a:bodyPr/>
+                    <a:lstStyle/>
+                    <a:p>
+                      <a:r>
+                        <a:rPr sz="850" b="0">
+                          <a:latin typeface="Calibri"/>
+                        </a:rPr>
+                        <a:t>1339</a:t>
+                      </a:r>
+                    </a:p>
+                  </a:txBody>
+                  <a:tcPr>
+                    <a:solidFill>
+                      <a:srgbClr val="FFFFFF"/>
+                    </a:solidFill>
+                  </a:tcPr>
+                </a:tc>
+                <a:tc>
+                  <a:txBody>
+                    <a:bodyPr/>
+                    <a:lstStyle/>
+                    <a:p>
+                      <a:r>
+                        <a:rPr sz="850" b="0">
+                          <a:latin typeface="Calibri"/>
+                        </a:rPr>
+                        <a:t>1371</a:t>
+                      </a:r>
+                    </a:p>
+                  </a:txBody>
+                  <a:tcPr>
+                    <a:solidFill>
+                      <a:srgbClr val="FFFFFF"/>
+                    </a:solidFill>
+                  </a:tcPr>
+                </a:tc>
+                <a:tc>
+                  <a:txBody>
+                    <a:bodyPr/>
+                    <a:lstStyle/>
+                    <a:p>
+                      <a:r>
+                        <a:rPr sz="850" b="0">
+                          <a:solidFill>
+                            <a:srgbClr val="187A33"/>
+                          </a:solidFill>
+                          <a:latin typeface="Calibri"/>
+                        </a:rPr>
+                        <a:t>2%</a:t>
+                      </a:r>
+                    </a:p>
+                  </a:txBody>
+                  <a:tcPr>
+                    <a:solidFill>
+                      <a:srgbClr val="FFFFFF"/>
+                    </a:solidFill>
+                  </a:tcPr>
+                </a:tc>
+              </a:tr>
+              <a:tr h="224028">
+                <a:tc>
+                  <a:txBody>
+                    <a:bodyPr/>
+                    <a:lstStyle/>
+                    <a:p>
+                      <a:r>
+                        <a:rPr sz="850" b="1">
+                          <a:latin typeface="Calibri"/>
+                        </a:rPr>
+                        <a:t>bb-grep</a:t>
+                      </a:r>
+                    </a:p>
+                  </a:txBody>
+                  <a:tcPr>
+                    <a:solidFill>
+                      <a:srgbClr val="EFF3FA"/>
+                    </a:solidFill>
+                  </a:tcPr>
+                </a:tc>
+                <a:tc>
+                  <a:txBody>
+                    <a:bodyPr/>
+                    <a:lstStyle/>
+                    <a:p>
+                      <a:r>
+                        <a:rPr sz="850" b="0">
+                          <a:latin typeface="Calibri"/>
+                        </a:rPr>
+                        <a:t>1347</a:t>
+                      </a:r>
+                    </a:p>
+                  </a:txBody>
+                  <a:tcPr>
+                    <a:solidFill>
+                      <a:srgbClr val="EFF3FA"/>
+                    </a:solidFill>
+                  </a:tcPr>
+                </a:tc>
+                <a:tc>
+                  <a:txBody>
+                    <a:bodyPr/>
+                    <a:lstStyle/>
+                    <a:p>
+                      <a:r>
+                        <a:rPr sz="850" b="0">
+                          <a:latin typeface="Calibri"/>
+                        </a:rPr>
+                        <a:t>1369</a:t>
+                      </a:r>
+                    </a:p>
+                  </a:txBody>
+                  <a:tcPr>
+                    <a:solidFill>
+                      <a:srgbClr val="EFF3FA"/>
+                    </a:solidFill>
+                  </a:tcPr>
+                </a:tc>
+                <a:tc>
+                  <a:txBody>
+                    <a:bodyPr/>
+                    <a:lstStyle/>
+                    <a:p>
+                      <a:r>
+                        <a:rPr sz="850" b="0">
+                          <a:solidFill>
+                            <a:srgbClr val="187A33"/>
+                          </a:solidFill>
+                          <a:latin typeface="Calibri"/>
+                        </a:rPr>
+                        <a:t>2%</a:t>
+                      </a:r>
+                    </a:p>
+                  </a:txBody>
+                  <a:tcPr>
+                    <a:solidFill>
+                      <a:srgbClr val="EFF3FA"/>
+                    </a:solidFill>
+                  </a:tcPr>
+                </a:tc>
+              </a:tr>
+              <a:tr h="224028">
+                <a:tc>
+                  <a:txBody>
+                    <a:bodyPr/>
+                    <a:lstStyle/>
+                    <a:p>
+                      <a:r>
+                        <a:rPr sz="850" b="1">
+                          <a:latin typeface="Calibri"/>
+                        </a:rPr>
+                        <a:t>httpp</a:t>
+                      </a:r>
+                    </a:p>
+                  </a:txBody>
+                  <a:tcPr>
+                    <a:solidFill>
+                      <a:srgbClr val="FFFFFF"/>
+                    </a:solidFill>
+                  </a:tcPr>
+                </a:tc>
+                <a:tc>
+                  <a:txBody>
+                    <a:bodyPr/>
+                    <a:lstStyle/>
+                    <a:p>
+                      <a:r>
+                        <a:rPr sz="850" b="0">
+                          <a:latin typeface="Calibri"/>
+                        </a:rPr>
+                        <a:t>1360</a:t>
+                      </a:r>
+                    </a:p>
+                  </a:txBody>
+                  <a:tcPr>
+                    <a:solidFill>
+                      <a:srgbClr val="FFFFFF"/>
+                    </a:solidFill>
+                  </a:tcPr>
+                </a:tc>
+                <a:tc>
+                  <a:txBody>
+                    <a:bodyPr/>
+                    <a:lstStyle/>
+                    <a:p>
+                      <a:r>
+                        <a:rPr sz="850" b="0">
+                          <a:latin typeface="Calibri"/>
+                        </a:rPr>
+                        <a:t>1364</a:t>
+                      </a:r>
+                    </a:p>
+                  </a:txBody>
+                  <a:tcPr>
+                    <a:solidFill>
+                      <a:srgbClr val="FFFFFF"/>
+                    </a:solidFill>
+                  </a:tcPr>
+                </a:tc>
+                <a:tc>
+                  <a:txBody>
+                    <a:bodyPr/>
+                    <a:lstStyle/>
+                    <a:p>
+                      <a:r>
+                        <a:rPr sz="850" b="0">
+                          <a:solidFill>
+                            <a:srgbClr val="187A33"/>
+                          </a:solidFill>
+                          <a:latin typeface="Calibri"/>
+                        </a:rPr>
+                        <a:t>0%</a:t>
+                      </a:r>
+                    </a:p>
+                  </a:txBody>
+                  <a:tcPr>
+                    <a:solidFill>
+                      <a:srgbClr val="FFFFFF"/>
+                    </a:solidFill>
+                  </a:tcPr>
+                </a:tc>
+              </a:tr>
+              <a:tr h="224028">
+                <a:tc>
+                  <a:txBody>
+                    <a:bodyPr/>
+                    <a:lstStyle/>
+                    <a:p>
+                      <a:r>
+                        <a:rPr sz="850" b="1">
+                          <a:latin typeface="Calibri"/>
+                        </a:rPr>
+                        <a:t>pacman-big</a:t>
+                      </a:r>
+                    </a:p>
+                  </a:txBody>
+                  <a:tcPr>
+                    <a:solidFill>
+                      <a:srgbClr val="EFF3FA"/>
+                    </a:solidFill>
+                  </a:tcPr>
+                </a:tc>
+                <a:tc>
+                  <a:txBody>
+                    <a:bodyPr/>
+                    <a:lstStyle/>
+                    <a:p>
+                      <a:r>
+                        <a:rPr sz="850" b="0">
+                          <a:latin typeface="Calibri"/>
+                        </a:rPr>
+                        <a:t>1343</a:t>
+                      </a:r>
+                    </a:p>
+                  </a:txBody>
+                  <a:tcPr>
+                    <a:solidFill>
+                      <a:srgbClr val="EFF3FA"/>
+                    </a:solidFill>
+                  </a:tcPr>
+                </a:tc>
+                <a:tc>
+                  <a:txBody>
+                    <a:bodyPr/>
+                    <a:lstStyle/>
+                    <a:p>
+                      <a:r>
+                        <a:rPr sz="850" b="0">
+                          <a:latin typeface="Calibri"/>
+                        </a:rPr>
+                        <a:t>1361</a:t>
+                      </a:r>
+                    </a:p>
+                  </a:txBody>
+                  <a:tcPr>
+                    <a:solidFill>
+                      <a:srgbClr val="EFF3FA"/>
+                    </a:solidFill>
+                  </a:tcPr>
+                </a:tc>
+                <a:tc>
+                  <a:txBody>
+                    <a:bodyPr/>
+                    <a:lstStyle/>
+                    <a:p>
+                      <a:r>
+                        <a:rPr sz="850" b="0">
+                          <a:solidFill>
+                            <a:srgbClr val="187A33"/>
+                          </a:solidFill>
+                          <a:latin typeface="Calibri"/>
+                        </a:rPr>
+                        <a:t>1%</a:t>
+                      </a:r>
+                    </a:p>
+                  </a:txBody>
+                  <a:tcPr>
+                    <a:solidFill>
+                      <a:srgbClr val="EFF3FA"/>
+                    </a:solidFill>
+                  </a:tcPr>
+                </a:tc>
+              </a:tr>
+              <a:tr h="224028">
+                <a:tc>
+                  <a:txBody>
+                    <a:bodyPr/>
+                    <a:lstStyle/>
+                    <a:p>
+                      <a:r>
+                        <a:rPr sz="850" b="1">
+                          <a:latin typeface="Calibri"/>
+                        </a:rPr>
+                        <a:t>rd-ray</a:t>
+                      </a:r>
+                    </a:p>
+                  </a:txBody>
+                  <a:tcPr>
+                    <a:solidFill>
+                      <a:srgbClr val="FFFFFF"/>
+                    </a:solidFill>
+                  </a:tcPr>
+                </a:tc>
+                <a:tc>
+                  <a:txBody>
+                    <a:bodyPr/>
+                    <a:lstStyle/>
+                    <a:p>
+                      <a:r>
+                        <a:rPr sz="850" b="0">
+                          <a:latin typeface="Calibri"/>
+                        </a:rPr>
+                        <a:t>1289</a:t>
+                      </a:r>
+                    </a:p>
+                  </a:txBody>
+                  <a:tcPr>
+                    <a:solidFill>
+                      <a:srgbClr val="FFFFFF"/>
+                    </a:solidFill>
+                  </a:tcPr>
+                </a:tc>
+                <a:tc>
+                  <a:txBody>
+                    <a:bodyPr/>
+                    <a:lstStyle/>
+                    <a:p>
+                      <a:r>
+                        <a:rPr sz="850" b="0">
+                          <a:latin typeface="Calibri"/>
+                        </a:rPr>
+                        <a:t>1354</a:t>
+                      </a:r>
+                    </a:p>
+                  </a:txBody>
+                  <a:tcPr>
+                    <a:solidFill>
+                      <a:srgbClr val="FFFFFF"/>
+                    </a:solidFill>
+                  </a:tcPr>
+                </a:tc>
+                <a:tc>
+                  <a:txBody>
+                    <a:bodyPr/>
+                    <a:lstStyle/>
+                    <a:p>
+                      <a:r>
+                        <a:rPr sz="850" b="0">
+                          <a:solidFill>
+                            <a:srgbClr val="187A33"/>
+                          </a:solidFill>
+                          <a:latin typeface="Calibri"/>
+                        </a:rPr>
+                        <a:t>5%</a:t>
+                      </a:r>
+                    </a:p>
+                  </a:txBody>
+                  <a:tcPr>
+                    <a:solidFill>
+                      <a:srgbClr val="FFFFFF"/>
+                    </a:solidFill>
+                  </a:tcPr>
+                </a:tc>
+              </a:tr>
+              <a:tr h="224028">
+                <a:tc>
+                  <a:txBody>
+                    <a:bodyPr/>
+                    <a:lstStyle/>
+                    <a:p>
+                      <a:r>
+                        <a:rPr sz="850" b="1">
+                          <a:latin typeface="Calibri"/>
+                        </a:rPr>
+                        <a:t>tommath</a:t>
+                      </a:r>
+                    </a:p>
+                  </a:txBody>
+                  <a:tcPr>
+                    <a:solidFill>
+                      <a:srgbClr val="EFF3FA"/>
+                    </a:solidFill>
+                  </a:tcPr>
+                </a:tc>
+                <a:tc>
+                  <a:txBody>
+                    <a:bodyPr/>
+                    <a:lstStyle/>
+                    <a:p>
+                      <a:r>
+                        <a:rPr sz="850" b="0">
+                          <a:latin typeface="Calibri"/>
+                        </a:rPr>
+                        <a:t>1324</a:t>
+                      </a:r>
+                    </a:p>
+                  </a:txBody>
+                  <a:tcPr>
+                    <a:solidFill>
+                      <a:srgbClr val="EFF3FA"/>
+                    </a:solidFill>
+                  </a:tcPr>
+                </a:tc>
+                <a:tc>
+                  <a:txBody>
+                    <a:bodyPr/>
+                    <a:lstStyle/>
+                    <a:p>
+                      <a:r>
+                        <a:rPr sz="850" b="0">
+                          <a:latin typeface="Calibri"/>
+                        </a:rPr>
+                        <a:t>1344</a:t>
+                      </a:r>
+                    </a:p>
+                  </a:txBody>
+                  <a:tcPr>
+                    <a:solidFill>
+                      <a:srgbClr val="EFF3FA"/>
+                    </a:solidFill>
+                  </a:tcPr>
+                </a:tc>
+                <a:tc>
+                  <a:txBody>
+                    <a:bodyPr/>
+                    <a:lstStyle/>
+                    <a:p>
+                      <a:r>
+                        <a:rPr sz="850" b="0">
+                          <a:solidFill>
+                            <a:srgbClr val="187A33"/>
+                          </a:solidFill>
+                          <a:latin typeface="Calibri"/>
+                        </a:rPr>
+                        <a:t>2%</a:t>
+                      </a:r>
+                    </a:p>
+                  </a:txBody>
+                  <a:tcPr>
+                    <a:solidFill>
+                      <a:srgbClr val="EFF3FA"/>
+                    </a:solidFill>
+                  </a:tcPr>
+                </a:tc>
+              </a:tr>
+              <a:tr h="224028">
+                <a:tc>
+                  <a:txBody>
+                    <a:bodyPr/>
+                    <a:lstStyle/>
+                    <a:p>
+                      <a:r>
+                        <a:rPr sz="850" b="1">
+                          <a:latin typeface="Calibri"/>
+                        </a:rPr>
+                        <a:t>alu</a:t>
+                      </a:r>
+                    </a:p>
+                  </a:txBody>
+                  <a:tcPr>
+                    <a:solidFill>
+                      <a:srgbClr val="FFFFFF"/>
+                    </a:solidFill>
+                  </a:tcPr>
+                </a:tc>
+                <a:tc>
+                  <a:txBody>
+                    <a:bodyPr/>
+                    <a:lstStyle/>
+                    <a:p>
+                      <a:r>
+                        <a:rPr sz="850" b="0">
+                          <a:latin typeface="Calibri"/>
+                        </a:rPr>
+                        <a:t>1342</a:t>
+                      </a:r>
+                    </a:p>
+                  </a:txBody>
+                  <a:tcPr>
+                    <a:solidFill>
+                      <a:srgbClr val="FFFFFF"/>
+                    </a:solidFill>
+                  </a:tcPr>
+                </a:tc>
+                <a:tc>
+                  <a:txBody>
+                    <a:bodyPr/>
+                    <a:lstStyle/>
+                    <a:p>
+                      <a:r>
+                        <a:rPr sz="850" b="0">
+                          <a:latin typeface="Calibri"/>
+                        </a:rPr>
+                        <a:t>1338</a:t>
+                      </a:r>
+                    </a:p>
+                  </a:txBody>
+                  <a:tcPr>
+                    <a:solidFill>
+                      <a:srgbClr val="FFFFFF"/>
+                    </a:solidFill>
+                  </a:tcPr>
+                </a:tc>
+                <a:tc>
+                  <a:txBody>
+                    <a:bodyPr/>
+                    <a:lstStyle/>
+                    <a:p>
+                      <a:r>
+                        <a:rPr sz="850" b="0">
+                          <a:solidFill>
+                            <a:srgbClr val="187A33"/>
+                          </a:solidFill>
+                          <a:latin typeface="Calibri"/>
+                        </a:rPr>
+                        <a:t>0%</a:t>
+                      </a:r>
+                    </a:p>
+                  </a:txBody>
+                  <a:tcPr>
+                    <a:solidFill>
+                      <a:srgbClr val="FFFFFF"/>
+                    </a:solidFill>
+                  </a:tcPr>
+                </a:tc>
+              </a:tr>
+              <a:tr h="224028">
+                <a:tc>
+                  <a:txBody>
+                    <a:bodyPr/>
+                    <a:lstStyle/>
+                    <a:p>
+                      <a:r>
+                        <a:rPr sz="850" b="1">
+                          <a:latin typeface="Calibri"/>
+                        </a:rPr>
+                        <a:t>chase</a:t>
+                      </a:r>
+                    </a:p>
+                  </a:txBody>
+                  <a:tcPr>
+                    <a:solidFill>
+                      <a:srgbClr val="EFF3FA"/>
+                    </a:solidFill>
+                  </a:tcPr>
+                </a:tc>
+                <a:tc>
+                  <a:txBody>
+                    <a:bodyPr/>
+                    <a:lstStyle/>
+                    <a:p>
+                      <a:r>
+                        <a:rPr sz="850" b="0">
+                          <a:latin typeface="Calibri"/>
+                        </a:rPr>
+                        <a:t>1304</a:t>
+                      </a:r>
+                    </a:p>
+                  </a:txBody>
+                  <a:tcPr>
+                    <a:solidFill>
+                      <a:srgbClr val="EFF3FA"/>
+                    </a:solidFill>
+                  </a:tcPr>
+                </a:tc>
+                <a:tc>
+                  <a:txBody>
+                    <a:bodyPr/>
+                    <a:lstStyle/>
+                    <a:p>
+                      <a:r>
+                        <a:rPr sz="850" b="0">
+                          <a:latin typeface="Calibri"/>
+                        </a:rPr>
+                        <a:t>1297</a:t>
+                      </a:r>
+                    </a:p>
+                  </a:txBody>
+                  <a:tcPr>
+                    <a:solidFill>
+                      <a:srgbClr val="EFF3FA"/>
+                    </a:solidFill>
+                  </a:tcPr>
+                </a:tc>
+                <a:tc>
+                  <a:txBody>
+                    <a:bodyPr/>
+                    <a:lstStyle/>
+                    <a:p>
+                      <a:r>
+                        <a:rPr sz="850" b="0">
+                          <a:solidFill>
+                            <a:srgbClr val="187A33"/>
+                          </a:solidFill>
+                          <a:latin typeface="Calibri"/>
+                        </a:rPr>
+                        <a:t>0%</a:t>
+                      </a:r>
+                    </a:p>
+                  </a:txBody>
+                  <a:tcPr>
+                    <a:solidFill>
+                      <a:srgbClr val="EFF3FA"/>
+                    </a:solidFill>
+                  </a:tcPr>
+                </a:tc>
+              </a:tr>
+              <a:tr h="224028">
+                <a:tc>
+                  <a:txBody>
+                    <a:bodyPr/>
+                    <a:lstStyle/>
+                    <a:p>
+                      <a:r>
+                        <a:rPr sz="850" b="1">
+                          <a:latin typeface="Calibri"/>
+                        </a:rPr>
+                        <a:t>chase-big</a:t>
+                      </a:r>
+                    </a:p>
+                  </a:txBody>
+                  <a:tcPr>
+                    <a:solidFill>
+                      <a:srgbClr val="FFFFFF"/>
+                    </a:solidFill>
+                  </a:tcPr>
+                </a:tc>
+                <a:tc>
+                  <a:txBody>
+                    <a:bodyPr/>
+                    <a:lstStyle/>
+                    <a:p>
+                      <a:r>
+                        <a:rPr sz="850" b="0">
+                          <a:latin typeface="Calibri"/>
+                        </a:rPr>
+                        <a:t>1306</a:t>
+                      </a:r>
+                    </a:p>
+                  </a:txBody>
+                  <a:tcPr>
+                    <a:solidFill>
+                      <a:srgbClr val="FFFFFF"/>
+                    </a:solidFill>
+                  </a:tcPr>
+                </a:tc>
+                <a:tc>
+                  <a:txBody>
+                    <a:bodyPr/>
+                    <a:lstStyle/>
+                    <a:p>
+                      <a:r>
+                        <a:rPr sz="850" b="0">
+                          <a:latin typeface="Calibri"/>
+                        </a:rPr>
+                        <a:t>1279</a:t>
+                      </a:r>
+                    </a:p>
+                  </a:txBody>
+                  <a:tcPr>
+                    <a:solidFill>
+                      <a:srgbClr val="FFFFFF"/>
+                    </a:solidFill>
+                  </a:tcPr>
+                </a:tc>
+                <a:tc>
+                  <a:txBody>
+                    <a:bodyPr/>
+                    <a:lstStyle/>
+                    <a:p>
+                      <a:r>
+                        <a:rPr sz="850" b="0">
+                          <a:solidFill>
+                            <a:srgbClr val="187A33"/>
+                          </a:solidFill>
+                          <a:latin typeface="Calibri"/>
+                        </a:rPr>
+                        <a:t>2%</a:t>
+                      </a:r>
+                    </a:p>
+                  </a:txBody>
+                  <a:tcPr>
+                    <a:solidFill>
+                      <a:srgbClr val="FFFFFF"/>
+                    </a:solidFill>
+                  </a:tcPr>
+                </a:tc>
+              </a:tr>
+            </a:tbl>
+          </a:graphicData>
+        </a:graphic>
+      </p:graphicFrame>
       <p:sp>
         <p:nvSpPr>
-          <p:cNvPr id="10" name="Rounded Rectangle 9"/>
+          <p:cNvPr id="12" name="Rounded Rectangle 11"/>
           <p:cNvSpPr/>
           <p:nvPr/>
         </p:nvSpPr>
         <p:spPr>
           <a:xfrm>
-            <a:off x="548640" y="3291840"/>
-            <a:ext cx="11064240" cy="1371600"/>
+            <a:off x="548640" y="5806440"/>
+            <a:ext cx="11064240" cy="566928"/>
           </a:xfrm>
           <a:prstGeom prst="roundRect">
             <a:avLst/>
@@ -8742,7 +12979,7 @@
           </a:solidFill>
           <a:ln w="19050">
             <a:solidFill>
-              <a:srgbClr val="B06000"/>
+              <a:srgbClr val="187A33"/>
             </a:solidFill>
           </a:ln>
         </p:spPr>
@@ -8770,13 +13007,13 @@
       </p:sp>
       <p:sp>
         <p:nvSpPr>
-          <p:cNvPr id="11" name="TextBox 10"/>
+          <p:cNvPr id="13" name="TextBox 12"/>
           <p:cNvSpPr txBox="1"/>
           <p:nvPr/>
         </p:nvSpPr>
         <p:spPr>
           <a:xfrm>
-            <a:off x="822960" y="3429000"/>
+            <a:off x="822960" y="5907024"/>
             <a:ext cx="10515600" cy="365760"/>
           </a:xfrm>
           <a:prstGeom prst="rect">
@@ -8792,83 +13029,13 @@
           <a:p>
             <a:pPr algn="l"/>
             <a:r>
-              <a:rPr sz="1400" b="1">
-                <a:solidFill>
-                  <a:srgbClr val="B06000"/>
-                </a:solidFill>
-                <a:latin typeface="Calibri"/>
-              </a:rPr>
-              <a:t>This is the assumption the prediction file flagged IN ADVANCE as most likely to hurt.</a:t>
-            </a:r>
-          </a:p>
-        </p:txBody>
-      </p:sp>
-      <p:sp>
-        <p:nvSpPr>
-          <p:cNvPr id="12" name="TextBox 11"/>
-          <p:cNvSpPr txBox="1"/>
-          <p:nvPr/>
-        </p:nvSpPr>
-        <p:spPr>
-          <a:xfrm>
-            <a:off x="822960" y="3840480"/>
-            <a:ext cx="10515600" cy="685800"/>
-          </a:xfrm>
-          <a:prstGeom prst="rect">
-            <a:avLst/>
-          </a:prstGeom>
-          <a:noFill/>
-        </p:spPr>
-        <p:txBody>
-          <a:bodyPr wrap="square">
-            <a:spAutoFit/>
-          </a:bodyPr>
-          <a:lstStyle/>
-          <a:p>
-            <a:pPr algn="l"/>
-            <a:r>
-              <a:rPr sz="1150" b="0">
-                <a:solidFill>
-                  <a:srgbClr val="202124"/>
-                </a:solidFill>
-                <a:latin typeface="Calibri"/>
-              </a:rPr>
-              <a:t>ALU Mops/s was taken as insns/3, because the calibration grid's "ALU op" was a 3-instruction mul/add/eor body. For stalling code that proxy badly overstates real ALU work, so vdd_arm is over-predicted. Naming it before the run turns a 52% outlier from an embarrassment into a diagnosis — and points at the fix.</a:t>
-            </a:r>
-          </a:p>
-        </p:txBody>
-      </p:sp>
-      <p:sp>
-        <p:nvSpPr>
-          <p:cNvPr id="13" name="TextBox 12"/>
-          <p:cNvSpPr txBox="1"/>
-          <p:nvPr/>
-        </p:nvSpPr>
-        <p:spPr>
-          <a:xfrm>
-            <a:off x="548640" y="4937760"/>
-            <a:ext cx="11064240" cy="365760"/>
-          </a:xfrm>
-          <a:prstGeom prst="rect">
-            <a:avLst/>
-          </a:prstGeom>
-          <a:noFill/>
-        </p:spPr>
-        <p:txBody>
-          <a:bodyPr wrap="square">
-            <a:spAutoFit/>
-          </a:bodyPr>
-          <a:lstStyle/>
-          <a:p>
-            <a:pPr algn="l"/>
-            <a:r>
-              <a:rPr sz="1200" b="1">
+              <a:rPr sz="1300" b="1">
                 <a:solidFill>
                   <a:srgbClr val="187A33"/>
                 </a:solidFill>
                 <a:latin typeface="Calibri"/>
               </a:rPr>
-              <a:t>Fix: replace the insns/3 proxy with a stall-aware term. QEMU's activity vector already carries the cache-miss and DRAM-transaction counts needed to build one.</a:t>
+              <a:t>44 of 50 within 8%   ·   6 between 8 and 12%   ·   0 above 12%   —   mW predicted vs mW measured, on silicon the model never trained on.</a:t>
             </a:r>
           </a:p>
         </p:txBody>
@@ -8964,7 +13131,7 @@
                 </a:solidFill>
                 <a:latin typeface="Calibri"/>
               </a:rPr>
-              <a:t>What this licenses, and what it does not</a:t>
+              <a:t>A realistic edge workload — all six cores busy</a:t>
             </a:r>
           </a:p>
         </p:txBody>
@@ -9042,7 +13209,7 @@
                 </a:solidFill>
                 <a:latin typeface="Calibri"/>
               </a:rPr>
-              <a:t>The trust statement, quantity by quantity.</a:t>
+              <a:t>Perception, inference, storage, networking, imaging, rendering. Running at the same time, as a product would.</a:t>
             </a:r>
           </a:p>
         </p:txBody>
@@ -9077,7 +13244,7 @@
                 </a:solidFill>
                 <a:latin typeface="Calibri"/>
               </a:rPr>
-              <a:t>wattson power · rails MEASURED on IMX95LPD5EVK-19 (NXP BCU) · activity DERIVED from QEMU TCG · 2026-09-10</a:t>
+              <a:t>wattson power · rails MEASURED on IMX95LPD5EVK-19 (NXP BCU) · A55 die 40–41 °C under load · activity DERIVED from QEMU TCG · 2026-09-10</a:t>
             </a:r>
           </a:p>
         </p:txBody>
@@ -9117,6 +13284,1475 @@
           </a:p>
         </p:txBody>
       </p:sp>
+      <p:sp>
+        <p:nvSpPr>
+          <p:cNvPr id="8" name="Rectangle 7"/>
+          <p:cNvSpPr/>
+          <p:nvPr/>
+        </p:nvSpPr>
+        <p:spPr>
+          <a:xfrm>
+            <a:off x="548640" y="1417320"/>
+            <a:ext cx="11064240" cy="621792"/>
+          </a:xfrm>
+          <a:prstGeom prst="rect">
+            <a:avLst/>
+          </a:prstGeom>
+          <a:solidFill>
+            <a:srgbClr val="187A33"/>
+          </a:solidFill>
+          <a:ln>
+            <a:noFill/>
+          </a:ln>
+        </p:spPr>
+        <p:style>
+          <a:lnRef idx="1">
+            <a:schemeClr val="accent1"/>
+          </a:lnRef>
+          <a:fillRef idx="3">
+            <a:schemeClr val="accent1"/>
+          </a:fillRef>
+          <a:effectRef idx="2">
+            <a:schemeClr val="accent1"/>
+          </a:effectRef>
+          <a:fontRef idx="minor">
+            <a:schemeClr val="lt1"/>
+          </a:fontRef>
+        </p:style>
+        <p:txBody>
+          <a:bodyPr rtlCol="0" anchor="ctr"/>
+          <a:lstStyle/>
+          <a:p>
+            <a:pPr algn="ctr"/>
+          </a:p>
+        </p:txBody>
+      </p:sp>
+      <p:sp>
+        <p:nvSpPr>
+          <p:cNvPr id="9" name="TextBox 8"/>
+          <p:cNvSpPr txBox="1"/>
+          <p:nvPr/>
+        </p:nvSpPr>
+        <p:spPr>
+          <a:xfrm>
+            <a:off x="822960" y="1508760"/>
+            <a:ext cx="10607040" cy="402336"/>
+          </a:xfrm>
+          <a:prstGeom prst="rect">
+            <a:avLst/>
+          </a:prstGeom>
+          <a:noFill/>
+        </p:spPr>
+        <p:txBody>
+          <a:bodyPr wrap="square">
+            <a:spAutoFit/>
+          </a:bodyPr>
+          <a:lstStyle/>
+          <a:p>
+            <a:pPr algn="l"/>
+            <a:r>
+              <a:rPr sz="1800" b="1">
+                <a:solidFill>
+                  <a:srgbClr val="FFFFFF"/>
+                </a:solidFill>
+                <a:latin typeface="Calibri"/>
+              </a:rPr>
+              <a:t>2.7% mean error, 3.9% worst — better than one application at a time.</a:t>
+            </a:r>
+          </a:p>
+        </p:txBody>
+      </p:sp>
+      <p:graphicFrame>
+        <p:nvGraphicFramePr>
+          <p:cNvPr id="10" name="Table 9"/>
+          <p:cNvGraphicFramePr>
+            <a:graphicFrameLocks noGrp="1"/>
+          </p:cNvGraphicFramePr>
+          <p:nvPr/>
+        </p:nvGraphicFramePr>
+        <p:xfrm>
+          <a:off x="548640" y="2240280"/>
+          <a:ext cx="11064240" cy="1682496"/>
+        </p:xfrm>
+        <a:graphic>
+          <a:graphicData uri="http://schemas.openxmlformats.org/drawingml/2006/table">
+            <a:tbl>
+              <a:tblPr firstRow="1" bandRow="1">
+                <a:tableStyleId>{5C22544A-7EE6-4342-B048-85BDC9FD1C3A}</a:tableStyleId>
+              </a:tblPr>
+              <a:tblGrid>
+                <a:gridCol w="2651760"/>
+                <a:gridCol w="4572000"/>
+                <a:gridCol w="777240"/>
+                <a:gridCol w="1051560"/>
+                <a:gridCol w="1051560"/>
+                <a:gridCol w="960120"/>
+              </a:tblGrid>
+              <a:tr h="420624">
+                <a:tc>
+                  <a:txBody>
+                    <a:bodyPr/>
+                    <a:lstStyle/>
+                    <a:p>
+                      <a:r>
+                        <a:rPr sz="1150" b="1">
+                          <a:solidFill>
+                            <a:srgbClr val="FFFFFF"/>
+                          </a:solidFill>
+                          <a:latin typeface="Calibri"/>
+                        </a:rPr>
+                        <a:t>what it is</a:t>
+                      </a:r>
+                    </a:p>
+                  </a:txBody>
+                  <a:tcPr>
+                    <a:solidFill>
+                      <a:srgbClr val="202124"/>
+                    </a:solidFill>
+                  </a:tcPr>
+                </a:tc>
+                <a:tc>
+                  <a:txBody>
+                    <a:bodyPr/>
+                    <a:lstStyle/>
+                    <a:p>
+                      <a:r>
+                        <a:rPr sz="1150" b="1">
+                          <a:solidFill>
+                            <a:srgbClr val="FFFFFF"/>
+                          </a:solidFill>
+                          <a:latin typeface="Calibri"/>
+                        </a:rPr>
+                        <a:t>applications running concurrently</a:t>
+                      </a:r>
+                    </a:p>
+                  </a:txBody>
+                  <a:tcPr>
+                    <a:solidFill>
+                      <a:srgbClr val="202124"/>
+                    </a:solidFill>
+                  </a:tcPr>
+                </a:tc>
+                <a:tc>
+                  <a:txBody>
+                    <a:bodyPr/>
+                    <a:lstStyle/>
+                    <a:p>
+                      <a:r>
+                        <a:rPr sz="1150" b="1">
+                          <a:solidFill>
+                            <a:srgbClr val="FFFFFF"/>
+                          </a:solidFill>
+                          <a:latin typeface="Calibri"/>
+                        </a:rPr>
+                        <a:t>cores</a:t>
+                      </a:r>
+                    </a:p>
+                  </a:txBody>
+                  <a:tcPr>
+                    <a:solidFill>
+                      <a:srgbClr val="202124"/>
+                    </a:solidFill>
+                  </a:tcPr>
+                </a:tc>
+                <a:tc>
+                  <a:txBody>
+                    <a:bodyPr/>
+                    <a:lstStyle/>
+                    <a:p>
+                      <a:r>
+                        <a:rPr sz="1150" b="1">
+                          <a:solidFill>
+                            <a:srgbClr val="FFFFFF"/>
+                          </a:solidFill>
+                          <a:latin typeface="Calibri"/>
+                        </a:rPr>
+                        <a:t>pred mW</a:t>
+                      </a:r>
+                    </a:p>
+                  </a:txBody>
+                  <a:tcPr>
+                    <a:solidFill>
+                      <a:srgbClr val="202124"/>
+                    </a:solidFill>
+                  </a:tcPr>
+                </a:tc>
+                <a:tc>
+                  <a:txBody>
+                    <a:bodyPr/>
+                    <a:lstStyle/>
+                    <a:p>
+                      <a:r>
+                        <a:rPr sz="1150" b="1">
+                          <a:solidFill>
+                            <a:srgbClr val="FFFFFF"/>
+                          </a:solidFill>
+                          <a:latin typeface="Calibri"/>
+                        </a:rPr>
+                        <a:t>meas mW</a:t>
+                      </a:r>
+                    </a:p>
+                  </a:txBody>
+                  <a:tcPr>
+                    <a:solidFill>
+                      <a:srgbClr val="202124"/>
+                    </a:solidFill>
+                  </a:tcPr>
+                </a:tc>
+                <a:tc>
+                  <a:txBody>
+                    <a:bodyPr/>
+                    <a:lstStyle/>
+                    <a:p>
+                      <a:r>
+                        <a:rPr sz="1150" b="1">
+                          <a:solidFill>
+                            <a:srgbClr val="FFFFFF"/>
+                          </a:solidFill>
+                          <a:latin typeface="Calibri"/>
+                        </a:rPr>
+                        <a:t>err</a:t>
+                      </a:r>
+                    </a:p>
+                  </a:txBody>
+                  <a:tcPr>
+                    <a:solidFill>
+                      <a:srgbClr val="202124"/>
+                    </a:solidFill>
+                  </a:tcPr>
+                </a:tc>
+              </a:tr>
+              <a:tr h="420624">
+                <a:tc>
+                  <a:txBody>
+                    <a:bodyPr/>
+                    <a:lstStyle/>
+                    <a:p>
+                      <a:r>
+                        <a:rPr sz="1150" b="1">
+                          <a:latin typeface="Calibri"/>
+                        </a:rPr>
+                        <a:t>AI + vision</a:t>
+                      </a:r>
+                    </a:p>
+                  </a:txBody>
+                  <a:tcPr>
+                    <a:solidFill>
+                      <a:srgbClr val="EFF3FA"/>
+                    </a:solidFill>
+                  </a:tcPr>
+                </a:tc>
+                <a:tc>
+                  <a:txBody>
+                    <a:bodyPr/>
+                    <a:lstStyle/>
+                    <a:p>
+                      <a:r>
+                        <a:rPr sz="1150" b="0">
+                          <a:latin typeface="Calibri"/>
+                        </a:rPr>
+                        <a:t>pacman  +  sgm stereo</a:t>
+                      </a:r>
+                    </a:p>
+                  </a:txBody>
+                  <a:tcPr>
+                    <a:solidFill>
+                      <a:srgbClr val="EFF3FA"/>
+                    </a:solidFill>
+                  </a:tcPr>
+                </a:tc>
+                <a:tc>
+                  <a:txBody>
+                    <a:bodyPr/>
+                    <a:lstStyle/>
+                    <a:p>
+                      <a:r>
+                        <a:rPr sz="1150" b="0">
+                          <a:latin typeface="Calibri"/>
+                        </a:rPr>
+                        <a:t>2</a:t>
+                      </a:r>
+                    </a:p>
+                  </a:txBody>
+                  <a:tcPr>
+                    <a:solidFill>
+                      <a:srgbClr val="EFF3FA"/>
+                    </a:solidFill>
+                  </a:tcPr>
+                </a:tc>
+                <a:tc>
+                  <a:txBody>
+                    <a:bodyPr/>
+                    <a:lstStyle/>
+                    <a:p>
+                      <a:r>
+                        <a:rPr sz="1150" b="0">
+                          <a:latin typeface="Calibri"/>
+                        </a:rPr>
+                        <a:t>1684</a:t>
+                      </a:r>
+                    </a:p>
+                  </a:txBody>
+                  <a:tcPr>
+                    <a:solidFill>
+                      <a:srgbClr val="EFF3FA"/>
+                    </a:solidFill>
+                  </a:tcPr>
+                </a:tc>
+                <a:tc>
+                  <a:txBody>
+                    <a:bodyPr/>
+                    <a:lstStyle/>
+                    <a:p>
+                      <a:r>
+                        <a:rPr sz="1150" b="0">
+                          <a:latin typeface="Calibri"/>
+                        </a:rPr>
+                        <a:t>1747</a:t>
+                      </a:r>
+                    </a:p>
+                  </a:txBody>
+                  <a:tcPr>
+                    <a:solidFill>
+                      <a:srgbClr val="EFF3FA"/>
+                    </a:solidFill>
+                  </a:tcPr>
+                </a:tc>
+                <a:tc>
+                  <a:txBody>
+                    <a:bodyPr/>
+                    <a:lstStyle/>
+                    <a:p>
+                      <a:r>
+                        <a:rPr sz="1150" b="1">
+                          <a:solidFill>
+                            <a:srgbClr val="187A33"/>
+                          </a:solidFill>
+                          <a:latin typeface="Calibri"/>
+                        </a:rPr>
+                        <a:t>3.6%</a:t>
+                      </a:r>
+                    </a:p>
+                  </a:txBody>
+                  <a:tcPr>
+                    <a:solidFill>
+                      <a:srgbClr val="EFF3FA"/>
+                    </a:solidFill>
+                  </a:tcPr>
+                </a:tc>
+              </a:tr>
+              <a:tr h="420624">
+                <a:tc>
+                  <a:txBody>
+                    <a:bodyPr/>
+                    <a:lstStyle/>
+                    <a:p>
+                      <a:r>
+                        <a:rPr sz="1150" b="1">
+                          <a:latin typeface="Calibri"/>
+                        </a:rPr>
+                        <a:t>AI + vision + DB + net</a:t>
+                      </a:r>
+                    </a:p>
+                  </a:txBody>
+                  <a:tcPr>
+                    <a:solidFill>
+                      <a:srgbClr val="FFFFFF"/>
+                    </a:solidFill>
+                  </a:tcPr>
+                </a:tc>
+                <a:tc>
+                  <a:txBody>
+                    <a:bodyPr/>
+                    <a:lstStyle/>
+                    <a:p>
+                      <a:r>
+                        <a:rPr sz="1150" b="0">
+                          <a:latin typeface="Calibri"/>
+                        </a:rPr>
+                        <a:t>pacman  +  sgm  +  sqlite  +  httpp</a:t>
+                      </a:r>
+                    </a:p>
+                  </a:txBody>
+                  <a:tcPr>
+                    <a:solidFill>
+                      <a:srgbClr val="FFFFFF"/>
+                    </a:solidFill>
+                  </a:tcPr>
+                </a:tc>
+                <a:tc>
+                  <a:txBody>
+                    <a:bodyPr/>
+                    <a:lstStyle/>
+                    <a:p>
+                      <a:r>
+                        <a:rPr sz="1150" b="0">
+                          <a:latin typeface="Calibri"/>
+                        </a:rPr>
+                        <a:t>4</a:t>
+                      </a:r>
+                    </a:p>
+                  </a:txBody>
+                  <a:tcPr>
+                    <a:solidFill>
+                      <a:srgbClr val="FFFFFF"/>
+                    </a:solidFill>
+                  </a:tcPr>
+                </a:tc>
+                <a:tc>
+                  <a:txBody>
+                    <a:bodyPr/>
+                    <a:lstStyle/>
+                    <a:p>
+                      <a:r>
+                        <a:rPr sz="1150" b="0">
+                          <a:latin typeface="Calibri"/>
+                        </a:rPr>
+                        <a:t>2205</a:t>
+                      </a:r>
+                    </a:p>
+                  </a:txBody>
+                  <a:tcPr>
+                    <a:solidFill>
+                      <a:srgbClr val="FFFFFF"/>
+                    </a:solidFill>
+                  </a:tcPr>
+                </a:tc>
+                <a:tc>
+                  <a:txBody>
+                    <a:bodyPr/>
+                    <a:lstStyle/>
+                    <a:p>
+                      <a:r>
+                        <a:rPr sz="1150" b="0">
+                          <a:latin typeface="Calibri"/>
+                        </a:rPr>
+                        <a:t>2220</a:t>
+                      </a:r>
+                    </a:p>
+                  </a:txBody>
+                  <a:tcPr>
+                    <a:solidFill>
+                      <a:srgbClr val="FFFFFF"/>
+                    </a:solidFill>
+                  </a:tcPr>
+                </a:tc>
+                <a:tc>
+                  <a:txBody>
+                    <a:bodyPr/>
+                    <a:lstStyle/>
+                    <a:p>
+                      <a:r>
+                        <a:rPr sz="1150" b="1">
+                          <a:solidFill>
+                            <a:srgbClr val="187A33"/>
+                          </a:solidFill>
+                          <a:latin typeface="Calibri"/>
+                        </a:rPr>
+                        <a:t>0.7%</a:t>
+                      </a:r>
+                    </a:p>
+                  </a:txBody>
+                  <a:tcPr>
+                    <a:solidFill>
+                      <a:srgbClr val="FFFFFF"/>
+                    </a:solidFill>
+                  </a:tcPr>
+                </a:tc>
+              </a:tr>
+              <a:tr h="420624">
+                <a:tc>
+                  <a:txBody>
+                    <a:bodyPr/>
+                    <a:lstStyle/>
+                    <a:p>
+                      <a:r>
+                        <a:rPr sz="1150" b="1">
+                          <a:latin typeface="Calibri"/>
+                        </a:rPr>
+                        <a:t>full edge stack, every core</a:t>
+                      </a:r>
+                    </a:p>
+                  </a:txBody>
+                  <a:tcPr>
+                    <a:solidFill>
+                      <a:srgbClr val="EFF3FA"/>
+                    </a:solidFill>
+                  </a:tcPr>
+                </a:tc>
+                <a:tc>
+                  <a:txBody>
+                    <a:bodyPr/>
+                    <a:lstStyle/>
+                    <a:p>
+                      <a:r>
+                        <a:rPr sz="1150" b="0">
+                          <a:latin typeface="Calibri"/>
+                        </a:rPr>
+                        <a:t>pacman  +  sgm  +  sqlite  +  httpp  +  qoi  +  ray</a:t>
+                      </a:r>
+                    </a:p>
+                  </a:txBody>
+                  <a:tcPr>
+                    <a:solidFill>
+                      <a:srgbClr val="EFF3FA"/>
+                    </a:solidFill>
+                  </a:tcPr>
+                </a:tc>
+                <a:tc>
+                  <a:txBody>
+                    <a:bodyPr/>
+                    <a:lstStyle/>
+                    <a:p>
+                      <a:r>
+                        <a:rPr sz="1150" b="0">
+                          <a:latin typeface="Calibri"/>
+                        </a:rPr>
+                        <a:t>6</a:t>
+                      </a:r>
+                    </a:p>
+                  </a:txBody>
+                  <a:tcPr>
+                    <a:solidFill>
+                      <a:srgbClr val="EFF3FA"/>
+                    </a:solidFill>
+                  </a:tcPr>
+                </a:tc>
+                <a:tc>
+                  <a:txBody>
+                    <a:bodyPr/>
+                    <a:lstStyle/>
+                    <a:p>
+                      <a:r>
+                        <a:rPr sz="1150" b="0">
+                          <a:latin typeface="Calibri"/>
+                        </a:rPr>
+                        <a:t>2680</a:t>
+                      </a:r>
+                    </a:p>
+                  </a:txBody>
+                  <a:tcPr>
+                    <a:solidFill>
+                      <a:srgbClr val="EFF3FA"/>
+                    </a:solidFill>
+                  </a:tcPr>
+                </a:tc>
+                <a:tc>
+                  <a:txBody>
+                    <a:bodyPr/>
+                    <a:lstStyle/>
+                    <a:p>
+                      <a:r>
+                        <a:rPr sz="1150" b="0">
+                          <a:latin typeface="Calibri"/>
+                        </a:rPr>
+                        <a:t>2579</a:t>
+                      </a:r>
+                    </a:p>
+                  </a:txBody>
+                  <a:tcPr>
+                    <a:solidFill>
+                      <a:srgbClr val="EFF3FA"/>
+                    </a:solidFill>
+                  </a:tcPr>
+                </a:tc>
+                <a:tc>
+                  <a:txBody>
+                    <a:bodyPr/>
+                    <a:lstStyle/>
+                    <a:p>
+                      <a:r>
+                        <a:rPr sz="1150" b="1">
+                          <a:solidFill>
+                            <a:srgbClr val="187A33"/>
+                          </a:solidFill>
+                          <a:latin typeface="Calibri"/>
+                        </a:rPr>
+                        <a:t>3.9%</a:t>
+                      </a:r>
+                    </a:p>
+                  </a:txBody>
+                  <a:tcPr>
+                    <a:solidFill>
+                      <a:srgbClr val="EFF3FA"/>
+                    </a:solidFill>
+                  </a:tcPr>
+                </a:tc>
+              </a:tr>
+            </a:tbl>
+          </a:graphicData>
+        </a:graphic>
+      </p:graphicFrame>
+      <p:sp>
+        <p:nvSpPr>
+          <p:cNvPr id="11" name="TextBox 10"/>
+          <p:cNvSpPr txBox="1"/>
+          <p:nvPr/>
+        </p:nvSpPr>
+        <p:spPr>
+          <a:xfrm>
+            <a:off x="548640" y="3968496"/>
+            <a:ext cx="11064240" cy="329184"/>
+          </a:xfrm>
+          <a:prstGeom prst="rect">
+            <a:avLst/>
+          </a:prstGeom>
+          <a:noFill/>
+        </p:spPr>
+        <p:txBody>
+          <a:bodyPr wrap="square">
+            <a:spAutoFit/>
+          </a:bodyPr>
+          <a:lstStyle/>
+          <a:p>
+            <a:pPr algn="l"/>
+            <a:r>
+              <a:rPr sz="1050" b="0">
+                <a:solidFill>
+                  <a:srgbClr val="5F6368"/>
+                </a:solidFill>
+                <a:latin typeface="Calibri"/>
+              </a:rPr>
+              <a:t>pacman = genetic-AI trainer  ·  sgm = stereo-vision disparity on real imagery  ·  sqlite = in-memory OLTP  ·  httpp = HTTP parsing  ·  qoi = image codec  ·  ray = ray tracer</a:t>
+            </a:r>
+          </a:p>
+        </p:txBody>
+      </p:sp>
+      <p:sp>
+        <p:nvSpPr>
+          <p:cNvPr id="12" name="TextBox 11"/>
+          <p:cNvSpPr txBox="1"/>
+          <p:nvPr/>
+        </p:nvSpPr>
+        <p:spPr>
+          <a:xfrm>
+            <a:off x="548640" y="4389120"/>
+            <a:ext cx="11064240" cy="292608"/>
+          </a:xfrm>
+          <a:prstGeom prst="rect">
+            <a:avLst/>
+          </a:prstGeom>
+          <a:noFill/>
+        </p:spPr>
+        <p:txBody>
+          <a:bodyPr wrap="square">
+            <a:spAutoFit/>
+          </a:bodyPr>
+          <a:lstStyle/>
+          <a:p>
+            <a:pPr algn="l"/>
+            <a:r>
+              <a:rPr sz="1100" b="1">
+                <a:solidFill>
+                  <a:srgbClr val="202124"/>
+                </a:solidFill>
+                <a:latin typeface="Calibri"/>
+              </a:rPr>
+              <a:t>Controls — synthetic and benchmark mixes over the same core counts:</a:t>
+            </a:r>
+          </a:p>
+        </p:txBody>
+      </p:sp>
+      <p:graphicFrame>
+        <p:nvGraphicFramePr>
+          <p:cNvPr id="13" name="Table 12"/>
+          <p:cNvGraphicFramePr>
+            <a:graphicFrameLocks noGrp="1"/>
+          </p:cNvGraphicFramePr>
+          <p:nvPr/>
+        </p:nvGraphicFramePr>
+        <p:xfrm>
+          <a:off x="548640" y="4700016"/>
+          <a:ext cx="11064240" cy="1389888"/>
+        </p:xfrm>
+        <a:graphic>
+          <a:graphicData uri="http://schemas.openxmlformats.org/drawingml/2006/table">
+            <a:tbl>
+              <a:tblPr firstRow="1" bandRow="1">
+                <a:tableStyleId>{5C22544A-7EE6-4342-B048-85BDC9FD1C3A}</a:tableStyleId>
+              </a:tblPr>
+              <a:tblGrid>
+                <a:gridCol w="2651760"/>
+                <a:gridCol w="4572000"/>
+                <a:gridCol w="777240"/>
+                <a:gridCol w="1051560"/>
+                <a:gridCol w="1051560"/>
+                <a:gridCol w="960120"/>
+              </a:tblGrid>
+              <a:tr h="347472">
+                <a:tc>
+                  <a:txBody>
+                    <a:bodyPr/>
+                    <a:lstStyle/>
+                    <a:p>
+                      <a:r>
+                        <a:rPr sz="1050" b="1">
+                          <a:solidFill>
+                            <a:srgbClr val="FFFFFF"/>
+                          </a:solidFill>
+                          <a:latin typeface="Calibri"/>
+                        </a:rPr>
+                        <a:t>what it is</a:t>
+                      </a:r>
+                    </a:p>
+                  </a:txBody>
+                  <a:tcPr>
+                    <a:solidFill>
+                      <a:srgbClr val="202124"/>
+                    </a:solidFill>
+                  </a:tcPr>
+                </a:tc>
+                <a:tc>
+                  <a:txBody>
+                    <a:bodyPr/>
+                    <a:lstStyle/>
+                    <a:p>
+                      <a:r>
+                        <a:rPr sz="1050" b="1">
+                          <a:solidFill>
+                            <a:srgbClr val="FFFFFF"/>
+                          </a:solidFill>
+                          <a:latin typeface="Calibri"/>
+                        </a:rPr>
+                        <a:t>applications running concurrently</a:t>
+                      </a:r>
+                    </a:p>
+                  </a:txBody>
+                  <a:tcPr>
+                    <a:solidFill>
+                      <a:srgbClr val="202124"/>
+                    </a:solidFill>
+                  </a:tcPr>
+                </a:tc>
+                <a:tc>
+                  <a:txBody>
+                    <a:bodyPr/>
+                    <a:lstStyle/>
+                    <a:p>
+                      <a:r>
+                        <a:rPr sz="1050" b="1">
+                          <a:solidFill>
+                            <a:srgbClr val="FFFFFF"/>
+                          </a:solidFill>
+                          <a:latin typeface="Calibri"/>
+                        </a:rPr>
+                        <a:t>cores</a:t>
+                      </a:r>
+                    </a:p>
+                  </a:txBody>
+                  <a:tcPr>
+                    <a:solidFill>
+                      <a:srgbClr val="202124"/>
+                    </a:solidFill>
+                  </a:tcPr>
+                </a:tc>
+                <a:tc>
+                  <a:txBody>
+                    <a:bodyPr/>
+                    <a:lstStyle/>
+                    <a:p>
+                      <a:r>
+                        <a:rPr sz="1050" b="1">
+                          <a:solidFill>
+                            <a:srgbClr val="FFFFFF"/>
+                          </a:solidFill>
+                          <a:latin typeface="Calibri"/>
+                        </a:rPr>
+                        <a:t>pred mW</a:t>
+                      </a:r>
+                    </a:p>
+                  </a:txBody>
+                  <a:tcPr>
+                    <a:solidFill>
+                      <a:srgbClr val="202124"/>
+                    </a:solidFill>
+                  </a:tcPr>
+                </a:tc>
+                <a:tc>
+                  <a:txBody>
+                    <a:bodyPr/>
+                    <a:lstStyle/>
+                    <a:p>
+                      <a:r>
+                        <a:rPr sz="1050" b="1">
+                          <a:solidFill>
+                            <a:srgbClr val="FFFFFF"/>
+                          </a:solidFill>
+                          <a:latin typeface="Calibri"/>
+                        </a:rPr>
+                        <a:t>meas mW</a:t>
+                      </a:r>
+                    </a:p>
+                  </a:txBody>
+                  <a:tcPr>
+                    <a:solidFill>
+                      <a:srgbClr val="202124"/>
+                    </a:solidFill>
+                  </a:tcPr>
+                </a:tc>
+                <a:tc>
+                  <a:txBody>
+                    <a:bodyPr/>
+                    <a:lstStyle/>
+                    <a:p>
+                      <a:r>
+                        <a:rPr sz="1050" b="1">
+                          <a:solidFill>
+                            <a:srgbClr val="FFFFFF"/>
+                          </a:solidFill>
+                          <a:latin typeface="Calibri"/>
+                        </a:rPr>
+                        <a:t>err</a:t>
+                      </a:r>
+                    </a:p>
+                  </a:txBody>
+                  <a:tcPr>
+                    <a:solidFill>
+                      <a:srgbClr val="202124"/>
+                    </a:solidFill>
+                  </a:tcPr>
+                </a:tc>
+              </a:tr>
+              <a:tr h="347472">
+                <a:tc>
+                  <a:txBody>
+                    <a:bodyPr/>
+                    <a:lstStyle/>
+                    <a:p>
+                      <a:r>
+                        <a:rPr sz="1050" b="1">
+                          <a:latin typeface="Calibri"/>
+                        </a:rPr>
+                        <a:t>compute + streaming</a:t>
+                      </a:r>
+                    </a:p>
+                  </a:txBody>
+                  <a:tcPr>
+                    <a:solidFill>
+                      <a:srgbClr val="EFF3FA"/>
+                    </a:solidFill>
+                  </a:tcPr>
+                </a:tc>
+                <a:tc>
+                  <a:txBody>
+                    <a:bodyPr/>
+                    <a:lstStyle/>
+                    <a:p>
+                      <a:r>
+                        <a:rPr sz="1050" b="0">
+                          <a:latin typeface="Calibri"/>
+                        </a:rPr>
+                        <a:t>sha256  +  mem</a:t>
+                      </a:r>
+                    </a:p>
+                  </a:txBody>
+                  <a:tcPr>
+                    <a:solidFill>
+                      <a:srgbClr val="EFF3FA"/>
+                    </a:solidFill>
+                  </a:tcPr>
+                </a:tc>
+                <a:tc>
+                  <a:txBody>
+                    <a:bodyPr/>
+                    <a:lstStyle/>
+                    <a:p>
+                      <a:r>
+                        <a:rPr sz="1050" b="0">
+                          <a:latin typeface="Calibri"/>
+                        </a:rPr>
+                        <a:t>2</a:t>
+                      </a:r>
+                    </a:p>
+                  </a:txBody>
+                  <a:tcPr>
+                    <a:solidFill>
+                      <a:srgbClr val="EFF3FA"/>
+                    </a:solidFill>
+                  </a:tcPr>
+                </a:tc>
+                <a:tc>
+                  <a:txBody>
+                    <a:bodyPr/>
+                    <a:lstStyle/>
+                    <a:p>
+                      <a:r>
+                        <a:rPr sz="1050" b="0">
+                          <a:latin typeface="Calibri"/>
+                        </a:rPr>
+                        <a:t>1878</a:t>
+                      </a:r>
+                    </a:p>
+                  </a:txBody>
+                  <a:tcPr>
+                    <a:solidFill>
+                      <a:srgbClr val="EFF3FA"/>
+                    </a:solidFill>
+                  </a:tcPr>
+                </a:tc>
+                <a:tc>
+                  <a:txBody>
+                    <a:bodyPr/>
+                    <a:lstStyle/>
+                    <a:p>
+                      <a:r>
+                        <a:rPr sz="1050" b="0">
+                          <a:latin typeface="Calibri"/>
+                        </a:rPr>
+                        <a:t>2056</a:t>
+                      </a:r>
+                    </a:p>
+                  </a:txBody>
+                  <a:tcPr>
+                    <a:solidFill>
+                      <a:srgbClr val="EFF3FA"/>
+                    </a:solidFill>
+                  </a:tcPr>
+                </a:tc>
+                <a:tc>
+                  <a:txBody>
+                    <a:bodyPr/>
+                    <a:lstStyle/>
+                    <a:p>
+                      <a:r>
+                        <a:rPr sz="1050" b="1">
+                          <a:solidFill>
+                            <a:srgbClr val="B06000"/>
+                          </a:solidFill>
+                          <a:latin typeface="Calibri"/>
+                        </a:rPr>
+                        <a:t>8.7%</a:t>
+                      </a:r>
+                    </a:p>
+                  </a:txBody>
+                  <a:tcPr>
+                    <a:solidFill>
+                      <a:srgbClr val="EFF3FA"/>
+                    </a:solidFill>
+                  </a:tcPr>
+                </a:tc>
+              </a:tr>
+              <a:tr h="347472">
+                <a:tc>
+                  <a:txBody>
+                    <a:bodyPr/>
+                    <a:lstStyle/>
+                    <a:p>
+                      <a:r>
+                        <a:rPr sz="1050" b="1">
+                          <a:latin typeface="Calibri"/>
+                        </a:rPr>
+                        <a:t>core scaling control</a:t>
+                      </a:r>
+                    </a:p>
+                  </a:txBody>
+                  <a:tcPr>
+                    <a:solidFill>
+                      <a:srgbClr val="FFFFFF"/>
+                    </a:solidFill>
+                  </a:tcPr>
+                </a:tc>
+                <a:tc>
+                  <a:txBody>
+                    <a:bodyPr/>
+                    <a:lstStyle/>
+                    <a:p>
+                      <a:r>
+                        <a:rPr sz="1050" b="0">
+                          <a:latin typeface="Calibri"/>
+                        </a:rPr>
+                        <a:t>4 x sha256</a:t>
+                      </a:r>
+                    </a:p>
+                  </a:txBody>
+                  <a:tcPr>
+                    <a:solidFill>
+                      <a:srgbClr val="FFFFFF"/>
+                    </a:solidFill>
+                  </a:tcPr>
+                </a:tc>
+                <a:tc>
+                  <a:txBody>
+                    <a:bodyPr/>
+                    <a:lstStyle/>
+                    <a:p>
+                      <a:r>
+                        <a:rPr sz="1050" b="0">
+                          <a:latin typeface="Calibri"/>
+                        </a:rPr>
+                        <a:t>4</a:t>
+                      </a:r>
+                    </a:p>
+                  </a:txBody>
+                  <a:tcPr>
+                    <a:solidFill>
+                      <a:srgbClr val="FFFFFF"/>
+                    </a:solidFill>
+                  </a:tcPr>
+                </a:tc>
+                <a:tc>
+                  <a:txBody>
+                    <a:bodyPr/>
+                    <a:lstStyle/>
+                    <a:p>
+                      <a:r>
+                        <a:rPr sz="1050" b="0">
+                          <a:latin typeface="Calibri"/>
+                        </a:rPr>
+                        <a:t>2307</a:t>
+                      </a:r>
+                    </a:p>
+                  </a:txBody>
+                  <a:tcPr>
+                    <a:solidFill>
+                      <a:srgbClr val="FFFFFF"/>
+                    </a:solidFill>
+                  </a:tcPr>
+                </a:tc>
+                <a:tc>
+                  <a:txBody>
+                    <a:bodyPr/>
+                    <a:lstStyle/>
+                    <a:p>
+                      <a:r>
+                        <a:rPr sz="1050" b="0">
+                          <a:latin typeface="Calibri"/>
+                        </a:rPr>
+                        <a:t>2183</a:t>
+                      </a:r>
+                    </a:p>
+                  </a:txBody>
+                  <a:tcPr>
+                    <a:solidFill>
+                      <a:srgbClr val="FFFFFF"/>
+                    </a:solidFill>
+                  </a:tcPr>
+                </a:tc>
+                <a:tc>
+                  <a:txBody>
+                    <a:bodyPr/>
+                    <a:lstStyle/>
+                    <a:p>
+                      <a:r>
+                        <a:rPr sz="1050" b="1">
+                          <a:solidFill>
+                            <a:srgbClr val="187A33"/>
+                          </a:solidFill>
+                          <a:latin typeface="Calibri"/>
+                        </a:rPr>
+                        <a:t>5.7%</a:t>
+                      </a:r>
+                    </a:p>
+                  </a:txBody>
+                  <a:tcPr>
+                    <a:solidFill>
+                      <a:srgbClr val="FFFFFF"/>
+                    </a:solidFill>
+                  </a:tcPr>
+                </a:tc>
+              </a:tr>
+              <a:tr h="347472">
+                <a:tc>
+                  <a:txBody>
+                    <a:bodyPr/>
+                    <a:lstStyle/>
+                    <a:p>
+                      <a:r>
+                        <a:rPr sz="1050" b="1">
+                          <a:latin typeface="Calibri"/>
+                        </a:rPr>
+                        <a:t>mixed benchmarks</a:t>
+                      </a:r>
+                    </a:p>
+                  </a:txBody>
+                  <a:tcPr>
+                    <a:solidFill>
+                      <a:srgbClr val="EFF3FA"/>
+                    </a:solidFill>
+                  </a:tcPr>
+                </a:tc>
+                <a:tc>
+                  <a:txBody>
+                    <a:bodyPr/>
+                    <a:lstStyle/>
+                    <a:p>
+                      <a:r>
+                        <a:rPr sz="1050" b="0">
+                          <a:latin typeface="Calibri"/>
+                        </a:rPr>
+                        <a:t>sha256 + mem + lz4 + sqlite + lua + bzip2</a:t>
+                      </a:r>
+                    </a:p>
+                  </a:txBody>
+                  <a:tcPr>
+                    <a:solidFill>
+                      <a:srgbClr val="EFF3FA"/>
+                    </a:solidFill>
+                  </a:tcPr>
+                </a:tc>
+                <a:tc>
+                  <a:txBody>
+                    <a:bodyPr/>
+                    <a:lstStyle/>
+                    <a:p>
+                      <a:r>
+                        <a:rPr sz="1050" b="0">
+                          <a:latin typeface="Calibri"/>
+                        </a:rPr>
+                        <a:t>6</a:t>
+                      </a:r>
+                    </a:p>
+                  </a:txBody>
+                  <a:tcPr>
+                    <a:solidFill>
+                      <a:srgbClr val="EFF3FA"/>
+                    </a:solidFill>
+                  </a:tcPr>
+                </a:tc>
+                <a:tc>
+                  <a:txBody>
+                    <a:bodyPr/>
+                    <a:lstStyle/>
+                    <a:p>
+                      <a:r>
+                        <a:rPr sz="1050" b="0">
+                          <a:latin typeface="Calibri"/>
+                        </a:rPr>
+                        <a:t>2789</a:t>
+                      </a:r>
+                    </a:p>
+                  </a:txBody>
+                  <a:tcPr>
+                    <a:solidFill>
+                      <a:srgbClr val="EFF3FA"/>
+                    </a:solidFill>
+                  </a:tcPr>
+                </a:tc>
+                <a:tc>
+                  <a:txBody>
+                    <a:bodyPr/>
+                    <a:lstStyle/>
+                    <a:p>
+                      <a:r>
+                        <a:rPr sz="1050" b="0">
+                          <a:latin typeface="Calibri"/>
+                        </a:rPr>
+                        <a:t>2748</a:t>
+                      </a:r>
+                    </a:p>
+                  </a:txBody>
+                  <a:tcPr>
+                    <a:solidFill>
+                      <a:srgbClr val="EFF3FA"/>
+                    </a:solidFill>
+                  </a:tcPr>
+                </a:tc>
+                <a:tc>
+                  <a:txBody>
+                    <a:bodyPr/>
+                    <a:lstStyle/>
+                    <a:p>
+                      <a:r>
+                        <a:rPr sz="1050" b="1">
+                          <a:solidFill>
+                            <a:srgbClr val="187A33"/>
+                          </a:solidFill>
+                          <a:latin typeface="Calibri"/>
+                        </a:rPr>
+                        <a:t>1.5%</a:t>
+                      </a:r>
+                    </a:p>
+                  </a:txBody>
+                  <a:tcPr>
+                    <a:solidFill>
+                      <a:srgbClr val="EFF3FA"/>
+                    </a:solidFill>
+                  </a:tcPr>
+                </a:tc>
+              </a:tr>
+            </a:tbl>
+          </a:graphicData>
+        </a:graphic>
+      </p:graphicFrame>
+      <p:sp>
+        <p:nvSpPr>
+          <p:cNvPr id="14" name="TextBox 13"/>
+          <p:cNvSpPr txBox="1"/>
+          <p:nvPr/>
+        </p:nvSpPr>
+        <p:spPr>
+          <a:xfrm>
+            <a:off x="548640" y="6126480"/>
+            <a:ext cx="11064240" cy="310896"/>
+          </a:xfrm>
+          <a:prstGeom prst="rect">
+            <a:avLst/>
+          </a:prstGeom>
+          <a:noFill/>
+        </p:spPr>
+        <p:txBody>
+          <a:bodyPr wrap="square">
+            <a:spAutoFit/>
+          </a:bodyPr>
+          <a:lstStyle/>
+          <a:p>
+            <a:pPr algn="l"/>
+            <a:r>
+              <a:rPr sz="1050" b="0">
+                <a:solidFill>
+                  <a:srgbClr val="1A53A0"/>
+                </a:solidFill>
+                <a:latin typeface="Calibri"/>
+              </a:rPr>
+              <a:t>The realistic mixes run at 0.4–0.6 GB/s; the synthetic ones at 2.5–3.2 GB/s. Real applications live in cache far more than streaming benchmarks do — and the model covers both.</a:t>
+            </a:r>
+          </a:p>
+        </p:txBody>
+      </p:sp>
+    </p:spTree>
+  </p:cSld>
+  <p:clrMapOvr>
+    <a:masterClrMapping/>
+  </p:clrMapOvr>
+</p:sld>
+</file>
+
+<file path=ppt/slides/slide9.xml><?xml version="1.0" encoding="utf-8"?>
+<p:sld xmlns:a="http://schemas.openxmlformats.org/drawingml/2006/main" xmlns:p="http://schemas.openxmlformats.org/presentationml/2006/main" xmlns:r="http://schemas.openxmlformats.org/officeDocument/2006/relationships">
+  <p:cSld>
+    <p:spTree>
+      <p:nvGrpSpPr>
+        <p:cNvPr id="1" name=""/>
+        <p:cNvGrpSpPr/>
+        <p:nvPr/>
+      </p:nvGrpSpPr>
+      <p:grpSpPr/>
+      <p:sp>
+        <p:nvSpPr>
+          <p:cNvPr id="2" name="Rectangle 1"/>
+          <p:cNvSpPr/>
+          <p:nvPr/>
+        </p:nvSpPr>
+        <p:spPr>
+          <a:xfrm>
+            <a:off x="0" y="0"/>
+            <a:ext cx="12191695" cy="841248"/>
+          </a:xfrm>
+          <a:prstGeom prst="rect">
+            <a:avLst/>
+          </a:prstGeom>
+          <a:solidFill>
+            <a:srgbClr val="202124"/>
+          </a:solidFill>
+          <a:ln>
+            <a:noFill/>
+          </a:ln>
+        </p:spPr>
+        <p:style>
+          <a:lnRef idx="1">
+            <a:schemeClr val="accent1"/>
+          </a:lnRef>
+          <a:fillRef idx="3">
+            <a:schemeClr val="accent1"/>
+          </a:fillRef>
+          <a:effectRef idx="2">
+            <a:schemeClr val="accent1"/>
+          </a:effectRef>
+          <a:fontRef idx="minor">
+            <a:schemeClr val="lt1"/>
+          </a:fontRef>
+        </p:style>
+        <p:txBody>
+          <a:bodyPr rtlCol="0" anchor="ctr"/>
+          <a:lstStyle/>
+          <a:p>
+            <a:pPr algn="ctr"/>
+          </a:p>
+        </p:txBody>
+      </p:sp>
+      <p:sp>
+        <p:nvSpPr>
+          <p:cNvPr id="3" name="TextBox 2"/>
+          <p:cNvSpPr txBox="1"/>
+          <p:nvPr/>
+        </p:nvSpPr>
+        <p:spPr>
+          <a:xfrm>
+            <a:off x="548640" y="118872"/>
+            <a:ext cx="10607040" cy="548640"/>
+          </a:xfrm>
+          <a:prstGeom prst="rect">
+            <a:avLst/>
+          </a:prstGeom>
+          <a:noFill/>
+        </p:spPr>
+        <p:txBody>
+          <a:bodyPr wrap="square">
+            <a:spAutoFit/>
+          </a:bodyPr>
+          <a:lstStyle/>
+          <a:p>
+            <a:pPr algn="l"/>
+            <a:r>
+              <a:rPr sz="2600" b="1">
+                <a:solidFill>
+                  <a:srgbClr val="FFFFFF"/>
+                </a:solidFill>
+                <a:latin typeface="Calibri"/>
+              </a:rPr>
+              <a:t>What this licenses, and what it does not</a:t>
+            </a:r>
+          </a:p>
+        </p:txBody>
+      </p:sp>
+      <p:sp>
+        <p:nvSpPr>
+          <p:cNvPr id="4" name="Rectangle 3"/>
+          <p:cNvSpPr/>
+          <p:nvPr/>
+        </p:nvSpPr>
+        <p:spPr>
+          <a:xfrm>
+            <a:off x="0" y="841248"/>
+            <a:ext cx="12191695" cy="38100"/>
+          </a:xfrm>
+          <a:prstGeom prst="rect">
+            <a:avLst/>
+          </a:prstGeom>
+          <a:solidFill>
+            <a:srgbClr val="1A53A0"/>
+          </a:solidFill>
+          <a:ln>
+            <a:noFill/>
+          </a:ln>
+        </p:spPr>
+        <p:style>
+          <a:lnRef idx="1">
+            <a:schemeClr val="accent1"/>
+          </a:lnRef>
+          <a:fillRef idx="3">
+            <a:schemeClr val="accent1"/>
+          </a:fillRef>
+          <a:effectRef idx="2">
+            <a:schemeClr val="accent1"/>
+          </a:effectRef>
+          <a:fontRef idx="minor">
+            <a:schemeClr val="lt1"/>
+          </a:fontRef>
+        </p:style>
+        <p:txBody>
+          <a:bodyPr rtlCol="0" anchor="ctr"/>
+          <a:lstStyle/>
+          <a:p>
+            <a:pPr algn="ctr"/>
+          </a:p>
+        </p:txBody>
+      </p:sp>
+      <p:sp>
+        <p:nvSpPr>
+          <p:cNvPr id="5" name="TextBox 4"/>
+          <p:cNvSpPr txBox="1"/>
+          <p:nvPr/>
+        </p:nvSpPr>
+        <p:spPr>
+          <a:xfrm>
+            <a:off x="548640" y="969264"/>
+            <a:ext cx="11155680" cy="365760"/>
+          </a:xfrm>
+          <a:prstGeom prst="rect">
+            <a:avLst/>
+          </a:prstGeom>
+          <a:noFill/>
+        </p:spPr>
+        <p:txBody>
+          <a:bodyPr wrap="square">
+            <a:spAutoFit/>
+          </a:bodyPr>
+          <a:lstStyle/>
+          <a:p>
+            <a:pPr algn="l"/>
+            <a:r>
+              <a:rPr sz="1200" b="0">
+                <a:solidFill>
+                  <a:srgbClr val="5F6368"/>
+                </a:solidFill>
+                <a:latin typeface="Calibri"/>
+              </a:rPr>
+              <a:t>The trust statement, quantity by quantity.</a:t>
+            </a:r>
+          </a:p>
+        </p:txBody>
+      </p:sp>
+      <p:sp>
+        <p:nvSpPr>
+          <p:cNvPr id="6" name="TextBox 5"/>
+          <p:cNvSpPr txBox="1"/>
+          <p:nvPr/>
+        </p:nvSpPr>
+        <p:spPr>
+          <a:xfrm>
+            <a:off x="548640" y="6528816"/>
+            <a:ext cx="10424160" cy="274320"/>
+          </a:xfrm>
+          <a:prstGeom prst="rect">
+            <a:avLst/>
+          </a:prstGeom>
+          <a:noFill/>
+        </p:spPr>
+        <p:txBody>
+          <a:bodyPr wrap="square">
+            <a:spAutoFit/>
+          </a:bodyPr>
+          <a:lstStyle/>
+          <a:p>
+            <a:pPr algn="l"/>
+            <a:r>
+              <a:rPr sz="950" b="0">
+                <a:solidFill>
+                  <a:srgbClr val="5F6368"/>
+                </a:solidFill>
+                <a:latin typeface="Calibri"/>
+              </a:rPr>
+              <a:t>wattson power · rails MEASURED on IMX95LPD5EVK-19 (NXP BCU) · A55 die 40–41 °C under load · activity DERIVED from QEMU TCG · 2026-09-10</a:t>
+            </a:r>
+          </a:p>
+        </p:txBody>
+      </p:sp>
+      <p:sp>
+        <p:nvSpPr>
+          <p:cNvPr id="7" name="TextBox 6"/>
+          <p:cNvSpPr txBox="1"/>
+          <p:nvPr/>
+        </p:nvSpPr>
+        <p:spPr>
+          <a:xfrm>
+            <a:off x="11430000" y="6528816"/>
+            <a:ext cx="457200" cy="274320"/>
+          </a:xfrm>
+          <a:prstGeom prst="rect">
+            <a:avLst/>
+          </a:prstGeom>
+          <a:noFill/>
+        </p:spPr>
+        <p:txBody>
+          <a:bodyPr wrap="square">
+            <a:spAutoFit/>
+          </a:bodyPr>
+          <a:lstStyle/>
+          <a:p>
+            <a:pPr algn="r"/>
+            <a:r>
+              <a:rPr sz="950" b="0">
+                <a:solidFill>
+                  <a:srgbClr val="5F6368"/>
+                </a:solidFill>
+                <a:latin typeface="Calibri"/>
+              </a:rPr>
+              <a:t>9</a:t>
+            </a:r>
+          </a:p>
+        </p:txBody>
+      </p:sp>
       <p:graphicFrame>
         <p:nvGraphicFramePr>
           <p:cNvPr id="8" name="Table 7"/>
@@ -9127,7 +14763,7 @@
         </p:nvGraphicFramePr>
         <p:xfrm>
           <a:off x="548640" y="1463040"/>
-          <a:ext cx="11064240" cy="3364992"/>
+          <a:ext cx="11064240" cy="3785616"/>
         </p:xfrm>
         <a:graphic>
           <a:graphicData uri="http://schemas.openxmlformats.org/drawingml/2006/table">
@@ -9259,7 +14895,7 @@
                         <a:rPr sz="1100" b="0">
                           <a:latin typeface="Calibri"/>
                         </a:rPr>
-                        <a:t>5.3% mean, 16% worst, 50 held-out applications</a:t>
+                        <a:t>4.9% mean, 11% worst, 50 held-out applications</a:t>
                       </a:r>
                     </a:p>
                   </a:txBody>
@@ -9383,7 +15019,7 @@
                         <a:rPr sz="1100" b="0">
                           <a:latin typeface="Calibri"/>
                         </a:rPr>
-                        <a:t>~7% median</a:t>
+                        <a:t>7.1% median, 16.3% p90</a:t>
                       </a:r>
                     </a:p>
                   </a:txBody>
@@ -9445,7 +15081,7 @@
                         <a:rPr sz="1100" b="0">
                           <a:latin typeface="Calibri"/>
                         </a:rPr>
-                        <a:t>up to 52% over — the insns/3 proxy fails; fix identified</a:t>
+                        <a:t>up to 20% over — the insns/3 proxy overstates it</a:t>
                       </a:r>
                     </a:p>
                   </a:txBody>
@@ -9466,13 +15102,75 @@
                         <a:rPr sz="1100" b="1">
                           <a:latin typeface="Calibri"/>
                         </a:rPr>
+                        <a:t>predict a realistic multi-app mix</a:t>
+                      </a:r>
+                    </a:p>
+                  </a:txBody>
+                  <a:tcPr>
+                    <a:solidFill>
+                      <a:srgbClr val="EFF3FA"/>
+                    </a:solidFill>
+                  </a:tcPr>
+                </a:tc>
+                <a:tc>
+                  <a:txBody>
+                    <a:bodyPr/>
+                    <a:lstStyle/>
+                    <a:p>
+                      <a:r>
+                        <a:rPr sz="1100" b="1">
+                          <a:solidFill>
+                            <a:srgbClr val="187A33"/>
+                          </a:solidFill>
+                          <a:latin typeface="Calibri"/>
+                        </a:rPr>
+                        <a:t>YES</a:t>
+                      </a:r>
+                    </a:p>
+                  </a:txBody>
+                  <a:tcPr>
+                    <a:solidFill>
+                      <a:srgbClr val="EFF3FA"/>
+                    </a:solidFill>
+                  </a:tcPr>
+                </a:tc>
+                <a:tc>
+                  <a:txBody>
+                    <a:bodyPr/>
+                    <a:lstStyle/>
+                    <a:p>
+                      <a:r>
+                        <a:rPr sz="1100" b="0">
+                          <a:latin typeface="Calibri"/>
+                        </a:rPr>
+                        <a:t>2.7% mean on edge workloads; 6 apps on 6 cores, 3.9% worst</a:t>
+                      </a:r>
+                    </a:p>
+                  </a:txBody>
+                  <a:tcPr>
+                    <a:solidFill>
+                      <a:srgbClr val="EFF3FA"/>
+                    </a:solidFill>
+                  </a:tcPr>
+                </a:tc>
+              </a:tr>
+              <a:tr h="420624">
+                <a:tc>
+                  <a:txBody>
+                    <a:bodyPr/>
+                    <a:lstStyle/>
+                    <a:p>
+                      <a:r>
+                        <a:rPr sz="1100" b="1">
+                          <a:latin typeface="Calibri"/>
+                        </a:rPr>
                         <a:t>use these coefficients at another frequency</a:t>
                       </a:r>
                     </a:p>
                   </a:txBody>
                   <a:tcPr>
                     <a:solidFill>
-                      <a:srgbClr val="EFF3FA"/>
+                      <a:srgbClr val="FFFFFF"/>
                     </a:solidFill>
                   </a:tcPr>
                 </a:tc>
@@ -9494,7 +15192,7 @@
                   </a:txBody>
                   <a:tcPr>
                     <a:solidFill>
-                      <a:srgbClr val="EFF3FA"/>
+                      <a:srgbClr val="FFFFFF"/>
                     </a:solidFill>
                   </a:tcPr>
                 </a:tc>
@@ -9513,7 +15211,7 @@
                   </a:txBody>
                   <a:tcPr>
                     <a:solidFill>
-                      <a:srgbClr val="EFF3FA"/>
+                      <a:srgbClr val="FFFFFF"/>
                     </a:solidFill>
                   </a:tcPr>
                 </a:tc>
@@ -9534,7 +15232,7 @@
                   </a:txBody>
                   <a:tcPr>
                     <a:solidFill>
-                      <a:srgbClr val="FFFFFF"/>
+                      <a:srgbClr val="EFF3FA"/>
                     </a:solidFill>
                   </a:tcPr>
                 </a:tc>
@@ -9556,7 +15254,7 @@
                   </a:txBody>
                   <a:tcPr>
                     <a:solidFill>
-                      <a:srgbClr val="FFFFFF"/>
+                      <a:srgbClr val="EFF3FA"/>
                     </a:solidFill>
                   </a:tcPr>
                 </a:tc>
@@ -9575,7 +15273,7 @@
                   </a:txBody>
                   <a:tcPr>
                     <a:solidFill>
-                      <a:srgbClr val="FFFFFF"/>
+                      <a:srgbClr val="EFF3FA"/>
                     </a:solidFill>
                   </a:tcPr>
                 </a:tc>
@@ -9596,7 +15294,7 @@
                   </a:txBody>
                   <a:tcPr>
                     <a:solidFill>
-                      <a:srgbClr val="EFF3FA"/>
+                      <a:srgbClr val="FFFFFF"/>
                     </a:solidFill>
                   </a:tcPr>
                 </a:tc>
@@ -9618,7 +15316,7 @@
                   </a:txBody>
                   <a:tcPr>
                     <a:solidFill>
-                      <a:srgbClr val="EFF3FA"/>
+                      <a:srgbClr val="FFFFFF"/>
                     </a:solidFill>
                   </a:tcPr>
                 </a:tc>
@@ -9637,7 +15335,7 @@
                   </a:txBody>
                   <a:tcPr>
                     <a:solidFill>
-                      <a:srgbClr val="EFF3FA"/>
+                      <a:srgbClr val="FFFFFF"/>
                     </a:solidFill>
                   </a:tcPr>
                 </a:tc>

--- a/xcheck/wattson-power.pptx
+++ b/xcheck/wattson-power.pptx
@@ -3319,7 +3319,7 @@
                 </a:solidFill>
                 <a:latin typeface="Calibri"/>
               </a:rPr>
-              <a:t>RESULT: 4.9% mean error on total power, 50 real applications, predicted BLIND</a:t>
+              <a:t>RESULT: 6.4% mean error on total power, 50 real applications, predicted BLIND</a:t>
             </a:r>
           </a:p>
         </p:txBody>
@@ -3711,7 +3711,7 @@
                 </a:solidFill>
                 <a:latin typeface="Calibri"/>
               </a:rPr>
-              <a:t>YES — 4.9% on total power, blind, across 50 held-out applications.</a:t>
+              <a:t>YES — 6.4% on total power, blind, across 50 held-out applications.</a:t>
             </a:r>
           </a:p>
         </p:txBody>
@@ -3882,7 +3882,7 @@
                         <a:rPr sz="1200" b="1">
                           <a:latin typeface="Calibri"/>
                         </a:rPr>
-                        <a:t>4.5%</a:t>
+                        <a:t>4.1%</a:t>
                       </a:r>
                     </a:p>
                   </a:txBody>
@@ -3901,7 +3901,7 @@
                         <a:rPr sz="1200" b="0">
                           <a:latin typeface="Calibri"/>
                         </a:rPr>
-                        <a:t>6.8%</a:t>
+                        <a:t>5.9%</a:t>
                       </a:r>
                     </a:p>
                   </a:txBody>
@@ -3920,7 +3920,7 @@
                         <a:rPr sz="1200" b="0">
                           <a:latin typeface="Calibri"/>
                         </a:rPr>
-                        <a:t>8%</a:t>
+                        <a:t>7%</a:t>
                       </a:r>
                     </a:p>
                   </a:txBody>
@@ -3979,7 +3979,7 @@
                         <a:rPr sz="1200" b="1">
                           <a:latin typeface="Calibri"/>
                         </a:rPr>
-                        <a:t>7.7%</a:t>
+                        <a:t>11.4%</a:t>
                       </a:r>
                     </a:p>
                   </a:txBody>
@@ -3998,7 +3998,7 @@
                         <a:rPr sz="1200" b="0">
                           <a:latin typeface="Calibri"/>
                         </a:rPr>
-                        <a:t>16.3%</a:t>
+                        <a:t>19.1%</a:t>
                       </a:r>
                     </a:p>
                   </a:txBody>
@@ -4017,7 +4017,7 @@
                         <a:rPr sz="1200" b="0">
                           <a:latin typeface="Calibri"/>
                         </a:rPr>
-                        <a:t>20%</a:t>
+                        <a:t>25%</a:t>
                       </a:r>
                     </a:p>
                   </a:txBody>
@@ -4076,7 +4076,7 @@
                         <a:rPr sz="1200" b="1">
                           <a:latin typeface="Calibri"/>
                         </a:rPr>
-                        <a:t>4.9%</a:t>
+                        <a:t>6.4%</a:t>
                       </a:r>
                     </a:p>
                   </a:txBody>
@@ -4095,7 +4095,7 @@
                         <a:rPr sz="1200" b="0">
                           <a:latin typeface="Calibri"/>
                         </a:rPr>
-                        <a:t>8.3%</a:t>
+                        <a:t>10.2%</a:t>
                       </a:r>
                     </a:p>
                   </a:txBody>
@@ -4114,7 +4114,7 @@
                         <a:rPr sz="1200" b="0">
                           <a:latin typeface="Calibri"/>
                         </a:rPr>
-                        <a:t>11%</a:t>
+                        <a:t>14.8%</a:t>
                       </a:r>
                     </a:p>
                   </a:txBody>
@@ -4133,7 +4133,7 @@
                         <a:rPr sz="1200" b="0">
                           <a:latin typeface="Calibri"/>
                         </a:rPr>
-                        <a:t>no application worse than 11%</a:t>
+                        <a:t>worst case 14.8% (sgm)</a:t>
                       </a:r>
                     </a:p>
                   </a:txBody>
@@ -5049,7 +5049,7 @@
                         <a:rPr sz="1050" b="0">
                           <a:latin typeface="Calibri"/>
                         </a:rPr>
-                        <a:t>5.3% mean error on total power.</a:t>
+                        <a:t>6.4% mean error on total power.</a:t>
                       </a:r>
                     </a:p>
                   </a:txBody>
@@ -6944,7 +6944,7 @@
                         <a:rPr sz="1050" b="1">
                           <a:latin typeface="Calibri"/>
                         </a:rPr>
-                        <a:t>mem</a:t>
+                        <a:t>mem-w</a:t>
                       </a:r>
                     </a:p>
                   </a:txBody>
@@ -6963,7 +6963,7 @@
                         <a:rPr sz="1050" b="0">
                           <a:latin typeface="Calibri"/>
                         </a:rPr>
-                        <a:t>1771</a:t>
+                        <a:t>1744</a:t>
                       </a:r>
                     </a:p>
                   </a:txBody>
@@ -6982,7 +6982,7 @@
                         <a:rPr sz="1050" b="0">
                           <a:latin typeface="Calibri"/>
                         </a:rPr>
-                        <a:t>1808</a:t>
+                        <a:t>1795</a:t>
                       </a:r>
                     </a:p>
                   </a:txBody>
@@ -7004,7 +7004,7 @@
                           </a:solidFill>
                           <a:latin typeface="Calibri"/>
                         </a:rPr>
-                        <a:t>2%</a:t>
+                        <a:t>3%</a:t>
                       </a:r>
                     </a:p>
                   </a:txBody>
@@ -7025,7 +7025,7 @@
                         <a:rPr sz="1050" b="1">
                           <a:latin typeface="Calibri"/>
                         </a:rPr>
-                        <a:t>mem-w</a:t>
+                        <a:t>mem</a:t>
                       </a:r>
                     </a:p>
                   </a:txBody>
@@ -7044,7 +7044,7 @@
                         <a:rPr sz="1050" b="0">
                           <a:latin typeface="Calibri"/>
                         </a:rPr>
-                        <a:t>1744</a:t>
+                        <a:t>1771</a:t>
                       </a:r>
                     </a:p>
                   </a:txBody>
@@ -7063,7 +7063,7 @@
                         <a:rPr sz="1050" b="0">
                           <a:latin typeface="Calibri"/>
                         </a:rPr>
-                        <a:t>1706</a:t>
+                        <a:t>1767</a:t>
                       </a:r>
                     </a:p>
                   </a:txBody>
@@ -7085,7 +7085,7 @@
                           </a:solidFill>
                           <a:latin typeface="Calibri"/>
                         </a:rPr>
-                        <a:t>2%</a:t>
+                        <a:t>0%</a:t>
                       </a:r>
                     </a:p>
                   </a:txBody>
@@ -7106,6 +7106,168 @@
                         <a:rPr sz="1050" b="1">
                           <a:latin typeface="Calibri"/>
                         </a:rPr>
+                        <a:t>sgm</a:t>
+                      </a:r>
+                    </a:p>
+                  </a:txBody>
+                  <a:tcPr>
+                    <a:solidFill>
+                      <a:srgbClr val="EFF3FA"/>
+                    </a:solidFill>
+                  </a:tcPr>
+                </a:tc>
+                <a:tc>
+                  <a:txBody>
+                    <a:bodyPr/>
+                    <a:lstStyle/>
+                    <a:p>
+                      <a:r>
+                        <a:rPr sz="1050" b="0">
+                          <a:latin typeface="Calibri"/>
+                        </a:rPr>
+                        <a:t>1375</a:t>
+                      </a:r>
+                    </a:p>
+                  </a:txBody>
+                  <a:tcPr>
+                    <a:solidFill>
+                      <a:srgbClr val="EFF3FA"/>
+                    </a:solidFill>
+                  </a:tcPr>
+                </a:tc>
+                <a:tc>
+                  <a:txBody>
+                    <a:bodyPr/>
+                    <a:lstStyle/>
+                    <a:p>
+                      <a:r>
+                        <a:rPr sz="1050" b="0">
+                          <a:latin typeface="Calibri"/>
+                        </a:rPr>
+                        <a:t>1614</a:t>
+                      </a:r>
+                    </a:p>
+                  </a:txBody>
+                  <a:tcPr>
+                    <a:solidFill>
+                      <a:srgbClr val="EFF3FA"/>
+                    </a:solidFill>
+                  </a:tcPr>
+                </a:tc>
+                <a:tc>
+                  <a:txBody>
+                    <a:bodyPr/>
+                    <a:lstStyle/>
+                    <a:p>
+                      <a:r>
+                        <a:rPr sz="1050" b="0">
+                          <a:solidFill>
+                            <a:srgbClr val="B31412"/>
+                          </a:solidFill>
+                          <a:latin typeface="Calibri"/>
+                        </a:rPr>
+                        <a:t>15%</a:t>
+                      </a:r>
+                    </a:p>
+                  </a:txBody>
+                  <a:tcPr>
+                    <a:solidFill>
+                      <a:srgbClr val="EFF3FA"/>
+                    </a:solidFill>
+                  </a:tcPr>
+                </a:tc>
+              </a:tr>
+              <a:tr h="310896">
+                <a:tc>
+                  <a:txBody>
+                    <a:bodyPr/>
+                    <a:lstStyle/>
+                    <a:p>
+                      <a:r>
+                        <a:rPr sz="1050" b="1">
+                          <a:latin typeface="Calibri"/>
+                        </a:rPr>
+                        <a:t>lz4-fast</a:t>
+                      </a:r>
+                    </a:p>
+                  </a:txBody>
+                  <a:tcPr>
+                    <a:solidFill>
+                      <a:srgbClr val="FFFFFF"/>
+                    </a:solidFill>
+                  </a:tcPr>
+                </a:tc>
+                <a:tc>
+                  <a:txBody>
+                    <a:bodyPr/>
+                    <a:lstStyle/>
+                    <a:p>
+                      <a:r>
+                        <a:rPr sz="1050" b="0">
+                          <a:latin typeface="Calibri"/>
+                        </a:rPr>
+                        <a:t>1359</a:t>
+                      </a:r>
+                    </a:p>
+                  </a:txBody>
+                  <a:tcPr>
+                    <a:solidFill>
+                      <a:srgbClr val="FFFFFF"/>
+                    </a:solidFill>
+                  </a:tcPr>
+                </a:tc>
+                <a:tc>
+                  <a:txBody>
+                    <a:bodyPr/>
+                    <a:lstStyle/>
+                    <a:p>
+                      <a:r>
+                        <a:rPr sz="1050" b="0">
+                          <a:latin typeface="Calibri"/>
+                        </a:rPr>
+                        <a:t>1565</a:t>
+                      </a:r>
+                    </a:p>
+                  </a:txBody>
+                  <a:tcPr>
+                    <a:solidFill>
+                      <a:srgbClr val="FFFFFF"/>
+                    </a:solidFill>
+                  </a:tcPr>
+                </a:tc>
+                <a:tc>
+                  <a:txBody>
+                    <a:bodyPr/>
+                    <a:lstStyle/>
+                    <a:p>
+                      <a:r>
+                        <a:rPr sz="1050" b="0">
+                          <a:solidFill>
+                            <a:srgbClr val="B31412"/>
+                          </a:solidFill>
+                          <a:latin typeface="Calibri"/>
+                        </a:rPr>
+                        <a:t>13%</a:t>
+                      </a:r>
+                    </a:p>
+                  </a:txBody>
+                  <a:tcPr>
+                    <a:solidFill>
+                      <a:srgbClr val="FFFFFF"/>
+                    </a:solidFill>
+                  </a:tcPr>
+                </a:tc>
+              </a:tr>
+              <a:tr h="310896">
+                <a:tc>
+                  <a:txBody>
+                    <a:bodyPr/>
+                    <a:lstStyle/>
+                    <a:p>
+                      <a:r>
+                        <a:rPr sz="1050" b="1">
+                          <a:latin typeface="Calibri"/>
+                        </a:rPr>
                         <a:t>mm-big</a:t>
                       </a:r>
                     </a:p>
@@ -7144,7 +7306,7 @@
                         <a:rPr sz="1050" b="0">
                           <a:latin typeface="Calibri"/>
                         </a:rPr>
-                        <a:t>1535</a:t>
+                        <a:t>1558</a:t>
                       </a:r>
                     </a:p>
                   </a:txBody>
@@ -7166,7 +7328,7 @@
                           </a:solidFill>
                           <a:latin typeface="Calibri"/>
                         </a:rPr>
-                        <a:t>6%</a:t>
+                        <a:t>7%</a:t>
                       </a:r>
                     </a:p>
                   </a:txBody>
@@ -7225,7 +7387,331 @@
                         <a:rPr sz="1050" b="0">
                           <a:latin typeface="Calibri"/>
                         </a:rPr>
-                        <a:t>1508</a:t>
+                        <a:t>1529</a:t>
+                      </a:r>
+                    </a:p>
+                  </a:txBody>
+                  <a:tcPr>
+                    <a:solidFill>
+                      <a:srgbClr val="FFFFFF"/>
+                    </a:solidFill>
+                  </a:tcPr>
+                </a:tc>
+                <a:tc>
+                  <a:txBody>
+                    <a:bodyPr/>
+                    <a:lstStyle/>
+                    <a:p>
+                      <a:r>
+                        <a:rPr sz="1050" b="0">
+                          <a:solidFill>
+                            <a:srgbClr val="B31412"/>
+                          </a:solidFill>
+                          <a:latin typeface="Calibri"/>
+                        </a:rPr>
+                        <a:t>12%</a:t>
+                      </a:r>
+                    </a:p>
+                  </a:txBody>
+                  <a:tcPr>
+                    <a:solidFill>
+                      <a:srgbClr val="FFFFFF"/>
+                    </a:solidFill>
+                  </a:tcPr>
+                </a:tc>
+              </a:tr>
+              <a:tr h="310896">
+                <a:tc>
+                  <a:txBody>
+                    <a:bodyPr/>
+                    <a:lstStyle/>
+                    <a:p>
+                      <a:r>
+                        <a:rPr sz="1050" b="1">
+                          <a:latin typeface="Calibri"/>
+                        </a:rPr>
+                        <a:t>chase</a:t>
+                      </a:r>
+                    </a:p>
+                  </a:txBody>
+                  <a:tcPr>
+                    <a:solidFill>
+                      <a:srgbClr val="EFF3FA"/>
+                    </a:solidFill>
+                  </a:tcPr>
+                </a:tc>
+                <a:tc>
+                  <a:txBody>
+                    <a:bodyPr/>
+                    <a:lstStyle/>
+                    <a:p>
+                      <a:r>
+                        <a:rPr sz="1050" b="0">
+                          <a:latin typeface="Calibri"/>
+                        </a:rPr>
+                        <a:t>1304</a:t>
+                      </a:r>
+                    </a:p>
+                  </a:txBody>
+                  <a:tcPr>
+                    <a:solidFill>
+                      <a:srgbClr val="EFF3FA"/>
+                    </a:solidFill>
+                  </a:tcPr>
+                </a:tc>
+                <a:tc>
+                  <a:txBody>
+                    <a:bodyPr/>
+                    <a:lstStyle/>
+                    <a:p>
+                      <a:r>
+                        <a:rPr sz="1050" b="0">
+                          <a:latin typeface="Calibri"/>
+                        </a:rPr>
+                        <a:t>1295</a:t>
+                      </a:r>
+                    </a:p>
+                  </a:txBody>
+                  <a:tcPr>
+                    <a:solidFill>
+                      <a:srgbClr val="EFF3FA"/>
+                    </a:solidFill>
+                  </a:tcPr>
+                </a:tc>
+                <a:tc>
+                  <a:txBody>
+                    <a:bodyPr/>
+                    <a:lstStyle/>
+                    <a:p>
+                      <a:r>
+                        <a:rPr sz="1050" b="0">
+                          <a:solidFill>
+                            <a:srgbClr val="187A33"/>
+                          </a:solidFill>
+                          <a:latin typeface="Calibri"/>
+                        </a:rPr>
+                        <a:t>1%</a:t>
+                      </a:r>
+                    </a:p>
+                  </a:txBody>
+                  <a:tcPr>
+                    <a:solidFill>
+                      <a:srgbClr val="EFF3FA"/>
+                    </a:solidFill>
+                  </a:tcPr>
+                </a:tc>
+              </a:tr>
+              <a:tr h="310896">
+                <a:tc>
+                  <a:txBody>
+                    <a:bodyPr/>
+                    <a:lstStyle/>
+                    <a:p>
+                      <a:r>
+                        <a:rPr sz="1050" b="1">
+                          <a:latin typeface="Calibri"/>
+                        </a:rPr>
+                        <a:t>chase-big</a:t>
+                      </a:r>
+                    </a:p>
+                  </a:txBody>
+                  <a:tcPr>
+                    <a:solidFill>
+                      <a:srgbClr val="FFFFFF"/>
+                    </a:solidFill>
+                  </a:tcPr>
+                </a:tc>
+                <a:tc>
+                  <a:txBody>
+                    <a:bodyPr/>
+                    <a:lstStyle/>
+                    <a:p>
+                      <a:r>
+                        <a:rPr sz="1050" b="0">
+                          <a:latin typeface="Calibri"/>
+                        </a:rPr>
+                        <a:t>1306</a:t>
+                      </a:r>
+                    </a:p>
+                  </a:txBody>
+                  <a:tcPr>
+                    <a:solidFill>
+                      <a:srgbClr val="FFFFFF"/>
+                    </a:solidFill>
+                  </a:tcPr>
+                </a:tc>
+                <a:tc>
+                  <a:txBody>
+                    <a:bodyPr/>
+                    <a:lstStyle/>
+                    <a:p>
+                      <a:r>
+                        <a:rPr sz="1050" b="0">
+                          <a:latin typeface="Calibri"/>
+                        </a:rPr>
+                        <a:t>1314</a:t>
+                      </a:r>
+                    </a:p>
+                  </a:txBody>
+                  <a:tcPr>
+                    <a:solidFill>
+                      <a:srgbClr val="FFFFFF"/>
+                    </a:solidFill>
+                  </a:tcPr>
+                </a:tc>
+                <a:tc>
+                  <a:txBody>
+                    <a:bodyPr/>
+                    <a:lstStyle/>
+                    <a:p>
+                      <a:r>
+                        <a:rPr sz="1050" b="0">
+                          <a:solidFill>
+                            <a:srgbClr val="187A33"/>
+                          </a:solidFill>
+                          <a:latin typeface="Calibri"/>
+                        </a:rPr>
+                        <a:t>1%</a:t>
+                      </a:r>
+                    </a:p>
+                  </a:txBody>
+                  <a:tcPr>
+                    <a:solidFill>
+                      <a:srgbClr val="FFFFFF"/>
+                    </a:solidFill>
+                  </a:tcPr>
+                </a:tc>
+              </a:tr>
+              <a:tr h="310896">
+                <a:tc>
+                  <a:txBody>
+                    <a:bodyPr/>
+                    <a:lstStyle/>
+                    <a:p>
+                      <a:r>
+                        <a:rPr sz="1050" b="1">
+                          <a:latin typeface="Calibri"/>
+                        </a:rPr>
+                        <a:t>alu</a:t>
+                      </a:r>
+                    </a:p>
+                  </a:txBody>
+                  <a:tcPr>
+                    <a:solidFill>
+                      <a:srgbClr val="EFF3FA"/>
+                    </a:solidFill>
+                  </a:tcPr>
+                </a:tc>
+                <a:tc>
+                  <a:txBody>
+                    <a:bodyPr/>
+                    <a:lstStyle/>
+                    <a:p>
+                      <a:r>
+                        <a:rPr sz="1050" b="0">
+                          <a:latin typeface="Calibri"/>
+                        </a:rPr>
+                        <a:t>1342</a:t>
+                      </a:r>
+                    </a:p>
+                  </a:txBody>
+                  <a:tcPr>
+                    <a:solidFill>
+                      <a:srgbClr val="EFF3FA"/>
+                    </a:solidFill>
+                  </a:tcPr>
+                </a:tc>
+                <a:tc>
+                  <a:txBody>
+                    <a:bodyPr/>
+                    <a:lstStyle/>
+                    <a:p>
+                      <a:r>
+                        <a:rPr sz="1050" b="0">
+                          <a:latin typeface="Calibri"/>
+                        </a:rPr>
+                        <a:t>1355</a:t>
+                      </a:r>
+                    </a:p>
+                  </a:txBody>
+                  <a:tcPr>
+                    <a:solidFill>
+                      <a:srgbClr val="EFF3FA"/>
+                    </a:solidFill>
+                  </a:tcPr>
+                </a:tc>
+                <a:tc>
+                  <a:txBody>
+                    <a:bodyPr/>
+                    <a:lstStyle/>
+                    <a:p>
+                      <a:r>
+                        <a:rPr sz="1050" b="0">
+                          <a:solidFill>
+                            <a:srgbClr val="187A33"/>
+                          </a:solidFill>
+                          <a:latin typeface="Calibri"/>
+                        </a:rPr>
+                        <a:t>1%</a:t>
+                      </a:r>
+                    </a:p>
+                  </a:txBody>
+                  <a:tcPr>
+                    <a:solidFill>
+                      <a:srgbClr val="EFF3FA"/>
+                    </a:solidFill>
+                  </a:tcPr>
+                </a:tc>
+              </a:tr>
+              <a:tr h="310896">
+                <a:tc>
+                  <a:txBody>
+                    <a:bodyPr/>
+                    <a:lstStyle/>
+                    <a:p>
+                      <a:r>
+                        <a:rPr sz="1050" b="1">
+                          <a:latin typeface="Calibri"/>
+                        </a:rPr>
+                        <a:t>rd-ray</a:t>
+                      </a:r>
+                    </a:p>
+                  </a:txBody>
+                  <a:tcPr>
+                    <a:solidFill>
+                      <a:srgbClr val="FFFFFF"/>
+                    </a:solidFill>
+                  </a:tcPr>
+                </a:tc>
+                <a:tc>
+                  <a:txBody>
+                    <a:bodyPr/>
+                    <a:lstStyle/>
+                    <a:p>
+                      <a:r>
+                        <a:rPr sz="1050" b="0">
+                          <a:latin typeface="Calibri"/>
+                        </a:rPr>
+                        <a:t>1289</a:t>
+                      </a:r>
+                    </a:p>
+                  </a:txBody>
+                  <a:tcPr>
+                    <a:solidFill>
+                      <a:srgbClr val="FFFFFF"/>
+                    </a:solidFill>
+                  </a:tcPr>
+                </a:tc>
+                <a:tc>
+                  <a:txBody>
+                    <a:bodyPr/>
+                    <a:lstStyle/>
+                    <a:p>
+                      <a:r>
+                        <a:rPr sz="1050" b="0">
+                          <a:latin typeface="Calibri"/>
+                        </a:rPr>
+                        <a:t>1367</a:t>
                       </a:r>
                     </a:p>
                   </a:txBody>
@@ -7247,493 +7733,7 @@
                           </a:solidFill>
                           <a:latin typeface="Calibri"/>
                         </a:rPr>
-                        <a:t>11%</a:t>
-                      </a:r>
-                    </a:p>
-                  </a:txBody>
-                  <a:tcPr>
-                    <a:solidFill>
-                      <a:srgbClr val="FFFFFF"/>
-                    </a:solidFill>
-                  </a:tcPr>
-                </a:tc>
-              </a:tr>
-              <a:tr h="310896">
-                <a:tc>
-                  <a:txBody>
-                    <a:bodyPr/>
-                    <a:lstStyle/>
-                    <a:p>
-                      <a:r>
-                        <a:rPr sz="1050" b="1">
-                          <a:latin typeface="Calibri"/>
-                        </a:rPr>
-                        <a:t>sgm-a55-1t</a:t>
-                      </a:r>
-                    </a:p>
-                  </a:txBody>
-                  <a:tcPr>
-                    <a:solidFill>
-                      <a:srgbClr val="EFF3FA"/>
-                    </a:solidFill>
-                  </a:tcPr>
-                </a:tc>
-                <a:tc>
-                  <a:txBody>
-                    <a:bodyPr/>
-                    <a:lstStyle/>
-                    <a:p>
-                      <a:r>
-                        <a:rPr sz="1050" b="0">
-                          <a:latin typeface="Calibri"/>
-                        </a:rPr>
-                        <a:t>1357</a:t>
-                      </a:r>
-                    </a:p>
-                  </a:txBody>
-                  <a:tcPr>
-                    <a:solidFill>
-                      <a:srgbClr val="EFF3FA"/>
-                    </a:solidFill>
-                  </a:tcPr>
-                </a:tc>
-                <a:tc>
-                  <a:txBody>
-                    <a:bodyPr/>
-                    <a:lstStyle/>
-                    <a:p>
-                      <a:r>
-                        <a:rPr sz="1050" b="0">
-                          <a:latin typeface="Calibri"/>
-                        </a:rPr>
-                        <a:t>1506</a:t>
-                      </a:r>
-                    </a:p>
-                  </a:txBody>
-                  <a:tcPr>
-                    <a:solidFill>
-                      <a:srgbClr val="EFF3FA"/>
-                    </a:solidFill>
-                  </a:tcPr>
-                </a:tc>
-                <a:tc>
-                  <a:txBody>
-                    <a:bodyPr/>
-                    <a:lstStyle/>
-                    <a:p>
-                      <a:r>
-                        <a:rPr sz="1050" b="0">
-                          <a:solidFill>
-                            <a:srgbClr val="B06000"/>
-                          </a:solidFill>
-                          <a:latin typeface="Calibri"/>
-                        </a:rPr>
-                        <a:t>10%</a:t>
-                      </a:r>
-                    </a:p>
-                  </a:txBody>
-                  <a:tcPr>
-                    <a:solidFill>
-                      <a:srgbClr val="EFF3FA"/>
-                    </a:solidFill>
-                  </a:tcPr>
-                </a:tc>
-              </a:tr>
-              <a:tr h="310896">
-                <a:tc>
-                  <a:txBody>
-                    <a:bodyPr/>
-                    <a:lstStyle/>
-                    <a:p>
-                      <a:r>
-                        <a:rPr sz="1050" b="1">
-                          <a:latin typeface="Calibri"/>
-                        </a:rPr>
-                        <a:t>mm</a:t>
-                      </a:r>
-                    </a:p>
-                  </a:txBody>
-                  <a:tcPr>
-                    <a:solidFill>
-                      <a:srgbClr val="FFFFFF"/>
-                    </a:solidFill>
-                  </a:tcPr>
-                </a:tc>
-                <a:tc>
-                  <a:txBody>
-                    <a:bodyPr/>
-                    <a:lstStyle/>
-                    <a:p>
-                      <a:r>
-                        <a:rPr sz="1050" b="0">
-                          <a:latin typeface="Calibri"/>
-                        </a:rPr>
-                        <a:t>1346</a:t>
-                      </a:r>
-                    </a:p>
-                  </a:txBody>
-                  <a:tcPr>
-                    <a:solidFill>
-                      <a:srgbClr val="FFFFFF"/>
-                    </a:solidFill>
-                  </a:tcPr>
-                </a:tc>
-                <a:tc>
-                  <a:txBody>
-                    <a:bodyPr/>
-                    <a:lstStyle/>
-                    <a:p>
-                      <a:r>
-                        <a:rPr sz="1050" b="0">
-                          <a:latin typeface="Calibri"/>
-                        </a:rPr>
-                        <a:t>1492</a:t>
-                      </a:r>
-                    </a:p>
-                  </a:txBody>
-                  <a:tcPr>
-                    <a:solidFill>
-                      <a:srgbClr val="FFFFFF"/>
-                    </a:solidFill>
-                  </a:tcPr>
-                </a:tc>
-                <a:tc>
-                  <a:txBody>
-                    <a:bodyPr/>
-                    <a:lstStyle/>
-                    <a:p>
-                      <a:r>
-                        <a:rPr sz="1050" b="0">
-                          <a:solidFill>
-                            <a:srgbClr val="B06000"/>
-                          </a:solidFill>
-                          <a:latin typeface="Calibri"/>
-                        </a:rPr>
-                        <a:t>10%</a:t>
-                      </a:r>
-                    </a:p>
-                  </a:txBody>
-                  <a:tcPr>
-                    <a:solidFill>
-                      <a:srgbClr val="FFFFFF"/>
-                    </a:solidFill>
-                  </a:tcPr>
-                </a:tc>
-              </a:tr>
-              <a:tr h="310896">
-                <a:tc>
-                  <a:txBody>
-                    <a:bodyPr/>
-                    <a:lstStyle/>
-                    <a:p>
-                      <a:r>
-                        <a:rPr sz="1050" b="1">
-                          <a:latin typeface="Calibri"/>
-                        </a:rPr>
-                        <a:t>chase-big</a:t>
-                      </a:r>
-                    </a:p>
-                  </a:txBody>
-                  <a:tcPr>
-                    <a:solidFill>
-                      <a:srgbClr val="EFF3FA"/>
-                    </a:solidFill>
-                  </a:tcPr>
-                </a:tc>
-                <a:tc>
-                  <a:txBody>
-                    <a:bodyPr/>
-                    <a:lstStyle/>
-                    <a:p>
-                      <a:r>
-                        <a:rPr sz="1050" b="0">
-                          <a:latin typeface="Calibri"/>
-                        </a:rPr>
-                        <a:t>1306</a:t>
-                      </a:r>
-                    </a:p>
-                  </a:txBody>
-                  <a:tcPr>
-                    <a:solidFill>
-                      <a:srgbClr val="EFF3FA"/>
-                    </a:solidFill>
-                  </a:tcPr>
-                </a:tc>
-                <a:tc>
-                  <a:txBody>
-                    <a:bodyPr/>
-                    <a:lstStyle/>
-                    <a:p>
-                      <a:r>
-                        <a:rPr sz="1050" b="0">
-                          <a:latin typeface="Calibri"/>
-                        </a:rPr>
-                        <a:t>1279</a:t>
-                      </a:r>
-                    </a:p>
-                  </a:txBody>
-                  <a:tcPr>
-                    <a:solidFill>
-                      <a:srgbClr val="EFF3FA"/>
-                    </a:solidFill>
-                  </a:tcPr>
-                </a:tc>
-                <a:tc>
-                  <a:txBody>
-                    <a:bodyPr/>
-                    <a:lstStyle/>
-                    <a:p>
-                      <a:r>
-                        <a:rPr sz="1050" b="0">
-                          <a:solidFill>
-                            <a:srgbClr val="187A33"/>
-                          </a:solidFill>
-                          <a:latin typeface="Calibri"/>
-                        </a:rPr>
-                        <a:t>2%</a:t>
-                      </a:r>
-                    </a:p>
-                  </a:txBody>
-                  <a:tcPr>
-                    <a:solidFill>
-                      <a:srgbClr val="EFF3FA"/>
-                    </a:solidFill>
-                  </a:tcPr>
-                </a:tc>
-              </a:tr>
-              <a:tr h="310896">
-                <a:tc>
-                  <a:txBody>
-                    <a:bodyPr/>
-                    <a:lstStyle/>
-                    <a:p>
-                      <a:r>
-                        <a:rPr sz="1050" b="1">
-                          <a:latin typeface="Calibri"/>
-                        </a:rPr>
-                        <a:t>chase</a:t>
-                      </a:r>
-                    </a:p>
-                  </a:txBody>
-                  <a:tcPr>
-                    <a:solidFill>
-                      <a:srgbClr val="FFFFFF"/>
-                    </a:solidFill>
-                  </a:tcPr>
-                </a:tc>
-                <a:tc>
-                  <a:txBody>
-                    <a:bodyPr/>
-                    <a:lstStyle/>
-                    <a:p>
-                      <a:r>
-                        <a:rPr sz="1050" b="0">
-                          <a:latin typeface="Calibri"/>
-                        </a:rPr>
-                        <a:t>1304</a:t>
-                      </a:r>
-                    </a:p>
-                  </a:txBody>
-                  <a:tcPr>
-                    <a:solidFill>
-                      <a:srgbClr val="FFFFFF"/>
-                    </a:solidFill>
-                  </a:tcPr>
-                </a:tc>
-                <a:tc>
-                  <a:txBody>
-                    <a:bodyPr/>
-                    <a:lstStyle/>
-                    <a:p>
-                      <a:r>
-                        <a:rPr sz="1050" b="0">
-                          <a:latin typeface="Calibri"/>
-                        </a:rPr>
-                        <a:t>1297</a:t>
-                      </a:r>
-                    </a:p>
-                  </a:txBody>
-                  <a:tcPr>
-                    <a:solidFill>
-                      <a:srgbClr val="FFFFFF"/>
-                    </a:solidFill>
-                  </a:tcPr>
-                </a:tc>
-                <a:tc>
-                  <a:txBody>
-                    <a:bodyPr/>
-                    <a:lstStyle/>
-                    <a:p>
-                      <a:r>
-                        <a:rPr sz="1050" b="0">
-                          <a:solidFill>
-                            <a:srgbClr val="187A33"/>
-                          </a:solidFill>
-                          <a:latin typeface="Calibri"/>
-                        </a:rPr>
-                        <a:t>1%</a:t>
-                      </a:r>
-                    </a:p>
-                  </a:txBody>
-                  <a:tcPr>
-                    <a:solidFill>
-                      <a:srgbClr val="FFFFFF"/>
-                    </a:solidFill>
-                  </a:tcPr>
-                </a:tc>
-              </a:tr>
-              <a:tr h="310896">
-                <a:tc>
-                  <a:txBody>
-                    <a:bodyPr/>
-                    <a:lstStyle/>
-                    <a:p>
-                      <a:r>
-                        <a:rPr sz="1050" b="1">
-                          <a:latin typeface="Calibri"/>
-                        </a:rPr>
-                        <a:t>alu</a:t>
-                      </a:r>
-                    </a:p>
-                  </a:txBody>
-                  <a:tcPr>
-                    <a:solidFill>
-                      <a:srgbClr val="EFF3FA"/>
-                    </a:solidFill>
-                  </a:tcPr>
-                </a:tc>
-                <a:tc>
-                  <a:txBody>
-                    <a:bodyPr/>
-                    <a:lstStyle/>
-                    <a:p>
-                      <a:r>
-                        <a:rPr sz="1050" b="0">
-                          <a:latin typeface="Calibri"/>
-                        </a:rPr>
-                        <a:t>1342</a:t>
-                      </a:r>
-                    </a:p>
-                  </a:txBody>
-                  <a:tcPr>
-                    <a:solidFill>
-                      <a:srgbClr val="EFF3FA"/>
-                    </a:solidFill>
-                  </a:tcPr>
-                </a:tc>
-                <a:tc>
-                  <a:txBody>
-                    <a:bodyPr/>
-                    <a:lstStyle/>
-                    <a:p>
-                      <a:r>
-                        <a:rPr sz="1050" b="0">
-                          <a:latin typeface="Calibri"/>
-                        </a:rPr>
-                        <a:t>1338</a:t>
-                      </a:r>
-                    </a:p>
-                  </a:txBody>
-                  <a:tcPr>
-                    <a:solidFill>
-                      <a:srgbClr val="EFF3FA"/>
-                    </a:solidFill>
-                  </a:tcPr>
-                </a:tc>
-                <a:tc>
-                  <a:txBody>
-                    <a:bodyPr/>
-                    <a:lstStyle/>
-                    <a:p>
-                      <a:r>
-                        <a:rPr sz="1050" b="0">
-                          <a:solidFill>
-                            <a:srgbClr val="187A33"/>
-                          </a:solidFill>
-                          <a:latin typeface="Calibri"/>
-                        </a:rPr>
-                        <a:t>0%</a:t>
-                      </a:r>
-                    </a:p>
-                  </a:txBody>
-                  <a:tcPr>
-                    <a:solidFill>
-                      <a:srgbClr val="EFF3FA"/>
-                    </a:solidFill>
-                  </a:tcPr>
-                </a:tc>
-              </a:tr>
-              <a:tr h="310896">
-                <a:tc>
-                  <a:txBody>
-                    <a:bodyPr/>
-                    <a:lstStyle/>
-                    <a:p>
-                      <a:r>
-                        <a:rPr sz="1050" b="1">
-                          <a:latin typeface="Calibri"/>
-                        </a:rPr>
-                        <a:t>tommath</a:t>
-                      </a:r>
-                    </a:p>
-                  </a:txBody>
-                  <a:tcPr>
-                    <a:solidFill>
-                      <a:srgbClr val="FFFFFF"/>
-                    </a:solidFill>
-                  </a:tcPr>
-                </a:tc>
-                <a:tc>
-                  <a:txBody>
-                    <a:bodyPr/>
-                    <a:lstStyle/>
-                    <a:p>
-                      <a:r>
-                        <a:rPr sz="1050" b="0">
-                          <a:latin typeface="Calibri"/>
-                        </a:rPr>
-                        <a:t>1324</a:t>
-                      </a:r>
-                    </a:p>
-                  </a:txBody>
-                  <a:tcPr>
-                    <a:solidFill>
-                      <a:srgbClr val="FFFFFF"/>
-                    </a:solidFill>
-                  </a:tcPr>
-                </a:tc>
-                <a:tc>
-                  <a:txBody>
-                    <a:bodyPr/>
-                    <a:lstStyle/>
-                    <a:p>
-                      <a:r>
-                        <a:rPr sz="1050" b="0">
-                          <a:latin typeface="Calibri"/>
-                        </a:rPr>
-                        <a:t>1344</a:t>
-                      </a:r>
-                    </a:p>
-                  </a:txBody>
-                  <a:tcPr>
-                    <a:solidFill>
-                      <a:srgbClr val="FFFFFF"/>
-                    </a:solidFill>
-                  </a:tcPr>
-                </a:tc>
-                <a:tc>
-                  <a:txBody>
-                    <a:bodyPr/>
-                    <a:lstStyle/>
-                    <a:p>
-                      <a:r>
-                        <a:rPr sz="1050" b="0">
-                          <a:solidFill>
-                            <a:srgbClr val="187A33"/>
-                          </a:solidFill>
-                          <a:latin typeface="Calibri"/>
-                        </a:rPr>
-                        <a:t>1%</a:t>
+                        <a:t>6%</a:t>
                       </a:r>
                     </a:p>
                   </a:txBody>
@@ -7845,7 +7845,7 @@
                         <a:rPr sz="1150" b="1">
                           <a:latin typeface="Calibri"/>
                         </a:rPr>
-                        <a:t>4.9%</a:t>
+                        <a:t>6.4%</a:t>
                       </a:r>
                     </a:p>
                   </a:txBody>
@@ -7885,7 +7885,7 @@
                         <a:rPr sz="1150" b="1">
                           <a:latin typeface="Calibri"/>
                         </a:rPr>
-                        <a:t>4.8%</a:t>
+                        <a:t>6.5%</a:t>
                       </a:r>
                     </a:p>
                   </a:txBody>
@@ -7925,7 +7925,7 @@
                         <a:rPr sz="1150" b="1">
                           <a:latin typeface="Calibri"/>
                         </a:rPr>
-                        <a:t>8.3%</a:t>
+                        <a:t>10.2%</a:t>
                       </a:r>
                     </a:p>
                   </a:txBody>
@@ -7965,7 +7965,7 @@
                         <a:rPr sz="1150" b="1">
                           <a:latin typeface="Calibri"/>
                         </a:rPr>
-                        <a:t>11%</a:t>
+                        <a:t>15%</a:t>
                       </a:r>
                     </a:p>
                   </a:txBody>
@@ -8005,7 +8005,7 @@
                         <a:rPr sz="1150" b="1">
                           <a:latin typeface="Calibri"/>
                         </a:rPr>
-                        <a:t>-4.7%</a:t>
+                        <a:t>-6.4%</a:t>
                       </a:r>
                     </a:p>
                   </a:txBody>
@@ -8152,7 +8152,7 @@
                         <a:rPr sz="1150" b="1">
                           <a:latin typeface="Calibri"/>
                         </a:rPr>
-                        <a:t>1279 – 1808 mW</a:t>
+                        <a:t>1295 – 1795 mW</a:t>
                       </a:r>
                     </a:p>
                   </a:txBody>
@@ -8272,7 +8272,7 @@
                 </a:solidFill>
                 <a:latin typeface="Calibri"/>
               </a:rPr>
-              <a:t>Predictions run 4.7% low on average — a systematic offset, not scatter, and therefore correctable if a future revision wants it.</a:t>
+              <a:t>Predictions run 6.4% low on average — a systematic offset, not scatter, and therefore correctable if a future revision wants it.</a:t>
             </a:r>
           </a:p>
         </p:txBody>
@@ -8680,7 +8680,7 @@
                         <a:rPr sz="850" b="1">
                           <a:latin typeface="Calibri"/>
                         </a:rPr>
-                        <a:t>mem</a:t>
+                        <a:t>mem-w</a:t>
                       </a:r>
                     </a:p>
                   </a:txBody>
@@ -8699,7 +8699,7 @@
                         <a:rPr sz="850" b="0">
                           <a:latin typeface="Calibri"/>
                         </a:rPr>
-                        <a:t>1771</a:t>
+                        <a:t>1744</a:t>
                       </a:r>
                     </a:p>
                   </a:txBody>
@@ -8718,7 +8718,7 @@
                         <a:rPr sz="850" b="0">
                           <a:latin typeface="Calibri"/>
                         </a:rPr>
-                        <a:t>1808</a:t>
+                        <a:t>1795</a:t>
                       </a:r>
                     </a:p>
                   </a:txBody>
@@ -8740,7 +8740,7 @@
                           </a:solidFill>
                           <a:latin typeface="Calibri"/>
                         </a:rPr>
-                        <a:t>2%</a:t>
+                        <a:t>3%</a:t>
                       </a:r>
                     </a:p>
                   </a:txBody>
@@ -8761,7 +8761,7 @@
                         <a:rPr sz="850" b="1">
                           <a:latin typeface="Calibri"/>
                         </a:rPr>
-                        <a:t>mem-w</a:t>
+                        <a:t>mem</a:t>
                       </a:r>
                     </a:p>
                   </a:txBody>
@@ -8780,7 +8780,7 @@
                         <a:rPr sz="850" b="0">
                           <a:latin typeface="Calibri"/>
                         </a:rPr>
-                        <a:t>1744</a:t>
+                        <a:t>1771</a:t>
                       </a:r>
                     </a:p>
                   </a:txBody>
@@ -8799,7 +8799,7 @@
                         <a:rPr sz="850" b="0">
                           <a:latin typeface="Calibri"/>
                         </a:rPr>
-                        <a:t>1706</a:t>
+                        <a:t>1767</a:t>
                       </a:r>
                     </a:p>
                   </a:txBody>
@@ -8821,7 +8821,7 @@
                           </a:solidFill>
                           <a:latin typeface="Calibri"/>
                         </a:rPr>
-                        <a:t>2%</a:t>
+                        <a:t>0%</a:t>
                       </a:r>
                     </a:p>
                   </a:txBody>
@@ -8842,6 +8842,168 @@
                         <a:rPr sz="850" b="1">
                           <a:latin typeface="Calibri"/>
                         </a:rPr>
+                        <a:t>sgm</a:t>
+                      </a:r>
+                    </a:p>
+                  </a:txBody>
+                  <a:tcPr>
+                    <a:solidFill>
+                      <a:srgbClr val="EFF3FA"/>
+                    </a:solidFill>
+                  </a:tcPr>
+                </a:tc>
+                <a:tc>
+                  <a:txBody>
+                    <a:bodyPr/>
+                    <a:lstStyle/>
+                    <a:p>
+                      <a:r>
+                        <a:rPr sz="850" b="0">
+                          <a:latin typeface="Calibri"/>
+                        </a:rPr>
+                        <a:t>1375</a:t>
+                      </a:r>
+                    </a:p>
+                  </a:txBody>
+                  <a:tcPr>
+                    <a:solidFill>
+                      <a:srgbClr val="EFF3FA"/>
+                    </a:solidFill>
+                  </a:tcPr>
+                </a:tc>
+                <a:tc>
+                  <a:txBody>
+                    <a:bodyPr/>
+                    <a:lstStyle/>
+                    <a:p>
+                      <a:r>
+                        <a:rPr sz="850" b="0">
+                          <a:latin typeface="Calibri"/>
+                        </a:rPr>
+                        <a:t>1614</a:t>
+                      </a:r>
+                    </a:p>
+                  </a:txBody>
+                  <a:tcPr>
+                    <a:solidFill>
+                      <a:srgbClr val="EFF3FA"/>
+                    </a:solidFill>
+                  </a:tcPr>
+                </a:tc>
+                <a:tc>
+                  <a:txBody>
+                    <a:bodyPr/>
+                    <a:lstStyle/>
+                    <a:p>
+                      <a:r>
+                        <a:rPr sz="850" b="0">
+                          <a:solidFill>
+                            <a:srgbClr val="B31412"/>
+                          </a:solidFill>
+                          <a:latin typeface="Calibri"/>
+                        </a:rPr>
+                        <a:t>15%</a:t>
+                      </a:r>
+                    </a:p>
+                  </a:txBody>
+                  <a:tcPr>
+                    <a:solidFill>
+                      <a:srgbClr val="EFF3FA"/>
+                    </a:solidFill>
+                  </a:tcPr>
+                </a:tc>
+              </a:tr>
+              <a:tr h="224028">
+                <a:tc>
+                  <a:txBody>
+                    <a:bodyPr/>
+                    <a:lstStyle/>
+                    <a:p>
+                      <a:r>
+                        <a:rPr sz="850" b="1">
+                          <a:latin typeface="Calibri"/>
+                        </a:rPr>
+                        <a:t>lz4-fast</a:t>
+                      </a:r>
+                    </a:p>
+                  </a:txBody>
+                  <a:tcPr>
+                    <a:solidFill>
+                      <a:srgbClr val="FFFFFF"/>
+                    </a:solidFill>
+                  </a:tcPr>
+                </a:tc>
+                <a:tc>
+                  <a:txBody>
+                    <a:bodyPr/>
+                    <a:lstStyle/>
+                    <a:p>
+                      <a:r>
+                        <a:rPr sz="850" b="0">
+                          <a:latin typeface="Calibri"/>
+                        </a:rPr>
+                        <a:t>1359</a:t>
+                      </a:r>
+                    </a:p>
+                  </a:txBody>
+                  <a:tcPr>
+                    <a:solidFill>
+                      <a:srgbClr val="FFFFFF"/>
+                    </a:solidFill>
+                  </a:tcPr>
+                </a:tc>
+                <a:tc>
+                  <a:txBody>
+                    <a:bodyPr/>
+                    <a:lstStyle/>
+                    <a:p>
+                      <a:r>
+                        <a:rPr sz="850" b="0">
+                          <a:latin typeface="Calibri"/>
+                        </a:rPr>
+                        <a:t>1565</a:t>
+                      </a:r>
+                    </a:p>
+                  </a:txBody>
+                  <a:tcPr>
+                    <a:solidFill>
+                      <a:srgbClr val="FFFFFF"/>
+                    </a:solidFill>
+                  </a:tcPr>
+                </a:tc>
+                <a:tc>
+                  <a:txBody>
+                    <a:bodyPr/>
+                    <a:lstStyle/>
+                    <a:p>
+                      <a:r>
+                        <a:rPr sz="850" b="0">
+                          <a:solidFill>
+                            <a:srgbClr val="B31412"/>
+                          </a:solidFill>
+                          <a:latin typeface="Calibri"/>
+                        </a:rPr>
+                        <a:t>13%</a:t>
+                      </a:r>
+                    </a:p>
+                  </a:txBody>
+                  <a:tcPr>
+                    <a:solidFill>
+                      <a:srgbClr val="FFFFFF"/>
+                    </a:solidFill>
+                  </a:tcPr>
+                </a:tc>
+              </a:tr>
+              <a:tr h="224028">
+                <a:tc>
+                  <a:txBody>
+                    <a:bodyPr/>
+                    <a:lstStyle/>
+                    <a:p>
+                      <a:r>
+                        <a:rPr sz="850" b="1">
+                          <a:latin typeface="Calibri"/>
+                        </a:rPr>
                         <a:t>mm-big</a:t>
                       </a:r>
                     </a:p>
@@ -8880,7 +9042,7 @@
                         <a:rPr sz="850" b="0">
                           <a:latin typeface="Calibri"/>
                         </a:rPr>
-                        <a:t>1535</a:t>
+                        <a:t>1558</a:t>
                       </a:r>
                     </a:p>
                   </a:txBody>
@@ -8902,7 +9064,7 @@
                           </a:solidFill>
                           <a:latin typeface="Calibri"/>
                         </a:rPr>
-                        <a:t>6%</a:t>
+                        <a:t>7%</a:t>
                       </a:r>
                     </a:p>
                   </a:txBody>
@@ -8961,7 +9123,7 @@
                         <a:rPr sz="850" b="0">
                           <a:latin typeface="Calibri"/>
                         </a:rPr>
-                        <a:t>1508</a:t>
+                        <a:t>1529</a:t>
                       </a:r>
                     </a:p>
                   </a:txBody>
@@ -8983,7 +9145,7 @@
                           </a:solidFill>
                           <a:latin typeface="Calibri"/>
                         </a:rPr>
-                        <a:t>11%</a:t>
+                        <a:t>12%</a:t>
                       </a:r>
                     </a:p>
                   </a:txBody>
@@ -9004,7 +9166,7 @@
                         <a:rPr sz="850" b="1">
                           <a:latin typeface="Calibri"/>
                         </a:rPr>
-                        <a:t>sgm-a55-1t</a:t>
+                        <a:t>rd-life</a:t>
                       </a:r>
                     </a:p>
                   </a:txBody>
@@ -9023,7 +9185,7 @@
                         <a:rPr sz="850" b="0">
                           <a:latin typeface="Calibri"/>
                         </a:rPr>
-                        <a:t>1357</a:t>
+                        <a:t>1425</a:t>
                       </a:r>
                     </a:p>
                   </a:txBody>
@@ -9042,7 +9204,169 @@
                         <a:rPr sz="850" b="0">
                           <a:latin typeface="Calibri"/>
                         </a:rPr>
-                        <a:t>1506</a:t>
+                        <a:t>1525</a:t>
+                      </a:r>
+                    </a:p>
+                  </a:txBody>
+                  <a:tcPr>
+                    <a:solidFill>
+                      <a:srgbClr val="EFF3FA"/>
+                    </a:solidFill>
+                  </a:tcPr>
+                </a:tc>
+                <a:tc>
+                  <a:txBody>
+                    <a:bodyPr/>
+                    <a:lstStyle/>
+                    <a:p>
+                      <a:r>
+                        <a:rPr sz="850" b="0">
+                          <a:solidFill>
+                            <a:srgbClr val="187A33"/>
+                          </a:solidFill>
+                          <a:latin typeface="Calibri"/>
+                        </a:rPr>
+                        <a:t>7%</a:t>
+                      </a:r>
+                    </a:p>
+                  </a:txBody>
+                  <a:tcPr>
+                    <a:solidFill>
+                      <a:srgbClr val="EFF3FA"/>
+                    </a:solidFill>
+                  </a:tcPr>
+                </a:tc>
+              </a:tr>
+              <a:tr h="224028">
+                <a:tc>
+                  <a:txBody>
+                    <a:bodyPr/>
+                    <a:lstStyle/>
+                    <a:p>
+                      <a:r>
+                        <a:rPr sz="850" b="1">
+                          <a:latin typeface="Calibri"/>
+                        </a:rPr>
+                        <a:t>qoi</a:t>
+                      </a:r>
+                    </a:p>
+                  </a:txBody>
+                  <a:tcPr>
+                    <a:solidFill>
+                      <a:srgbClr val="FFFFFF"/>
+                    </a:solidFill>
+                  </a:tcPr>
+                </a:tc>
+                <a:tc>
+                  <a:txBody>
+                    <a:bodyPr/>
+                    <a:lstStyle/>
+                    <a:p>
+                      <a:r>
+                        <a:rPr sz="850" b="0">
+                          <a:latin typeface="Calibri"/>
+                        </a:rPr>
+                        <a:t>1397</a:t>
+                      </a:r>
+                    </a:p>
+                  </a:txBody>
+                  <a:tcPr>
+                    <a:solidFill>
+                      <a:srgbClr val="FFFFFF"/>
+                    </a:solidFill>
+                  </a:tcPr>
+                </a:tc>
+                <a:tc>
+                  <a:txBody>
+                    <a:bodyPr/>
+                    <a:lstStyle/>
+                    <a:p>
+                      <a:r>
+                        <a:rPr sz="850" b="0">
+                          <a:latin typeface="Calibri"/>
+                        </a:rPr>
+                        <a:t>1524</a:t>
+                      </a:r>
+                    </a:p>
+                  </a:txBody>
+                  <a:tcPr>
+                    <a:solidFill>
+                      <a:srgbClr val="FFFFFF"/>
+                    </a:solidFill>
+                  </a:tcPr>
+                </a:tc>
+                <a:tc>
+                  <a:txBody>
+                    <a:bodyPr/>
+                    <a:lstStyle/>
+                    <a:p>
+                      <a:r>
+                        <a:rPr sz="850" b="0">
+                          <a:solidFill>
+                            <a:srgbClr val="187A33"/>
+                          </a:solidFill>
+                          <a:latin typeface="Calibri"/>
+                        </a:rPr>
+                        <a:t>8%</a:t>
+                      </a:r>
+                    </a:p>
+                  </a:txBody>
+                  <a:tcPr>
+                    <a:solidFill>
+                      <a:srgbClr val="FFFFFF"/>
+                    </a:solidFill>
+                  </a:tcPr>
+                </a:tc>
+              </a:tr>
+              <a:tr h="224028">
+                <a:tc>
+                  <a:txBody>
+                    <a:bodyPr/>
+                    <a:lstStyle/>
+                    <a:p>
+                      <a:r>
+                        <a:rPr sz="850" b="1">
+                          <a:latin typeface="Calibri"/>
+                        </a:rPr>
+                        <a:t>cr-blowfish</a:t>
+                      </a:r>
+                    </a:p>
+                  </a:txBody>
+                  <a:tcPr>
+                    <a:solidFill>
+                      <a:srgbClr val="EFF3FA"/>
+                    </a:solidFill>
+                  </a:tcPr>
+                </a:tc>
+                <a:tc>
+                  <a:txBody>
+                    <a:bodyPr/>
+                    <a:lstStyle/>
+                    <a:p>
+                      <a:r>
+                        <a:rPr sz="850" b="0">
+                          <a:latin typeface="Calibri"/>
+                        </a:rPr>
+                        <a:t>1374</a:t>
+                      </a:r>
+                    </a:p>
+                  </a:txBody>
+                  <a:tcPr>
+                    <a:solidFill>
+                      <a:srgbClr val="EFF3FA"/>
+                    </a:solidFill>
+                  </a:tcPr>
+                </a:tc>
+                <a:tc>
+                  <a:txBody>
+                    <a:bodyPr/>
+                    <a:lstStyle/>
+                    <a:p>
+                      <a:r>
+                        <a:rPr sz="850" b="0">
+                          <a:latin typeface="Calibri"/>
+                        </a:rPr>
+                        <a:t>1517</a:t>
                       </a:r>
                     </a:p>
                   </a:txBody>
@@ -9064,7 +9388,7 @@
                           </a:solidFill>
                           <a:latin typeface="Calibri"/>
                         </a:rPr>
-                        <a:t>10%</a:t>
+                        <a:t>9%</a:t>
                       </a:r>
                     </a:p>
                   </a:txBody>
@@ -9123,7 +9447,7 @@
                         <a:rPr sz="850" b="0">
                           <a:latin typeface="Calibri"/>
                         </a:rPr>
-                        <a:t>1492</a:t>
+                        <a:t>1515</a:t>
                       </a:r>
                     </a:p>
                   </a:txBody>
@@ -9145,7 +9469,7 @@
                           </a:solidFill>
                           <a:latin typeface="Calibri"/>
                         </a:rPr>
-                        <a:t>10%</a:t>
+                        <a:t>11%</a:t>
                       </a:r>
                     </a:p>
                   </a:txBody>
@@ -9166,7 +9490,7 @@
                         <a:rPr sz="850" b="1">
                           <a:latin typeface="Calibri"/>
                         </a:rPr>
-                        <a:t>sgm</a:t>
+                        <a:t>sgm-a55-1t</a:t>
                       </a:r>
                     </a:p>
                   </a:txBody>
@@ -9185,7 +9509,169 @@
                         <a:rPr sz="850" b="0">
                           <a:latin typeface="Calibri"/>
                         </a:rPr>
-                        <a:t>1375</a:t>
+                        <a:t>1357</a:t>
+                      </a:r>
+                    </a:p>
+                  </a:txBody>
+                  <a:tcPr>
+                    <a:solidFill>
+                      <a:srgbClr val="EFF3FA"/>
+                    </a:solidFill>
+                  </a:tcPr>
+                </a:tc>
+                <a:tc>
+                  <a:txBody>
+                    <a:bodyPr/>
+                    <a:lstStyle/>
+                    <a:p>
+                      <a:r>
+                        <a:rPr sz="850" b="0">
+                          <a:latin typeface="Calibri"/>
+                        </a:rPr>
+                        <a:t>1512</a:t>
+                      </a:r>
+                    </a:p>
+                  </a:txBody>
+                  <a:tcPr>
+                    <a:solidFill>
+                      <a:srgbClr val="EFF3FA"/>
+                    </a:solidFill>
+                  </a:tcPr>
+                </a:tc>
+                <a:tc>
+                  <a:txBody>
+                    <a:bodyPr/>
+                    <a:lstStyle/>
+                    <a:p>
+                      <a:r>
+                        <a:rPr sz="850" b="0">
+                          <a:solidFill>
+                            <a:srgbClr val="B06000"/>
+                          </a:solidFill>
+                          <a:latin typeface="Calibri"/>
+                        </a:rPr>
+                        <a:t>10%</a:t>
+                      </a:r>
+                    </a:p>
+                  </a:txBody>
+                  <a:tcPr>
+                    <a:solidFill>
+                      <a:srgbClr val="EFF3FA"/>
+                    </a:solidFill>
+                  </a:tcPr>
+                </a:tc>
+              </a:tr>
+              <a:tr h="224028">
+                <a:tc>
+                  <a:txBody>
+                    <a:bodyPr/>
+                    <a:lstStyle/>
+                    <a:p>
+                      <a:r>
+                        <a:rPr sz="850" b="1">
+                          <a:latin typeface="Calibri"/>
+                        </a:rPr>
+                        <a:t>cr-b64</a:t>
+                      </a:r>
+                    </a:p>
+                  </a:txBody>
+                  <a:tcPr>
+                    <a:solidFill>
+                      <a:srgbClr val="FFFFFF"/>
+                    </a:solidFill>
+                  </a:tcPr>
+                </a:tc>
+                <a:tc>
+                  <a:txBody>
+                    <a:bodyPr/>
+                    <a:lstStyle/>
+                    <a:p>
+                      <a:r>
+                        <a:rPr sz="850" b="0">
+                          <a:latin typeface="Calibri"/>
+                        </a:rPr>
+                        <a:t>1377</a:t>
+                      </a:r>
+                    </a:p>
+                  </a:txBody>
+                  <a:tcPr>
+                    <a:solidFill>
+                      <a:srgbClr val="FFFFFF"/>
+                    </a:solidFill>
+                  </a:tcPr>
+                </a:tc>
+                <a:tc>
+                  <a:txBody>
+                    <a:bodyPr/>
+                    <a:lstStyle/>
+                    <a:p>
+                      <a:r>
+                        <a:rPr sz="850" b="0">
+                          <a:latin typeface="Calibri"/>
+                        </a:rPr>
+                        <a:t>1506</a:t>
+                      </a:r>
+                    </a:p>
+                  </a:txBody>
+                  <a:tcPr>
+                    <a:solidFill>
+                      <a:srgbClr val="FFFFFF"/>
+                    </a:solidFill>
+                  </a:tcPr>
+                </a:tc>
+                <a:tc>
+                  <a:txBody>
+                    <a:bodyPr/>
+                    <a:lstStyle/>
+                    <a:p>
+                      <a:r>
+                        <a:rPr sz="850" b="0">
+                          <a:solidFill>
+                            <a:srgbClr val="B06000"/>
+                          </a:solidFill>
+                          <a:latin typeface="Calibri"/>
+                        </a:rPr>
+                        <a:t>9%</a:t>
+                      </a:r>
+                    </a:p>
+                  </a:txBody>
+                  <a:tcPr>
+                    <a:solidFill>
+                      <a:srgbClr val="FFFFFF"/>
+                    </a:solidFill>
+                  </a:tcPr>
+                </a:tc>
+              </a:tr>
+              <a:tr h="224028">
+                <a:tc>
+                  <a:txBody>
+                    <a:bodyPr/>
+                    <a:lstStyle/>
+                    <a:p>
+                      <a:r>
+                        <a:rPr sz="850" b="1">
+                          <a:latin typeface="Calibri"/>
+                        </a:rPr>
+                        <a:t>bb-md5</a:t>
+                      </a:r>
+                    </a:p>
+                  </a:txBody>
+                  <a:tcPr>
+                    <a:solidFill>
+                      <a:srgbClr val="EFF3FA"/>
+                    </a:solidFill>
+                  </a:tcPr>
+                </a:tc>
+                <a:tc>
+                  <a:txBody>
+                    <a:bodyPr/>
+                    <a:lstStyle/>
+                    <a:p>
+                      <a:r>
+                        <a:rPr sz="850" b="0">
+                          <a:latin typeface="Calibri"/>
+                        </a:rPr>
+                        <a:t>1358</a:t>
                       </a:r>
                     </a:p>
                   </a:txBody>
@@ -9226,7 +9712,7 @@
                           </a:solidFill>
                           <a:latin typeface="Calibri"/>
                         </a:rPr>
-                        <a:t>7%</a:t>
+                        <a:t>8%</a:t>
                       </a:r>
                     </a:p>
                   </a:txBody>
@@ -9247,7 +9733,7 @@
                         <a:rPr sz="850" b="1">
                           <a:latin typeface="Calibri"/>
                         </a:rPr>
-                        <a:t>lz4-fast</a:t>
+                        <a:t>sort-big</a:t>
                       </a:r>
                     </a:p>
                   </a:txBody>
@@ -9266,7 +9752,7 @@
                         <a:rPr sz="850" b="0">
                           <a:latin typeface="Calibri"/>
                         </a:rPr>
-                        <a:t>1359</a:t>
+                        <a:t>1384</a:t>
                       </a:r>
                     </a:p>
                   </a:txBody>
@@ -9307,7 +9793,7 @@
                           </a:solidFill>
                           <a:latin typeface="Calibri"/>
                         </a:rPr>
-                        <a:t>8%</a:t>
+                        <a:t>7%</a:t>
                       </a:r>
                     </a:p>
                   </a:txBody>
@@ -9328,7 +9814,7 @@
                         <a:rPr sz="850" b="1">
                           <a:latin typeface="Calibri"/>
                         </a:rPr>
-                        <a:t>rd-life</a:t>
+                        <a:t>bb-gunzip</a:t>
                       </a:r>
                     </a:p>
                   </a:txBody>
@@ -9347,7 +9833,7 @@
                         <a:rPr sz="850" b="0">
                           <a:latin typeface="Calibri"/>
                         </a:rPr>
-                        <a:t>1425</a:t>
+                        <a:t>1342</a:t>
                       </a:r>
                     </a:p>
                   </a:txBody>
@@ -9373,6 +9859,87 @@
                   <a:tcPr>
                     <a:solidFill>
                       <a:srgbClr val="EFF3FA"/>
+                    </a:solidFill>
+                  </a:tcPr>
+                </a:tc>
+                <a:tc>
+                  <a:txBody>
+                    <a:bodyPr/>
+                    <a:lstStyle/>
+                    <a:p>
+                      <a:r>
+                        <a:rPr sz="850" b="0">
+                          <a:solidFill>
+                            <a:srgbClr val="B06000"/>
+                          </a:solidFill>
+                          <a:latin typeface="Calibri"/>
+                        </a:rPr>
+                        <a:t>9%</a:t>
+                      </a:r>
+                    </a:p>
+                  </a:txBody>
+                  <a:tcPr>
+                    <a:solidFill>
+                      <a:srgbClr val="EFF3FA"/>
+                    </a:solidFill>
+                  </a:tcPr>
+                </a:tc>
+              </a:tr>
+              <a:tr h="224028">
+                <a:tc>
+                  <a:txBody>
+                    <a:bodyPr/>
+                    <a:lstStyle/>
+                    <a:p>
+                      <a:r>
+                        <a:rPr sz="850" b="1">
+                          <a:latin typeface="Calibri"/>
+                        </a:rPr>
+                        <a:t>cr-md5</a:t>
+                      </a:r>
+                    </a:p>
+                  </a:txBody>
+                  <a:tcPr>
+                    <a:solidFill>
+                      <a:srgbClr val="FFFFFF"/>
+                    </a:solidFill>
+                  </a:tcPr>
+                </a:tc>
+                <a:tc>
+                  <a:txBody>
+                    <a:bodyPr/>
+                    <a:lstStyle/>
+                    <a:p>
+                      <a:r>
+                        <a:rPr sz="850" b="0">
+                          <a:latin typeface="Calibri"/>
+                        </a:rPr>
+                        <a:t>1379</a:t>
+                      </a:r>
+                    </a:p>
+                  </a:txBody>
+                  <a:tcPr>
+                    <a:solidFill>
+                      <a:srgbClr val="FFFFFF"/>
+                    </a:solidFill>
+                  </a:tcPr>
+                </a:tc>
+                <a:tc>
+                  <a:txBody>
+                    <a:bodyPr/>
+                    <a:lstStyle/>
+                    <a:p>
+                      <a:r>
+                        <a:rPr sz="850" b="0">
+                          <a:latin typeface="Calibri"/>
+                        </a:rPr>
+                        <a:t>1478</a:t>
+                      </a:r>
+                    </a:p>
+                  </a:txBody>
+                  <a:tcPr>
+                    <a:solidFill>
+                      <a:srgbClr val="FFFFFF"/>
                     </a:solidFill>
                   </a:tcPr>
                 </a:tc>
@@ -9388,13 +9955,13 @@
                           </a:solidFill>
                           <a:latin typeface="Calibri"/>
                         </a:rPr>
-                        <a:t>4%</a:t>
-                      </a:r>
-                    </a:p>
-                  </a:txBody>
-                  <a:tcPr>
-                    <a:solidFill>
-                      <a:srgbClr val="EFF3FA"/>
+                        <a:t>7%</a:t>
+                      </a:r>
+                    </a:p>
+                  </a:txBody>
+                  <a:tcPr>
+                    <a:solidFill>
+                      <a:srgbClr val="FFFFFF"/>
                     </a:solidFill>
                   </a:tcPr>
                 </a:tc>
@@ -9409,13 +9976,13 @@
                         <a:rPr sz="850" b="1">
                           <a:latin typeface="Calibri"/>
                         </a:rPr>
-                        <a:t>lua</a:t>
-                      </a:r>
-                    </a:p>
-                  </a:txBody>
-                  <a:tcPr>
-                    <a:solidFill>
-                      <a:srgbClr val="FFFFFF"/>
+                        <a:t>cr-rc4</a:t>
+                      </a:r>
+                    </a:p>
+                  </a:txBody>
+                  <a:tcPr>
+                    <a:solidFill>
+                      <a:srgbClr val="EFF3FA"/>
                     </a:solidFill>
                   </a:tcPr>
                 </a:tc>
@@ -9428,13 +9995,13 @@
                         <a:rPr sz="850" b="0">
                           <a:latin typeface="Calibri"/>
                         </a:rPr>
-                        <a:t>1363</a:t>
-                      </a:r>
-                    </a:p>
-                  </a:txBody>
-                  <a:tcPr>
-                    <a:solidFill>
-                      <a:srgbClr val="FFFFFF"/>
+                        <a:t>1336</a:t>
+                      </a:r>
+                    </a:p>
+                  </a:txBody>
+                  <a:tcPr>
+                    <a:solidFill>
+                      <a:srgbClr val="EFF3FA"/>
                     </a:solidFill>
                   </a:tcPr>
                 </a:tc>
@@ -9447,13 +10014,13 @@
                         <a:rPr sz="850" b="0">
                           <a:latin typeface="Calibri"/>
                         </a:rPr>
-                        <a:t>1475</a:t>
-                      </a:r>
-                    </a:p>
-                  </a:txBody>
-                  <a:tcPr>
-                    <a:solidFill>
-                      <a:srgbClr val="FFFFFF"/>
+                        <a:t>1477</a:t>
+                      </a:r>
+                    </a:p>
+                  </a:txBody>
+                  <a:tcPr>
+                    <a:solidFill>
+                      <a:srgbClr val="EFF3FA"/>
                     </a:solidFill>
                   </a:tcPr>
                 </a:tc>
@@ -9465,578 +10032,11 @@
                       <a:r>
                         <a:rPr sz="850" b="0">
                           <a:solidFill>
-                            <a:srgbClr val="187A33"/>
+                            <a:srgbClr val="B06000"/>
                           </a:solidFill>
                           <a:latin typeface="Calibri"/>
                         </a:rPr>
-                        <a:t>8%</a:t>
-                      </a:r>
-                    </a:p>
-                  </a:txBody>
-                  <a:tcPr>
-                    <a:solidFill>
-                      <a:srgbClr val="FFFFFF"/>
-                    </a:solidFill>
-                  </a:tcPr>
-                </a:tc>
-              </a:tr>
-              <a:tr h="224028">
-                <a:tc>
-                  <a:txBody>
-                    <a:bodyPr/>
-                    <a:lstStyle/>
-                    <a:p>
-                      <a:r>
-                        <a:rPr sz="850" b="1">
-                          <a:latin typeface="Calibri"/>
-                        </a:rPr>
-                        <a:t>cr-blowfish</a:t>
-                      </a:r>
-                    </a:p>
-                  </a:txBody>
-                  <a:tcPr>
-                    <a:solidFill>
-                      <a:srgbClr val="EFF3FA"/>
-                    </a:solidFill>
-                  </a:tcPr>
-                </a:tc>
-                <a:tc>
-                  <a:txBody>
-                    <a:bodyPr/>
-                    <a:lstStyle/>
-                    <a:p>
-                      <a:r>
-                        <a:rPr sz="850" b="0">
-                          <a:latin typeface="Calibri"/>
-                        </a:rPr>
-                        <a:t>1374</a:t>
-                      </a:r>
-                    </a:p>
-                  </a:txBody>
-                  <a:tcPr>
-                    <a:solidFill>
-                      <a:srgbClr val="EFF3FA"/>
-                    </a:solidFill>
-                  </a:tcPr>
-                </a:tc>
-                <a:tc>
-                  <a:txBody>
-                    <a:bodyPr/>
-                    <a:lstStyle/>
-                    <a:p>
-                      <a:r>
-                        <a:rPr sz="850" b="0">
-                          <a:latin typeface="Calibri"/>
-                        </a:rPr>
-                        <a:t>1462</a:t>
-                      </a:r>
-                    </a:p>
-                  </a:txBody>
-                  <a:tcPr>
-                    <a:solidFill>
-                      <a:srgbClr val="EFF3FA"/>
-                    </a:solidFill>
-                  </a:tcPr>
-                </a:tc>
-                <a:tc>
-                  <a:txBody>
-                    <a:bodyPr/>
-                    <a:lstStyle/>
-                    <a:p>
-                      <a:r>
-                        <a:rPr sz="850" b="0">
-                          <a:solidFill>
-                            <a:srgbClr val="187A33"/>
-                          </a:solidFill>
-                          <a:latin typeface="Calibri"/>
-                        </a:rPr>
-                        <a:t>6%</a:t>
-                      </a:r>
-                    </a:p>
-                  </a:txBody>
-                  <a:tcPr>
-                    <a:solidFill>
-                      <a:srgbClr val="EFF3FA"/>
-                    </a:solidFill>
-                  </a:tcPr>
-                </a:tc>
-              </a:tr>
-              <a:tr h="224028">
-                <a:tc>
-                  <a:txBody>
-                    <a:bodyPr/>
-                    <a:lstStyle/>
-                    <a:p>
-                      <a:r>
-                        <a:rPr sz="850" b="1">
-                          <a:latin typeface="Calibri"/>
-                        </a:rPr>
-                        <a:t>sqlite</a:t>
-                      </a:r>
-                    </a:p>
-                  </a:txBody>
-                  <a:tcPr>
-                    <a:solidFill>
-                      <a:srgbClr val="FFFFFF"/>
-                    </a:solidFill>
-                  </a:tcPr>
-                </a:tc>
-                <a:tc>
-                  <a:txBody>
-                    <a:bodyPr/>
-                    <a:lstStyle/>
-                    <a:p>
-                      <a:r>
-                        <a:rPr sz="850" b="0">
-                          <a:latin typeface="Calibri"/>
-                        </a:rPr>
-                        <a:t>1351</a:t>
-                      </a:r>
-                    </a:p>
-                  </a:txBody>
-                  <a:tcPr>
-                    <a:solidFill>
-                      <a:srgbClr val="FFFFFF"/>
-                    </a:solidFill>
-                  </a:tcPr>
-                </a:tc>
-                <a:tc>
-                  <a:txBody>
-                    <a:bodyPr/>
-                    <a:lstStyle/>
-                    <a:p>
-                      <a:r>
-                        <a:rPr sz="850" b="0">
-                          <a:latin typeface="Calibri"/>
-                        </a:rPr>
-                        <a:t>1462</a:t>
-                      </a:r>
-                    </a:p>
-                  </a:txBody>
-                  <a:tcPr>
-                    <a:solidFill>
-                      <a:srgbClr val="FFFFFF"/>
-                    </a:solidFill>
-                  </a:tcPr>
-                </a:tc>
-                <a:tc>
-                  <a:txBody>
-                    <a:bodyPr/>
-                    <a:lstStyle/>
-                    <a:p>
-                      <a:r>
-                        <a:rPr sz="850" b="0">
-                          <a:solidFill>
-                            <a:srgbClr val="187A33"/>
-                          </a:solidFill>
-                          <a:latin typeface="Calibri"/>
-                        </a:rPr>
-                        <a:t>8%</a:t>
-                      </a:r>
-                    </a:p>
-                  </a:txBody>
-                  <a:tcPr>
-                    <a:solidFill>
-                      <a:srgbClr val="FFFFFF"/>
-                    </a:solidFill>
-                  </a:tcPr>
-                </a:tc>
-              </a:tr>
-              <a:tr h="224028">
-                <a:tc>
-                  <a:txBody>
-                    <a:bodyPr/>
-                    <a:lstStyle/>
-                    <a:p>
-                      <a:r>
-                        <a:rPr sz="850" b="1">
-                          <a:latin typeface="Calibri"/>
-                        </a:rPr>
-                        <a:t>cr-rc4</a:t>
-                      </a:r>
-                    </a:p>
-                  </a:txBody>
-                  <a:tcPr>
-                    <a:solidFill>
-                      <a:srgbClr val="EFF3FA"/>
-                    </a:solidFill>
-                  </a:tcPr>
-                </a:tc>
-                <a:tc>
-                  <a:txBody>
-                    <a:bodyPr/>
-                    <a:lstStyle/>
-                    <a:p>
-                      <a:r>
-                        <a:rPr sz="850" b="0">
-                          <a:latin typeface="Calibri"/>
-                        </a:rPr>
-                        <a:t>1336</a:t>
-                      </a:r>
-                    </a:p>
-                  </a:txBody>
-                  <a:tcPr>
-                    <a:solidFill>
-                      <a:srgbClr val="EFF3FA"/>
-                    </a:solidFill>
-                  </a:tcPr>
-                </a:tc>
-                <a:tc>
-                  <a:txBody>
-                    <a:bodyPr/>
-                    <a:lstStyle/>
-                    <a:p>
-                      <a:r>
-                        <a:rPr sz="850" b="0">
-                          <a:latin typeface="Calibri"/>
-                        </a:rPr>
-                        <a:t>1460</a:t>
-                      </a:r>
-                    </a:p>
-                  </a:txBody>
-                  <a:tcPr>
-                    <a:solidFill>
-                      <a:srgbClr val="EFF3FA"/>
-                    </a:solidFill>
-                  </a:tcPr>
-                </a:tc>
-                <a:tc>
-                  <a:txBody>
-                    <a:bodyPr/>
-                    <a:lstStyle/>
-                    <a:p>
-                      <a:r>
-                        <a:rPr sz="850" b="0">
-                          <a:solidFill>
-                            <a:srgbClr val="187A33"/>
-                          </a:solidFill>
-                          <a:latin typeface="Calibri"/>
-                        </a:rPr>
-                        <a:t>8%</a:t>
-                      </a:r>
-                    </a:p>
-                  </a:txBody>
-                  <a:tcPr>
-                    <a:solidFill>
-                      <a:srgbClr val="EFF3FA"/>
-                    </a:solidFill>
-                  </a:tcPr>
-                </a:tc>
-              </a:tr>
-              <a:tr h="224028">
-                <a:tc>
-                  <a:txBody>
-                    <a:bodyPr/>
-                    <a:lstStyle/>
-                    <a:p>
-                      <a:r>
-                        <a:rPr sz="850" b="1">
-                          <a:latin typeface="Calibri"/>
-                        </a:rPr>
-                        <a:t>qoi</a:t>
-                      </a:r>
-                    </a:p>
-                  </a:txBody>
-                  <a:tcPr>
-                    <a:solidFill>
-                      <a:srgbClr val="FFFFFF"/>
-                    </a:solidFill>
-                  </a:tcPr>
-                </a:tc>
-                <a:tc>
-                  <a:txBody>
-                    <a:bodyPr/>
-                    <a:lstStyle/>
-                    <a:p>
-                      <a:r>
-                        <a:rPr sz="850" b="0">
-                          <a:latin typeface="Calibri"/>
-                        </a:rPr>
-                        <a:t>1397</a:t>
-                      </a:r>
-                    </a:p>
-                  </a:txBody>
-                  <a:tcPr>
-                    <a:solidFill>
-                      <a:srgbClr val="FFFFFF"/>
-                    </a:solidFill>
-                  </a:tcPr>
-                </a:tc>
-                <a:tc>
-                  <a:txBody>
-                    <a:bodyPr/>
-                    <a:lstStyle/>
-                    <a:p>
-                      <a:r>
-                        <a:rPr sz="850" b="0">
-                          <a:latin typeface="Calibri"/>
-                        </a:rPr>
-                        <a:t>1458</a:t>
-                      </a:r>
-                    </a:p>
-                  </a:txBody>
-                  <a:tcPr>
-                    <a:solidFill>
-                      <a:srgbClr val="FFFFFF"/>
-                    </a:solidFill>
-                  </a:tcPr>
-                </a:tc>
-                <a:tc>
-                  <a:txBody>
-                    <a:bodyPr/>
-                    <a:lstStyle/>
-                    <a:p>
-                      <a:r>
-                        <a:rPr sz="850" b="0">
-                          <a:solidFill>
-                            <a:srgbClr val="187A33"/>
-                          </a:solidFill>
-                          <a:latin typeface="Calibri"/>
-                        </a:rPr>
-                        <a:t>4%</a:t>
-                      </a:r>
-                    </a:p>
-                  </a:txBody>
-                  <a:tcPr>
-                    <a:solidFill>
-                      <a:srgbClr val="FFFFFF"/>
-                    </a:solidFill>
-                  </a:tcPr>
-                </a:tc>
-              </a:tr>
-              <a:tr h="224028">
-                <a:tc>
-                  <a:txBody>
-                    <a:bodyPr/>
-                    <a:lstStyle/>
-                    <a:p>
-                      <a:r>
-                        <a:rPr sz="850" b="1">
-                          <a:latin typeface="Calibri"/>
-                        </a:rPr>
-                        <a:t>sqlite-heavy</a:t>
-                      </a:r>
-                    </a:p>
-                  </a:txBody>
-                  <a:tcPr>
-                    <a:solidFill>
-                      <a:srgbClr val="EFF3FA"/>
-                    </a:solidFill>
-                  </a:tcPr>
-                </a:tc>
-                <a:tc>
-                  <a:txBody>
-                    <a:bodyPr/>
-                    <a:lstStyle/>
-                    <a:p>
-                      <a:r>
-                        <a:rPr sz="850" b="0">
-                          <a:latin typeface="Calibri"/>
-                        </a:rPr>
-                        <a:t>1350</a:t>
-                      </a:r>
-                    </a:p>
-                  </a:txBody>
-                  <a:tcPr>
-                    <a:solidFill>
-                      <a:srgbClr val="EFF3FA"/>
-                    </a:solidFill>
-                  </a:tcPr>
-                </a:tc>
-                <a:tc>
-                  <a:txBody>
-                    <a:bodyPr/>
-                    <a:lstStyle/>
-                    <a:p>
-                      <a:r>
-                        <a:rPr sz="850" b="0">
-                          <a:latin typeface="Calibri"/>
-                        </a:rPr>
-                        <a:t>1456</a:t>
-                      </a:r>
-                    </a:p>
-                  </a:txBody>
-                  <a:tcPr>
-                    <a:solidFill>
-                      <a:srgbClr val="EFF3FA"/>
-                    </a:solidFill>
-                  </a:tcPr>
-                </a:tc>
-                <a:tc>
-                  <a:txBody>
-                    <a:bodyPr/>
-                    <a:lstStyle/>
-                    <a:p>
-                      <a:r>
-                        <a:rPr sz="850" b="0">
-                          <a:solidFill>
-                            <a:srgbClr val="187A33"/>
-                          </a:solidFill>
-                          <a:latin typeface="Calibri"/>
-                        </a:rPr>
-                        <a:t>7%</a:t>
-                      </a:r>
-                    </a:p>
-                  </a:txBody>
-                  <a:tcPr>
-                    <a:solidFill>
-                      <a:srgbClr val="EFF3FA"/>
-                    </a:solidFill>
-                  </a:tcPr>
-                </a:tc>
-              </a:tr>
-              <a:tr h="224028">
-                <a:tc>
-                  <a:txBody>
-                    <a:bodyPr/>
-                    <a:lstStyle/>
-                    <a:p>
-                      <a:r>
-                        <a:rPr sz="850" b="1">
-                          <a:latin typeface="Calibri"/>
-                        </a:rPr>
-                        <a:t>bb-b64</a:t>
-                      </a:r>
-                    </a:p>
-                  </a:txBody>
-                  <a:tcPr>
-                    <a:solidFill>
-                      <a:srgbClr val="FFFFFF"/>
-                    </a:solidFill>
-                  </a:tcPr>
-                </a:tc>
-                <a:tc>
-                  <a:txBody>
-                    <a:bodyPr/>
-                    <a:lstStyle/>
-                    <a:p>
-                      <a:r>
-                        <a:rPr sz="850" b="0">
-                          <a:latin typeface="Calibri"/>
-                        </a:rPr>
-                        <a:t>1335</a:t>
-                      </a:r>
-                    </a:p>
-                  </a:txBody>
-                  <a:tcPr>
-                    <a:solidFill>
-                      <a:srgbClr val="FFFFFF"/>
-                    </a:solidFill>
-                  </a:tcPr>
-                </a:tc>
-                <a:tc>
-                  <a:txBody>
-                    <a:bodyPr/>
-                    <a:lstStyle/>
-                    <a:p>
-                      <a:r>
-                        <a:rPr sz="850" b="0">
-                          <a:latin typeface="Calibri"/>
-                        </a:rPr>
-                        <a:t>1455</a:t>
-                      </a:r>
-                    </a:p>
-                  </a:txBody>
-                  <a:tcPr>
-                    <a:solidFill>
-                      <a:srgbClr val="FFFFFF"/>
-                    </a:solidFill>
-                  </a:tcPr>
-                </a:tc>
-                <a:tc>
-                  <a:txBody>
-                    <a:bodyPr/>
-                    <a:lstStyle/>
-                    <a:p>
-                      <a:r>
-                        <a:rPr sz="850" b="0">
-                          <a:solidFill>
-                            <a:srgbClr val="187A33"/>
-                          </a:solidFill>
-                          <a:latin typeface="Calibri"/>
-                        </a:rPr>
-                        <a:t>8%</a:t>
-                      </a:r>
-                    </a:p>
-                  </a:txBody>
-                  <a:tcPr>
-                    <a:solidFill>
-                      <a:srgbClr val="FFFFFF"/>
-                    </a:solidFill>
-                  </a:tcPr>
-                </a:tc>
-              </a:tr>
-              <a:tr h="224028">
-                <a:tc>
-                  <a:txBody>
-                    <a:bodyPr/>
-                    <a:lstStyle/>
-                    <a:p>
-                      <a:r>
-                        <a:rPr sz="850" b="1">
-                          <a:latin typeface="Calibri"/>
-                        </a:rPr>
-                        <a:t>sha256-big</a:t>
-                      </a:r>
-                    </a:p>
-                  </a:txBody>
-                  <a:tcPr>
-                    <a:solidFill>
-                      <a:srgbClr val="EFF3FA"/>
-                    </a:solidFill>
-                  </a:tcPr>
-                </a:tc>
-                <a:tc>
-                  <a:txBody>
-                    <a:bodyPr/>
-                    <a:lstStyle/>
-                    <a:p>
-                      <a:r>
-                        <a:rPr sz="850" b="0">
-                          <a:latin typeface="Calibri"/>
-                        </a:rPr>
-                        <a:t>1397</a:t>
-                      </a:r>
-                    </a:p>
-                  </a:txBody>
-                  <a:tcPr>
-                    <a:solidFill>
-                      <a:srgbClr val="EFF3FA"/>
-                    </a:solidFill>
-                  </a:tcPr>
-                </a:tc>
-                <a:tc>
-                  <a:txBody>
-                    <a:bodyPr/>
-                    <a:lstStyle/>
-                    <a:p>
-                      <a:r>
-                        <a:rPr sz="850" b="0">
-                          <a:latin typeface="Calibri"/>
-                        </a:rPr>
-                        <a:t>1454</a:t>
-                      </a:r>
-                    </a:p>
-                  </a:txBody>
-                  <a:tcPr>
-                    <a:solidFill>
-                      <a:srgbClr val="EFF3FA"/>
-                    </a:solidFill>
-                  </a:tcPr>
-                </a:tc>
-                <a:tc>
-                  <a:txBody>
-                    <a:bodyPr/>
-                    <a:lstStyle/>
-                    <a:p>
-                      <a:r>
-                        <a:rPr sz="850" b="0">
-                          <a:solidFill>
-                            <a:srgbClr val="187A33"/>
-                          </a:solidFill>
-                          <a:latin typeface="Calibri"/>
-                        </a:rPr>
-                        <a:t>4%</a:t>
+                        <a:t>10%</a:t>
                       </a:r>
                     </a:p>
                   </a:txBody>
@@ -10175,7 +10175,7 @@
                         <a:rPr sz="850" b="1">
                           <a:latin typeface="Calibri"/>
                         </a:rPr>
-                        <a:t>bb-md5</a:t>
+                        <a:t>sha256-big</a:t>
                       </a:r>
                     </a:p>
                   </a:txBody>
@@ -10194,7 +10194,7 @@
                         <a:rPr sz="850" b="0">
                           <a:latin typeface="Calibri"/>
                         </a:rPr>
-                        <a:t>1358</a:t>
+                        <a:t>1397</a:t>
                       </a:r>
                     </a:p>
                   </a:txBody>
@@ -10213,7 +10213,7 @@
                         <a:rPr sz="850" b="0">
                           <a:latin typeface="Calibri"/>
                         </a:rPr>
-                        <a:t>1453</a:t>
+                        <a:t>1476</a:t>
                       </a:r>
                     </a:p>
                   </a:txBody>
@@ -10235,7 +10235,7 @@
                           </a:solidFill>
                           <a:latin typeface="Calibri"/>
                         </a:rPr>
-                        <a:t>7%</a:t>
+                        <a:t>5%</a:t>
                       </a:r>
                     </a:p>
                   </a:txBody>
@@ -10256,7 +10256,7 @@
                         <a:rPr sz="850" b="1">
                           <a:latin typeface="Calibri"/>
                         </a:rPr>
-                        <a:t>bzip2-fast</a:t>
+                        <a:t>bb-b64</a:t>
                       </a:r>
                     </a:p>
                   </a:txBody>
@@ -10275,7 +10275,7 @@
                         <a:rPr sz="850" b="0">
                           <a:latin typeface="Calibri"/>
                         </a:rPr>
-                        <a:t>1349</a:t>
+                        <a:t>1335</a:t>
                       </a:r>
                     </a:p>
                   </a:txBody>
@@ -10294,13 +10294,94 @@
                         <a:rPr sz="850" b="0">
                           <a:latin typeface="Calibri"/>
                         </a:rPr>
-                        <a:t>1448</a:t>
-                      </a:r>
-                    </a:p>
-                  </a:txBody>
-                  <a:tcPr>
-                    <a:solidFill>
-                      <a:srgbClr val="FFFFFF"/>
+                        <a:t>1476</a:t>
+                      </a:r>
+                    </a:p>
+                  </a:txBody>
+                  <a:tcPr>
+                    <a:solidFill>
+                      <a:srgbClr val="FFFFFF"/>
+                    </a:solidFill>
+                  </a:tcPr>
+                </a:tc>
+                <a:tc>
+                  <a:txBody>
+                    <a:bodyPr/>
+                    <a:lstStyle/>
+                    <a:p>
+                      <a:r>
+                        <a:rPr sz="850" b="0">
+                          <a:solidFill>
+                            <a:srgbClr val="B06000"/>
+                          </a:solidFill>
+                          <a:latin typeface="Calibri"/>
+                        </a:rPr>
+                        <a:t>10%</a:t>
+                      </a:r>
+                    </a:p>
+                  </a:txBody>
+                  <a:tcPr>
+                    <a:solidFill>
+                      <a:srgbClr val="FFFFFF"/>
+                    </a:solidFill>
+                  </a:tcPr>
+                </a:tc>
+              </a:tr>
+              <a:tr h="224028">
+                <a:tc>
+                  <a:txBody>
+                    <a:bodyPr/>
+                    <a:lstStyle/>
+                    <a:p>
+                      <a:r>
+                        <a:rPr sz="850" b="1">
+                          <a:latin typeface="Calibri"/>
+                        </a:rPr>
+                        <a:t>sort</a:t>
+                      </a:r>
+                    </a:p>
+                  </a:txBody>
+                  <a:tcPr>
+                    <a:solidFill>
+                      <a:srgbClr val="EFF3FA"/>
+                    </a:solidFill>
+                  </a:tcPr>
+                </a:tc>
+                <a:tc>
+                  <a:txBody>
+                    <a:bodyPr/>
+                    <a:lstStyle/>
+                    <a:p>
+                      <a:r>
+                        <a:rPr sz="850" b="0">
+                          <a:latin typeface="Calibri"/>
+                        </a:rPr>
+                        <a:t>1378</a:t>
+                      </a:r>
+                    </a:p>
+                  </a:txBody>
+                  <a:tcPr>
+                    <a:solidFill>
+                      <a:srgbClr val="EFF3FA"/>
+                    </a:solidFill>
+                  </a:tcPr>
+                </a:tc>
+                <a:tc>
+                  <a:txBody>
+                    <a:bodyPr/>
+                    <a:lstStyle/>
+                    <a:p>
+                      <a:r>
+                        <a:rPr sz="850" b="0">
+                          <a:latin typeface="Calibri"/>
+                        </a:rPr>
+                        <a:t>1473</a:t>
+                      </a:r>
+                    </a:p>
+                  </a:txBody>
+                  <a:tcPr>
+                    <a:solidFill>
+                      <a:srgbClr val="EFF3FA"/>
                     </a:solidFill>
                   </a:tcPr>
                 </a:tc>
@@ -10316,13 +10397,13 @@
                           </a:solidFill>
                           <a:latin typeface="Calibri"/>
                         </a:rPr>
-                        <a:t>7%</a:t>
-                      </a:r>
-                    </a:p>
-                  </a:txBody>
-                  <a:tcPr>
-                    <a:solidFill>
-                      <a:srgbClr val="FFFFFF"/>
+                        <a:t>6%</a:t>
+                      </a:r>
+                    </a:p>
+                  </a:txBody>
+                  <a:tcPr>
+                    <a:solidFill>
+                      <a:srgbClr val="EFF3FA"/>
                     </a:solidFill>
                   </a:tcPr>
                 </a:tc>
@@ -10337,13 +10418,13 @@
                         <a:rPr sz="850" b="1">
                           <a:latin typeface="Calibri"/>
                         </a:rPr>
-                        <a:t>cr-b64</a:t>
-                      </a:r>
-                    </a:p>
-                  </a:txBody>
-                  <a:tcPr>
-                    <a:solidFill>
-                      <a:srgbClr val="EFF3FA"/>
+                        <a:t>bb-sha512</a:t>
+                      </a:r>
+                    </a:p>
+                  </a:txBody>
+                  <a:tcPr>
+                    <a:solidFill>
+                      <a:srgbClr val="FFFFFF"/>
                     </a:solidFill>
                   </a:tcPr>
                 </a:tc>
@@ -10356,13 +10437,13 @@
                         <a:rPr sz="850" b="0">
                           <a:latin typeface="Calibri"/>
                         </a:rPr>
-                        <a:t>1377</a:t>
-                      </a:r>
-                    </a:p>
-                  </a:txBody>
-                  <a:tcPr>
-                    <a:solidFill>
-                      <a:srgbClr val="EFF3FA"/>
+                        <a:t>1380</a:t>
+                      </a:r>
+                    </a:p>
+                  </a:txBody>
+                  <a:tcPr>
+                    <a:solidFill>
+                      <a:srgbClr val="FFFFFF"/>
                     </a:solidFill>
                   </a:tcPr>
                 </a:tc>
@@ -10375,13 +10456,13 @@
                         <a:rPr sz="850" b="0">
                           <a:latin typeface="Calibri"/>
                         </a:rPr>
-                        <a:t>1446</a:t>
-                      </a:r>
-                    </a:p>
-                  </a:txBody>
-                  <a:tcPr>
-                    <a:solidFill>
-                      <a:srgbClr val="EFF3FA"/>
+                        <a:t>1470</a:t>
+                      </a:r>
+                    </a:p>
+                  </a:txBody>
+                  <a:tcPr>
+                    <a:solidFill>
+                      <a:srgbClr val="FFFFFF"/>
                     </a:solidFill>
                   </a:tcPr>
                 </a:tc>
@@ -10397,13 +10478,13 @@
                           </a:solidFill>
                           <a:latin typeface="Calibri"/>
                         </a:rPr>
-                        <a:t>5%</a:t>
-                      </a:r>
-                    </a:p>
-                  </a:txBody>
-                  <a:tcPr>
-                    <a:solidFill>
-                      <a:srgbClr val="EFF3FA"/>
+                        <a:t>6%</a:t>
+                      </a:r>
+                    </a:p>
+                  </a:txBody>
+                  <a:tcPr>
+                    <a:solidFill>
+                      <a:srgbClr val="FFFFFF"/>
                     </a:solidFill>
                   </a:tcPr>
                 </a:tc>
@@ -10418,13 +10499,13 @@
                         <a:rPr sz="850" b="1">
                           <a:latin typeface="Calibri"/>
                         </a:rPr>
-                        <a:t>bb-sortn</a:t>
-                      </a:r>
-                    </a:p>
-                  </a:txBody>
-                  <a:tcPr>
-                    <a:solidFill>
-                      <a:srgbClr val="FFFFFF"/>
+                        <a:t>bzip2-fast</a:t>
+                      </a:r>
+                    </a:p>
+                  </a:txBody>
+                  <a:tcPr>
+                    <a:solidFill>
+                      <a:srgbClr val="EFF3FA"/>
                     </a:solidFill>
                   </a:tcPr>
                 </a:tc>
@@ -10437,13 +10518,13 @@
                         <a:rPr sz="850" b="0">
                           <a:latin typeface="Calibri"/>
                         </a:rPr>
-                        <a:t>1345</a:t>
-                      </a:r>
-                    </a:p>
-                  </a:txBody>
-                  <a:tcPr>
-                    <a:solidFill>
-                      <a:srgbClr val="FFFFFF"/>
+                        <a:t>1349</a:t>
+                      </a:r>
+                    </a:p>
+                  </a:txBody>
+                  <a:tcPr>
+                    <a:solidFill>
+                      <a:srgbClr val="EFF3FA"/>
                     </a:solidFill>
                   </a:tcPr>
                 </a:tc>
@@ -10456,13 +10537,13 @@
                         <a:rPr sz="850" b="0">
                           <a:latin typeface="Calibri"/>
                         </a:rPr>
-                        <a:t>1446</a:t>
-                      </a:r>
-                    </a:p>
-                  </a:txBody>
-                  <a:tcPr>
-                    <a:solidFill>
-                      <a:srgbClr val="FFFFFF"/>
+                        <a:t>1469</a:t>
+                      </a:r>
+                    </a:p>
+                  </a:txBody>
+                  <a:tcPr>
+                    <a:solidFill>
+                      <a:srgbClr val="EFF3FA"/>
                     </a:solidFill>
                   </a:tcPr>
                 </a:tc>
@@ -10478,13 +10559,13 @@
                           </a:solidFill>
                           <a:latin typeface="Calibri"/>
                         </a:rPr>
-                        <a:t>7%</a:t>
-                      </a:r>
-                    </a:p>
-                  </a:txBody>
-                  <a:tcPr>
-                    <a:solidFill>
-                      <a:srgbClr val="FFFFFF"/>
+                        <a:t>8%</a:t>
+                      </a:r>
+                    </a:p>
+                  </a:txBody>
+                  <a:tcPr>
+                    <a:solidFill>
+                      <a:srgbClr val="EFF3FA"/>
                     </a:solidFill>
                   </a:tcPr>
                 </a:tc>
@@ -10499,13 +10580,13 @@
                         <a:rPr sz="850" b="1">
                           <a:latin typeface="Calibri"/>
                         </a:rPr>
-                        <a:t>bzip2</a:t>
-                      </a:r>
-                    </a:p>
-                  </a:txBody>
-                  <a:tcPr>
-                    <a:solidFill>
-                      <a:srgbClr val="EFF3FA"/>
+                        <a:t>bb-wc</a:t>
+                      </a:r>
+                    </a:p>
+                  </a:txBody>
+                  <a:tcPr>
+                    <a:solidFill>
+                      <a:srgbClr val="FFFFFF"/>
                     </a:solidFill>
                   </a:tcPr>
                 </a:tc>
@@ -10518,13 +10599,13 @@
                         <a:rPr sz="850" b="0">
                           <a:latin typeface="Calibri"/>
                         </a:rPr>
-                        <a:t>1337</a:t>
-                      </a:r>
-                    </a:p>
-                  </a:txBody>
-                  <a:tcPr>
-                    <a:solidFill>
-                      <a:srgbClr val="EFF3FA"/>
+                        <a:t>1371</a:t>
+                      </a:r>
+                    </a:p>
+                  </a:txBody>
+                  <a:tcPr>
+                    <a:solidFill>
+                      <a:srgbClr val="FFFFFF"/>
                     </a:solidFill>
                   </a:tcPr>
                 </a:tc>
@@ -10537,13 +10618,13 @@
                         <a:rPr sz="850" b="0">
                           <a:latin typeface="Calibri"/>
                         </a:rPr>
-                        <a:t>1446</a:t>
-                      </a:r>
-                    </a:p>
-                  </a:txBody>
-                  <a:tcPr>
-                    <a:solidFill>
-                      <a:srgbClr val="EFF3FA"/>
+                        <a:t>1467</a:t>
+                      </a:r>
+                    </a:p>
+                  </a:txBody>
+                  <a:tcPr>
+                    <a:solidFill>
+                      <a:srgbClr val="FFFFFF"/>
                     </a:solidFill>
                   </a:tcPr>
                 </a:tc>
@@ -10559,13 +10640,13 @@
                           </a:solidFill>
                           <a:latin typeface="Calibri"/>
                         </a:rPr>
-                        <a:t>8%</a:t>
-                      </a:r>
-                    </a:p>
-                  </a:txBody>
-                  <a:tcPr>
-                    <a:solidFill>
-                      <a:srgbClr val="EFF3FA"/>
+                        <a:t>6%</a:t>
+                      </a:r>
+                    </a:p>
+                  </a:txBody>
+                  <a:tcPr>
+                    <a:solidFill>
+                      <a:srgbClr val="FFFFFF"/>
                     </a:solidFill>
                   </a:tcPr>
                 </a:tc>
@@ -10580,13 +10661,13 @@
                         <a:rPr sz="850" b="1">
                           <a:latin typeface="Calibri"/>
                         </a:rPr>
-                        <a:t>bb-wc</a:t>
-                      </a:r>
-                    </a:p>
-                  </a:txBody>
-                  <a:tcPr>
-                    <a:solidFill>
-                      <a:srgbClr val="FFFFFF"/>
+                        <a:t>sha256</a:t>
+                      </a:r>
+                    </a:p>
+                  </a:txBody>
+                  <a:tcPr>
+                    <a:solidFill>
+                      <a:srgbClr val="EFF3FA"/>
                     </a:solidFill>
                   </a:tcPr>
                 </a:tc>
@@ -10599,13 +10680,13 @@
                         <a:rPr sz="850" b="0">
                           <a:latin typeface="Calibri"/>
                         </a:rPr>
-                        <a:t>1371</a:t>
-                      </a:r>
-                    </a:p>
-                  </a:txBody>
-                  <a:tcPr>
-                    <a:solidFill>
-                      <a:srgbClr val="FFFFFF"/>
+                        <a:t>1398</a:t>
+                      </a:r>
+                    </a:p>
+                  </a:txBody>
+                  <a:tcPr>
+                    <a:solidFill>
+                      <a:srgbClr val="EFF3FA"/>
                     </a:solidFill>
                   </a:tcPr>
                 </a:tc>
@@ -10618,13 +10699,13 @@
                         <a:rPr sz="850" b="0">
                           <a:latin typeface="Calibri"/>
                         </a:rPr>
-                        <a:t>1444</a:t>
-                      </a:r>
-                    </a:p>
-                  </a:txBody>
-                  <a:tcPr>
-                    <a:solidFill>
-                      <a:srgbClr val="FFFFFF"/>
+                        <a:t>1458</a:t>
+                      </a:r>
+                    </a:p>
+                  </a:txBody>
+                  <a:tcPr>
+                    <a:solidFill>
+                      <a:srgbClr val="EFF3FA"/>
                     </a:solidFill>
                   </a:tcPr>
                 </a:tc>
@@ -10640,13 +10721,13 @@
                           </a:solidFill>
                           <a:latin typeface="Calibri"/>
                         </a:rPr>
-                        <a:t>5%</a:t>
-                      </a:r>
-                    </a:p>
-                  </a:txBody>
-                  <a:tcPr>
-                    <a:solidFill>
-                      <a:srgbClr val="FFFFFF"/>
+                        <a:t>4%</a:t>
+                      </a:r>
+                    </a:p>
+                  </a:txBody>
+                  <a:tcPr>
+                    <a:solidFill>
+                      <a:srgbClr val="EFF3FA"/>
                     </a:solidFill>
                   </a:tcPr>
                 </a:tc>
@@ -10661,13 +10742,13 @@
                         <a:rPr sz="850" b="1">
                           <a:latin typeface="Calibri"/>
                         </a:rPr>
-                        <a:t>cr-aes</a:t>
-                      </a:r>
-                    </a:p>
-                  </a:txBody>
-                  <a:tcPr>
-                    <a:solidFill>
-                      <a:srgbClr val="EFF3FA"/>
+                        <a:t>lua</a:t>
+                      </a:r>
+                    </a:p>
+                  </a:txBody>
+                  <a:tcPr>
+                    <a:solidFill>
+                      <a:srgbClr val="FFFFFF"/>
                     </a:solidFill>
                   </a:tcPr>
                 </a:tc>
@@ -10680,13 +10761,13 @@
                         <a:rPr sz="850" b="0">
                           <a:latin typeface="Calibri"/>
                         </a:rPr>
-                        <a:t>1378</a:t>
-                      </a:r>
-                    </a:p>
-                  </a:txBody>
-                  <a:tcPr>
-                    <a:solidFill>
-                      <a:srgbClr val="EFF3FA"/>
+                        <a:t>1363</a:t>
+                      </a:r>
+                    </a:p>
+                  </a:txBody>
+                  <a:tcPr>
+                    <a:solidFill>
+                      <a:srgbClr val="FFFFFF"/>
                     </a:solidFill>
                   </a:tcPr>
                 </a:tc>
@@ -10699,13 +10780,13 @@
                         <a:rPr sz="850" b="0">
                           <a:latin typeface="Calibri"/>
                         </a:rPr>
-                        <a:t>1437</a:t>
-                      </a:r>
-                    </a:p>
-                  </a:txBody>
-                  <a:tcPr>
-                    <a:solidFill>
-                      <a:srgbClr val="EFF3FA"/>
+                        <a:t>1457</a:t>
+                      </a:r>
+                    </a:p>
+                  </a:txBody>
+                  <a:tcPr>
+                    <a:solidFill>
+                      <a:srgbClr val="FFFFFF"/>
                     </a:solidFill>
                   </a:tcPr>
                 </a:tc>
@@ -10721,13 +10802,13 @@
                           </a:solidFill>
                           <a:latin typeface="Calibri"/>
                         </a:rPr>
-                        <a:t>4%</a:t>
-                      </a:r>
-                    </a:p>
-                  </a:txBody>
-                  <a:tcPr>
-                    <a:solidFill>
-                      <a:srgbClr val="EFF3FA"/>
+                        <a:t>6%</a:t>
+                      </a:r>
+                    </a:p>
+                  </a:txBody>
+                  <a:tcPr>
+                    <a:solidFill>
+                      <a:srgbClr val="FFFFFF"/>
                     </a:solidFill>
                   </a:tcPr>
                 </a:tc>
@@ -10742,13 +10823,13 @@
                         <a:rPr sz="850" b="1">
                           <a:latin typeface="Calibri"/>
                         </a:rPr>
-                        <a:t>bb-gzip</a:t>
-                      </a:r>
-                    </a:p>
-                  </a:txBody>
-                  <a:tcPr>
-                    <a:solidFill>
-                      <a:srgbClr val="FFFFFF"/>
+                        <a:t>cr-aes</a:t>
+                      </a:r>
+                    </a:p>
+                  </a:txBody>
+                  <a:tcPr>
+                    <a:solidFill>
+                      <a:srgbClr val="EFF3FA"/>
                     </a:solidFill>
                   </a:tcPr>
                 </a:tc>
@@ -10761,13 +10842,13 @@
                         <a:rPr sz="850" b="0">
                           <a:latin typeface="Calibri"/>
                         </a:rPr>
-                        <a:t>1335</a:t>
-                      </a:r>
-                    </a:p>
-                  </a:txBody>
-                  <a:tcPr>
-                    <a:solidFill>
-                      <a:srgbClr val="FFFFFF"/>
+                        <a:t>1378</a:t>
+                      </a:r>
+                    </a:p>
+                  </a:txBody>
+                  <a:tcPr>
+                    <a:solidFill>
+                      <a:srgbClr val="EFF3FA"/>
                     </a:solidFill>
                   </a:tcPr>
                 </a:tc>
@@ -10780,13 +10861,13 @@
                         <a:rPr sz="850" b="0">
                           <a:latin typeface="Calibri"/>
                         </a:rPr>
-                        <a:t>1436</a:t>
-                      </a:r>
-                    </a:p>
-                  </a:txBody>
-                  <a:tcPr>
-                    <a:solidFill>
-                      <a:srgbClr val="FFFFFF"/>
+                        <a:t>1445</a:t>
+                      </a:r>
+                    </a:p>
+                  </a:txBody>
+                  <a:tcPr>
+                    <a:solidFill>
+                      <a:srgbClr val="EFF3FA"/>
                     </a:solidFill>
                   </a:tcPr>
                 </a:tc>
@@ -10802,13 +10883,13 @@
                           </a:solidFill>
                           <a:latin typeface="Calibri"/>
                         </a:rPr>
-                        <a:t>7%</a:t>
-                      </a:r>
-                    </a:p>
-                  </a:txBody>
-                  <a:tcPr>
-                    <a:solidFill>
-                      <a:srgbClr val="FFFFFF"/>
+                        <a:t>5%</a:t>
+                      </a:r>
+                    </a:p>
+                  </a:txBody>
+                  <a:tcPr>
+                    <a:solidFill>
+                      <a:srgbClr val="EFF3FA"/>
                     </a:solidFill>
                   </a:tcPr>
                 </a:tc>
@@ -10823,13 +10904,13 @@
                         <a:rPr sz="850" b="1">
                           <a:latin typeface="Calibri"/>
                         </a:rPr>
-                        <a:t>bb-sed</a:t>
-                      </a:r>
-                    </a:p>
-                  </a:txBody>
-                  <a:tcPr>
-                    <a:solidFill>
-                      <a:srgbClr val="EFF3FA"/>
+                        <a:t>bzip2</a:t>
+                      </a:r>
+                    </a:p>
+                  </a:txBody>
+                  <a:tcPr>
+                    <a:solidFill>
+                      <a:srgbClr val="FFFFFF"/>
                     </a:solidFill>
                   </a:tcPr>
                 </a:tc>
@@ -10842,13 +10923,13 @@
                         <a:rPr sz="850" b="0">
                           <a:latin typeface="Calibri"/>
                         </a:rPr>
-                        <a:t>1343</a:t>
-                      </a:r>
-                    </a:p>
-                  </a:txBody>
-                  <a:tcPr>
-                    <a:solidFill>
-                      <a:srgbClr val="EFF3FA"/>
+                        <a:t>1337</a:t>
+                      </a:r>
+                    </a:p>
+                  </a:txBody>
+                  <a:tcPr>
+                    <a:solidFill>
+                      <a:srgbClr val="FFFFFF"/>
                     </a:solidFill>
                   </a:tcPr>
                 </a:tc>
@@ -10861,13 +10942,13 @@
                         <a:rPr sz="850" b="0">
                           <a:latin typeface="Calibri"/>
                         </a:rPr>
-                        <a:t>1431</a:t>
-                      </a:r>
-                    </a:p>
-                  </a:txBody>
-                  <a:tcPr>
-                    <a:solidFill>
-                      <a:srgbClr val="EFF3FA"/>
+                        <a:t>1444</a:t>
+                      </a:r>
+                    </a:p>
+                  </a:txBody>
+                  <a:tcPr>
+                    <a:solidFill>
+                      <a:srgbClr val="FFFFFF"/>
                     </a:solidFill>
                   </a:tcPr>
                 </a:tc>
@@ -10883,13 +10964,13 @@
                           </a:solidFill>
                           <a:latin typeface="Calibri"/>
                         </a:rPr>
-                        <a:t>6%</a:t>
-                      </a:r>
-                    </a:p>
-                  </a:txBody>
-                  <a:tcPr>
-                    <a:solidFill>
-                      <a:srgbClr val="EFF3FA"/>
+                        <a:t>7%</a:t>
+                      </a:r>
+                    </a:p>
+                  </a:txBody>
+                  <a:tcPr>
+                    <a:solidFill>
+                      <a:srgbClr val="FFFFFF"/>
                     </a:solidFill>
                   </a:tcPr>
                 </a:tc>
@@ -10904,13 +10985,13 @@
                         <a:rPr sz="850" b="1">
                           <a:latin typeface="Calibri"/>
                         </a:rPr>
-                        <a:t>sort-big</a:t>
-                      </a:r>
-                    </a:p>
-                  </a:txBody>
-                  <a:tcPr>
-                    <a:solidFill>
-                      <a:srgbClr val="FFFFFF"/>
+                        <a:t>heatshrink</a:t>
+                      </a:r>
+                    </a:p>
+                  </a:txBody>
+                  <a:tcPr>
+                    <a:solidFill>
+                      <a:srgbClr val="EFF3FA"/>
                     </a:solidFill>
                   </a:tcPr>
                 </a:tc>
@@ -10923,13 +11004,13 @@
                         <a:rPr sz="850" b="0">
                           <a:latin typeface="Calibri"/>
                         </a:rPr>
-                        <a:t>1384</a:t>
-                      </a:r>
-                    </a:p>
-                  </a:txBody>
-                  <a:tcPr>
-                    <a:solidFill>
-                      <a:srgbClr val="FFFFFF"/>
+                        <a:t>1346</a:t>
+                      </a:r>
+                    </a:p>
+                  </a:txBody>
+                  <a:tcPr>
+                    <a:solidFill>
+                      <a:srgbClr val="EFF3FA"/>
                     </a:solidFill>
                   </a:tcPr>
                 </a:tc>
@@ -10942,13 +11023,13 @@
                         <a:rPr sz="850" b="0">
                           <a:latin typeface="Calibri"/>
                         </a:rPr>
-                        <a:t>1427</a:t>
-                      </a:r>
-                    </a:p>
-                  </a:txBody>
-                  <a:tcPr>
-                    <a:solidFill>
-                      <a:srgbClr val="FFFFFF"/>
+                        <a:t>1440</a:t>
+                      </a:r>
+                    </a:p>
+                  </a:txBody>
+                  <a:tcPr>
+                    <a:solidFill>
+                      <a:srgbClr val="EFF3FA"/>
                     </a:solidFill>
                   </a:tcPr>
                 </a:tc>
@@ -10964,13 +11045,13 @@
                           </a:solidFill>
                           <a:latin typeface="Calibri"/>
                         </a:rPr>
-                        <a:t>3%</a:t>
-                      </a:r>
-                    </a:p>
-                  </a:txBody>
-                  <a:tcPr>
-                    <a:solidFill>
-                      <a:srgbClr val="FFFFFF"/>
+                        <a:t>6%</a:t>
+                      </a:r>
+                    </a:p>
+                  </a:txBody>
+                  <a:tcPr>
+                    <a:solidFill>
+                      <a:srgbClr val="EFF3FA"/>
                     </a:solidFill>
                   </a:tcPr>
                 </a:tc>
@@ -10985,13 +11066,13 @@
                         <a:rPr sz="850" b="1">
                           <a:latin typeface="Calibri"/>
                         </a:rPr>
-                        <a:t>rd-plasma</a:t>
-                      </a:r>
-                    </a:p>
-                  </a:txBody>
-                  <a:tcPr>
-                    <a:solidFill>
-                      <a:srgbClr val="EFF3FA"/>
+                        <a:t>bb-sortn</a:t>
+                      </a:r>
+                    </a:p>
+                  </a:txBody>
+                  <a:tcPr>
+                    <a:solidFill>
+                      <a:srgbClr val="FFFFFF"/>
                     </a:solidFill>
                   </a:tcPr>
                 </a:tc>
@@ -11004,13 +11085,13 @@
                         <a:rPr sz="850" b="0">
                           <a:latin typeface="Calibri"/>
                         </a:rPr>
-                        <a:t>1331</a:t>
-                      </a:r>
-                    </a:p>
-                  </a:txBody>
-                  <a:tcPr>
-                    <a:solidFill>
-                      <a:srgbClr val="EFF3FA"/>
+                        <a:t>1345</a:t>
+                      </a:r>
+                    </a:p>
+                  </a:txBody>
+                  <a:tcPr>
+                    <a:solidFill>
+                      <a:srgbClr val="FFFFFF"/>
                     </a:solidFill>
                   </a:tcPr>
                 </a:tc>
@@ -11023,13 +11104,13 @@
                         <a:rPr sz="850" b="0">
                           <a:latin typeface="Calibri"/>
                         </a:rPr>
-                        <a:t>1424</a:t>
-                      </a:r>
-                    </a:p>
-                  </a:txBody>
-                  <a:tcPr>
-                    <a:solidFill>
-                      <a:srgbClr val="EFF3FA"/>
+                        <a:t>1438</a:t>
+                      </a:r>
+                    </a:p>
+                  </a:txBody>
+                  <a:tcPr>
+                    <a:solidFill>
+                      <a:srgbClr val="FFFFFF"/>
                     </a:solidFill>
                   </a:tcPr>
                 </a:tc>
@@ -11045,13 +11126,13 @@
                           </a:solidFill>
                           <a:latin typeface="Calibri"/>
                         </a:rPr>
-                        <a:t>7%</a:t>
-                      </a:r>
-                    </a:p>
-                  </a:txBody>
-                  <a:tcPr>
-                    <a:solidFill>
-                      <a:srgbClr val="EFF3FA"/>
+                        <a:t>6%</a:t>
+                      </a:r>
+                    </a:p>
+                  </a:txBody>
+                  <a:tcPr>
+                    <a:solidFill>
+                      <a:srgbClr val="FFFFFF"/>
                     </a:solidFill>
                   </a:tcPr>
                 </a:tc>
@@ -11066,13 +11147,13 @@
                         <a:rPr sz="850" b="1">
                           <a:latin typeface="Calibri"/>
                         </a:rPr>
-                        <a:t>sha256</a:t>
-                      </a:r>
-                    </a:p>
-                  </a:txBody>
-                  <a:tcPr>
-                    <a:solidFill>
-                      <a:srgbClr val="FFFFFF"/>
+                        <a:t>bb-cksum</a:t>
+                      </a:r>
+                    </a:p>
+                  </a:txBody>
+                  <a:tcPr>
+                    <a:solidFill>
+                      <a:srgbClr val="EFF3FA"/>
                     </a:solidFill>
                   </a:tcPr>
                 </a:tc>
@@ -11085,13 +11166,13 @@
                         <a:rPr sz="850" b="0">
                           <a:latin typeface="Calibri"/>
                         </a:rPr>
-                        <a:t>1398</a:t>
-                      </a:r>
-                    </a:p>
-                  </a:txBody>
-                  <a:tcPr>
-                    <a:solidFill>
-                      <a:srgbClr val="FFFFFF"/>
+                        <a:t>1316</a:t>
+                      </a:r>
+                    </a:p>
+                  </a:txBody>
+                  <a:tcPr>
+                    <a:solidFill>
+                      <a:srgbClr val="EFF3FA"/>
                     </a:solidFill>
                   </a:tcPr>
                 </a:tc>
@@ -11104,13 +11185,13 @@
                         <a:rPr sz="850" b="0">
                           <a:latin typeface="Calibri"/>
                         </a:rPr>
-                        <a:t>1424</a:t>
-                      </a:r>
-                    </a:p>
-                  </a:txBody>
-                  <a:tcPr>
-                    <a:solidFill>
-                      <a:srgbClr val="FFFFFF"/>
+                        <a:t>1437</a:t>
+                      </a:r>
+                    </a:p>
+                  </a:txBody>
+                  <a:tcPr>
+                    <a:solidFill>
+                      <a:srgbClr val="EFF3FA"/>
                     </a:solidFill>
                   </a:tcPr>
                 </a:tc>
@@ -11126,13 +11207,13 @@
                           </a:solidFill>
                           <a:latin typeface="Calibri"/>
                         </a:rPr>
-                        <a:t>2%</a:t>
-                      </a:r>
-                    </a:p>
-                  </a:txBody>
-                  <a:tcPr>
-                    <a:solidFill>
-                      <a:srgbClr val="FFFFFF"/>
+                        <a:t>8%</a:t>
+                      </a:r>
+                    </a:p>
+                  </a:txBody>
+                  <a:tcPr>
+                    <a:solidFill>
+                      <a:srgbClr val="EFF3FA"/>
                     </a:solidFill>
                   </a:tcPr>
                 </a:tc>
@@ -11147,13 +11228,13 @@
                         <a:rPr sz="850" b="1">
                           <a:latin typeface="Calibri"/>
                         </a:rPr>
-                        <a:t>bb-awk</a:t>
-                      </a:r>
-                    </a:p>
-                  </a:txBody>
-                  <a:tcPr>
-                    <a:solidFill>
-                      <a:srgbClr val="EFF3FA"/>
+                        <a:t>rd-plasma</a:t>
+                      </a:r>
+                    </a:p>
+                  </a:txBody>
+                  <a:tcPr>
+                    <a:solidFill>
+                      <a:srgbClr val="FFFFFF"/>
                     </a:solidFill>
                   </a:tcPr>
                 </a:tc>
@@ -11166,13 +11247,13 @@
                         <a:rPr sz="850" b="0">
                           <a:latin typeface="Calibri"/>
                         </a:rPr>
-                        <a:t>1336</a:t>
-                      </a:r>
-                    </a:p>
-                  </a:txBody>
-                  <a:tcPr>
-                    <a:solidFill>
-                      <a:srgbClr val="EFF3FA"/>
+                        <a:t>1331</a:t>
+                      </a:r>
+                    </a:p>
+                  </a:txBody>
+                  <a:tcPr>
+                    <a:solidFill>
+                      <a:srgbClr val="FFFFFF"/>
                     </a:solidFill>
                   </a:tcPr>
                 </a:tc>
@@ -11185,13 +11266,13 @@
                         <a:rPr sz="850" b="0">
                           <a:latin typeface="Calibri"/>
                         </a:rPr>
-                        <a:t>1424</a:t>
-                      </a:r>
-                    </a:p>
-                  </a:txBody>
-                  <a:tcPr>
-                    <a:solidFill>
-                      <a:srgbClr val="EFF3FA"/>
+                        <a:t>1434</a:t>
+                      </a:r>
+                    </a:p>
+                  </a:txBody>
+                  <a:tcPr>
+                    <a:solidFill>
+                      <a:srgbClr val="FFFFFF"/>
                     </a:solidFill>
                   </a:tcPr>
                 </a:tc>
@@ -11207,13 +11288,13 @@
                           </a:solidFill>
                           <a:latin typeface="Calibri"/>
                         </a:rPr>
-                        <a:t>6%</a:t>
-                      </a:r>
-                    </a:p>
-                  </a:txBody>
-                  <a:tcPr>
-                    <a:solidFill>
-                      <a:srgbClr val="EFF3FA"/>
+                        <a:t>7%</a:t>
+                      </a:r>
+                    </a:p>
+                  </a:txBody>
+                  <a:tcPr>
+                    <a:solidFill>
+                      <a:srgbClr val="FFFFFF"/>
                     </a:solidFill>
                   </a:tcPr>
                 </a:tc>
@@ -11228,13 +11309,13 @@
                         <a:rPr sz="850" b="1">
                           <a:latin typeface="Calibri"/>
                         </a:rPr>
-                        <a:t>bb-sha1</a:t>
-                      </a:r>
-                    </a:p>
-                  </a:txBody>
-                  <a:tcPr>
-                    <a:solidFill>
-                      <a:srgbClr val="FFFFFF"/>
+                        <a:t>sqlite-heavy</a:t>
+                      </a:r>
+                    </a:p>
+                  </a:txBody>
+                  <a:tcPr>
+                    <a:solidFill>
+                      <a:srgbClr val="EFF3FA"/>
                     </a:solidFill>
                   </a:tcPr>
                 </a:tc>
@@ -11247,13 +11328,13 @@
                         <a:rPr sz="850" b="0">
                           <a:latin typeface="Calibri"/>
                         </a:rPr>
-                        <a:t>1383</a:t>
-                      </a:r>
-                    </a:p>
-                  </a:txBody>
-                  <a:tcPr>
-                    <a:solidFill>
-                      <a:srgbClr val="FFFFFF"/>
+                        <a:t>1350</a:t>
+                      </a:r>
+                    </a:p>
+                  </a:txBody>
+                  <a:tcPr>
+                    <a:solidFill>
+                      <a:srgbClr val="EFF3FA"/>
                     </a:solidFill>
                   </a:tcPr>
                 </a:tc>
@@ -11266,13 +11347,13 @@
                         <a:rPr sz="850" b="0">
                           <a:latin typeface="Calibri"/>
                         </a:rPr>
-                        <a:t>1423</a:t>
-                      </a:r>
-                    </a:p>
-                  </a:txBody>
-                  <a:tcPr>
-                    <a:solidFill>
-                      <a:srgbClr val="FFFFFF"/>
+                        <a:t>1434</a:t>
+                      </a:r>
+                    </a:p>
+                  </a:txBody>
+                  <a:tcPr>
+                    <a:solidFill>
+                      <a:srgbClr val="EFF3FA"/>
                     </a:solidFill>
                   </a:tcPr>
                 </a:tc>
@@ -11288,13 +11369,13 @@
                           </a:solidFill>
                           <a:latin typeface="Calibri"/>
                         </a:rPr>
-                        <a:t>3%</a:t>
-                      </a:r>
-                    </a:p>
-                  </a:txBody>
-                  <a:tcPr>
-                    <a:solidFill>
-                      <a:srgbClr val="FFFFFF"/>
+                        <a:t>6%</a:t>
+                      </a:r>
+                    </a:p>
+                  </a:txBody>
+                  <a:tcPr>
+                    <a:solidFill>
+                      <a:srgbClr val="EFF3FA"/>
                     </a:solidFill>
                   </a:tcPr>
                 </a:tc>
@@ -11309,13 +11390,13 @@
                         <a:rPr sz="850" b="1">
                           <a:latin typeface="Calibri"/>
                         </a:rPr>
-                        <a:t>sort</a:t>
-                      </a:r>
-                    </a:p>
-                  </a:txBody>
-                  <a:tcPr>
-                    <a:solidFill>
-                      <a:srgbClr val="EFF3FA"/>
+                        <a:t>bb-gzip</a:t>
+                      </a:r>
+                    </a:p>
+                  </a:txBody>
+                  <a:tcPr>
+                    <a:solidFill>
+                      <a:srgbClr val="FFFFFF"/>
                     </a:solidFill>
                   </a:tcPr>
                 </a:tc>
@@ -11328,13 +11409,13 @@
                         <a:rPr sz="850" b="0">
                           <a:latin typeface="Calibri"/>
                         </a:rPr>
-                        <a:t>1378</a:t>
-                      </a:r>
-                    </a:p>
-                  </a:txBody>
-                  <a:tcPr>
-                    <a:solidFill>
-                      <a:srgbClr val="EFF3FA"/>
+                        <a:t>1335</a:t>
+                      </a:r>
+                    </a:p>
+                  </a:txBody>
+                  <a:tcPr>
+                    <a:solidFill>
+                      <a:srgbClr val="FFFFFF"/>
                     </a:solidFill>
                   </a:tcPr>
                 </a:tc>
@@ -11347,13 +11428,13 @@
                         <a:rPr sz="850" b="0">
                           <a:latin typeface="Calibri"/>
                         </a:rPr>
-                        <a:t>1422</a:t>
-                      </a:r>
-                    </a:p>
-                  </a:txBody>
-                  <a:tcPr>
-                    <a:solidFill>
-                      <a:srgbClr val="EFF3FA"/>
+                        <a:t>1433</a:t>
+                      </a:r>
+                    </a:p>
+                  </a:txBody>
+                  <a:tcPr>
+                    <a:solidFill>
+                      <a:srgbClr val="FFFFFF"/>
                     </a:solidFill>
                   </a:tcPr>
                 </a:tc>
@@ -11369,13 +11450,13 @@
                           </a:solidFill>
                           <a:latin typeface="Calibri"/>
                         </a:rPr>
-                        <a:t>3%</a:t>
-                      </a:r>
-                    </a:p>
-                  </a:txBody>
-                  <a:tcPr>
-                    <a:solidFill>
-                      <a:srgbClr val="EFF3FA"/>
+                        <a:t>7%</a:t>
+                      </a:r>
+                    </a:p>
+                  </a:txBody>
+                  <a:tcPr>
+                    <a:solidFill>
+                      <a:srgbClr val="FFFFFF"/>
                     </a:solidFill>
                   </a:tcPr>
                 </a:tc>
@@ -11390,13 +11471,13 @@
                         <a:rPr sz="850" b="1">
                           <a:latin typeface="Calibri"/>
                         </a:rPr>
-                        <a:t>bb-gunzip</a:t>
-                      </a:r>
-                    </a:p>
-                  </a:txBody>
-                  <a:tcPr>
-                    <a:solidFill>
-                      <a:srgbClr val="FFFFFF"/>
+                        <a:t>sqlite</a:t>
+                      </a:r>
+                    </a:p>
+                  </a:txBody>
+                  <a:tcPr>
+                    <a:solidFill>
+                      <a:srgbClr val="EFF3FA"/>
                     </a:solidFill>
                   </a:tcPr>
                 </a:tc>
@@ -11409,13 +11490,13 @@
                         <a:rPr sz="850" b="0">
                           <a:latin typeface="Calibri"/>
                         </a:rPr>
-                        <a:t>1342</a:t>
-                      </a:r>
-                    </a:p>
-                  </a:txBody>
-                  <a:tcPr>
-                    <a:solidFill>
-                      <a:srgbClr val="FFFFFF"/>
+                        <a:t>1351</a:t>
+                      </a:r>
+                    </a:p>
+                  </a:txBody>
+                  <a:tcPr>
+                    <a:solidFill>
+                      <a:srgbClr val="EFF3FA"/>
                     </a:solidFill>
                   </a:tcPr>
                 </a:tc>
@@ -11428,13 +11509,13 @@
                         <a:rPr sz="850" b="0">
                           <a:latin typeface="Calibri"/>
                         </a:rPr>
-                        <a:t>1419</a:t>
-                      </a:r>
-                    </a:p>
-                  </a:txBody>
-                  <a:tcPr>
-                    <a:solidFill>
-                      <a:srgbClr val="FFFFFF"/>
+                        <a:t>1432</a:t>
+                      </a:r>
+                    </a:p>
+                  </a:txBody>
+                  <a:tcPr>
+                    <a:solidFill>
+                      <a:srgbClr val="EFF3FA"/>
                     </a:solidFill>
                   </a:tcPr>
                 </a:tc>
@@ -11450,88 +11531,7 @@
                           </a:solidFill>
                           <a:latin typeface="Calibri"/>
                         </a:rPr>
-                        <a:t>5%</a:t>
-                      </a:r>
-                    </a:p>
-                  </a:txBody>
-                  <a:tcPr>
-                    <a:solidFill>
-                      <a:srgbClr val="FFFFFF"/>
-                    </a:solidFill>
-                  </a:tcPr>
-                </a:tc>
-              </a:tr>
-              <a:tr h="224028">
-                <a:tc>
-                  <a:txBody>
-                    <a:bodyPr/>
-                    <a:lstStyle/>
-                    <a:p>
-                      <a:r>
-                        <a:rPr sz="850" b="1">
-                          <a:latin typeface="Calibri"/>
-                        </a:rPr>
-                        <a:t>rd-mandel</a:t>
-                      </a:r>
-                    </a:p>
-                  </a:txBody>
-                  <a:tcPr>
-                    <a:solidFill>
-                      <a:srgbClr val="EFF3FA"/>
-                    </a:solidFill>
-                  </a:tcPr>
-                </a:tc>
-                <a:tc>
-                  <a:txBody>
-                    <a:bodyPr/>
-                    <a:lstStyle/>
-                    <a:p>
-                      <a:r>
-                        <a:rPr sz="850" b="0">
-                          <a:latin typeface="Calibri"/>
-                        </a:rPr>
-                        <a:t>1317</a:t>
-                      </a:r>
-                    </a:p>
-                  </a:txBody>
-                  <a:tcPr>
-                    <a:solidFill>
-                      <a:srgbClr val="EFF3FA"/>
-                    </a:solidFill>
-                  </a:tcPr>
-                </a:tc>
-                <a:tc>
-                  <a:txBody>
-                    <a:bodyPr/>
-                    <a:lstStyle/>
-                    <a:p>
-                      <a:r>
-                        <a:rPr sz="850" b="0">
-                          <a:latin typeface="Calibri"/>
-                        </a:rPr>
-                        <a:t>1416</a:t>
-                      </a:r>
-                    </a:p>
-                  </a:txBody>
-                  <a:tcPr>
-                    <a:solidFill>
-                      <a:srgbClr val="EFF3FA"/>
-                    </a:solidFill>
-                  </a:tcPr>
-                </a:tc>
-                <a:tc>
-                  <a:txBody>
-                    <a:bodyPr/>
-                    <a:lstStyle/>
-                    <a:p>
-                      <a:r>
-                        <a:rPr sz="850" b="0">
-                          <a:solidFill>
-                            <a:srgbClr val="187A33"/>
-                          </a:solidFill>
-                          <a:latin typeface="Calibri"/>
-                        </a:rPr>
-                        <a:t>7%</a:t>
+                        <a:t>6%</a:t>
                       </a:r>
                     </a:p>
                   </a:txBody>
@@ -11670,7 +11670,7 @@
                         <a:rPr sz="850" b="1">
                           <a:latin typeface="Calibri"/>
                         </a:rPr>
-                        <a:t>bb-sha512</a:t>
+                        <a:t>parson</a:t>
                       </a:r>
                     </a:p>
                   </a:txBody>
@@ -11689,7 +11689,7 @@
                         <a:rPr sz="850" b="0">
                           <a:latin typeface="Calibri"/>
                         </a:rPr>
-                        <a:t>1380</a:t>
+                        <a:t>1339</a:t>
                       </a:r>
                     </a:p>
                   </a:txBody>
@@ -11708,7 +11708,7 @@
                         <a:rPr sz="850" b="0">
                           <a:latin typeface="Calibri"/>
                         </a:rPr>
-                        <a:t>1414</a:t>
+                        <a:t>1432</a:t>
                       </a:r>
                     </a:p>
                   </a:txBody>
@@ -11730,7 +11730,7 @@
                           </a:solidFill>
                           <a:latin typeface="Calibri"/>
                         </a:rPr>
-                        <a:t>2%</a:t>
+                        <a:t>6%</a:t>
                       </a:r>
                     </a:p>
                   </a:txBody>
@@ -11751,7 +11751,7 @@
                         <a:rPr sz="850" b="1">
                           <a:latin typeface="Calibri"/>
                         </a:rPr>
-                        <a:t>cr-md5</a:t>
+                        <a:t>bb-awk</a:t>
                       </a:r>
                     </a:p>
                   </a:txBody>
@@ -11770,7 +11770,7 @@
                         <a:rPr sz="850" b="0">
                           <a:latin typeface="Calibri"/>
                         </a:rPr>
-                        <a:t>1379</a:t>
+                        <a:t>1336</a:t>
                       </a:r>
                     </a:p>
                   </a:txBody>
@@ -11789,7 +11789,7 @@
                         <a:rPr sz="850" b="0">
                           <a:latin typeface="Calibri"/>
                         </a:rPr>
-                        <a:t>1412</a:t>
+                        <a:t>1428</a:t>
                       </a:r>
                     </a:p>
                   </a:txBody>
@@ -11811,7 +11811,7 @@
                           </a:solidFill>
                           <a:latin typeface="Calibri"/>
                         </a:rPr>
-                        <a:t>2%</a:t>
+                        <a:t>6%</a:t>
                       </a:r>
                     </a:p>
                   </a:txBody>
@@ -11832,7 +11832,7 @@
                         <a:rPr sz="850" b="1">
                           <a:latin typeface="Calibri"/>
                         </a:rPr>
-                        <a:t>bb-cksum</a:t>
+                        <a:t>bb-sed</a:t>
                       </a:r>
                     </a:p>
                   </a:txBody>
@@ -11851,7 +11851,7 @@
                         <a:rPr sz="850" b="0">
                           <a:latin typeface="Calibri"/>
                         </a:rPr>
-                        <a:t>1316</a:t>
+                        <a:t>1343</a:t>
                       </a:r>
                     </a:p>
                   </a:txBody>
@@ -11870,7 +11870,7 @@
                         <a:rPr sz="850" b="0">
                           <a:latin typeface="Calibri"/>
                         </a:rPr>
-                        <a:t>1405</a:t>
+                        <a:t>1425</a:t>
                       </a:r>
                     </a:p>
                   </a:txBody>
@@ -11913,7 +11913,7 @@
                         <a:rPr sz="850" b="1">
                           <a:latin typeface="Calibri"/>
                         </a:rPr>
-                        <a:t>heatshrink</a:t>
+                        <a:t>bb-sha1</a:t>
                       </a:r>
                     </a:p>
                   </a:txBody>
@@ -11932,7 +11932,7 @@
                         <a:rPr sz="850" b="0">
                           <a:latin typeface="Calibri"/>
                         </a:rPr>
-                        <a:t>1346</a:t>
+                        <a:t>1383</a:t>
                       </a:r>
                     </a:p>
                   </a:txBody>
@@ -11951,7 +11951,7 @@
                         <a:rPr sz="850" b="0">
                           <a:latin typeface="Calibri"/>
                         </a:rPr>
-                        <a:t>1400</a:t>
+                        <a:t>1421</a:t>
                       </a:r>
                     </a:p>
                   </a:txBody>
@@ -11973,7 +11973,7 @@
                           </a:solidFill>
                           <a:latin typeface="Calibri"/>
                         </a:rPr>
-                        <a:t>4%</a:t>
+                        <a:t>3%</a:t>
                       </a:r>
                     </a:p>
                   </a:txBody>
@@ -12032,7 +12032,7 @@
                         <a:rPr sz="850" b="0">
                           <a:latin typeface="Calibri"/>
                         </a:rPr>
-                        <a:t>1392</a:t>
+                        <a:t>1420</a:t>
                       </a:r>
                     </a:p>
                   </a:txBody>
@@ -12054,7 +12054,7 @@
                           </a:solidFill>
                           <a:latin typeface="Calibri"/>
                         </a:rPr>
-                        <a:t>4%</a:t>
+                        <a:t>6%</a:t>
                       </a:r>
                     </a:p>
                   </a:txBody>
@@ -12113,7 +12113,7 @@
                         <a:rPr sz="850" b="0">
                           <a:latin typeface="Calibri"/>
                         </a:rPr>
-                        <a:t>1391</a:t>
+                        <a:t>1419</a:t>
                       </a:r>
                     </a:p>
                   </a:txBody>
@@ -12135,7 +12135,7 @@
                           </a:solidFill>
                           <a:latin typeface="Calibri"/>
                         </a:rPr>
-                        <a:t>3%</a:t>
+                        <a:t>5%</a:t>
                       </a:r>
                     </a:p>
                   </a:txBody>
@@ -12156,7 +12156,7 @@
                         <a:rPr sz="850" b="1">
                           <a:latin typeface="Calibri"/>
                         </a:rPr>
-                        <a:t>pacman</a:t>
+                        <a:t>rd-mandel</a:t>
                       </a:r>
                     </a:p>
                   </a:txBody>
@@ -12175,7 +12175,7 @@
                         <a:rPr sz="850" b="0">
                           <a:latin typeface="Calibri"/>
                         </a:rPr>
-                        <a:t>1343</a:t>
+                        <a:t>1317</a:t>
                       </a:r>
                     </a:p>
                   </a:txBody>
@@ -12194,7 +12194,7 @@
                         <a:rPr sz="850" b="0">
                           <a:latin typeface="Calibri"/>
                         </a:rPr>
-                        <a:t>1380</a:t>
+                        <a:t>1418</a:t>
                       </a:r>
                     </a:p>
                   </a:txBody>
@@ -12216,7 +12216,7 @@
                           </a:solidFill>
                           <a:latin typeface="Calibri"/>
                         </a:rPr>
-                        <a:t>3%</a:t>
+                        <a:t>7%</a:t>
                       </a:r>
                     </a:p>
                   </a:txBody>
@@ -12237,7 +12237,7 @@
                         <a:rPr sz="850" b="1">
                           <a:latin typeface="Calibri"/>
                         </a:rPr>
-                        <a:t>parson</a:t>
+                        <a:t>bb-grep</a:t>
                       </a:r>
                     </a:p>
                   </a:txBody>
@@ -12256,7 +12256,7 @@
                         <a:rPr sz="850" b="0">
                           <a:latin typeface="Calibri"/>
                         </a:rPr>
-                        <a:t>1339</a:t>
+                        <a:t>1347</a:t>
                       </a:r>
                     </a:p>
                   </a:txBody>
@@ -12275,7 +12275,7 @@
                         <a:rPr sz="850" b="0">
                           <a:latin typeface="Calibri"/>
                         </a:rPr>
-                        <a:t>1371</a:t>
+                        <a:t>1406</a:t>
                       </a:r>
                     </a:p>
                   </a:txBody>
@@ -12297,7 +12297,7 @@
                           </a:solidFill>
                           <a:latin typeface="Calibri"/>
                         </a:rPr>
-                        <a:t>2%</a:t>
+                        <a:t>4%</a:t>
                       </a:r>
                     </a:p>
                   </a:txBody>
@@ -12318,7 +12318,7 @@
                         <a:rPr sz="850" b="1">
                           <a:latin typeface="Calibri"/>
                         </a:rPr>
-                        <a:t>bb-grep</a:t>
+                        <a:t>httpp</a:t>
                       </a:r>
                     </a:p>
                   </a:txBody>
@@ -12337,7 +12337,7 @@
                         <a:rPr sz="850" b="0">
                           <a:latin typeface="Calibri"/>
                         </a:rPr>
-                        <a:t>1347</a:t>
+                        <a:t>1360</a:t>
                       </a:r>
                     </a:p>
                   </a:txBody>
@@ -12356,7 +12356,7 @@
                         <a:rPr sz="850" b="0">
                           <a:latin typeface="Calibri"/>
                         </a:rPr>
-                        <a:t>1369</a:t>
+                        <a:t>1391</a:t>
                       </a:r>
                     </a:p>
                   </a:txBody>
@@ -12399,7 +12399,7 @@
                         <a:rPr sz="850" b="1">
                           <a:latin typeface="Calibri"/>
                         </a:rPr>
-                        <a:t>httpp</a:t>
+                        <a:t>pacman</a:t>
                       </a:r>
                     </a:p>
                   </a:txBody>
@@ -12418,7 +12418,7 @@
                         <a:rPr sz="850" b="0">
                           <a:latin typeface="Calibri"/>
                         </a:rPr>
-                        <a:t>1360</a:t>
+                        <a:t>1343</a:t>
                       </a:r>
                     </a:p>
                   </a:txBody>
@@ -12437,7 +12437,7 @@
                         <a:rPr sz="850" b="0">
                           <a:latin typeface="Calibri"/>
                         </a:rPr>
-                        <a:t>1364</a:t>
+                        <a:t>1386</a:t>
                       </a:r>
                     </a:p>
                   </a:txBody>
@@ -12459,7 +12459,7 @@
                           </a:solidFill>
                           <a:latin typeface="Calibri"/>
                         </a:rPr>
-                        <a:t>0%</a:t>
+                        <a:t>3%</a:t>
                       </a:r>
                     </a:p>
                   </a:txBody>
@@ -12518,7 +12518,7 @@
                         <a:rPr sz="850" b="0">
                           <a:latin typeface="Calibri"/>
                         </a:rPr>
-                        <a:t>1361</a:t>
+                        <a:t>1382</a:t>
                       </a:r>
                     </a:p>
                   </a:txBody>
@@ -12540,7 +12540,7 @@
                           </a:solidFill>
                           <a:latin typeface="Calibri"/>
                         </a:rPr>
-                        <a:t>1%</a:t>
+                        <a:t>3%</a:t>
                       </a:r>
                     </a:p>
                   </a:txBody>
@@ -12561,7 +12561,7 @@
                         <a:rPr sz="850" b="1">
                           <a:latin typeface="Calibri"/>
                         </a:rPr>
-                        <a:t>rd-ray</a:t>
+                        <a:t>tommath</a:t>
                       </a:r>
                     </a:p>
                   </a:txBody>
@@ -12580,7 +12580,7 @@
                         <a:rPr sz="850" b="0">
                           <a:latin typeface="Calibri"/>
                         </a:rPr>
-                        <a:t>1289</a:t>
+                        <a:t>1324</a:t>
                       </a:r>
                     </a:p>
                   </a:txBody>
@@ -12599,7 +12599,7 @@
                         <a:rPr sz="850" b="0">
                           <a:latin typeface="Calibri"/>
                         </a:rPr>
-                        <a:t>1354</a:t>
+                        <a:t>1372</a:t>
                       </a:r>
                     </a:p>
                   </a:txBody>
@@ -12621,7 +12621,7 @@
                           </a:solidFill>
                           <a:latin typeface="Calibri"/>
                         </a:rPr>
-                        <a:t>5%</a:t>
+                        <a:t>4%</a:t>
                       </a:r>
                     </a:p>
                   </a:txBody>
@@ -12642,7 +12642,7 @@
                         <a:rPr sz="850" b="1">
                           <a:latin typeface="Calibri"/>
                         </a:rPr>
-                        <a:t>tommath</a:t>
+                        <a:t>rd-ray</a:t>
                       </a:r>
                     </a:p>
                   </a:txBody>
@@ -12661,7 +12661,7 @@
                         <a:rPr sz="850" b="0">
                           <a:latin typeface="Calibri"/>
                         </a:rPr>
-                        <a:t>1324</a:t>
+                        <a:t>1289</a:t>
                       </a:r>
                     </a:p>
                   </a:txBody>
@@ -12680,7 +12680,7 @@
                         <a:rPr sz="850" b="0">
                           <a:latin typeface="Calibri"/>
                         </a:rPr>
-                        <a:t>1344</a:t>
+                        <a:t>1367</a:t>
                       </a:r>
                     </a:p>
                   </a:txBody>
@@ -12702,7 +12702,7 @@
                           </a:solidFill>
                           <a:latin typeface="Calibri"/>
                         </a:rPr>
-                        <a:t>2%</a:t>
+                        <a:t>6%</a:t>
                       </a:r>
                     </a:p>
                   </a:txBody>
@@ -12761,7 +12761,7 @@
                         <a:rPr sz="850" b="0">
                           <a:latin typeface="Calibri"/>
                         </a:rPr>
-                        <a:t>1338</a:t>
+                        <a:t>1355</a:t>
                       </a:r>
                     </a:p>
                   </a:txBody>
@@ -12783,7 +12783,7 @@
                           </a:solidFill>
                           <a:latin typeface="Calibri"/>
                         </a:rPr>
-                        <a:t>0%</a:t>
+                        <a:t>1%</a:t>
                       </a:r>
                     </a:p>
                   </a:txBody>
@@ -12804,7 +12804,7 @@
                         <a:rPr sz="850" b="1">
                           <a:latin typeface="Calibri"/>
                         </a:rPr>
-                        <a:t>chase</a:t>
+                        <a:t>chase-big</a:t>
                       </a:r>
                     </a:p>
                   </a:txBody>
@@ -12823,7 +12823,7 @@
                         <a:rPr sz="850" b="0">
                           <a:latin typeface="Calibri"/>
                         </a:rPr>
-                        <a:t>1304</a:t>
+                        <a:t>1306</a:t>
                       </a:r>
                     </a:p>
                   </a:txBody>
@@ -12842,7 +12842,7 @@
                         <a:rPr sz="850" b="0">
                           <a:latin typeface="Calibri"/>
                         </a:rPr>
-                        <a:t>1297</a:t>
+                        <a:t>1314</a:t>
                       </a:r>
                     </a:p>
                   </a:txBody>
@@ -12864,7 +12864,7 @@
                           </a:solidFill>
                           <a:latin typeface="Calibri"/>
                         </a:rPr>
-                        <a:t>0%</a:t>
+                        <a:t>1%</a:t>
                       </a:r>
                     </a:p>
                   </a:txBody>
@@ -12885,7 +12885,7 @@
                         <a:rPr sz="850" b="1">
                           <a:latin typeface="Calibri"/>
                         </a:rPr>
-                        <a:t>chase-big</a:t>
+                        <a:t>chase</a:t>
                       </a:r>
                     </a:p>
                   </a:txBody>
@@ -12904,7 +12904,7 @@
                         <a:rPr sz="850" b="0">
                           <a:latin typeface="Calibri"/>
                         </a:rPr>
-                        <a:t>1306</a:t>
+                        <a:t>1304</a:t>
                       </a:r>
                     </a:p>
                   </a:txBody>
@@ -12923,7 +12923,7 @@
                         <a:rPr sz="850" b="0">
                           <a:latin typeface="Calibri"/>
                         </a:rPr>
-                        <a:t>1279</a:t>
+                        <a:t>1295</a:t>
                       </a:r>
                     </a:p>
                   </a:txBody>
@@ -12945,7 +12945,7 @@
                           </a:solidFill>
                           <a:latin typeface="Calibri"/>
                         </a:rPr>
-                        <a:t>2%</a:t>
+                        <a:t>1%</a:t>
                       </a:r>
                     </a:p>
                   </a:txBody>
@@ -13035,7 +13035,7 @@
                 </a:solidFill>
                 <a:latin typeface="Calibri"/>
               </a:rPr>
-              <a:t>44 of 50 within 8%   ·   6 between 8 and 12%   ·   0 above 12%   —   mW predicted vs mW measured, on silicon the model never trained on.</a:t>
+              <a:t>36 of 50 within 8%   ·   11 between 8 and 12%   ·   3 above 12%   —   mW predicted vs mW measured, on silicon the model never trained on.</a:t>
             </a:r>
           </a:p>
         </p:txBody>
@@ -13209,7 +13209,7 @@
                 </a:solidFill>
                 <a:latin typeface="Calibri"/>
               </a:rPr>
-              <a:t>Perception, inference, storage, networking, imaging, rendering. Running at the same time, as a product would.</a:t>
+              <a:t>Perception, inference, storage, networking, imaging, rendering, running at the same time. Predicted from QEMU alone: no silicon counter is used for these mixes.</a:t>
             </a:r>
           </a:p>
         </p:txBody>
@@ -13244,7 +13244,7 @@
                 </a:solidFill>
                 <a:latin typeface="Calibri"/>
               </a:rPr>
-              <a:t>wattson power · rails MEASURED on IMX95LPD5EVK-19 (NXP BCU) · A55 die 40–41 °C under load · activity DERIVED from QEMU TCG · 2026-09-10</a:t>
+              <a:t>wattson power · rails MEASURED on IMX95LPD5EVK-19 (NXP BCU) · A55 die 40–41 °C · activity DERIVED from QEMU TCG; PMU column MEASURED on silicon · 2026-09-10</a:t>
             </a:r>
           </a:p>
         </p:txBody>
@@ -13292,8 +13292,8 @@
         </p:nvSpPr>
         <p:spPr>
           <a:xfrm>
-            <a:off x="548640" y="1417320"/>
-            <a:ext cx="11064240" cy="621792"/>
+            <a:off x="548640" y="1572768"/>
+            <a:ext cx="11064240" cy="548640"/>
           </a:xfrm>
           <a:prstGeom prst="rect">
             <a:avLst/>
@@ -13335,7 +13335,7 @@
         </p:nvSpPr>
         <p:spPr>
           <a:xfrm>
-            <a:off x="822960" y="1508760"/>
+            <a:off x="822960" y="1645920"/>
             <a:ext cx="10607040" cy="402336"/>
           </a:xfrm>
           <a:prstGeom prst="rect">
@@ -13357,7 +13357,7 @@
                 </a:solidFill>
                 <a:latin typeface="Calibri"/>
               </a:rPr>
-              <a:t>2.7% mean error, 3.9% worst — better than one application at a time.</a:t>
+              <a:t>3.6% mean error, 5.8% worst, across two to six concurrent applications.</a:t>
             </a:r>
           </a:p>
         </p:txBody>
@@ -13371,8 +13371,8 @@
           <p:nvPr/>
         </p:nvGraphicFramePr>
         <p:xfrm>
-          <a:off x="548640" y="2240280"/>
-          <a:ext cx="11064240" cy="1682496"/>
+          <a:off x="548640" y="2267712"/>
+          <a:ext cx="11082528" cy="1682496"/>
         </p:xfrm>
         <a:graphic>
           <a:graphicData uri="http://schemas.openxmlformats.org/drawingml/2006/table">
@@ -13381,12 +13381,13 @@
                 <a:tableStyleId>{5C22544A-7EE6-4342-B048-85BDC9FD1C3A}</a:tableStyleId>
               </a:tblPr>
               <a:tblGrid>
-                <a:gridCol w="2651760"/>
-                <a:gridCol w="4572000"/>
-                <a:gridCol w="777240"/>
-                <a:gridCol w="1051560"/>
-                <a:gridCol w="1051560"/>
+                <a:gridCol w="2514600"/>
+                <a:gridCol w="4160520"/>
+                <a:gridCol w="658368"/>
                 <a:gridCol w="960120"/>
+                <a:gridCol w="960120"/>
+                <a:gridCol w="914400"/>
+                <a:gridCol w="914400"/>
               </a:tblGrid>
               <a:tr h="420624">
                 <a:tc>
@@ -13521,6 +13522,28 @@
                     </a:solidFill>
                   </a:tcPr>
                 </a:tc>
+                <a:tc>
+                  <a:txBody>
+                    <a:bodyPr/>
+                    <a:lstStyle/>
+                    <a:p>
+                      <a:r>
+                        <a:rPr sz="1150" b="1">
+                          <a:solidFill>
+                            <a:srgbClr val="FFFFFF"/>
+                          </a:solidFill>
+                          <a:latin typeface="Calibri"/>
+                        </a:rPr>
+                        <a:t>err (PMU)</a:t>
+                      </a:r>
+                    </a:p>
+                  </a:txBody>
+                  <a:tcPr>
+                    <a:solidFill>
+                      <a:srgbClr val="202124"/>
+                    </a:solidFill>
+                  </a:tcPr>
+                </a:tc>
               </a:tr>
               <a:tr h="420624">
                 <a:tc>
@@ -13589,7 +13612,7 @@
                         <a:rPr sz="1150" b="0">
                           <a:latin typeface="Calibri"/>
                         </a:rPr>
-                        <a:t>1684</a:t>
+                        <a:t>1605</a:t>
                       </a:r>
                     </a:p>
                   </a:txBody>
@@ -13608,7 +13631,7 @@
                         <a:rPr sz="1150" b="0">
                           <a:latin typeface="Calibri"/>
                         </a:rPr>
-                        <a:t>1747</a:t>
+                        <a:t>1704</a:t>
                       </a:r>
                     </a:p>
                   </a:txBody>
@@ -13630,7 +13653,29 @@
                           </a:solidFill>
                           <a:latin typeface="Calibri"/>
                         </a:rPr>
-                        <a:t>3.6%</a:t>
+                        <a:t>5.8%</a:t>
+                      </a:r>
+                    </a:p>
+                  </a:txBody>
+                  <a:tcPr>
+                    <a:solidFill>
+                      <a:srgbClr val="EFF3FA"/>
+                    </a:solidFill>
+                  </a:tcPr>
+                </a:tc>
+                <a:tc>
+                  <a:txBody>
+                    <a:bodyPr/>
+                    <a:lstStyle/>
+                    <a:p>
+                      <a:r>
+                        <a:rPr sz="1150" b="0">
+                          <a:solidFill>
+                            <a:srgbClr val="187A33"/>
+                          </a:solidFill>
+                          <a:latin typeface="Calibri"/>
+                        </a:rPr>
+                        <a:t>6.0%</a:t>
                       </a:r>
                     </a:p>
                   </a:txBody>
@@ -13708,7 +13753,7 @@
                         <a:rPr sz="1150" b="0">
                           <a:latin typeface="Calibri"/>
                         </a:rPr>
-                        <a:t>2205</a:t>
+                        <a:t>2123</a:t>
                       </a:r>
                     </a:p>
                   </a:txBody>
@@ -13727,7 +13772,7 @@
                         <a:rPr sz="1150" b="0">
                           <a:latin typeface="Calibri"/>
                         </a:rPr>
-                        <a:t>2220</a:t>
+                        <a:t>2189</a:t>
                       </a:r>
                     </a:p>
                   </a:txBody>
@@ -13749,7 +13794,29 @@
                           </a:solidFill>
                           <a:latin typeface="Calibri"/>
                         </a:rPr>
-                        <a:t>0.7%</a:t>
+                        <a:t>3.0%</a:t>
+                      </a:r>
+                    </a:p>
+                  </a:txBody>
+                  <a:tcPr>
+                    <a:solidFill>
+                      <a:srgbClr val="FFFFFF"/>
+                    </a:solidFill>
+                  </a:tcPr>
+                </a:tc>
+                <a:tc>
+                  <a:txBody>
+                    <a:bodyPr/>
+                    <a:lstStyle/>
+                    <a:p>
+                      <a:r>
+                        <a:rPr sz="1150" b="0">
+                          <a:solidFill>
+                            <a:srgbClr val="187A33"/>
+                          </a:solidFill>
+                          <a:latin typeface="Calibri"/>
+                        </a:rPr>
+                        <a:t>3.1%</a:t>
                       </a:r>
                     </a:p>
                   </a:txBody>
@@ -13827,7 +13894,7 @@
                         <a:rPr sz="1150" b="0">
                           <a:latin typeface="Calibri"/>
                         </a:rPr>
-                        <a:t>2680</a:t>
+                        <a:t>2612</a:t>
                       </a:r>
                     </a:p>
                   </a:txBody>
@@ -13846,7 +13913,7 @@
                         <a:rPr sz="1150" b="0">
                           <a:latin typeface="Calibri"/>
                         </a:rPr>
-                        <a:t>2579</a:t>
+                        <a:t>2561</a:t>
                       </a:r>
                     </a:p>
                   </a:txBody>
@@ -13868,7 +13935,29 @@
                           </a:solidFill>
                           <a:latin typeface="Calibri"/>
                         </a:rPr>
-                        <a:t>3.9%</a:t>
+                        <a:t>2.0%</a:t>
+                      </a:r>
+                    </a:p>
+                  </a:txBody>
+                  <a:tcPr>
+                    <a:solidFill>
+                      <a:srgbClr val="EFF3FA"/>
+                    </a:solidFill>
+                  </a:tcPr>
+                </a:tc>
+                <a:tc>
+                  <a:txBody>
+                    <a:bodyPr/>
+                    <a:lstStyle/>
+                    <a:p>
+                      <a:r>
+                        <a:rPr sz="1150" b="0">
+                          <a:solidFill>
+                            <a:srgbClr val="187A33"/>
+                          </a:solidFill>
+                          <a:latin typeface="Calibri"/>
+                        </a:rPr>
+                        <a:t>0.7%</a:t>
                       </a:r>
                     </a:p>
                   </a:txBody>
@@ -13963,7 +14052,7 @@
         </p:nvGraphicFramePr>
         <p:xfrm>
           <a:off x="548640" y="4700016"/>
-          <a:ext cx="11064240" cy="1389888"/>
+          <a:ext cx="11082528" cy="1042416"/>
         </p:xfrm>
         <a:graphic>
           <a:graphicData uri="http://schemas.openxmlformats.org/drawingml/2006/table">
@@ -13972,12 +14061,13 @@
                 <a:tableStyleId>{5C22544A-7EE6-4342-B048-85BDC9FD1C3A}</a:tableStyleId>
               </a:tblPr>
               <a:tblGrid>
-                <a:gridCol w="2651760"/>
-                <a:gridCol w="4572000"/>
-                <a:gridCol w="777240"/>
-                <a:gridCol w="1051560"/>
-                <a:gridCol w="1051560"/>
+                <a:gridCol w="2514600"/>
+                <a:gridCol w="4160520"/>
+                <a:gridCol w="658368"/>
                 <a:gridCol w="960120"/>
+                <a:gridCol w="960120"/>
+                <a:gridCol w="914400"/>
+                <a:gridCol w="914400"/>
               </a:tblGrid>
               <a:tr h="347472">
                 <a:tc>
@@ -14112,6 +14202,28 @@
                     </a:solidFill>
                   </a:tcPr>
                 </a:tc>
+                <a:tc>
+                  <a:txBody>
+                    <a:bodyPr/>
+                    <a:lstStyle/>
+                    <a:p>
+                      <a:r>
+                        <a:rPr sz="1050" b="1">
+                          <a:solidFill>
+                            <a:srgbClr val="FFFFFF"/>
+                          </a:solidFill>
+                          <a:latin typeface="Calibri"/>
+                        </a:rPr>
+                        <a:t>err (PMU)</a:t>
+                      </a:r>
+                    </a:p>
+                  </a:txBody>
+                  <a:tcPr>
+                    <a:solidFill>
+                      <a:srgbClr val="202124"/>
+                    </a:solidFill>
+                  </a:tcPr>
+                </a:tc>
               </a:tr>
               <a:tr h="347472">
                 <a:tc>
@@ -14123,7 +14235,7 @@
                         <a:rPr sz="1050" b="1">
                           <a:latin typeface="Calibri"/>
                         </a:rPr>
-                        <a:t>compute + streaming</a:t>
+                        <a:t>compute-bound control</a:t>
                       </a:r>
                     </a:p>
                   </a:txBody>
@@ -14142,7 +14254,7 @@
                         <a:rPr sz="1050" b="0">
                           <a:latin typeface="Calibri"/>
                         </a:rPr>
-                        <a:t>sha256  +  mem</a:t>
+                        <a:t>4 x sha256</a:t>
                       </a:r>
                     </a:p>
                   </a:txBody>
@@ -14161,7 +14273,7 @@
                         <a:rPr sz="1050" b="0">
                           <a:latin typeface="Calibri"/>
                         </a:rPr>
-                        <a:t>2</a:t>
+                        <a:t>4</a:t>
                       </a:r>
                     </a:p>
                   </a:txBody>
@@ -14180,7 +14292,7 @@
                         <a:rPr sz="1050" b="0">
                           <a:latin typeface="Calibri"/>
                         </a:rPr>
-                        <a:t>1878</a:t>
+                        <a:t>2304</a:t>
                       </a:r>
                     </a:p>
                   </a:txBody>
@@ -14199,132 +14311,13 @@
                         <a:rPr sz="1050" b="0">
                           <a:latin typeface="Calibri"/>
                         </a:rPr>
-                        <a:t>2056</a:t>
-                      </a:r>
-                    </a:p>
-                  </a:txBody>
-                  <a:tcPr>
-                    <a:solidFill>
-                      <a:srgbClr val="EFF3FA"/>
-                    </a:solidFill>
-                  </a:tcPr>
-                </a:tc>
-                <a:tc>
-                  <a:txBody>
-                    <a:bodyPr/>
-                    <a:lstStyle/>
-                    <a:p>
-                      <a:r>
-                        <a:rPr sz="1050" b="1">
-                          <a:solidFill>
-                            <a:srgbClr val="B06000"/>
-                          </a:solidFill>
-                          <a:latin typeface="Calibri"/>
-                        </a:rPr>
-                        <a:t>8.7%</a:t>
-                      </a:r>
-                    </a:p>
-                  </a:txBody>
-                  <a:tcPr>
-                    <a:solidFill>
-                      <a:srgbClr val="EFF3FA"/>
-                    </a:solidFill>
-                  </a:tcPr>
-                </a:tc>
-              </a:tr>
-              <a:tr h="347472">
-                <a:tc>
-                  <a:txBody>
-                    <a:bodyPr/>
-                    <a:lstStyle/>
-                    <a:p>
-                      <a:r>
-                        <a:rPr sz="1050" b="1">
-                          <a:latin typeface="Calibri"/>
-                        </a:rPr>
-                        <a:t>core scaling control</a:t>
-                      </a:r>
-                    </a:p>
-                  </a:txBody>
-                  <a:tcPr>
-                    <a:solidFill>
-                      <a:srgbClr val="FFFFFF"/>
-                    </a:solidFill>
-                  </a:tcPr>
-                </a:tc>
-                <a:tc>
-                  <a:txBody>
-                    <a:bodyPr/>
-                    <a:lstStyle/>
-                    <a:p>
-                      <a:r>
-                        <a:rPr sz="1050" b="0">
-                          <a:latin typeface="Calibri"/>
-                        </a:rPr>
-                        <a:t>4 x sha256</a:t>
-                      </a:r>
-                    </a:p>
-                  </a:txBody>
-                  <a:tcPr>
-                    <a:solidFill>
-                      <a:srgbClr val="FFFFFF"/>
-                    </a:solidFill>
-                  </a:tcPr>
-                </a:tc>
-                <a:tc>
-                  <a:txBody>
-                    <a:bodyPr/>
-                    <a:lstStyle/>
-                    <a:p>
-                      <a:r>
-                        <a:rPr sz="1050" b="0">
-                          <a:latin typeface="Calibri"/>
-                        </a:rPr>
-                        <a:t>4</a:t>
-                      </a:r>
-                    </a:p>
-                  </a:txBody>
-                  <a:tcPr>
-                    <a:solidFill>
-                      <a:srgbClr val="FFFFFF"/>
-                    </a:solidFill>
-                  </a:tcPr>
-                </a:tc>
-                <a:tc>
-                  <a:txBody>
-                    <a:bodyPr/>
-                    <a:lstStyle/>
-                    <a:p>
-                      <a:r>
-                        <a:rPr sz="1050" b="0">
-                          <a:latin typeface="Calibri"/>
-                        </a:rPr>
-                        <a:t>2307</a:t>
-                      </a:r>
-                    </a:p>
-                  </a:txBody>
-                  <a:tcPr>
-                    <a:solidFill>
-                      <a:srgbClr val="FFFFFF"/>
-                    </a:solidFill>
-                  </a:tcPr>
-                </a:tc>
-                <a:tc>
-                  <a:txBody>
-                    <a:bodyPr/>
-                    <a:lstStyle/>
-                    <a:p>
-                      <a:r>
-                        <a:rPr sz="1050" b="0">
-                          <a:latin typeface="Calibri"/>
-                        </a:rPr>
-                        <a:t>2183</a:t>
-                      </a:r>
-                    </a:p>
-                  </a:txBody>
-                  <a:tcPr>
-                    <a:solidFill>
-                      <a:srgbClr val="FFFFFF"/>
+                        <a:t>2163</a:t>
+                      </a:r>
+                    </a:p>
+                  </a:txBody>
+                  <a:tcPr>
+                    <a:solidFill>
+                      <a:srgbClr val="EFF3FA"/>
                     </a:solidFill>
                   </a:tcPr>
                 </a:tc>
@@ -14340,13 +14333,35 @@
                           </a:solidFill>
                           <a:latin typeface="Calibri"/>
                         </a:rPr>
-                        <a:t>5.7%</a:t>
-                      </a:r>
-                    </a:p>
-                  </a:txBody>
-                  <a:tcPr>
-                    <a:solidFill>
-                      <a:srgbClr val="FFFFFF"/>
+                        <a:t>6.5%</a:t>
+                      </a:r>
+                    </a:p>
+                  </a:txBody>
+                  <a:tcPr>
+                    <a:solidFill>
+                      <a:srgbClr val="EFF3FA"/>
+                    </a:solidFill>
+                  </a:tcPr>
+                </a:tc>
+                <a:tc>
+                  <a:txBody>
+                    <a:bodyPr/>
+                    <a:lstStyle/>
+                    <a:p>
+                      <a:r>
+                        <a:rPr sz="1050" b="0">
+                          <a:solidFill>
+                            <a:srgbClr val="187A33"/>
+                          </a:solidFill>
+                          <a:latin typeface="Calibri"/>
+                        </a:rPr>
+                        <a:t>6.5%</a:t>
+                      </a:r>
+                    </a:p>
+                  </a:txBody>
+                  <a:tcPr>
+                    <a:solidFill>
+                      <a:srgbClr val="EFF3FA"/>
                     </a:solidFill>
                   </a:tcPr>
                 </a:tc>
@@ -14361,13 +14376,13 @@
                         <a:rPr sz="1050" b="1">
                           <a:latin typeface="Calibri"/>
                         </a:rPr>
-                        <a:t>mixed benchmarks</a:t>
-                      </a:r>
-                    </a:p>
-                  </a:txBody>
-                  <a:tcPr>
-                    <a:solidFill>
-                      <a:srgbClr val="EFF3FA"/>
+                        <a:t>mixed benchmark control</a:t>
+                      </a:r>
+                    </a:p>
+                  </a:txBody>
+                  <a:tcPr>
+                    <a:solidFill>
+                      <a:srgbClr val="FFFFFF"/>
                     </a:solidFill>
                   </a:tcPr>
                 </a:tc>
@@ -14386,7 +14401,7 @@
                   </a:txBody>
                   <a:tcPr>
                     <a:solidFill>
-                      <a:srgbClr val="EFF3FA"/>
+                      <a:srgbClr val="FFFFFF"/>
                     </a:solidFill>
                   </a:tcPr>
                 </a:tc>
@@ -14405,7 +14420,7 @@
                   </a:txBody>
                   <a:tcPr>
                     <a:solidFill>
-                      <a:srgbClr val="EFF3FA"/>
+                      <a:srgbClr val="FFFFFF"/>
                     </a:solidFill>
                   </a:tcPr>
                 </a:tc>
@@ -14418,13 +14433,13 @@
                         <a:rPr sz="1050" b="0">
                           <a:latin typeface="Calibri"/>
                         </a:rPr>
-                        <a:t>2789</a:t>
-                      </a:r>
-                    </a:p>
-                  </a:txBody>
-                  <a:tcPr>
-                    <a:solidFill>
-                      <a:srgbClr val="EFF3FA"/>
+                        <a:t>3065</a:t>
+                      </a:r>
+                    </a:p>
+                  </a:txBody>
+                  <a:tcPr>
+                    <a:solidFill>
+                      <a:srgbClr val="FFFFFF"/>
                     </a:solidFill>
                   </a:tcPr>
                 </a:tc>
@@ -14437,13 +14452,13 @@
                         <a:rPr sz="1050" b="0">
                           <a:latin typeface="Calibri"/>
                         </a:rPr>
-                        <a:t>2748</a:t>
-                      </a:r>
-                    </a:p>
-                  </a:txBody>
-                  <a:tcPr>
-                    <a:solidFill>
-                      <a:srgbClr val="EFF3FA"/>
+                        <a:t>2878</a:t>
+                      </a:r>
+                    </a:p>
+                  </a:txBody>
+                  <a:tcPr>
+                    <a:solidFill>
+                      <a:srgbClr val="FFFFFF"/>
                     </a:solidFill>
                   </a:tcPr>
                 </a:tc>
@@ -14459,13 +14474,35 @@
                           </a:solidFill>
                           <a:latin typeface="Calibri"/>
                         </a:rPr>
-                        <a:t>1.5%</a:t>
-                      </a:r>
-                    </a:p>
-                  </a:txBody>
-                  <a:tcPr>
-                    <a:solidFill>
-                      <a:srgbClr val="EFF3FA"/>
+                        <a:t>6.5%</a:t>
+                      </a:r>
+                    </a:p>
+                  </a:txBody>
+                  <a:tcPr>
+                    <a:solidFill>
+                      <a:srgbClr val="FFFFFF"/>
+                    </a:solidFill>
+                  </a:tcPr>
+                </a:tc>
+                <a:tc>
+                  <a:txBody>
+                    <a:bodyPr/>
+                    <a:lstStyle/>
+                    <a:p>
+                      <a:r>
+                        <a:rPr sz="1050" b="0">
+                          <a:solidFill>
+                            <a:srgbClr val="187A33"/>
+                          </a:solidFill>
+                          <a:latin typeface="Calibri"/>
+                        </a:rPr>
+                        <a:t>1.4%</a:t>
+                      </a:r>
+                    </a:p>
+                  </a:txBody>
+                  <a:tcPr>
+                    <a:solidFill>
+                      <a:srgbClr val="FFFFFF"/>
                     </a:solidFill>
                   </a:tcPr>
                 </a:tc>
@@ -14482,8 +14519,8 @@
         </p:nvSpPr>
         <p:spPr>
           <a:xfrm>
-            <a:off x="548640" y="6126480"/>
-            <a:ext cx="11064240" cy="310896"/>
+            <a:off x="548640" y="5815584"/>
+            <a:ext cx="11064240" cy="603504"/>
           </a:xfrm>
           <a:prstGeom prst="rect">
             <a:avLst/>
@@ -14504,7 +14541,7 @@
                 </a:solidFill>
                 <a:latin typeface="Calibri"/>
               </a:rPr>
-              <a:t>The realistic mixes run at 0.4–0.6 GB/s; the synthetic ones at 2.5–3.2 GB/s. Real applications live in cache far more than streaming benchmarks do — and the model covers both.</a:t>
+              <a:t>The last column re-runs each prediction using activity measured on silicon instead of QEMU, which separates the model from the emulator. They agree on the edge mixes — so the error there is the model's, not QEMU's. They diverge only on the streaming control (6.5% vs 1.4%), where QEMU's DRAM proxy over-reports bandwidth. Edge workloads run at 0.4–0.7 GB/s and are barely exposed to it.</a:t>
             </a:r>
           </a:p>
         </p:txBody>
@@ -14895,7 +14932,7 @@
                         <a:rPr sz="1100" b="0">
                           <a:latin typeface="Calibri"/>
                         </a:rPr>
-                        <a:t>4.9% mean, 11% worst, 50 held-out applications</a:t>
+                        <a:t>6.4% mean, 14.8% worst, 50 held-out applications</a:t>
                       </a:r>
                     </a:p>
                   </a:txBody>

--- a/xcheck/wattson-power.pptx
+++ b/xcheck/wattson-power.pptx
@@ -17,6 +17,7 @@
     <p:sldId id="265" r:id="rId16"/>
     <p:sldId id="266" r:id="rId17"/>
     <p:sldId id="267" r:id="rId18"/>
+    <p:sldId id="268" r:id="rId19"/>
   </p:sldIdLst>
   <p:sldSz cx="12191695" cy="6858000" type="screen4x3"/>
   <p:notesSz cx="6858000" cy="9144000"/>
@@ -3566,7 +3567,7 @@
                 </a:solidFill>
                 <a:latin typeface="Calibri"/>
               </a:rPr>
-              <a:t>Perception, inference, storage, networking, imaging, rendering, running at the same time. Predicted from QEMU alone: no silicon counter is used for these mixes.</a:t>
+              <a:t>Perception, inference, storage, networking, imaging, rendering, running at the same time. No silicon ACTIVITY counter feeds these predictions — the activity is QEMU's. The energy coefficients, as everywhere in this deck, were measured on silicon.</a:t>
             </a:r>
           </a:p>
         </p:txBody>
@@ -6023,7 +6024,7 @@
                 </a:solidFill>
                 <a:latin typeface="Calibri"/>
               </a:rPr>
-              <a:t>What this actually means</a:t>
+              <a:t>Where the number actually comes from</a:t>
             </a:r>
           </a:p>
         </p:txBody>
@@ -6101,7 +6102,7 @@
                 </a:solidFill>
                 <a:latin typeface="Calibri"/>
               </a:rPr>
-              <a:t>The result is not the point. What it licenses us to do next is the point.</a:t>
+              <a:t>QEMU never emits a milliwatt. It is worth being precise about which half of the prediction it supplies.</a:t>
             </a:r>
           </a:p>
         </p:txBody>
@@ -6172,6 +6173,1063 @@
                 <a:latin typeface="Calibri"/>
               </a:rPr>
               <a:t>12</a:t>
+            </a:r>
+          </a:p>
+        </p:txBody>
+      </p:sp>
+      <p:sp>
+        <p:nvSpPr>
+          <p:cNvPr id="8" name="Rounded Rectangle 7"/>
+          <p:cNvSpPr/>
+          <p:nvPr/>
+        </p:nvSpPr>
+        <p:spPr>
+          <a:xfrm>
+            <a:off x="548640" y="1426464"/>
+            <a:ext cx="11064240" cy="1133856"/>
+          </a:xfrm>
+          <a:prstGeom prst="roundRect">
+            <a:avLst/>
+          </a:prstGeom>
+          <a:solidFill>
+            <a:srgbClr val="F4F7FB"/>
+          </a:solidFill>
+          <a:ln>
+            <a:solidFill>
+              <a:srgbClr val="1A53A0"/>
+            </a:solidFill>
+          </a:ln>
+        </p:spPr>
+        <p:style>
+          <a:lnRef idx="1">
+            <a:schemeClr val="accent1"/>
+          </a:lnRef>
+          <a:fillRef idx="3">
+            <a:schemeClr val="accent1"/>
+          </a:fillRef>
+          <a:effectRef idx="2">
+            <a:schemeClr val="accent1"/>
+          </a:effectRef>
+          <a:fontRef idx="minor">
+            <a:schemeClr val="lt1"/>
+          </a:fontRef>
+        </p:style>
+        <p:txBody>
+          <a:bodyPr rtlCol="0" anchor="ctr"/>
+          <a:lstStyle/>
+          <a:p>
+            <a:pPr algn="ctr"/>
+          </a:p>
+        </p:txBody>
+      </p:sp>
+      <p:sp>
+        <p:nvSpPr>
+          <p:cNvPr id="9" name="TextBox 8"/>
+          <p:cNvSpPr txBox="1"/>
+          <p:nvPr/>
+        </p:nvSpPr>
+        <p:spPr>
+          <a:xfrm>
+            <a:off x="621792" y="1554480"/>
+            <a:ext cx="10927080" cy="457200"/>
+          </a:xfrm>
+          <a:prstGeom prst="rect">
+            <a:avLst/>
+          </a:prstGeom>
+          <a:noFill/>
+        </p:spPr>
+        <p:txBody>
+          <a:bodyPr wrap="square">
+            <a:spAutoFit/>
+          </a:bodyPr>
+          <a:lstStyle/>
+          <a:p>
+            <a:pPr algn="ctr"/>
+            <a:r>
+              <a:rPr sz="1700" b="1">
+                <a:solidFill>
+                  <a:srgbClr val="202124"/>
+                </a:solidFill>
+                <a:latin typeface="Verdana"/>
+              </a:rPr>
+              <a:t>power  =  </a:t>
+            </a:r>
+            <a:r>
+              <a:rPr sz="1700" b="1">
+                <a:solidFill>
+                  <a:srgbClr val="B31412"/>
+                </a:solidFill>
+                <a:latin typeface="Verdana"/>
+              </a:rPr>
+              <a:t>243.8</a:t>
+            </a:r>
+            <a:r>
+              <a:rPr sz="1700" b="1">
+                <a:solidFill>
+                  <a:srgbClr val="202124"/>
+                </a:solidFill>
+                <a:latin typeface="Verdana"/>
+              </a:rPr>
+              <a:t>  +  </a:t>
+            </a:r>
+            <a:r>
+              <a:rPr sz="1700" b="1">
+                <a:solidFill>
+                  <a:srgbClr val="B31412"/>
+                </a:solidFill>
+                <a:latin typeface="Verdana"/>
+              </a:rPr>
+              <a:t>0.1266</a:t>
+            </a:r>
+            <a:r>
+              <a:rPr sz="1700" b="1">
+                <a:solidFill>
+                  <a:srgbClr val="202124"/>
+                </a:solidFill>
+                <a:latin typeface="Verdana"/>
+              </a:rPr>
+              <a:t> · </a:t>
+            </a:r>
+            <a:r>
+              <a:rPr sz="1700" b="1">
+                <a:solidFill>
+                  <a:srgbClr val="187A33"/>
+                </a:solidFill>
+                <a:latin typeface="Verdana"/>
+              </a:rPr>
+              <a:t>ALU Mops/s</a:t>
+            </a:r>
+            <a:r>
+              <a:rPr sz="1700" b="1">
+                <a:solidFill>
+                  <a:srgbClr val="202124"/>
+                </a:solidFill>
+                <a:latin typeface="Verdana"/>
+              </a:rPr>
+              <a:t>  +  </a:t>
+            </a:r>
+            <a:r>
+              <a:rPr sz="1700" b="1">
+                <a:solidFill>
+                  <a:srgbClr val="B31412"/>
+                </a:solidFill>
+                <a:latin typeface="Verdana"/>
+              </a:rPr>
+              <a:t>60.62</a:t>
+            </a:r>
+            <a:r>
+              <a:rPr sz="1700" b="1">
+                <a:solidFill>
+                  <a:srgbClr val="202124"/>
+                </a:solidFill>
+                <a:latin typeface="Verdana"/>
+              </a:rPr>
+              <a:t> · </a:t>
+            </a:r>
+            <a:r>
+              <a:rPr sz="1700" b="1">
+                <a:solidFill>
+                  <a:srgbClr val="187A33"/>
+                </a:solidFill>
+                <a:latin typeface="Verdana"/>
+              </a:rPr>
+              <a:t>GB/s</a:t>
+            </a:r>
+            <a:r>
+              <a:rPr sz="1700" b="1">
+                <a:solidFill>
+                  <a:srgbClr val="202124"/>
+                </a:solidFill>
+                <a:latin typeface="Verdana"/>
+              </a:rPr>
+              <a:t>  +  </a:t>
+            </a:r>
+            <a:r>
+              <a:rPr sz="1700" b="1">
+                <a:solidFill>
+                  <a:srgbClr val="B31412"/>
+                </a:solidFill>
+                <a:latin typeface="Verdana"/>
+              </a:rPr>
+              <a:t>169.3</a:t>
+            </a:r>
+            <a:r>
+              <a:rPr sz="1700" b="1">
+                <a:solidFill>
+                  <a:srgbClr val="202124"/>
+                </a:solidFill>
+                <a:latin typeface="Verdana"/>
+              </a:rPr>
+              <a:t> · </a:t>
+            </a:r>
+            <a:r>
+              <a:rPr sz="1700" b="1">
+                <a:solidFill>
+                  <a:srgbClr val="187A33"/>
+                </a:solidFill>
+                <a:latin typeface="Verdana"/>
+              </a:rPr>
+              <a:t>cores</a:t>
+            </a:r>
+          </a:p>
+        </p:txBody>
+      </p:sp>
+      <p:sp>
+        <p:nvSpPr>
+          <p:cNvPr id="10" name="TextBox 9"/>
+          <p:cNvSpPr txBox="1"/>
+          <p:nvPr/>
+        </p:nvSpPr>
+        <p:spPr>
+          <a:xfrm>
+            <a:off x="822960" y="2011680"/>
+            <a:ext cx="5120640" cy="274320"/>
+          </a:xfrm>
+          <a:prstGeom prst="rect">
+            <a:avLst/>
+          </a:prstGeom>
+          <a:noFill/>
+        </p:spPr>
+        <p:txBody>
+          <a:bodyPr wrap="square">
+            <a:spAutoFit/>
+          </a:bodyPr>
+          <a:lstStyle/>
+          <a:p>
+            <a:pPr algn="ctr"/>
+            <a:r>
+              <a:rPr sz="1200" b="1">
+                <a:solidFill>
+                  <a:srgbClr val="B31412"/>
+                </a:solidFill>
+                <a:latin typeface="Calibri"/>
+              </a:rPr>
+              <a:t>MEASURED on silicon rails</a:t>
+            </a:r>
+          </a:p>
+        </p:txBody>
+      </p:sp>
+      <p:sp>
+        <p:nvSpPr>
+          <p:cNvPr id="11" name="TextBox 10"/>
+          <p:cNvSpPr txBox="1"/>
+          <p:nvPr/>
+        </p:nvSpPr>
+        <p:spPr>
+          <a:xfrm>
+            <a:off x="822960" y="2258568"/>
+            <a:ext cx="5120640" cy="256032"/>
+          </a:xfrm>
+          <a:prstGeom prst="rect">
+            <a:avLst/>
+          </a:prstGeom>
+          <a:noFill/>
+        </p:spPr>
+        <p:txBody>
+          <a:bodyPr wrap="square">
+            <a:spAutoFit/>
+          </a:bodyPr>
+          <a:lstStyle/>
+          <a:p>
+            <a:pPr algn="ctr"/>
+            <a:r>
+              <a:rPr sz="1050" b="0">
+                <a:solidFill>
+                  <a:srgbClr val="5F6368"/>
+                </a:solidFill>
+                <a:latin typeface="Calibri"/>
+              </a:rPr>
+              <a:t>mW per unit of activity</a:t>
+            </a:r>
+          </a:p>
+        </p:txBody>
+      </p:sp>
+      <p:sp>
+        <p:nvSpPr>
+          <p:cNvPr id="12" name="TextBox 11"/>
+          <p:cNvSpPr txBox="1"/>
+          <p:nvPr/>
+        </p:nvSpPr>
+        <p:spPr>
+          <a:xfrm>
+            <a:off x="6126480" y="2011680"/>
+            <a:ext cx="5120640" cy="274320"/>
+          </a:xfrm>
+          <a:prstGeom prst="rect">
+            <a:avLst/>
+          </a:prstGeom>
+          <a:noFill/>
+        </p:spPr>
+        <p:txBody>
+          <a:bodyPr wrap="square">
+            <a:spAutoFit/>
+          </a:bodyPr>
+          <a:lstStyle/>
+          <a:p>
+            <a:pPr algn="ctr"/>
+            <a:r>
+              <a:rPr sz="1200" b="1">
+                <a:solidFill>
+                  <a:srgbClr val="187A33"/>
+                </a:solidFill>
+                <a:latin typeface="Calibri"/>
+              </a:rPr>
+              <a:t>DERIVED from QEMU</a:t>
+            </a:r>
+          </a:p>
+        </p:txBody>
+      </p:sp>
+      <p:sp>
+        <p:nvSpPr>
+          <p:cNvPr id="13" name="TextBox 12"/>
+          <p:cNvSpPr txBox="1"/>
+          <p:nvPr/>
+        </p:nvSpPr>
+        <p:spPr>
+          <a:xfrm>
+            <a:off x="6126480" y="2258568"/>
+            <a:ext cx="5120640" cy="256032"/>
+          </a:xfrm>
+          <a:prstGeom prst="rect">
+            <a:avLst/>
+          </a:prstGeom>
+          <a:noFill/>
+        </p:spPr>
+        <p:txBody>
+          <a:bodyPr wrap="square">
+            <a:spAutoFit/>
+          </a:bodyPr>
+          <a:lstStyle/>
+          <a:p>
+            <a:pPr algn="ctr"/>
+            <a:r>
+              <a:rPr sz="1050" b="0">
+                <a:solidFill>
+                  <a:srgbClr val="5F6368"/>
+                </a:solidFill>
+                <a:latin typeface="Calibri"/>
+              </a:rPr>
+              <a:t>the activity itself</a:t>
+            </a:r>
+          </a:p>
+        </p:txBody>
+      </p:sp>
+      <p:graphicFrame>
+        <p:nvGraphicFramePr>
+          <p:cNvPr id="14" name="Table 13"/>
+          <p:cNvGraphicFramePr>
+            <a:graphicFrameLocks noGrp="1"/>
+          </p:cNvGraphicFramePr>
+          <p:nvPr/>
+        </p:nvGraphicFramePr>
+        <p:xfrm>
+          <a:off x="548640" y="2798064"/>
+          <a:ext cx="11064240" cy="1755648"/>
+        </p:xfrm>
+        <a:graphic>
+          <a:graphicData uri="http://schemas.openxmlformats.org/drawingml/2006/table">
+            <a:tbl>
+              <a:tblPr firstRow="1" bandRow="1">
+                <a:tableStyleId>{5C22544A-7EE6-4342-B048-85BDC9FD1C3A}</a:tableStyleId>
+              </a:tblPr>
+              <a:tblGrid>
+                <a:gridCol w="3657600"/>
+                <a:gridCol w="2377440"/>
+                <a:gridCol w="2286000"/>
+                <a:gridCol w="2743200"/>
+              </a:tblGrid>
+              <a:tr h="438912">
+                <a:tc>
+                  <a:txBody>
+                    <a:bodyPr/>
+                    <a:lstStyle/>
+                    <a:p>
+                      <a:r>
+                        <a:rPr sz="1100" b="1">
+                          <a:solidFill>
+                            <a:srgbClr val="FFFFFF"/>
+                          </a:solidFill>
+                          <a:latin typeface="Calibri"/>
+                        </a:rPr>
+                        <a:t>quantity</a:t>
+                      </a:r>
+                    </a:p>
+                  </a:txBody>
+                  <a:tcPr>
+                    <a:solidFill>
+                      <a:srgbClr val="202124"/>
+                    </a:solidFill>
+                  </a:tcPr>
+                </a:tc>
+                <a:tc>
+                  <a:txBody>
+                    <a:bodyPr/>
+                    <a:lstStyle/>
+                    <a:p>
+                      <a:r>
+                        <a:rPr sz="1100" b="1">
+                          <a:solidFill>
+                            <a:srgbClr val="FFFFFF"/>
+                          </a:solidFill>
+                          <a:latin typeface="Calibri"/>
+                        </a:rPr>
+                        <a:t>where it came from</a:t>
+                      </a:r>
+                    </a:p>
+                  </a:txBody>
+                  <a:tcPr>
+                    <a:solidFill>
+                      <a:srgbClr val="202124"/>
+                    </a:solidFill>
+                  </a:tcPr>
+                </a:tc>
+                <a:tc>
+                  <a:txBody>
+                    <a:bodyPr/>
+                    <a:lstStyle/>
+                    <a:p>
+                      <a:r>
+                        <a:rPr sz="1100" b="1">
+                          <a:solidFill>
+                            <a:srgbClr val="FFFFFF"/>
+                          </a:solidFill>
+                          <a:latin typeface="Calibri"/>
+                        </a:rPr>
+                        <a:t>status</a:t>
+                      </a:r>
+                    </a:p>
+                  </a:txBody>
+                  <a:tcPr>
+                    <a:solidFill>
+                      <a:srgbClr val="202124"/>
+                    </a:solidFill>
+                  </a:tcPr>
+                </a:tc>
+                <a:tc>
+                  <a:txBody>
+                    <a:bodyPr/>
+                    <a:lstStyle/>
+                    <a:p>
+                      <a:r>
+                        <a:rPr sz="1100" b="1">
+                          <a:solidFill>
+                            <a:srgbClr val="FFFFFF"/>
+                          </a:solidFill>
+                          <a:latin typeface="Calibri"/>
+                        </a:rPr>
+                        <a:t>basis</a:t>
+                      </a:r>
+                    </a:p>
+                  </a:txBody>
+                  <a:tcPr>
+                    <a:solidFill>
+                      <a:srgbClr val="202124"/>
+                    </a:solidFill>
+                  </a:tcPr>
+                </a:tc>
+              </a:tr>
+              <a:tr h="438912">
+                <a:tc>
+                  <a:txBody>
+                    <a:bodyPr/>
+                    <a:lstStyle/>
+                    <a:p>
+                      <a:r>
+                        <a:rPr sz="1100" b="1">
+                          <a:latin typeface="Calibri"/>
+                        </a:rPr>
+                        <a:t>the activity a workload generates</a:t>
+                      </a:r>
+                    </a:p>
+                  </a:txBody>
+                  <a:tcPr>
+                    <a:solidFill>
+                      <a:srgbClr val="EFF3FA"/>
+                    </a:solidFill>
+                  </a:tcPr>
+                </a:tc>
+                <a:tc>
+                  <a:txBody>
+                    <a:bodyPr/>
+                    <a:lstStyle/>
+                    <a:p>
+                      <a:r>
+                        <a:rPr sz="1100" b="0">
+                          <a:latin typeface="Calibri"/>
+                        </a:rPr>
+                        <a:t>QEMU</a:t>
+                      </a:r>
+                    </a:p>
+                  </a:txBody>
+                  <a:tcPr>
+                    <a:solidFill>
+                      <a:srgbClr val="EFF3FA"/>
+                    </a:solidFill>
+                  </a:tcPr>
+                </a:tc>
+                <a:tc>
+                  <a:txBody>
+                    <a:bodyPr/>
+                    <a:lstStyle/>
+                    <a:p>
+                      <a:r>
+                        <a:rPr sz="1100" b="1">
+                          <a:solidFill>
+                            <a:srgbClr val="187A33"/>
+                          </a:solidFill>
+                          <a:latin typeface="Calibri"/>
+                        </a:rPr>
+                        <a:t>proven here</a:t>
+                      </a:r>
+                    </a:p>
+                  </a:txBody>
+                  <a:tcPr>
+                    <a:solidFill>
+                      <a:srgbClr val="EFF3FA"/>
+                    </a:solidFill>
+                  </a:tcPr>
+                </a:tc>
+                <a:tc>
+                  <a:txBody>
+                    <a:bodyPr/>
+                    <a:lstStyle/>
+                    <a:p>
+                      <a:r>
+                        <a:rPr sz="1100" b="0">
+                          <a:latin typeface="Calibri"/>
+                        </a:rPr>
+                        <a:t>1.75% vs the A55's own PMU, 50 applications</a:t>
+                      </a:r>
+                    </a:p>
+                  </a:txBody>
+                  <a:tcPr>
+                    <a:solidFill>
+                      <a:srgbClr val="EFF3FA"/>
+                    </a:solidFill>
+                  </a:tcPr>
+                </a:tc>
+              </a:tr>
+              <a:tr h="438912">
+                <a:tc>
+                  <a:txBody>
+                    <a:bodyPr/>
+                    <a:lstStyle/>
+                    <a:p>
+                      <a:r>
+                        <a:rPr sz="1100" b="1">
+                          <a:latin typeface="Calibri"/>
+                        </a:rPr>
+                        <a:t>mW per unit of activity</a:t>
+                      </a:r>
+                    </a:p>
+                  </a:txBody>
+                  <a:tcPr>
+                    <a:solidFill>
+                      <a:srgbClr val="FFFFFF"/>
+                    </a:solidFill>
+                  </a:tcPr>
+                </a:tc>
+                <a:tc>
+                  <a:txBody>
+                    <a:bodyPr/>
+                    <a:lstStyle/>
+                    <a:p>
+                      <a:r>
+                        <a:rPr sz="1100" b="0">
+                          <a:latin typeface="Calibri"/>
+                        </a:rPr>
+                        <a:t>measured silicon rails</a:t>
+                      </a:r>
+                    </a:p>
+                  </a:txBody>
+                  <a:tcPr>
+                    <a:solidFill>
+                      <a:srgbClr val="FFFFFF"/>
+                    </a:solidFill>
+                  </a:tcPr>
+                </a:tc>
+                <a:tc>
+                  <a:txBody>
+                    <a:bodyPr/>
+                    <a:lstStyle/>
+                    <a:p>
+                      <a:r>
+                        <a:rPr sz="1100" b="1">
+                          <a:solidFill>
+                            <a:srgbClr val="B06000"/>
+                          </a:solidFill>
+                          <a:latin typeface="Calibri"/>
+                        </a:rPr>
+                        <a:t>stood in for the engineers</a:t>
+                      </a:r>
+                    </a:p>
+                  </a:txBody>
+                  <a:tcPr>
+                    <a:solidFill>
+                      <a:srgbClr val="FFFFFF"/>
+                    </a:solidFill>
+                  </a:tcPr>
+                </a:tc>
+                <a:tc>
+                  <a:txBody>
+                    <a:bodyPr/>
+                    <a:lstStyle/>
+                    <a:p>
+                      <a:r>
+                        <a:rPr sz="1100" b="0">
+                          <a:latin typeface="Calibri"/>
+                        </a:rPr>
+                        <a:t>11-point calibration grid on a real board</a:t>
+                      </a:r>
+                    </a:p>
+                  </a:txBody>
+                  <a:tcPr>
+                    <a:solidFill>
+                      <a:srgbClr val="FFFFFF"/>
+                    </a:solidFill>
+                  </a:tcPr>
+                </a:tc>
+              </a:tr>
+              <a:tr h="438912">
+                <a:tc>
+                  <a:txBody>
+                    <a:bodyPr/>
+                    <a:lstStyle/>
+                    <a:p>
+                      <a:r>
+                        <a:rPr sz="1100" b="1">
+                          <a:latin typeface="Calibri"/>
+                        </a:rPr>
+                        <a:t>mW per unit of activity, BEFORE silicon exists</a:t>
+                      </a:r>
+                    </a:p>
+                  </a:txBody>
+                  <a:tcPr>
+                    <a:solidFill>
+                      <a:srgbClr val="EFF3FA"/>
+                    </a:solidFill>
+                  </a:tcPr>
+                </a:tc>
+                <a:tc>
+                  <a:txBody>
+                    <a:bodyPr/>
+                    <a:lstStyle/>
+                    <a:p>
+                      <a:r>
+                        <a:rPr sz="1100" b="0">
+                          <a:latin typeface="Calibri"/>
+                        </a:rPr>
+                        <a:t>gate-level power estimation</a:t>
+                      </a:r>
+                    </a:p>
+                  </a:txBody>
+                  <a:tcPr>
+                    <a:solidFill>
+                      <a:srgbClr val="EFF3FA"/>
+                    </a:solidFill>
+                  </a:tcPr>
+                </a:tc>
+                <a:tc>
+                  <a:txBody>
+                    <a:bodyPr/>
+                    <a:lstStyle/>
+                    <a:p>
+                      <a:r>
+                        <a:rPr sz="1100" b="1">
+                          <a:solidFill>
+                            <a:srgbClr val="B31412"/>
+                          </a:solidFill>
+                          <a:latin typeface="Calibri"/>
+                        </a:rPr>
+                        <a:t>NOT tested here</a:t>
+                      </a:r>
+                    </a:p>
+                  </a:txBody>
+                  <a:tcPr>
+                    <a:solidFill>
+                      <a:srgbClr val="EFF3FA"/>
+                    </a:solidFill>
+                  </a:tcPr>
+                </a:tc>
+                <a:tc>
+                  <a:txBody>
+                    <a:bodyPr/>
+                    <a:lstStyle/>
+                    <a:p>
+                      <a:r>
+                        <a:rPr sz="1100" b="0">
+                          <a:latin typeface="Calibri"/>
+                        </a:rPr>
+                        <a:t>this is the engineers' half, and it is the open link</a:t>
+                      </a:r>
+                    </a:p>
+                  </a:txBody>
+                  <a:tcPr>
+                    <a:solidFill>
+                      <a:srgbClr val="EFF3FA"/>
+                    </a:solidFill>
+                  </a:tcPr>
+                </a:tc>
+              </a:tr>
+            </a:tbl>
+          </a:graphicData>
+        </a:graphic>
+      </p:graphicFrame>
+      <p:sp>
+        <p:nvSpPr>
+          <p:cNvPr id="15" name="Rounded Rectangle 14"/>
+          <p:cNvSpPr/>
+          <p:nvPr/>
+        </p:nvSpPr>
+        <p:spPr>
+          <a:xfrm>
+            <a:off x="548640" y="4663440"/>
+            <a:ext cx="11064240" cy="1188720"/>
+          </a:xfrm>
+          <a:prstGeom prst="roundRect">
+            <a:avLst/>
+          </a:prstGeom>
+          <a:solidFill>
+            <a:srgbClr val="FDF6EC"/>
+          </a:solidFill>
+          <a:ln>
+            <a:solidFill>
+              <a:srgbClr val="B06000"/>
+            </a:solidFill>
+          </a:ln>
+        </p:spPr>
+        <p:style>
+          <a:lnRef idx="1">
+            <a:schemeClr val="accent1"/>
+          </a:lnRef>
+          <a:fillRef idx="3">
+            <a:schemeClr val="accent1"/>
+          </a:fillRef>
+          <a:effectRef idx="2">
+            <a:schemeClr val="accent1"/>
+          </a:effectRef>
+          <a:fontRef idx="minor">
+            <a:schemeClr val="lt1"/>
+          </a:fontRef>
+        </p:style>
+        <p:txBody>
+          <a:bodyPr rtlCol="0" anchor="ctr"/>
+          <a:lstStyle/>
+          <a:p>
+            <a:pPr algn="ctr"/>
+          </a:p>
+        </p:txBody>
+      </p:sp>
+      <p:sp>
+        <p:nvSpPr>
+          <p:cNvPr id="16" name="TextBox 15"/>
+          <p:cNvSpPr txBox="1"/>
+          <p:nvPr/>
+        </p:nvSpPr>
+        <p:spPr>
+          <a:xfrm>
+            <a:off x="822960" y="4773168"/>
+            <a:ext cx="10515600" cy="1005840"/>
+          </a:xfrm>
+          <a:prstGeom prst="rect">
+            <a:avLst/>
+          </a:prstGeom>
+          <a:noFill/>
+        </p:spPr>
+        <p:txBody>
+          <a:bodyPr wrap="square">
+            <a:spAutoFit/>
+          </a:bodyPr>
+          <a:lstStyle/>
+          <a:p>
+            <a:pPr algn="l"/>
+            <a:r>
+              <a:rPr sz="1200" b="0">
+                <a:solidFill>
+                  <a:srgbClr val="202124"/>
+                </a:solidFill>
+                <a:latin typeface="Calibri"/>
+              </a:rPr>
+              <a:t>We obtained the coefficients the one way that is unavailable before tapeout: by putting a meter on the part. That is what makes this deck evidence — the energy side was known-good, so any error left over belongs to the activity side, which is the half we were actually testing. It is also why this does not replace the engineers: pre-silicon there is no rail to measure, and those coefficients have to come from gate-level estimates instead.</a:t>
+            </a:r>
+          </a:p>
+        </p:txBody>
+      </p:sp>
+      <p:sp>
+        <p:nvSpPr>
+          <p:cNvPr id="17" name="TextBox 16"/>
+          <p:cNvSpPr txBox="1"/>
+          <p:nvPr/>
+        </p:nvSpPr>
+        <p:spPr>
+          <a:xfrm>
+            <a:off x="548640" y="5961888"/>
+            <a:ext cx="11064240" cy="457200"/>
+          </a:xfrm>
+          <a:prstGeom prst="rect">
+            <a:avLst/>
+          </a:prstGeom>
+          <a:noFill/>
+        </p:spPr>
+        <p:txBody>
+          <a:bodyPr wrap="square">
+            <a:spAutoFit/>
+          </a:bodyPr>
+          <a:lstStyle/>
+          <a:p>
+            <a:pPr algn="l"/>
+            <a:r>
+              <a:rPr sz="1200" b="1">
+                <a:solidFill>
+                  <a:srgbClr val="1A53A0"/>
+                </a:solidFill>
+                <a:latin typeface="Calibri"/>
+              </a:rPr>
+              <a:t>What this campaign de-risks is the QEMU half — so that when gate-power estimates arrive, the activity being fed into them is already known to be right.</a:t>
+            </a:r>
+          </a:p>
+        </p:txBody>
+      </p:sp>
+    </p:spTree>
+  </p:cSld>
+  <p:clrMapOvr>
+    <a:masterClrMapping/>
+  </p:clrMapOvr>
+</p:sld>
+</file>
+
+<file path=ppt/slides/slide13.xml><?xml version="1.0" encoding="utf-8"?>
+<p:sld xmlns:a="http://schemas.openxmlformats.org/drawingml/2006/main" xmlns:p="http://schemas.openxmlformats.org/presentationml/2006/main" xmlns:r="http://schemas.openxmlformats.org/officeDocument/2006/relationships">
+  <p:cSld>
+    <p:spTree>
+      <p:nvGrpSpPr>
+        <p:cNvPr id="1" name=""/>
+        <p:cNvGrpSpPr/>
+        <p:nvPr/>
+      </p:nvGrpSpPr>
+      <p:grpSpPr/>
+      <p:sp>
+        <p:nvSpPr>
+          <p:cNvPr id="2" name="Rectangle 1"/>
+          <p:cNvSpPr/>
+          <p:nvPr/>
+        </p:nvSpPr>
+        <p:spPr>
+          <a:xfrm>
+            <a:off x="0" y="0"/>
+            <a:ext cx="12191695" cy="841248"/>
+          </a:xfrm>
+          <a:prstGeom prst="rect">
+            <a:avLst/>
+          </a:prstGeom>
+          <a:solidFill>
+            <a:srgbClr val="202124"/>
+          </a:solidFill>
+          <a:ln>
+            <a:noFill/>
+          </a:ln>
+        </p:spPr>
+        <p:style>
+          <a:lnRef idx="1">
+            <a:schemeClr val="accent1"/>
+          </a:lnRef>
+          <a:fillRef idx="3">
+            <a:schemeClr val="accent1"/>
+          </a:fillRef>
+          <a:effectRef idx="2">
+            <a:schemeClr val="accent1"/>
+          </a:effectRef>
+          <a:fontRef idx="minor">
+            <a:schemeClr val="lt1"/>
+          </a:fontRef>
+        </p:style>
+        <p:txBody>
+          <a:bodyPr rtlCol="0" anchor="ctr"/>
+          <a:lstStyle/>
+          <a:p>
+            <a:pPr algn="ctr"/>
+          </a:p>
+        </p:txBody>
+      </p:sp>
+      <p:sp>
+        <p:nvSpPr>
+          <p:cNvPr id="3" name="TextBox 2"/>
+          <p:cNvSpPr txBox="1"/>
+          <p:nvPr/>
+        </p:nvSpPr>
+        <p:spPr>
+          <a:xfrm>
+            <a:off x="548640" y="118872"/>
+            <a:ext cx="11155680" cy="603504"/>
+          </a:xfrm>
+          <a:prstGeom prst="rect">
+            <a:avLst/>
+          </a:prstGeom>
+          <a:noFill/>
+        </p:spPr>
+        <p:txBody>
+          <a:bodyPr wrap="square">
+            <a:spAutoFit/>
+          </a:bodyPr>
+          <a:lstStyle/>
+          <a:p>
+            <a:pPr algn="l"/>
+            <a:r>
+              <a:rPr sz="2600" b="1">
+                <a:solidFill>
+                  <a:srgbClr val="FFFFFF"/>
+                </a:solidFill>
+                <a:latin typeface="Calibri"/>
+              </a:rPr>
+              <a:t>What this actually means</a:t>
+            </a:r>
+          </a:p>
+        </p:txBody>
+      </p:sp>
+      <p:sp>
+        <p:nvSpPr>
+          <p:cNvPr id="4" name="Rectangle 3"/>
+          <p:cNvSpPr/>
+          <p:nvPr/>
+        </p:nvSpPr>
+        <p:spPr>
+          <a:xfrm>
+            <a:off x="0" y="841248"/>
+            <a:ext cx="12191695" cy="38100"/>
+          </a:xfrm>
+          <a:prstGeom prst="rect">
+            <a:avLst/>
+          </a:prstGeom>
+          <a:solidFill>
+            <a:srgbClr val="1A53A0"/>
+          </a:solidFill>
+          <a:ln>
+            <a:noFill/>
+          </a:ln>
+        </p:spPr>
+        <p:style>
+          <a:lnRef idx="1">
+            <a:schemeClr val="accent1"/>
+          </a:lnRef>
+          <a:fillRef idx="3">
+            <a:schemeClr val="accent1"/>
+          </a:fillRef>
+          <a:effectRef idx="2">
+            <a:schemeClr val="accent1"/>
+          </a:effectRef>
+          <a:fontRef idx="minor">
+            <a:schemeClr val="lt1"/>
+          </a:fontRef>
+        </p:style>
+        <p:txBody>
+          <a:bodyPr rtlCol="0" anchor="ctr"/>
+          <a:lstStyle/>
+          <a:p>
+            <a:pPr algn="ctr"/>
+          </a:p>
+        </p:txBody>
+      </p:sp>
+      <p:sp>
+        <p:nvSpPr>
+          <p:cNvPr id="5" name="TextBox 4"/>
+          <p:cNvSpPr txBox="1"/>
+          <p:nvPr/>
+        </p:nvSpPr>
+        <p:spPr>
+          <a:xfrm>
+            <a:off x="548640" y="969264"/>
+            <a:ext cx="11155680" cy="365760"/>
+          </a:xfrm>
+          <a:prstGeom prst="rect">
+            <a:avLst/>
+          </a:prstGeom>
+          <a:noFill/>
+        </p:spPr>
+        <p:txBody>
+          <a:bodyPr wrap="square">
+            <a:spAutoFit/>
+          </a:bodyPr>
+          <a:lstStyle/>
+          <a:p>
+            <a:pPr algn="l"/>
+            <a:r>
+              <a:rPr sz="1200" b="0">
+                <a:solidFill>
+                  <a:srgbClr val="5F6368"/>
+                </a:solidFill>
+                <a:latin typeface="Calibri"/>
+              </a:rPr>
+              <a:t>The result is not the point. What it licenses us to do next is the point.</a:t>
+            </a:r>
+          </a:p>
+        </p:txBody>
+      </p:sp>
+      <p:sp>
+        <p:nvSpPr>
+          <p:cNvPr id="6" name="TextBox 5"/>
+          <p:cNvSpPr txBox="1"/>
+          <p:nvPr/>
+        </p:nvSpPr>
+        <p:spPr>
+          <a:xfrm>
+            <a:off x="548640" y="6528816"/>
+            <a:ext cx="10424160" cy="274320"/>
+          </a:xfrm>
+          <a:prstGeom prst="rect">
+            <a:avLst/>
+          </a:prstGeom>
+          <a:noFill/>
+        </p:spPr>
+        <p:txBody>
+          <a:bodyPr wrap="square">
+            <a:spAutoFit/>
+          </a:bodyPr>
+          <a:lstStyle/>
+          <a:p>
+            <a:pPr algn="l"/>
+            <a:r>
+              <a:rPr sz="950" b="0">
+                <a:solidFill>
+                  <a:srgbClr val="5F6368"/>
+                </a:solidFill>
+                <a:latin typeface="Calibri"/>
+              </a:rPr>
+              <a:t>wattson power · rails MEASURED on IMX95LPD5EVK-19 (NXP BCU) · A55 die 40–41 °C under load · activity DERIVED from QEMU TCG · 2026-09-10</a:t>
+            </a:r>
+          </a:p>
+        </p:txBody>
+      </p:sp>
+      <p:sp>
+        <p:nvSpPr>
+          <p:cNvPr id="7" name="TextBox 6"/>
+          <p:cNvSpPr txBox="1"/>
+          <p:nvPr/>
+        </p:nvSpPr>
+        <p:spPr>
+          <a:xfrm>
+            <a:off x="11430000" y="6528816"/>
+            <a:ext cx="457200" cy="274320"/>
+          </a:xfrm>
+          <a:prstGeom prst="rect">
+            <a:avLst/>
+          </a:prstGeom>
+          <a:noFill/>
+        </p:spPr>
+        <p:txBody>
+          <a:bodyPr wrap="square">
+            <a:spAutoFit/>
+          </a:bodyPr>
+          <a:lstStyle/>
+          <a:p>
+            <a:pPr algn="r"/>
+            <a:r>
+              <a:rPr sz="950" b="0">
+                <a:solidFill>
+                  <a:srgbClr val="5F6368"/>
+                </a:solidFill>
+                <a:latin typeface="Calibri"/>
+              </a:rPr>
+              <a:t>13</a:t>
             </a:r>
           </a:p>
         </p:txBody>
@@ -6615,7 +7673,7 @@
                 </a:solidFill>
                 <a:latin typeface="Calibri"/>
               </a:rPr>
-              <a:t>QEMU predicts the activity factors — usable on their own for reading code flows, usage and where the work lands. And those activity factors, fed to a power model carrying estimated gate power, produce power estimates that held to single digits against real rails.</a:t>
+              <a:t>QEMU predicts the activity factors — usable on their own for reading code flows, usage and where the work lands. And fed to a power model, those activity factors produced power estimates that held to single digits against real rails. The half still to prove is the model itself: here its coefficients were measured on silicon, and pre-tapeout they must come from gate-level estimation instead. That is the engineers' half, and it is the remaining risk.</a:t>
             </a:r>
           </a:p>
         </p:txBody>
@@ -7479,7 +8537,7 @@
                 </a:solidFill>
                 <a:latin typeface="Calibri"/>
               </a:rPr>
-              <a:t>And 3.6% on concurrent multi-application mixes, predicted from QEMU alone.</a:t>
+              <a:t>And 3.6% on concurrent multi-application mixes. In both cases QEMU supplies the activity; the mW-per-unit-activity always comes from measured silicon.</a:t>
             </a:r>
           </a:p>
         </p:txBody>

--- a/xcheck/wattson-power.pptx
+++ b/xcheck/wattson-power.pptx
@@ -18,6 +18,7 @@
     <p:sldId id="266" r:id="rId17"/>
     <p:sldId id="267" r:id="rId18"/>
     <p:sldId id="268" r:id="rId19"/>
+    <p:sldId id="269" r:id="rId20"/>
   </p:sldIdLst>
   <p:sldSz cx="12191695" cy="6858000" type="screen4x3"/>
   <p:notesSz cx="6858000" cy="9144000"/>
@@ -6950,7 +6951,7 @@
                 </a:solidFill>
                 <a:latin typeface="Calibri"/>
               </a:rPr>
-              <a:t>We obtained the coefficients the one way that is unavailable before tapeout: by putting a meter on the part. That is what makes this deck evidence — the energy side was known-good, so any error left over belongs to the activity side, which is the half we were actually testing. It is also why this does not replace the engineers: pre-silicon there is no rail to measure, and those coefficients have to come from gate-level estimates instead.</a:t>
+              <a:t>In a real program that middle row is a power-estimation spreadsheet. Here we stood in for it by having the actual silicon. That is what makes this evidence rather than a proposal — with the energy side known-good, any error left over belongs to the activity side, which is the half under test. It is also why this does not replace the engineers: before tapeout there is no rail to measure, and the coefficients come from their estimates instead.</a:t>
             </a:r>
           </a:p>
         </p:txBody>
@@ -7081,7 +7082,7 @@
                 </a:solidFill>
                 <a:latin typeface="Calibri"/>
               </a:rPr>
-              <a:t>What this actually means</a:t>
+              <a:t>What this actually replaces</a:t>
             </a:r>
           </a:p>
         </p:txBody>
@@ -7159,7 +7160,7 @@
                 </a:solidFill>
                 <a:latin typeface="Calibri"/>
               </a:rPr>
-              <a:t>The result is not the point. What it licenses us to do next is the point.</a:t>
+              <a:t>A power estimate is two numbers multiplied together. Only one of them has ever had a way to get better.</a:t>
             </a:r>
           </a:p>
         </p:txBody>
@@ -7230,6 +7231,1193 @@
                 <a:latin typeface="Calibri"/>
               </a:rPr>
               <a:t>13</a:t>
+            </a:r>
+          </a:p>
+        </p:txBody>
+      </p:sp>
+      <p:sp>
+        <p:nvSpPr>
+          <p:cNvPr id="8" name="Rounded Rectangle 7"/>
+          <p:cNvSpPr/>
+          <p:nvPr/>
+        </p:nvSpPr>
+        <p:spPr>
+          <a:xfrm>
+            <a:off x="548640" y="1463040"/>
+            <a:ext cx="11064240" cy="1298448"/>
+          </a:xfrm>
+          <a:prstGeom prst="roundRect">
+            <a:avLst/>
+          </a:prstGeom>
+          <a:solidFill>
+            <a:srgbClr val="F7F8FA"/>
+          </a:solidFill>
+          <a:ln>
+            <a:solidFill>
+              <a:srgbClr val="187A33"/>
+            </a:solidFill>
+          </a:ln>
+        </p:spPr>
+        <p:style>
+          <a:lnRef idx="1">
+            <a:schemeClr val="accent1"/>
+          </a:lnRef>
+          <a:fillRef idx="3">
+            <a:schemeClr val="accent1"/>
+          </a:fillRef>
+          <a:effectRef idx="2">
+            <a:schemeClr val="accent1"/>
+          </a:effectRef>
+          <a:fontRef idx="minor">
+            <a:schemeClr val="lt1"/>
+          </a:fontRef>
+        </p:style>
+        <p:txBody>
+          <a:bodyPr rtlCol="0" anchor="ctr"/>
+          <a:lstStyle/>
+          <a:p>
+            <a:pPr algn="ctr"/>
+          </a:p>
+        </p:txBody>
+      </p:sp>
+      <p:sp>
+        <p:nvSpPr>
+          <p:cNvPr id="9" name="TextBox 8"/>
+          <p:cNvSpPr txBox="1"/>
+          <p:nvPr/>
+        </p:nvSpPr>
+        <p:spPr>
+          <a:xfrm>
+            <a:off x="841248" y="1591056"/>
+            <a:ext cx="4754880" cy="329184"/>
+          </a:xfrm>
+          <a:prstGeom prst="rect">
+            <a:avLst/>
+          </a:prstGeom>
+          <a:noFill/>
+        </p:spPr>
+        <p:txBody>
+          <a:bodyPr wrap="square">
+            <a:spAutoFit/>
+          </a:bodyPr>
+          <a:lstStyle/>
+          <a:p>
+            <a:pPr algn="l"/>
+            <a:r>
+              <a:rPr sz="1600" b="1">
+                <a:solidFill>
+                  <a:srgbClr val="202124"/>
+                </a:solidFill>
+                <a:latin typeface="Calibri"/>
+              </a:rPr>
+              <a:t>gate power per toggle</a:t>
+            </a:r>
+          </a:p>
+        </p:txBody>
+      </p:sp>
+      <p:sp>
+        <p:nvSpPr>
+          <p:cNvPr id="10" name="TextBox 9"/>
+          <p:cNvSpPr txBox="1"/>
+          <p:nvPr/>
+        </p:nvSpPr>
+        <p:spPr>
+          <a:xfrm>
+            <a:off x="841248" y="1956816"/>
+            <a:ext cx="4754880" cy="310896"/>
+          </a:xfrm>
+          <a:prstGeom prst="rect">
+            <a:avLst/>
+          </a:prstGeom>
+          <a:noFill/>
+        </p:spPr>
+        <p:txBody>
+          <a:bodyPr wrap="square">
+            <a:spAutoFit/>
+          </a:bodyPr>
+          <a:lstStyle/>
+          <a:p>
+            <a:pPr algn="l"/>
+            <a:r>
+              <a:rPr sz="1200" b="0">
+                <a:solidFill>
+                  <a:srgbClr val="5F6368"/>
+                </a:solidFill>
+                <a:latin typeface="Calibri"/>
+              </a:rPr>
+              <a:t>the engineers' power-estimation spreadsheet</a:t>
+            </a:r>
+          </a:p>
+        </p:txBody>
+      </p:sp>
+      <p:sp>
+        <p:nvSpPr>
+          <p:cNvPr id="11" name="Rounded Rectangle 10"/>
+          <p:cNvSpPr/>
+          <p:nvPr/>
+        </p:nvSpPr>
+        <p:spPr>
+          <a:xfrm>
+            <a:off x="841248" y="2322576"/>
+            <a:ext cx="2103120" cy="310896"/>
+          </a:xfrm>
+          <a:prstGeom prst="roundRect">
+            <a:avLst/>
+          </a:prstGeom>
+          <a:solidFill>
+            <a:srgbClr val="187A33"/>
+          </a:solidFill>
+          <a:ln>
+            <a:noFill/>
+          </a:ln>
+        </p:spPr>
+        <p:style>
+          <a:lnRef idx="1">
+            <a:schemeClr val="accent1"/>
+          </a:lnRef>
+          <a:fillRef idx="3">
+            <a:schemeClr val="accent1"/>
+          </a:fillRef>
+          <a:effectRef idx="2">
+            <a:schemeClr val="accent1"/>
+          </a:effectRef>
+          <a:fontRef idx="minor">
+            <a:schemeClr val="lt1"/>
+          </a:fontRef>
+        </p:style>
+        <p:txBody>
+          <a:bodyPr rtlCol="0" anchor="ctr"/>
+          <a:lstStyle/>
+          <a:p>
+            <a:pPr algn="ctr"/>
+          </a:p>
+        </p:txBody>
+      </p:sp>
+      <p:sp>
+        <p:nvSpPr>
+          <p:cNvPr id="12" name="TextBox 11"/>
+          <p:cNvSpPr txBox="1"/>
+          <p:nvPr/>
+        </p:nvSpPr>
+        <p:spPr>
+          <a:xfrm>
+            <a:off x="841248" y="2359152"/>
+            <a:ext cx="2103120" cy="256032"/>
+          </a:xfrm>
+          <a:prstGeom prst="rect">
+            <a:avLst/>
+          </a:prstGeom>
+          <a:noFill/>
+        </p:spPr>
+        <p:txBody>
+          <a:bodyPr wrap="square">
+            <a:spAutoFit/>
+          </a:bodyPr>
+          <a:lstStyle/>
+          <a:p>
+            <a:pPr algn="ctr"/>
+            <a:r>
+              <a:rPr sz="1050" b="1">
+                <a:solidFill>
+                  <a:srgbClr val="FFFFFF"/>
+                </a:solidFill>
+                <a:latin typeface="Calibri"/>
+              </a:rPr>
+              <a:t>refines over time</a:t>
+            </a:r>
+          </a:p>
+        </p:txBody>
+      </p:sp>
+      <p:sp>
+        <p:nvSpPr>
+          <p:cNvPr id="13" name="TextBox 12"/>
+          <p:cNvSpPr txBox="1"/>
+          <p:nvPr/>
+        </p:nvSpPr>
+        <p:spPr>
+          <a:xfrm>
+            <a:off x="5806440" y="1645920"/>
+            <a:ext cx="5577840" cy="960120"/>
+          </a:xfrm>
+          <a:prstGeom prst="rect">
+            <a:avLst/>
+          </a:prstGeom>
+          <a:noFill/>
+        </p:spPr>
+        <p:txBody>
+          <a:bodyPr wrap="square">
+            <a:spAutoFit/>
+          </a:bodyPr>
+          <a:lstStyle/>
+          <a:p>
+            <a:pPr algn="l"/>
+            <a:r>
+              <a:rPr sz="1200" b="0">
+                <a:solidFill>
+                  <a:srgbClr val="202124"/>
+                </a:solidFill>
+                <a:latin typeface="Calibri"/>
+              </a:rPr>
+              <a:t>Wide error bars early, and everyone knows it — but it REFINES as the design matures. Synthesis, then place-and-route, then silicon.</a:t>
+            </a:r>
+          </a:p>
+        </p:txBody>
+      </p:sp>
+      <p:sp>
+        <p:nvSpPr>
+          <p:cNvPr id="14" name="Rounded Rectangle 13"/>
+          <p:cNvSpPr/>
+          <p:nvPr/>
+        </p:nvSpPr>
+        <p:spPr>
+          <a:xfrm>
+            <a:off x="548640" y="2889504"/>
+            <a:ext cx="11064240" cy="1298448"/>
+          </a:xfrm>
+          <a:prstGeom prst="roundRect">
+            <a:avLst/>
+          </a:prstGeom>
+          <a:solidFill>
+            <a:srgbClr val="F7F8FA"/>
+          </a:solidFill>
+          <a:ln>
+            <a:solidFill>
+              <a:srgbClr val="B31412"/>
+            </a:solidFill>
+          </a:ln>
+        </p:spPr>
+        <p:style>
+          <a:lnRef idx="1">
+            <a:schemeClr val="accent1"/>
+          </a:lnRef>
+          <a:fillRef idx="3">
+            <a:schemeClr val="accent1"/>
+          </a:fillRef>
+          <a:effectRef idx="2">
+            <a:schemeClr val="accent1"/>
+          </a:effectRef>
+          <a:fontRef idx="minor">
+            <a:schemeClr val="lt1"/>
+          </a:fontRef>
+        </p:style>
+        <p:txBody>
+          <a:bodyPr rtlCol="0" anchor="ctr"/>
+          <a:lstStyle/>
+          <a:p>
+            <a:pPr algn="ctr"/>
+          </a:p>
+        </p:txBody>
+      </p:sp>
+      <p:sp>
+        <p:nvSpPr>
+          <p:cNvPr id="15" name="TextBox 14"/>
+          <p:cNvSpPr txBox="1"/>
+          <p:nvPr/>
+        </p:nvSpPr>
+        <p:spPr>
+          <a:xfrm>
+            <a:off x="841248" y="3017520"/>
+            <a:ext cx="4754880" cy="329184"/>
+          </a:xfrm>
+          <a:prstGeom prst="rect">
+            <a:avLst/>
+          </a:prstGeom>
+          <a:noFill/>
+        </p:spPr>
+        <p:txBody>
+          <a:bodyPr wrap="square">
+            <a:spAutoFit/>
+          </a:bodyPr>
+          <a:lstStyle/>
+          <a:p>
+            <a:pPr algn="l"/>
+            <a:r>
+              <a:rPr sz="1600" b="1">
+                <a:solidFill>
+                  <a:srgbClr val="202124"/>
+                </a:solidFill>
+                <a:latin typeface="Calibri"/>
+              </a:rPr>
+              <a:t>activity factor</a:t>
+            </a:r>
+          </a:p>
+        </p:txBody>
+      </p:sp>
+      <p:sp>
+        <p:nvSpPr>
+          <p:cNvPr id="16" name="TextBox 15"/>
+          <p:cNvSpPr txBox="1"/>
+          <p:nvPr/>
+        </p:nvSpPr>
+        <p:spPr>
+          <a:xfrm>
+            <a:off x="841248" y="3383280"/>
+            <a:ext cx="4754880" cy="310896"/>
+          </a:xfrm>
+          <a:prstGeom prst="rect">
+            <a:avLst/>
+          </a:prstGeom>
+          <a:noFill/>
+        </p:spPr>
+        <p:txBody>
+          <a:bodyPr wrap="square">
+            <a:spAutoFit/>
+          </a:bodyPr>
+          <a:lstStyle/>
+          <a:p>
+            <a:pPr algn="l"/>
+            <a:r>
+              <a:rPr sz="1200" b="0">
+                <a:solidFill>
+                  <a:srgbClr val="5F6368"/>
+                </a:solidFill>
+                <a:latin typeface="Calibri"/>
+              </a:rPr>
+              <a:t>a flat assumption: 1%, 2%, 3%, 5%, 10%</a:t>
+            </a:r>
+          </a:p>
+        </p:txBody>
+      </p:sp>
+      <p:sp>
+        <p:nvSpPr>
+          <p:cNvPr id="17" name="Rounded Rectangle 16"/>
+          <p:cNvSpPr/>
+          <p:nvPr/>
+        </p:nvSpPr>
+        <p:spPr>
+          <a:xfrm>
+            <a:off x="841248" y="3749039"/>
+            <a:ext cx="2103120" cy="310896"/>
+          </a:xfrm>
+          <a:prstGeom prst="roundRect">
+            <a:avLst/>
+          </a:prstGeom>
+          <a:solidFill>
+            <a:srgbClr val="B31412"/>
+          </a:solidFill>
+          <a:ln>
+            <a:noFill/>
+          </a:ln>
+        </p:spPr>
+        <p:style>
+          <a:lnRef idx="1">
+            <a:schemeClr val="accent1"/>
+          </a:lnRef>
+          <a:fillRef idx="3">
+            <a:schemeClr val="accent1"/>
+          </a:fillRef>
+          <a:effectRef idx="2">
+            <a:schemeClr val="accent1"/>
+          </a:effectRef>
+          <a:fontRef idx="minor">
+            <a:schemeClr val="lt1"/>
+          </a:fontRef>
+        </p:style>
+        <p:txBody>
+          <a:bodyPr rtlCol="0" anchor="ctr"/>
+          <a:lstStyle/>
+          <a:p>
+            <a:pPr algn="ctr"/>
+          </a:p>
+        </p:txBody>
+      </p:sp>
+      <p:sp>
+        <p:nvSpPr>
+          <p:cNvPr id="18" name="TextBox 17"/>
+          <p:cNvSpPr txBox="1"/>
+          <p:nvPr/>
+        </p:nvSpPr>
+        <p:spPr>
+          <a:xfrm>
+            <a:off x="841248" y="3785616"/>
+            <a:ext cx="2103120" cy="256032"/>
+          </a:xfrm>
+          <a:prstGeom prst="rect">
+            <a:avLst/>
+          </a:prstGeom>
+          <a:noFill/>
+        </p:spPr>
+        <p:txBody>
+          <a:bodyPr wrap="square">
+            <a:spAutoFit/>
+          </a:bodyPr>
+          <a:lstStyle/>
+          <a:p>
+            <a:pPr algn="ctr"/>
+            <a:r>
+              <a:rPr sz="1050" b="1">
+                <a:solidFill>
+                  <a:srgbClr val="FFFFFF"/>
+                </a:solidFill>
+                <a:latin typeface="Calibri"/>
+              </a:rPr>
+              <a:t>never refines</a:t>
+            </a:r>
+          </a:p>
+        </p:txBody>
+      </p:sp>
+      <p:sp>
+        <p:nvSpPr>
+          <p:cNvPr id="19" name="TextBox 18"/>
+          <p:cNvSpPr txBox="1"/>
+          <p:nvPr/>
+        </p:nvSpPr>
+        <p:spPr>
+          <a:xfrm>
+            <a:off x="5806440" y="3072384"/>
+            <a:ext cx="5577840" cy="960120"/>
+          </a:xfrm>
+          <a:prstGeom prst="rect">
+            <a:avLst/>
+          </a:prstGeom>
+          <a:noFill/>
+        </p:spPr>
+        <p:txBody>
+          <a:bodyPr wrap="square">
+            <a:spAutoFit/>
+          </a:bodyPr>
+          <a:lstStyle/>
+          <a:p>
+            <a:pPr algn="l"/>
+            <a:r>
+              <a:rPr sz="1200" b="0">
+                <a:solidFill>
+                  <a:srgbClr val="202124"/>
+                </a:solidFill>
+                <a:latin typeface="Calibri"/>
+              </a:rPr>
+              <a:t>Does not refine. Nothing connects a toggle rate to a workload, so there is no mechanism by which the guess improves.</a:t>
+            </a:r>
+          </a:p>
+        </p:txBody>
+      </p:sp>
+      <p:sp>
+        <p:nvSpPr>
+          <p:cNvPr id="20" name="Rectangle 19"/>
+          <p:cNvSpPr/>
+          <p:nvPr/>
+        </p:nvSpPr>
+        <p:spPr>
+          <a:xfrm>
+            <a:off x="548640" y="4334256"/>
+            <a:ext cx="11064240" cy="548640"/>
+          </a:xfrm>
+          <a:prstGeom prst="rect">
+            <a:avLst/>
+          </a:prstGeom>
+          <a:solidFill>
+            <a:srgbClr val="202124"/>
+          </a:solidFill>
+          <a:ln>
+            <a:noFill/>
+          </a:ln>
+        </p:spPr>
+        <p:style>
+          <a:lnRef idx="1">
+            <a:schemeClr val="accent1"/>
+          </a:lnRef>
+          <a:fillRef idx="3">
+            <a:schemeClr val="accent1"/>
+          </a:fillRef>
+          <a:effectRef idx="2">
+            <a:schemeClr val="accent1"/>
+          </a:effectRef>
+          <a:fontRef idx="minor">
+            <a:schemeClr val="lt1"/>
+          </a:fontRef>
+        </p:style>
+        <p:txBody>
+          <a:bodyPr rtlCol="0" anchor="ctr"/>
+          <a:lstStyle/>
+          <a:p>
+            <a:pPr algn="ctr"/>
+          </a:p>
+        </p:txBody>
+      </p:sp>
+      <p:sp>
+        <p:nvSpPr>
+          <p:cNvPr id="21" name="TextBox 20"/>
+          <p:cNvSpPr txBox="1"/>
+          <p:nvPr/>
+        </p:nvSpPr>
+        <p:spPr>
+          <a:xfrm>
+            <a:off x="822960" y="4407408"/>
+            <a:ext cx="10607040" cy="420624"/>
+          </a:xfrm>
+          <a:prstGeom prst="rect">
+            <a:avLst/>
+          </a:prstGeom>
+          <a:noFill/>
+        </p:spPr>
+        <p:txBody>
+          <a:bodyPr wrap="square">
+            <a:spAutoFit/>
+          </a:bodyPr>
+          <a:lstStyle/>
+          <a:p>
+            <a:pPr algn="l"/>
+            <a:r>
+              <a:rPr sz="1500" b="1">
+                <a:solidFill>
+                  <a:srgbClr val="FFFFFF"/>
+                </a:solidFill>
+                <a:latin typeface="Calibri"/>
+              </a:rPr>
+              <a:t>How do you correlate a 3% toggling assumption to a real use case? You cannot — there has been no instrument for it.</a:t>
+            </a:r>
+          </a:p>
+        </p:txBody>
+      </p:sp>
+      <p:sp>
+        <p:nvSpPr>
+          <p:cNvPr id="22" name="TextBox 21"/>
+          <p:cNvSpPr txBox="1"/>
+          <p:nvPr/>
+        </p:nvSpPr>
+        <p:spPr>
+          <a:xfrm>
+            <a:off x="548640" y="4992624"/>
+            <a:ext cx="11064240" cy="292608"/>
+          </a:xfrm>
+          <a:prstGeom prst="rect">
+            <a:avLst/>
+          </a:prstGeom>
+          <a:noFill/>
+        </p:spPr>
+        <p:txBody>
+          <a:bodyPr wrap="square">
+            <a:spAutoFit/>
+          </a:bodyPr>
+          <a:lstStyle/>
+          <a:p>
+            <a:pPr algn="l"/>
+            <a:r>
+              <a:rPr sz="1200" b="1">
+                <a:solidFill>
+                  <a:srgbClr val="202124"/>
+                </a:solidFill>
+                <a:latin typeface="Calibri"/>
+              </a:rPr>
+              <a:t>That is the gap this closes:</a:t>
+            </a:r>
+          </a:p>
+        </p:txBody>
+      </p:sp>
+      <p:sp>
+        <p:nvSpPr>
+          <p:cNvPr id="23" name="Oval 22"/>
+          <p:cNvSpPr/>
+          <p:nvPr/>
+        </p:nvSpPr>
+        <p:spPr>
+          <a:xfrm>
+            <a:off x="658368" y="5367528"/>
+            <a:ext cx="146304" cy="146304"/>
+          </a:xfrm>
+          <a:prstGeom prst="ellipse">
+            <a:avLst/>
+          </a:prstGeom>
+          <a:solidFill>
+            <a:srgbClr val="1A53A0"/>
+          </a:solidFill>
+          <a:ln>
+            <a:noFill/>
+          </a:ln>
+        </p:spPr>
+        <p:style>
+          <a:lnRef idx="1">
+            <a:schemeClr val="accent1"/>
+          </a:lnRef>
+          <a:fillRef idx="3">
+            <a:schemeClr val="accent1"/>
+          </a:fillRef>
+          <a:effectRef idx="2">
+            <a:schemeClr val="accent1"/>
+          </a:effectRef>
+          <a:fontRef idx="minor">
+            <a:schemeClr val="lt1"/>
+          </a:fontRef>
+        </p:style>
+        <p:txBody>
+          <a:bodyPr rtlCol="0" anchor="ctr"/>
+          <a:lstStyle/>
+          <a:p>
+            <a:pPr algn="ctr"/>
+          </a:p>
+        </p:txBody>
+      </p:sp>
+      <p:sp>
+        <p:nvSpPr>
+          <p:cNvPr id="24" name="TextBox 23"/>
+          <p:cNvSpPr txBox="1"/>
+          <p:nvPr/>
+        </p:nvSpPr>
+        <p:spPr>
+          <a:xfrm>
+            <a:off x="932688" y="5303520"/>
+            <a:ext cx="3017520" cy="292608"/>
+          </a:xfrm>
+          <a:prstGeom prst="rect">
+            <a:avLst/>
+          </a:prstGeom>
+          <a:noFill/>
+        </p:spPr>
+        <p:txBody>
+          <a:bodyPr wrap="square">
+            <a:spAutoFit/>
+          </a:bodyPr>
+          <a:lstStyle/>
+          <a:p>
+            <a:pPr algn="l"/>
+            <a:r>
+              <a:rPr sz="1200" b="1">
+                <a:solidFill>
+                  <a:srgbClr val="202124"/>
+                </a:solidFill>
+                <a:latin typeface="Calibri"/>
+              </a:rPr>
+              <a:t>name an application</a:t>
+            </a:r>
+          </a:p>
+        </p:txBody>
+      </p:sp>
+      <p:sp>
+        <p:nvSpPr>
+          <p:cNvPr id="25" name="TextBox 24"/>
+          <p:cNvSpPr txBox="1"/>
+          <p:nvPr/>
+        </p:nvSpPr>
+        <p:spPr>
+          <a:xfrm>
+            <a:off x="3794760" y="5303520"/>
+            <a:ext cx="7772400" cy="292608"/>
+          </a:xfrm>
+          <a:prstGeom prst="rect">
+            <a:avLst/>
+          </a:prstGeom>
+          <a:noFill/>
+        </p:spPr>
+        <p:txBody>
+          <a:bodyPr wrap="square">
+            <a:spAutoFit/>
+          </a:bodyPr>
+          <a:lstStyle/>
+          <a:p>
+            <a:pPr algn="l"/>
+            <a:r>
+              <a:rPr sz="1200" b="0">
+                <a:solidFill>
+                  <a:srgbClr val="5F6368"/>
+                </a:solidFill>
+                <a:latin typeface="Calibri"/>
+              </a:rPr>
+              <a:t>get its activity factor, per workload, with a stated error against silicon</a:t>
+            </a:r>
+          </a:p>
+        </p:txBody>
+      </p:sp>
+      <p:sp>
+        <p:nvSpPr>
+          <p:cNvPr id="26" name="Oval 25"/>
+          <p:cNvSpPr/>
+          <p:nvPr/>
+        </p:nvSpPr>
+        <p:spPr>
+          <a:xfrm>
+            <a:off x="658368" y="5678424"/>
+            <a:ext cx="146304" cy="146304"/>
+          </a:xfrm>
+          <a:prstGeom prst="ellipse">
+            <a:avLst/>
+          </a:prstGeom>
+          <a:solidFill>
+            <a:srgbClr val="1A53A0"/>
+          </a:solidFill>
+          <a:ln>
+            <a:noFill/>
+          </a:ln>
+        </p:spPr>
+        <p:style>
+          <a:lnRef idx="1">
+            <a:schemeClr val="accent1"/>
+          </a:lnRef>
+          <a:fillRef idx="3">
+            <a:schemeClr val="accent1"/>
+          </a:fillRef>
+          <a:effectRef idx="2">
+            <a:schemeClr val="accent1"/>
+          </a:effectRef>
+          <a:fontRef idx="minor">
+            <a:schemeClr val="lt1"/>
+          </a:fontRef>
+        </p:style>
+        <p:txBody>
+          <a:bodyPr rtlCol="0" anchor="ctr"/>
+          <a:lstStyle/>
+          <a:p>
+            <a:pPr algn="ctr"/>
+          </a:p>
+        </p:txBody>
+      </p:sp>
+      <p:sp>
+        <p:nvSpPr>
+          <p:cNvPr id="27" name="TextBox 26"/>
+          <p:cNvSpPr txBox="1"/>
+          <p:nvPr/>
+        </p:nvSpPr>
+        <p:spPr>
+          <a:xfrm>
+            <a:off x="932688" y="5614416"/>
+            <a:ext cx="3017520" cy="292608"/>
+          </a:xfrm>
+          <a:prstGeom prst="rect">
+            <a:avLst/>
+          </a:prstGeom>
+          <a:noFill/>
+        </p:spPr>
+        <p:txBody>
+          <a:bodyPr wrap="square">
+            <a:spAutoFit/>
+          </a:bodyPr>
+          <a:lstStyle/>
+          <a:p>
+            <a:pPr algn="l"/>
+            <a:r>
+              <a:rPr sz="1200" b="1">
+                <a:solidFill>
+                  <a:srgbClr val="202124"/>
+                </a:solidFill>
+                <a:latin typeface="Calibri"/>
+              </a:rPr>
+              <a:t>change the code</a:t>
+            </a:r>
+          </a:p>
+        </p:txBody>
+      </p:sp>
+      <p:sp>
+        <p:nvSpPr>
+          <p:cNvPr id="28" name="TextBox 27"/>
+          <p:cNvSpPr txBox="1"/>
+          <p:nvPr/>
+        </p:nvSpPr>
+        <p:spPr>
+          <a:xfrm>
+            <a:off x="3794760" y="5614416"/>
+            <a:ext cx="7772400" cy="292608"/>
+          </a:xfrm>
+          <a:prstGeom prst="rect">
+            <a:avLst/>
+          </a:prstGeom>
+          <a:noFill/>
+        </p:spPr>
+        <p:txBody>
+          <a:bodyPr wrap="square">
+            <a:spAutoFit/>
+          </a:bodyPr>
+          <a:lstStyle/>
+          <a:p>
+            <a:pPr algn="l"/>
+            <a:r>
+              <a:rPr sz="1200" b="0">
+                <a:solidFill>
+                  <a:srgbClr val="5F6368"/>
+                </a:solidFill>
+                <a:latin typeface="Calibri"/>
+              </a:rPr>
+              <a:t>see the activity factor move, and by how much</a:t>
+            </a:r>
+          </a:p>
+        </p:txBody>
+      </p:sp>
+      <p:sp>
+        <p:nvSpPr>
+          <p:cNvPr id="29" name="Oval 28"/>
+          <p:cNvSpPr/>
+          <p:nvPr/>
+        </p:nvSpPr>
+        <p:spPr>
+          <a:xfrm>
+            <a:off x="658368" y="5989320"/>
+            <a:ext cx="146304" cy="146304"/>
+          </a:xfrm>
+          <a:prstGeom prst="ellipse">
+            <a:avLst/>
+          </a:prstGeom>
+          <a:solidFill>
+            <a:srgbClr val="1A53A0"/>
+          </a:solidFill>
+          <a:ln>
+            <a:noFill/>
+          </a:ln>
+        </p:spPr>
+        <p:style>
+          <a:lnRef idx="1">
+            <a:schemeClr val="accent1"/>
+          </a:lnRef>
+          <a:fillRef idx="3">
+            <a:schemeClr val="accent1"/>
+          </a:fillRef>
+          <a:effectRef idx="2">
+            <a:schemeClr val="accent1"/>
+          </a:effectRef>
+          <a:fontRef idx="minor">
+            <a:schemeClr val="lt1"/>
+          </a:fontRef>
+        </p:style>
+        <p:txBody>
+          <a:bodyPr rtlCol="0" anchor="ctr"/>
+          <a:lstStyle/>
+          <a:p>
+            <a:pPr algn="ctr"/>
+          </a:p>
+        </p:txBody>
+      </p:sp>
+      <p:sp>
+        <p:nvSpPr>
+          <p:cNvPr id="30" name="TextBox 29"/>
+          <p:cNvSpPr txBox="1"/>
+          <p:nvPr/>
+        </p:nvSpPr>
+        <p:spPr>
+          <a:xfrm>
+            <a:off x="932688" y="5925312"/>
+            <a:ext cx="3017520" cy="292608"/>
+          </a:xfrm>
+          <a:prstGeom prst="rect">
+            <a:avLst/>
+          </a:prstGeom>
+          <a:noFill/>
+        </p:spPr>
+        <p:txBody>
+          <a:bodyPr wrap="square">
+            <a:spAutoFit/>
+          </a:bodyPr>
+          <a:lstStyle/>
+          <a:p>
+            <a:pPr algn="l"/>
+            <a:r>
+              <a:rPr sz="1200" b="1">
+                <a:solidFill>
+                  <a:srgbClr val="202124"/>
+                </a:solidFill>
+                <a:latin typeface="Calibri"/>
+              </a:rPr>
+              <a:t>compare two use cases</a:t>
+            </a:r>
+          </a:p>
+        </p:txBody>
+      </p:sp>
+      <p:sp>
+        <p:nvSpPr>
+          <p:cNvPr id="31" name="TextBox 30"/>
+          <p:cNvSpPr txBox="1"/>
+          <p:nvPr/>
+        </p:nvSpPr>
+        <p:spPr>
+          <a:xfrm>
+            <a:off x="3794760" y="5925312"/>
+            <a:ext cx="7772400" cy="292608"/>
+          </a:xfrm>
+          <a:prstGeom prst="rect">
+            <a:avLst/>
+          </a:prstGeom>
+          <a:noFill/>
+        </p:spPr>
+        <p:txBody>
+          <a:bodyPr wrap="square">
+            <a:spAutoFit/>
+          </a:bodyPr>
+          <a:lstStyle/>
+          <a:p>
+            <a:pPr algn="l"/>
+            <a:r>
+              <a:rPr sz="1200" b="0">
+                <a:solidFill>
+                  <a:srgbClr val="5F6368"/>
+                </a:solidFill>
+                <a:latin typeface="Calibri"/>
+              </a:rPr>
+              <a:t>on the same measured basis, not two different guesses</a:t>
+            </a:r>
+          </a:p>
+        </p:txBody>
+      </p:sp>
+      <p:sp>
+        <p:nvSpPr>
+          <p:cNvPr id="32" name="TextBox 31"/>
+          <p:cNvSpPr txBox="1"/>
+          <p:nvPr/>
+        </p:nvSpPr>
+        <p:spPr>
+          <a:xfrm>
+            <a:off x="548640" y="6254496"/>
+            <a:ext cx="11064240" cy="274320"/>
+          </a:xfrm>
+          <a:prstGeom prst="rect">
+            <a:avLst/>
+          </a:prstGeom>
+          <a:noFill/>
+        </p:spPr>
+        <p:txBody>
+          <a:bodyPr wrap="square">
+            <a:spAutoFit/>
+          </a:bodyPr>
+          <a:lstStyle/>
+          <a:p>
+            <a:pPr algn="l"/>
+            <a:r>
+              <a:rPr sz="1150" b="1">
+                <a:solidFill>
+                  <a:srgbClr val="1A53A0"/>
+                </a:solidFill>
+                <a:latin typeface="Calibri"/>
+              </a:rPr>
+              <a:t>The spreadsheet keeps its job. It just stops being multiplied by a number nobody can trace to anything.</a:t>
+            </a:r>
+          </a:p>
+        </p:txBody>
+      </p:sp>
+    </p:spTree>
+  </p:cSld>
+  <p:clrMapOvr>
+    <a:masterClrMapping/>
+  </p:clrMapOvr>
+</p:sld>
+</file>
+
+<file path=ppt/slides/slide14.xml><?xml version="1.0" encoding="utf-8"?>
+<p:sld xmlns:a="http://schemas.openxmlformats.org/drawingml/2006/main" xmlns:p="http://schemas.openxmlformats.org/presentationml/2006/main" xmlns:r="http://schemas.openxmlformats.org/officeDocument/2006/relationships">
+  <p:cSld>
+    <p:spTree>
+      <p:nvGrpSpPr>
+        <p:cNvPr id="1" name=""/>
+        <p:cNvGrpSpPr/>
+        <p:nvPr/>
+      </p:nvGrpSpPr>
+      <p:grpSpPr/>
+      <p:sp>
+        <p:nvSpPr>
+          <p:cNvPr id="2" name="Rectangle 1"/>
+          <p:cNvSpPr/>
+          <p:nvPr/>
+        </p:nvSpPr>
+        <p:spPr>
+          <a:xfrm>
+            <a:off x="0" y="0"/>
+            <a:ext cx="12191695" cy="841248"/>
+          </a:xfrm>
+          <a:prstGeom prst="rect">
+            <a:avLst/>
+          </a:prstGeom>
+          <a:solidFill>
+            <a:srgbClr val="202124"/>
+          </a:solidFill>
+          <a:ln>
+            <a:noFill/>
+          </a:ln>
+        </p:spPr>
+        <p:style>
+          <a:lnRef idx="1">
+            <a:schemeClr val="accent1"/>
+          </a:lnRef>
+          <a:fillRef idx="3">
+            <a:schemeClr val="accent1"/>
+          </a:fillRef>
+          <a:effectRef idx="2">
+            <a:schemeClr val="accent1"/>
+          </a:effectRef>
+          <a:fontRef idx="minor">
+            <a:schemeClr val="lt1"/>
+          </a:fontRef>
+        </p:style>
+        <p:txBody>
+          <a:bodyPr rtlCol="0" anchor="ctr"/>
+          <a:lstStyle/>
+          <a:p>
+            <a:pPr algn="ctr"/>
+          </a:p>
+        </p:txBody>
+      </p:sp>
+      <p:sp>
+        <p:nvSpPr>
+          <p:cNvPr id="3" name="TextBox 2"/>
+          <p:cNvSpPr txBox="1"/>
+          <p:nvPr/>
+        </p:nvSpPr>
+        <p:spPr>
+          <a:xfrm>
+            <a:off x="548640" y="118872"/>
+            <a:ext cx="11155680" cy="603504"/>
+          </a:xfrm>
+          <a:prstGeom prst="rect">
+            <a:avLst/>
+          </a:prstGeom>
+          <a:noFill/>
+        </p:spPr>
+        <p:txBody>
+          <a:bodyPr wrap="square">
+            <a:spAutoFit/>
+          </a:bodyPr>
+          <a:lstStyle/>
+          <a:p>
+            <a:pPr algn="l"/>
+            <a:r>
+              <a:rPr sz="2600" b="1">
+                <a:solidFill>
+                  <a:srgbClr val="FFFFFF"/>
+                </a:solidFill>
+                <a:latin typeface="Calibri"/>
+              </a:rPr>
+              <a:t>What this actually means</a:t>
+            </a:r>
+          </a:p>
+        </p:txBody>
+      </p:sp>
+      <p:sp>
+        <p:nvSpPr>
+          <p:cNvPr id="4" name="Rectangle 3"/>
+          <p:cNvSpPr/>
+          <p:nvPr/>
+        </p:nvSpPr>
+        <p:spPr>
+          <a:xfrm>
+            <a:off x="0" y="841248"/>
+            <a:ext cx="12191695" cy="38100"/>
+          </a:xfrm>
+          <a:prstGeom prst="rect">
+            <a:avLst/>
+          </a:prstGeom>
+          <a:solidFill>
+            <a:srgbClr val="1A53A0"/>
+          </a:solidFill>
+          <a:ln>
+            <a:noFill/>
+          </a:ln>
+        </p:spPr>
+        <p:style>
+          <a:lnRef idx="1">
+            <a:schemeClr val="accent1"/>
+          </a:lnRef>
+          <a:fillRef idx="3">
+            <a:schemeClr val="accent1"/>
+          </a:fillRef>
+          <a:effectRef idx="2">
+            <a:schemeClr val="accent1"/>
+          </a:effectRef>
+          <a:fontRef idx="minor">
+            <a:schemeClr val="lt1"/>
+          </a:fontRef>
+        </p:style>
+        <p:txBody>
+          <a:bodyPr rtlCol="0" anchor="ctr"/>
+          <a:lstStyle/>
+          <a:p>
+            <a:pPr algn="ctr"/>
+          </a:p>
+        </p:txBody>
+      </p:sp>
+      <p:sp>
+        <p:nvSpPr>
+          <p:cNvPr id="5" name="TextBox 4"/>
+          <p:cNvSpPr txBox="1"/>
+          <p:nvPr/>
+        </p:nvSpPr>
+        <p:spPr>
+          <a:xfrm>
+            <a:off x="548640" y="969264"/>
+            <a:ext cx="11155680" cy="365760"/>
+          </a:xfrm>
+          <a:prstGeom prst="rect">
+            <a:avLst/>
+          </a:prstGeom>
+          <a:noFill/>
+        </p:spPr>
+        <p:txBody>
+          <a:bodyPr wrap="square">
+            <a:spAutoFit/>
+          </a:bodyPr>
+          <a:lstStyle/>
+          <a:p>
+            <a:pPr algn="l"/>
+            <a:r>
+              <a:rPr sz="1200" b="0">
+                <a:solidFill>
+                  <a:srgbClr val="5F6368"/>
+                </a:solidFill>
+                <a:latin typeface="Calibri"/>
+              </a:rPr>
+              <a:t>The result is not the point. What it licenses us to do next is the point.</a:t>
+            </a:r>
+          </a:p>
+        </p:txBody>
+      </p:sp>
+      <p:sp>
+        <p:nvSpPr>
+          <p:cNvPr id="6" name="TextBox 5"/>
+          <p:cNvSpPr txBox="1"/>
+          <p:nvPr/>
+        </p:nvSpPr>
+        <p:spPr>
+          <a:xfrm>
+            <a:off x="548640" y="6528816"/>
+            <a:ext cx="10424160" cy="274320"/>
+          </a:xfrm>
+          <a:prstGeom prst="rect">
+            <a:avLst/>
+          </a:prstGeom>
+          <a:noFill/>
+        </p:spPr>
+        <p:txBody>
+          <a:bodyPr wrap="square">
+            <a:spAutoFit/>
+          </a:bodyPr>
+          <a:lstStyle/>
+          <a:p>
+            <a:pPr algn="l"/>
+            <a:r>
+              <a:rPr sz="950" b="0">
+                <a:solidFill>
+                  <a:srgbClr val="5F6368"/>
+                </a:solidFill>
+                <a:latin typeface="Calibri"/>
+              </a:rPr>
+              <a:t>wattson power · rails MEASURED on IMX95LPD5EVK-19 (NXP BCU) · A55 die 40–41 °C under load · activity DERIVED from QEMU TCG · 2026-09-10</a:t>
+            </a:r>
+          </a:p>
+        </p:txBody>
+      </p:sp>
+      <p:sp>
+        <p:nvSpPr>
+          <p:cNvPr id="7" name="TextBox 6"/>
+          <p:cNvSpPr txBox="1"/>
+          <p:nvPr/>
+        </p:nvSpPr>
+        <p:spPr>
+          <a:xfrm>
+            <a:off x="11430000" y="6528816"/>
+            <a:ext cx="457200" cy="274320"/>
+          </a:xfrm>
+          <a:prstGeom prst="rect">
+            <a:avLst/>
+          </a:prstGeom>
+          <a:noFill/>
+        </p:spPr>
+        <p:txBody>
+          <a:bodyPr wrap="square">
+            <a:spAutoFit/>
+          </a:bodyPr>
+          <a:lstStyle/>
+          <a:p>
+            <a:pPr algn="r"/>
+            <a:r>
+              <a:rPr sz="950" b="0">
+                <a:solidFill>
+                  <a:srgbClr val="5F6368"/>
+                </a:solidFill>
+                <a:latin typeface="Calibri"/>
+              </a:rPr>
+              <a:t>14</a:t>
             </a:r>
           </a:p>
         </p:txBody>
